--- a/TIRAHOU_Soutenance.pptx
+++ b/TIRAHOU_Soutenance.pptx
@@ -30,6 +30,12 @@
     <p:sldId id="278" r:id="rId29"/>
     <p:sldId id="279" r:id="rId30"/>
     <p:sldId id="280" r:id="rId31"/>
+    <p:sldId id="281" r:id="rId32"/>
+    <p:sldId id="282" r:id="rId33"/>
+    <p:sldId id="283" r:id="rId34"/>
+    <p:sldId id="284" r:id="rId35"/>
+    <p:sldId id="285" r:id="rId36"/>
+    <p:sldId id="286" r:id="rId37"/>
   </p:sldIdLst>
   <p:sldSz cx="12191695" cy="6858000" type="screen4x3"/>
   <p:notesSz cx="6858000" cy="9144000"/>
@@ -20854,7 +20860,7 @@
                 </a:solidFill>
                 <a:latin typeface="Segoe UI"/>
               </a:rPr>
-              <a:t>Limites identifiées</a:t>
+              <a:t>Limites traitées pendant la préparation</a:t>
             </a:r>
           </a:p>
         </p:txBody>
@@ -20905,7 +20911,7 @@
                 </a:solidFill>
                 <a:latin typeface="Segoe UI"/>
               </a:rPr>
-              <a:t>Mobile Money enregistré manuellement (pas d'API CinetPay/FedaPay)</a:t>
+              <a:t>Mobile Money (CinetPay) &amp; notifications push : déjà opérationnels de bout en bout</a:t>
             </a:r>
           </a:p>
           <a:p>
@@ -20933,7 +20939,7 @@
                 </a:solidFill>
                 <a:latin typeface="Segoe UI"/>
               </a:rPr>
-              <a:t>Modèle de prédiction heuristique, non calibré sur données réelles</a:t>
+              <a:t>Bug critique corrigé sur le score prédictif + calibration empirique outillée</a:t>
             </a:r>
           </a:p>
           <a:p>
@@ -20961,7 +20967,7 @@
                 </a:solidFill>
                 <a:latin typeface="Segoe UI"/>
               </a:rPr>
-              <a:t>Aucun test de charge réalisé (comportement sous forte affluence inconnu)</a:t>
+              <a:t>Test de charge réel exécuté (40 util.) — rate limiting confirmé, latence de connexion identifiée</a:t>
             </a:r>
           </a:p>
           <a:p>
@@ -20989,9 +20995,71 @@
                 </a:solidFill>
                 <a:latin typeface="Segoe UI"/>
               </a:rPr>
-              <a:t>Row-Level Security absent (filtrage au niveau vue, pas natif DB)</a:t>
-            </a:r>
-          </a:p>
+              <a:t>Row-Level Security PostgreSQL implémentée et testée (défense en profondeur)</a:t>
+            </a:r>
+          </a:p>
+        </p:txBody>
+      </p:sp>
+      <p:sp>
+        <p:nvSpPr>
+          <p:cNvPr id="11" name="TextBox 10"/>
+          <p:cNvSpPr txBox="1"/>
+          <p:nvPr/>
+        </p:nvSpPr>
+        <p:spPr>
+          <a:xfrm>
+            <a:off x="6263640" y="1828800"/>
+            <a:ext cx="5212080" cy="365760"/>
+          </a:xfrm>
+          <a:prstGeom prst="rect">
+            <a:avLst/>
+          </a:prstGeom>
+          <a:noFill/>
+        </p:spPr>
+        <p:txBody>
+          <a:bodyPr wrap="square" anchor="t" lIns="0" rIns="0" tIns="0" bIns="0">
+            <a:spAutoFit/>
+          </a:bodyPr>
+          <a:lstStyle/>
+          <a:p>
+            <a:pPr algn="l">
+              <a:lnSpc>
+                <a:spcPct val="100000"/>
+              </a:lnSpc>
+            </a:pPr>
+            <a:r>
+              <a:rPr sz="1400" b="1" i="0">
+                <a:solidFill>
+                  <a:srgbClr val="059669"/>
+                </a:solidFill>
+                <a:latin typeface="Segoe UI"/>
+              </a:rPr>
+              <a:t>Perspectives d'évolution</a:t>
+            </a:r>
+          </a:p>
+        </p:txBody>
+      </p:sp>
+      <p:sp>
+        <p:nvSpPr>
+          <p:cNvPr id="12" name="TextBox 11"/>
+          <p:cNvSpPr txBox="1"/>
+          <p:nvPr/>
+        </p:nvSpPr>
+        <p:spPr>
+          <a:xfrm>
+            <a:off x="6263640" y="2240280"/>
+            <a:ext cx="5212080" cy="3840480"/>
+          </a:xfrm>
+          <a:prstGeom prst="rect">
+            <a:avLst/>
+          </a:prstGeom>
+          <a:noFill/>
+        </p:spPr>
+        <p:txBody>
+          <a:bodyPr wrap="square" lIns="0" rIns="0">
+            <a:spAutoFit/>
+          </a:bodyPr>
+          <a:lstStyle/>
           <a:p>
             <a:pPr>
               <a:lnSpc>
@@ -21004,20 +21072,29 @@
             <a:r>
               <a:rPr sz="900">
                 <a:solidFill>
-                  <a:srgbClr val="DC2626"/>
+                  <a:srgbClr val="059669"/>
                 </a:solidFill>
                 <a:latin typeface="Segoe UI"/>
               </a:rPr>
               <a:t>●  </a:t>
             </a:r>
             <a:r>
+              <a:rPr b="1" sz="1200">
+                <a:solidFill>
+                  <a:srgbClr val="0F172A"/>
+                </a:solidFill>
+                <a:latin typeface="Segoe UI"/>
+              </a:rPr>
+              <a:t>Court terme — </a:t>
+            </a:r>
+            <a:r>
               <a:rPr sz="1200">
                 <a:solidFill>
                   <a:srgbClr val="334155"/>
                 </a:solidFill>
                 <a:latin typeface="Segoe UI"/>
               </a:rPr>
-              <a:t>Notifications push non implémentées (PWA prête, non activée)</a:t>
+              <a:t>recalibrer le modèle prédictif sur des données réelles de production</a:t>
             </a:r>
           </a:p>
           <a:p>
@@ -21032,156 +21109,29 @@
             <a:r>
               <a:rPr sz="900">
                 <a:solidFill>
-                  <a:srgbClr val="DC2626"/>
+                  <a:srgbClr val="059669"/>
                 </a:solidFill>
                 <a:latin typeface="Segoe UI"/>
               </a:rPr>
               <a:t>●  </a:t>
             </a:r>
             <a:r>
+              <a:rPr b="1" sz="1200">
+                <a:solidFill>
+                  <a:srgbClr val="0F172A"/>
+                </a:solidFill>
+                <a:latin typeface="Segoe UI"/>
+              </a:rPr>
+              <a:t>Moyen terme — </a:t>
+            </a:r>
+            <a:r>
               <a:rPr sz="1200">
                 <a:solidFill>
                   <a:srgbClr val="334155"/>
                 </a:solidFill>
                 <a:latin typeface="Segoe UI"/>
               </a:rPr>
-              <a:t>Architecture mono-établissement, pas encore multi-tenant</a:t>
-            </a:r>
-          </a:p>
-        </p:txBody>
-      </p:sp>
-      <p:sp>
-        <p:nvSpPr>
-          <p:cNvPr id="11" name="TextBox 10"/>
-          <p:cNvSpPr txBox="1"/>
-          <p:nvPr/>
-        </p:nvSpPr>
-        <p:spPr>
-          <a:xfrm>
-            <a:off x="6263640" y="1828800"/>
-            <a:ext cx="5212080" cy="365760"/>
-          </a:xfrm>
-          <a:prstGeom prst="rect">
-            <a:avLst/>
-          </a:prstGeom>
-          <a:noFill/>
-        </p:spPr>
-        <p:txBody>
-          <a:bodyPr wrap="square" anchor="t" lIns="0" rIns="0" tIns="0" bIns="0">
-            <a:spAutoFit/>
-          </a:bodyPr>
-          <a:lstStyle/>
-          <a:p>
-            <a:pPr algn="l">
-              <a:lnSpc>
-                <a:spcPct val="100000"/>
-              </a:lnSpc>
-            </a:pPr>
-            <a:r>
-              <a:rPr sz="1400" b="1" i="0">
-                <a:solidFill>
-                  <a:srgbClr val="059669"/>
-                </a:solidFill>
-                <a:latin typeface="Segoe UI"/>
-              </a:rPr>
-              <a:t>Perspectives d'évolution</a:t>
-            </a:r>
-          </a:p>
-        </p:txBody>
-      </p:sp>
-      <p:sp>
-        <p:nvSpPr>
-          <p:cNvPr id="12" name="TextBox 11"/>
-          <p:cNvSpPr txBox="1"/>
-          <p:nvPr/>
-        </p:nvSpPr>
-        <p:spPr>
-          <a:xfrm>
-            <a:off x="6263640" y="2240280"/>
-            <a:ext cx="5212080" cy="3840480"/>
-          </a:xfrm>
-          <a:prstGeom prst="rect">
-            <a:avLst/>
-          </a:prstGeom>
-          <a:noFill/>
-        </p:spPr>
-        <p:txBody>
-          <a:bodyPr wrap="square" lIns="0" rIns="0">
-            <a:spAutoFit/>
-          </a:bodyPr>
-          <a:lstStyle/>
-          <a:p>
-            <a:pPr>
-              <a:lnSpc>
-                <a:spcPct val="108000"/>
-              </a:lnSpc>
-              <a:spcAft>
-                <a:spcPts val="1000"/>
-              </a:spcAft>
-            </a:pPr>
-            <a:r>
-              <a:rPr sz="900">
-                <a:solidFill>
-                  <a:srgbClr val="059669"/>
-                </a:solidFill>
-                <a:latin typeface="Segoe UI"/>
-              </a:rPr>
-              <a:t>●  </a:t>
-            </a:r>
-            <a:r>
-              <a:rPr b="1" sz="1200">
-                <a:solidFill>
-                  <a:srgbClr val="0F172A"/>
-                </a:solidFill>
-                <a:latin typeface="Segoe UI"/>
-              </a:rPr>
-              <a:t>Court terme — </a:t>
-            </a:r>
-            <a:r>
-              <a:rPr sz="1200">
-                <a:solidFill>
-                  <a:srgbClr val="334155"/>
-                </a:solidFill>
-                <a:latin typeface="Segoe UI"/>
-              </a:rPr>
-              <a:t>paiements Mobile Money via API, notifications push, tests de charge (Locust)</a:t>
-            </a:r>
-          </a:p>
-          <a:p>
-            <a:pPr>
-              <a:lnSpc>
-                <a:spcPct val="108000"/>
-              </a:lnSpc>
-              <a:spcAft>
-                <a:spcPts val="1000"/>
-              </a:spcAft>
-            </a:pPr>
-            <a:r>
-              <a:rPr sz="900">
-                <a:solidFill>
-                  <a:srgbClr val="059669"/>
-                </a:solidFill>
-                <a:latin typeface="Segoe UI"/>
-              </a:rPr>
-              <a:t>●  </a:t>
-            </a:r>
-            <a:r>
-              <a:rPr b="1" sz="1200">
-                <a:solidFill>
-                  <a:srgbClr val="0F172A"/>
-                </a:solidFill>
-                <a:latin typeface="Segoe UI"/>
-              </a:rPr>
-              <a:t>Moyen terme — </a:t>
-            </a:r>
-            <a:r>
-              <a:rPr sz="1200">
-                <a:solidFill>
-                  <a:srgbClr val="334155"/>
-                </a:solidFill>
-                <a:latin typeface="Segoe UI"/>
-              </a:rPr>
-              <a:t>modèle ML supervisé, architecture multi-tenant (SaaS), module RH &amp; paie, SCORM/xAPI</a:t>
+              <a:t>architecture multi-tenant (note de conception rédigée), module RH &amp; paie, SCORM/xAPI</a:t>
             </a:r>
           </a:p>
           <a:p>
@@ -21633,6 +21583,1579 @@
 </p:sld>
 </file>
 
+<file path=ppt/slides/slide26.xml><?xml version="1.0" encoding="utf-8"?>
+<p:sld xmlns:a="http://schemas.openxmlformats.org/drawingml/2006/main" xmlns:p="http://schemas.openxmlformats.org/presentationml/2006/main" xmlns:r="http://schemas.openxmlformats.org/officeDocument/2006/relationships">
+  <p:cSld>
+    <p:spTree>
+      <p:nvGrpSpPr>
+        <p:cNvPr id="1" name=""/>
+        <p:cNvGrpSpPr/>
+        <p:nvPr/>
+      </p:nvGrpSpPr>
+      <p:grpSpPr/>
+      <p:sp>
+        <p:nvSpPr>
+          <p:cNvPr id="2" name="Rectangle 1"/>
+          <p:cNvSpPr/>
+          <p:nvPr/>
+        </p:nvSpPr>
+        <p:spPr>
+          <a:xfrm>
+            <a:off x="0" y="0"/>
+            <a:ext cx="12191695" cy="6858000"/>
+          </a:xfrm>
+          <a:prstGeom prst="rect">
+            <a:avLst/>
+          </a:prstGeom>
+          <a:solidFill>
+            <a:srgbClr val="F8FAFC"/>
+          </a:solidFill>
+          <a:ln>
+            <a:noFill/>
+          </a:ln>
+          <a:effectLst/>
+        </p:spPr>
+        <p:style>
+          <a:lnRef idx="1">
+            <a:schemeClr val="accent1"/>
+          </a:lnRef>
+          <a:fillRef idx="3">
+            <a:schemeClr val="accent1"/>
+          </a:fillRef>
+          <a:effectRef idx="2">
+            <a:schemeClr val="accent1"/>
+          </a:effectRef>
+          <a:fontRef idx="minor">
+            <a:schemeClr val="lt1"/>
+          </a:fontRef>
+        </p:style>
+        <p:txBody>
+          <a:bodyPr rtlCol="0" anchor="ctr"/>
+          <a:lstStyle/>
+          <a:p>
+            <a:pPr algn="ctr"/>
+          </a:p>
+        </p:txBody>
+      </p:sp>
+      <p:sp>
+        <p:nvSpPr>
+          <p:cNvPr id="3" name="Rectangle 2"/>
+          <p:cNvSpPr/>
+          <p:nvPr/>
+        </p:nvSpPr>
+        <p:spPr>
+          <a:xfrm>
+            <a:off x="502920" y="457200"/>
+            <a:ext cx="54864" cy="777240"/>
+          </a:xfrm>
+          <a:prstGeom prst="rect">
+            <a:avLst/>
+          </a:prstGeom>
+          <a:solidFill>
+            <a:srgbClr val="2563EB"/>
+          </a:solidFill>
+          <a:ln>
+            <a:noFill/>
+          </a:ln>
+          <a:effectLst/>
+        </p:spPr>
+        <p:style>
+          <a:lnRef idx="1">
+            <a:schemeClr val="accent1"/>
+          </a:lnRef>
+          <a:fillRef idx="3">
+            <a:schemeClr val="accent1"/>
+          </a:fillRef>
+          <a:effectRef idx="2">
+            <a:schemeClr val="accent1"/>
+          </a:effectRef>
+          <a:fontRef idx="minor">
+            <a:schemeClr val="lt1"/>
+          </a:fontRef>
+        </p:style>
+        <p:txBody>
+          <a:bodyPr rtlCol="0" anchor="ctr"/>
+          <a:lstStyle/>
+          <a:p>
+            <a:pPr algn="ctr"/>
+          </a:p>
+        </p:txBody>
+      </p:sp>
+      <p:sp>
+        <p:nvSpPr>
+          <p:cNvPr id="4" name="TextBox 3"/>
+          <p:cNvSpPr txBox="1"/>
+          <p:nvPr/>
+        </p:nvSpPr>
+        <p:spPr>
+          <a:xfrm>
+            <a:off x="713232" y="438912"/>
+            <a:ext cx="10058400" cy="274320"/>
+          </a:xfrm>
+          <a:prstGeom prst="rect">
+            <a:avLst/>
+          </a:prstGeom>
+          <a:noFill/>
+        </p:spPr>
+        <p:txBody>
+          <a:bodyPr wrap="none" lIns="0" tIns="0" rIns="0" bIns="0">
+            <a:spAutoFit/>
+          </a:bodyPr>
+          <a:lstStyle/>
+          <a:p>
+            <a:pPr algn="l"/>
+            <a:r>
+              <a:rPr sz="1150" b="1">
+                <a:solidFill>
+                  <a:srgbClr val="2563EB"/>
+                </a:solidFill>
+                <a:latin typeface="Segoe UI"/>
+              </a:rPr>
+              <a:t>ANNEXES</a:t>
+            </a:r>
+          </a:p>
+        </p:txBody>
+      </p:sp>
+      <p:sp>
+        <p:nvSpPr>
+          <p:cNvPr id="5" name="TextBox 4"/>
+          <p:cNvSpPr txBox="1"/>
+          <p:nvPr/>
+        </p:nvSpPr>
+        <p:spPr>
+          <a:xfrm>
+            <a:off x="685800" y="694944"/>
+            <a:ext cx="10789920" cy="594360"/>
+          </a:xfrm>
+          <a:prstGeom prst="rect">
+            <a:avLst/>
+          </a:prstGeom>
+          <a:noFill/>
+        </p:spPr>
+        <p:txBody>
+          <a:bodyPr wrap="square" lIns="0" tIns="0" rIns="0" bIns="0">
+            <a:spAutoFit/>
+          </a:bodyPr>
+          <a:lstStyle/>
+          <a:p>
+            <a:pPr algn="l"/>
+            <a:r>
+              <a:rPr sz="2700" b="1">
+                <a:solidFill>
+                  <a:srgbClr val="0F172A"/>
+                </a:solidFill>
+                <a:latin typeface="Segoe UI Semibold"/>
+              </a:rPr>
+              <a:t>Modélisation UML complémentaire — diagrammes de classes</a:t>
+            </a:r>
+          </a:p>
+        </p:txBody>
+      </p:sp>
+      <p:sp>
+        <p:nvSpPr>
+          <p:cNvPr id="6" name="TextBox 5"/>
+          <p:cNvSpPr txBox="1"/>
+          <p:nvPr/>
+        </p:nvSpPr>
+        <p:spPr>
+          <a:xfrm>
+            <a:off x="502920" y="6528816"/>
+            <a:ext cx="5486400" cy="274320"/>
+          </a:xfrm>
+          <a:prstGeom prst="rect">
+            <a:avLst/>
+          </a:prstGeom>
+          <a:noFill/>
+        </p:spPr>
+        <p:txBody>
+          <a:bodyPr wrap="none" lIns="0" tIns="0" rIns="0" bIns="0">
+            <a:spAutoFit/>
+          </a:bodyPr>
+          <a:lstStyle/>
+          <a:p>
+            <a:r>
+              <a:rPr sz="900">
+                <a:solidFill>
+                  <a:srgbClr val="64748B"/>
+                </a:solidFill>
+                <a:latin typeface="Segoe UI"/>
+              </a:rPr>
+              <a:t>TIRAHOU — Soutenance de mémoire</a:t>
+            </a:r>
+          </a:p>
+        </p:txBody>
+      </p:sp>
+      <p:sp>
+        <p:nvSpPr>
+          <p:cNvPr id="7" name="TextBox 6"/>
+          <p:cNvSpPr txBox="1"/>
+          <p:nvPr/>
+        </p:nvSpPr>
+        <p:spPr>
+          <a:xfrm>
+            <a:off x="10972800" y="6528816"/>
+            <a:ext cx="731520" cy="274320"/>
+          </a:xfrm>
+          <a:prstGeom prst="rect">
+            <a:avLst/>
+          </a:prstGeom>
+          <a:noFill/>
+        </p:spPr>
+        <p:txBody>
+          <a:bodyPr wrap="none" lIns="0" tIns="0" rIns="0" bIns="0">
+            <a:spAutoFit/>
+          </a:bodyPr>
+          <a:lstStyle/>
+          <a:p>
+            <a:pPr algn="r"/>
+            <a:r>
+              <a:rPr sz="900">
+                <a:solidFill>
+                  <a:srgbClr val="64748B"/>
+                </a:solidFill>
+                <a:latin typeface="Segoe UI"/>
+              </a:rPr>
+              <a:t>26</a:t>
+            </a:r>
+          </a:p>
+        </p:txBody>
+      </p:sp>
+      <p:cxnSp>
+        <p:nvCxnSpPr>
+          <p:cNvPr id="8" name="Connector 7"/>
+          <p:cNvCxnSpPr/>
+          <p:nvPr/>
+        </p:nvCxnSpPr>
+        <p:spPr>
+          <a:xfrm>
+            <a:off x="502920" y="6473952"/>
+            <a:ext cx="11183112" cy="0"/>
+          </a:xfrm>
+          <a:prstGeom prst="line">
+            <a:avLst/>
+          </a:prstGeom>
+          <a:ln w="9525">
+            <a:solidFill>
+              <a:srgbClr val="E2E8F0"/>
+            </a:solidFill>
+          </a:ln>
+        </p:spPr>
+        <p:style>
+          <a:lnRef idx="2">
+            <a:schemeClr val="accent1"/>
+          </a:lnRef>
+          <a:fillRef idx="0">
+            <a:schemeClr val="accent1"/>
+          </a:fillRef>
+          <a:effectRef idx="1">
+            <a:schemeClr val="accent1"/>
+          </a:effectRef>
+          <a:fontRef idx="minor">
+            <a:schemeClr val="tx1"/>
+          </a:fontRef>
+        </p:style>
+      </p:cxnSp>
+      <p:sp>
+        <p:nvSpPr>
+          <p:cNvPr id="9" name="TextBox 8"/>
+          <p:cNvSpPr txBox="1"/>
+          <p:nvPr/>
+        </p:nvSpPr>
+        <p:spPr>
+          <a:xfrm>
+            <a:off x="502920" y="1900000"/>
+            <a:ext cx="11183112" cy="3800000"/>
+          </a:xfrm>
+          <a:prstGeom prst="rect">
+            <a:avLst/>
+          </a:prstGeom>
+          <a:noFill/>
+        </p:spPr>
+        <p:txBody>
+          <a:bodyPr wrap="square" lIns="0" tIns="0" rIns="0" bIns="0">
+            <a:spAutoFit/>
+          </a:bodyPr>
+          <a:lstStyle/>
+          <a:p>
+            <a:pPr>
+              <a:spcAft>
+                <a:spcPts val="1000"/>
+              </a:spcAft>
+            </a:pPr>
+            <a:r>
+              <a:rPr sz="1500" b="0">
+                <a:solidFill>
+                  <a:srgbClr val="64748B"/>
+                </a:solidFill>
+                <a:latin typeface="Segoe UI"/>
+              </a:rPr>
+              <a:t>Les diagrammes suivants documentent le modèle conceptuel de classes établi lors de la</a:t>
+            </a:r>
+          </a:p>
+          <a:p>
+            <a:pPr>
+              <a:spcAft>
+                <a:spcPts val="1000"/>
+              </a:spcAft>
+            </a:pPr>
+            <a:r>
+              <a:rPr sz="1500" b="0">
+                <a:solidFill>
+                  <a:srgbClr val="64748B"/>
+                </a:solidFill>
+                <a:latin typeface="Segoe UI"/>
+              </a:rPr>
+              <a:t>phase de conception, avant l'implémentation — ils illustrent la démarche de modélisation</a:t>
+            </a:r>
+          </a:p>
+          <a:p>
+            <a:pPr>
+              <a:spcAft>
+                <a:spcPts val="1000"/>
+              </a:spcAft>
+            </a:pPr>
+            <a:r>
+              <a:rPr sz="1500" b="0">
+                <a:solidFill>
+                  <a:srgbClr val="64748B"/>
+                </a:solidFill>
+                <a:latin typeface="Segoe UI"/>
+              </a:rPr>
+              <a:t>qui a précédé et structuré le développement de chaque module.</a:t>
+            </a:r>
+          </a:p>
+          <a:p>
+            <a:pPr>
+              <a:spcAft>
+                <a:spcPts val="1000"/>
+              </a:spcAft>
+            </a:pPr>
+            <a:r>
+              <a:rPr sz="1500" b="0">
+                <a:solidFill>
+                  <a:srgbClr val="64748B"/>
+                </a:solidFill>
+                <a:latin typeface="Segoe UI"/>
+              </a:rPr>
+              <a:t/>
+            </a:r>
+          </a:p>
+          <a:p>
+            <a:pPr>
+              <a:spcAft>
+                <a:spcPts val="1000"/>
+              </a:spcAft>
+            </a:pPr>
+            <a:r>
+              <a:rPr sz="1600" b="1">
+                <a:solidFill>
+                  <a:srgbClr val="0F172A"/>
+                </a:solidFill>
+                <a:latin typeface="Segoe UI"/>
+              </a:rPr>
+              <a:t>1.  Diagramme de classes global — vue d'ensemble du domaine métier</a:t>
+            </a:r>
+          </a:p>
+          <a:p>
+            <a:pPr>
+              <a:spcAft>
+                <a:spcPts val="1000"/>
+              </a:spcAft>
+            </a:pPr>
+            <a:r>
+              <a:rPr sz="1600" b="1">
+                <a:solidFill>
+                  <a:srgbClr val="0F172A"/>
+                </a:solidFill>
+                <a:latin typeface="Segoe UI"/>
+              </a:rPr>
+              <a:t>2.  Identités &amp; sécurité — utilisateurs, rôles, permissions, sessions, audit</a:t>
+            </a:r>
+          </a:p>
+          <a:p>
+            <a:pPr>
+              <a:spcAft>
+                <a:spcPts val="1000"/>
+              </a:spcAft>
+            </a:pPr>
+            <a:r>
+              <a:rPr sz="1600" b="1">
+                <a:solidFill>
+                  <a:srgbClr val="0F172A"/>
+                </a:solidFill>
+                <a:latin typeface="Segoe UI"/>
+              </a:rPr>
+              <a:t>3.  Structure LMD — niveaux, semestres, UE, EC, crédits</a:t>
+            </a:r>
+          </a:p>
+          <a:p>
+            <a:pPr>
+              <a:spcAft>
+                <a:spcPts val="1000"/>
+              </a:spcAft>
+            </a:pPr>
+            <a:r>
+              <a:rPr sz="1600" b="1">
+                <a:solidFill>
+                  <a:srgbClr val="0F172A"/>
+                </a:solidFill>
+                <a:latin typeface="Segoe UI"/>
+              </a:rPr>
+              <a:t>4.  Évaluations — modèle polymorphe (examen, quiz, devoir, projet)</a:t>
+            </a:r>
+          </a:p>
+          <a:p>
+            <a:pPr>
+              <a:spcAft>
+                <a:spcPts val="1000"/>
+              </a:spcAft>
+            </a:pPr>
+            <a:r>
+              <a:rPr sz="1600" b="1">
+                <a:solidFill>
+                  <a:srgbClr val="0F172A"/>
+                </a:solidFill>
+                <a:latin typeface="Segoe UI"/>
+              </a:rPr>
+              <a:t>5.  Emploi du temps — créneaux, salles, réservations</a:t>
+            </a:r>
+          </a:p>
+        </p:txBody>
+      </p:sp>
+    </p:spTree>
+  </p:cSld>
+  <p:clrMapOvr>
+    <a:masterClrMapping/>
+  </p:clrMapOvr>
+</p:sld>
+</file>
+
+<file path=ppt/slides/slide27.xml><?xml version="1.0" encoding="utf-8"?>
+<p:sld xmlns:a="http://schemas.openxmlformats.org/drawingml/2006/main" xmlns:p="http://schemas.openxmlformats.org/presentationml/2006/main" xmlns:r="http://schemas.openxmlformats.org/officeDocument/2006/relationships">
+  <p:cSld>
+    <p:spTree>
+      <p:nvGrpSpPr>
+        <p:cNvPr id="1" name=""/>
+        <p:cNvGrpSpPr/>
+        <p:nvPr/>
+      </p:nvGrpSpPr>
+      <p:grpSpPr/>
+      <p:sp>
+        <p:nvSpPr>
+          <p:cNvPr id="2" name="Rectangle 1"/>
+          <p:cNvSpPr/>
+          <p:nvPr/>
+        </p:nvSpPr>
+        <p:spPr>
+          <a:xfrm>
+            <a:off x="0" y="0"/>
+            <a:ext cx="12191695" cy="6858000"/>
+          </a:xfrm>
+          <a:prstGeom prst="rect">
+            <a:avLst/>
+          </a:prstGeom>
+          <a:solidFill>
+            <a:srgbClr val="F8FAFC"/>
+          </a:solidFill>
+          <a:ln>
+            <a:noFill/>
+          </a:ln>
+          <a:effectLst/>
+        </p:spPr>
+        <p:style>
+          <a:lnRef idx="1">
+            <a:schemeClr val="accent1"/>
+          </a:lnRef>
+          <a:fillRef idx="3">
+            <a:schemeClr val="accent1"/>
+          </a:fillRef>
+          <a:effectRef idx="2">
+            <a:schemeClr val="accent1"/>
+          </a:effectRef>
+          <a:fontRef idx="minor">
+            <a:schemeClr val="lt1"/>
+          </a:fontRef>
+        </p:style>
+        <p:txBody>
+          <a:bodyPr rtlCol="0" anchor="ctr"/>
+          <a:lstStyle/>
+          <a:p>
+            <a:pPr algn="ctr"/>
+          </a:p>
+        </p:txBody>
+      </p:sp>
+      <p:sp>
+        <p:nvSpPr>
+          <p:cNvPr id="3" name="Rectangle 2"/>
+          <p:cNvSpPr/>
+          <p:nvPr/>
+        </p:nvSpPr>
+        <p:spPr>
+          <a:xfrm>
+            <a:off x="502920" y="457200"/>
+            <a:ext cx="54864" cy="777240"/>
+          </a:xfrm>
+          <a:prstGeom prst="rect">
+            <a:avLst/>
+          </a:prstGeom>
+          <a:solidFill>
+            <a:srgbClr val="2563EB"/>
+          </a:solidFill>
+          <a:ln>
+            <a:noFill/>
+          </a:ln>
+          <a:effectLst/>
+        </p:spPr>
+        <p:style>
+          <a:lnRef idx="1">
+            <a:schemeClr val="accent1"/>
+          </a:lnRef>
+          <a:fillRef idx="3">
+            <a:schemeClr val="accent1"/>
+          </a:fillRef>
+          <a:effectRef idx="2">
+            <a:schemeClr val="accent1"/>
+          </a:effectRef>
+          <a:fontRef idx="minor">
+            <a:schemeClr val="lt1"/>
+          </a:fontRef>
+        </p:style>
+        <p:txBody>
+          <a:bodyPr rtlCol="0" anchor="ctr"/>
+          <a:lstStyle/>
+          <a:p>
+            <a:pPr algn="ctr"/>
+          </a:p>
+        </p:txBody>
+      </p:sp>
+      <p:sp>
+        <p:nvSpPr>
+          <p:cNvPr id="4" name="TextBox 3"/>
+          <p:cNvSpPr txBox="1"/>
+          <p:nvPr/>
+        </p:nvSpPr>
+        <p:spPr>
+          <a:xfrm>
+            <a:off x="713232" y="438912"/>
+            <a:ext cx="10058400" cy="274320"/>
+          </a:xfrm>
+          <a:prstGeom prst="rect">
+            <a:avLst/>
+          </a:prstGeom>
+          <a:noFill/>
+        </p:spPr>
+        <p:txBody>
+          <a:bodyPr wrap="none" lIns="0" tIns="0" rIns="0" bIns="0">
+            <a:spAutoFit/>
+          </a:bodyPr>
+          <a:lstStyle/>
+          <a:p>
+            <a:pPr algn="l"/>
+            <a:r>
+              <a:rPr sz="1150" b="1">
+                <a:solidFill>
+                  <a:srgbClr val="2563EB"/>
+                </a:solidFill>
+                <a:latin typeface="Segoe UI"/>
+              </a:rPr>
+              <a:t>ANNEXES</a:t>
+            </a:r>
+          </a:p>
+        </p:txBody>
+      </p:sp>
+      <p:sp>
+        <p:nvSpPr>
+          <p:cNvPr id="5" name="TextBox 4"/>
+          <p:cNvSpPr txBox="1"/>
+          <p:nvPr/>
+        </p:nvSpPr>
+        <p:spPr>
+          <a:xfrm>
+            <a:off x="685800" y="694944"/>
+            <a:ext cx="10789920" cy="594360"/>
+          </a:xfrm>
+          <a:prstGeom prst="rect">
+            <a:avLst/>
+          </a:prstGeom>
+          <a:noFill/>
+        </p:spPr>
+        <p:txBody>
+          <a:bodyPr wrap="square" lIns="0" tIns="0" rIns="0" bIns="0">
+            <a:spAutoFit/>
+          </a:bodyPr>
+          <a:lstStyle/>
+          <a:p>
+            <a:pPr algn="l"/>
+            <a:r>
+              <a:rPr sz="2400" b="1">
+                <a:solidFill>
+                  <a:srgbClr val="0F172A"/>
+                </a:solidFill>
+                <a:latin typeface="Segoe UI Semibold"/>
+              </a:rPr>
+              <a:t>Diagramme de classes — vue d'ensemble du domaine métier</a:t>
+            </a:r>
+          </a:p>
+        </p:txBody>
+      </p:sp>
+      <p:sp>
+        <p:nvSpPr>
+          <p:cNvPr id="6" name="TextBox 5"/>
+          <p:cNvSpPr txBox="1"/>
+          <p:nvPr/>
+        </p:nvSpPr>
+        <p:spPr>
+          <a:xfrm>
+            <a:off x="502920" y="6528816"/>
+            <a:ext cx="5486400" cy="274320"/>
+          </a:xfrm>
+          <a:prstGeom prst="rect">
+            <a:avLst/>
+          </a:prstGeom>
+          <a:noFill/>
+        </p:spPr>
+        <p:txBody>
+          <a:bodyPr wrap="none" lIns="0" tIns="0" rIns="0" bIns="0">
+            <a:spAutoFit/>
+          </a:bodyPr>
+          <a:lstStyle/>
+          <a:p>
+            <a:r>
+              <a:rPr sz="900">
+                <a:solidFill>
+                  <a:srgbClr val="64748B"/>
+                </a:solidFill>
+                <a:latin typeface="Segoe UI"/>
+              </a:rPr>
+              <a:t>TIRAHOU — Soutenance de mémoire</a:t>
+            </a:r>
+          </a:p>
+        </p:txBody>
+      </p:sp>
+      <p:sp>
+        <p:nvSpPr>
+          <p:cNvPr id="7" name="TextBox 6"/>
+          <p:cNvSpPr txBox="1"/>
+          <p:nvPr/>
+        </p:nvSpPr>
+        <p:spPr>
+          <a:xfrm>
+            <a:off x="10972800" y="6528816"/>
+            <a:ext cx="731520" cy="274320"/>
+          </a:xfrm>
+          <a:prstGeom prst="rect">
+            <a:avLst/>
+          </a:prstGeom>
+          <a:noFill/>
+        </p:spPr>
+        <p:txBody>
+          <a:bodyPr wrap="none" lIns="0" tIns="0" rIns="0" bIns="0">
+            <a:spAutoFit/>
+          </a:bodyPr>
+          <a:lstStyle/>
+          <a:p>
+            <a:pPr algn="r"/>
+            <a:r>
+              <a:rPr sz="900">
+                <a:solidFill>
+                  <a:srgbClr val="64748B"/>
+                </a:solidFill>
+                <a:latin typeface="Segoe UI"/>
+              </a:rPr>
+              <a:t>27</a:t>
+            </a:r>
+          </a:p>
+        </p:txBody>
+      </p:sp>
+      <p:cxnSp>
+        <p:nvCxnSpPr>
+          <p:cNvPr id="8" name="Connector 7"/>
+          <p:cNvCxnSpPr/>
+          <p:nvPr/>
+        </p:nvCxnSpPr>
+        <p:spPr>
+          <a:xfrm>
+            <a:off x="502920" y="6473952"/>
+            <a:ext cx="11183112" cy="0"/>
+          </a:xfrm>
+          <a:prstGeom prst="line">
+            <a:avLst/>
+          </a:prstGeom>
+          <a:ln w="9525">
+            <a:solidFill>
+              <a:srgbClr val="E2E8F0"/>
+            </a:solidFill>
+          </a:ln>
+        </p:spPr>
+        <p:style>
+          <a:lnRef idx="2">
+            <a:schemeClr val="accent1"/>
+          </a:lnRef>
+          <a:fillRef idx="0">
+            <a:schemeClr val="accent1"/>
+          </a:fillRef>
+          <a:effectRef idx="1">
+            <a:schemeClr val="accent1"/>
+          </a:effectRef>
+          <a:fontRef idx="minor">
+            <a:schemeClr val="tx1"/>
+          </a:fontRef>
+        </p:style>
+      </p:cxnSp>
+      <p:sp>
+        <p:nvSpPr>
+          <p:cNvPr id="9" name="Rounded Rectangle 8"/>
+          <p:cNvSpPr/>
+          <p:nvPr/>
+        </p:nvSpPr>
+        <p:spPr>
+          <a:xfrm>
+            <a:off x="3183466" y="1300000"/>
+            <a:ext cx="5822019" cy="5100000"/>
+          </a:xfrm>
+          <a:prstGeom prst="roundRect">
+            <a:avLst>
+              <a:gd name="adj" fmla="val 4500"/>
+            </a:avLst>
+          </a:prstGeom>
+          <a:solidFill>
+            <a:srgbClr val="FFFFFF"/>
+          </a:solidFill>
+          <a:ln w="12700">
+            <a:solidFill>
+              <a:srgbClr val="E2E8F0"/>
+            </a:solidFill>
+          </a:ln>
+          <a:effectLst/>
+        </p:spPr>
+        <p:style>
+          <a:lnRef idx="1">
+            <a:schemeClr val="accent1"/>
+          </a:lnRef>
+          <a:fillRef idx="3">
+            <a:schemeClr val="accent1"/>
+          </a:fillRef>
+          <a:effectRef idx="2">
+            <a:schemeClr val="accent1"/>
+          </a:effectRef>
+          <a:fontRef idx="minor">
+            <a:schemeClr val="lt1"/>
+          </a:fontRef>
+        </p:style>
+        <p:txBody>
+          <a:bodyPr rtlCol="0" anchor="ctr"/>
+          <a:lstStyle/>
+          <a:p>
+            <a:pPr algn="ctr"/>
+          </a:p>
+        </p:txBody>
+      </p:sp>
+      <p:pic>
+        <p:nvPicPr>
+          <p:cNvPr id="10" name="Picture 9" descr="Diagramme_Global.png"/>
+          <p:cNvPicPr>
+            <a:picLocks noChangeAspect="1"/>
+          </p:cNvPicPr>
+          <p:nvPr/>
+        </p:nvPicPr>
+        <p:blipFill>
+          <a:blip r:embed="rId2"/>
+          <a:stretch>
+            <a:fillRect/>
+          </a:stretch>
+        </p:blipFill>
+        <p:spPr>
+          <a:xfrm>
+            <a:off x="3283466" y="1400000"/>
+            <a:ext cx="5622019" cy="4900000"/>
+          </a:xfrm>
+          <a:prstGeom prst="rect">
+            <a:avLst/>
+          </a:prstGeom>
+        </p:spPr>
+      </p:pic>
+    </p:spTree>
+  </p:cSld>
+  <p:clrMapOvr>
+    <a:masterClrMapping/>
+  </p:clrMapOvr>
+</p:sld>
+</file>
+
+<file path=ppt/slides/slide28.xml><?xml version="1.0" encoding="utf-8"?>
+<p:sld xmlns:a="http://schemas.openxmlformats.org/drawingml/2006/main" xmlns:p="http://schemas.openxmlformats.org/presentationml/2006/main" xmlns:r="http://schemas.openxmlformats.org/officeDocument/2006/relationships">
+  <p:cSld>
+    <p:spTree>
+      <p:nvGrpSpPr>
+        <p:cNvPr id="1" name=""/>
+        <p:cNvGrpSpPr/>
+        <p:nvPr/>
+      </p:nvGrpSpPr>
+      <p:grpSpPr/>
+      <p:sp>
+        <p:nvSpPr>
+          <p:cNvPr id="2" name="Rectangle 1"/>
+          <p:cNvSpPr/>
+          <p:nvPr/>
+        </p:nvSpPr>
+        <p:spPr>
+          <a:xfrm>
+            <a:off x="0" y="0"/>
+            <a:ext cx="12191695" cy="6858000"/>
+          </a:xfrm>
+          <a:prstGeom prst="rect">
+            <a:avLst/>
+          </a:prstGeom>
+          <a:solidFill>
+            <a:srgbClr val="F8FAFC"/>
+          </a:solidFill>
+          <a:ln>
+            <a:noFill/>
+          </a:ln>
+          <a:effectLst/>
+        </p:spPr>
+        <p:style>
+          <a:lnRef idx="1">
+            <a:schemeClr val="accent1"/>
+          </a:lnRef>
+          <a:fillRef idx="3">
+            <a:schemeClr val="accent1"/>
+          </a:fillRef>
+          <a:effectRef idx="2">
+            <a:schemeClr val="accent1"/>
+          </a:effectRef>
+          <a:fontRef idx="minor">
+            <a:schemeClr val="lt1"/>
+          </a:fontRef>
+        </p:style>
+        <p:txBody>
+          <a:bodyPr rtlCol="0" anchor="ctr"/>
+          <a:lstStyle/>
+          <a:p>
+            <a:pPr algn="ctr"/>
+          </a:p>
+        </p:txBody>
+      </p:sp>
+      <p:sp>
+        <p:nvSpPr>
+          <p:cNvPr id="3" name="Rectangle 2"/>
+          <p:cNvSpPr/>
+          <p:nvPr/>
+        </p:nvSpPr>
+        <p:spPr>
+          <a:xfrm>
+            <a:off x="502920" y="457200"/>
+            <a:ext cx="54864" cy="777240"/>
+          </a:xfrm>
+          <a:prstGeom prst="rect">
+            <a:avLst/>
+          </a:prstGeom>
+          <a:solidFill>
+            <a:srgbClr val="2563EB"/>
+          </a:solidFill>
+          <a:ln>
+            <a:noFill/>
+          </a:ln>
+          <a:effectLst/>
+        </p:spPr>
+        <p:style>
+          <a:lnRef idx="1">
+            <a:schemeClr val="accent1"/>
+          </a:lnRef>
+          <a:fillRef idx="3">
+            <a:schemeClr val="accent1"/>
+          </a:fillRef>
+          <a:effectRef idx="2">
+            <a:schemeClr val="accent1"/>
+          </a:effectRef>
+          <a:fontRef idx="minor">
+            <a:schemeClr val="lt1"/>
+          </a:fontRef>
+        </p:style>
+        <p:txBody>
+          <a:bodyPr rtlCol="0" anchor="ctr"/>
+          <a:lstStyle/>
+          <a:p>
+            <a:pPr algn="ctr"/>
+          </a:p>
+        </p:txBody>
+      </p:sp>
+      <p:sp>
+        <p:nvSpPr>
+          <p:cNvPr id="4" name="TextBox 3"/>
+          <p:cNvSpPr txBox="1"/>
+          <p:nvPr/>
+        </p:nvSpPr>
+        <p:spPr>
+          <a:xfrm>
+            <a:off x="713232" y="438912"/>
+            <a:ext cx="10058400" cy="274320"/>
+          </a:xfrm>
+          <a:prstGeom prst="rect">
+            <a:avLst/>
+          </a:prstGeom>
+          <a:noFill/>
+        </p:spPr>
+        <p:txBody>
+          <a:bodyPr wrap="none" lIns="0" tIns="0" rIns="0" bIns="0">
+            <a:spAutoFit/>
+          </a:bodyPr>
+          <a:lstStyle/>
+          <a:p>
+            <a:pPr algn="l"/>
+            <a:r>
+              <a:rPr sz="1150" b="1">
+                <a:solidFill>
+                  <a:srgbClr val="2563EB"/>
+                </a:solidFill>
+                <a:latin typeface="Segoe UI"/>
+              </a:rPr>
+              <a:t>ANNEXES</a:t>
+            </a:r>
+          </a:p>
+        </p:txBody>
+      </p:sp>
+      <p:sp>
+        <p:nvSpPr>
+          <p:cNvPr id="5" name="TextBox 4"/>
+          <p:cNvSpPr txBox="1"/>
+          <p:nvPr/>
+        </p:nvSpPr>
+        <p:spPr>
+          <a:xfrm>
+            <a:off x="685800" y="694944"/>
+            <a:ext cx="10789920" cy="594360"/>
+          </a:xfrm>
+          <a:prstGeom prst="rect">
+            <a:avLst/>
+          </a:prstGeom>
+          <a:noFill/>
+        </p:spPr>
+        <p:txBody>
+          <a:bodyPr wrap="square" lIns="0" tIns="0" rIns="0" bIns="0">
+            <a:spAutoFit/>
+          </a:bodyPr>
+          <a:lstStyle/>
+          <a:p>
+            <a:pPr algn="l"/>
+            <a:r>
+              <a:rPr sz="2400" b="1">
+                <a:solidFill>
+                  <a:srgbClr val="0F172A"/>
+                </a:solidFill>
+                <a:latin typeface="Segoe UI Semibold"/>
+              </a:rPr>
+              <a:t>Identités &amp; sécurité — utilisateurs, rôles, permissions</a:t>
+            </a:r>
+          </a:p>
+        </p:txBody>
+      </p:sp>
+      <p:sp>
+        <p:nvSpPr>
+          <p:cNvPr id="6" name="TextBox 5"/>
+          <p:cNvSpPr txBox="1"/>
+          <p:nvPr/>
+        </p:nvSpPr>
+        <p:spPr>
+          <a:xfrm>
+            <a:off x="502920" y="6528816"/>
+            <a:ext cx="5486400" cy="274320"/>
+          </a:xfrm>
+          <a:prstGeom prst="rect">
+            <a:avLst/>
+          </a:prstGeom>
+          <a:noFill/>
+        </p:spPr>
+        <p:txBody>
+          <a:bodyPr wrap="none" lIns="0" tIns="0" rIns="0" bIns="0">
+            <a:spAutoFit/>
+          </a:bodyPr>
+          <a:lstStyle/>
+          <a:p>
+            <a:r>
+              <a:rPr sz="900">
+                <a:solidFill>
+                  <a:srgbClr val="64748B"/>
+                </a:solidFill>
+                <a:latin typeface="Segoe UI"/>
+              </a:rPr>
+              <a:t>TIRAHOU — Soutenance de mémoire</a:t>
+            </a:r>
+          </a:p>
+        </p:txBody>
+      </p:sp>
+      <p:sp>
+        <p:nvSpPr>
+          <p:cNvPr id="7" name="TextBox 6"/>
+          <p:cNvSpPr txBox="1"/>
+          <p:nvPr/>
+        </p:nvSpPr>
+        <p:spPr>
+          <a:xfrm>
+            <a:off x="10972800" y="6528816"/>
+            <a:ext cx="731520" cy="274320"/>
+          </a:xfrm>
+          <a:prstGeom prst="rect">
+            <a:avLst/>
+          </a:prstGeom>
+          <a:noFill/>
+        </p:spPr>
+        <p:txBody>
+          <a:bodyPr wrap="none" lIns="0" tIns="0" rIns="0" bIns="0">
+            <a:spAutoFit/>
+          </a:bodyPr>
+          <a:lstStyle/>
+          <a:p>
+            <a:pPr algn="r"/>
+            <a:r>
+              <a:rPr sz="900">
+                <a:solidFill>
+                  <a:srgbClr val="64748B"/>
+                </a:solidFill>
+                <a:latin typeface="Segoe UI"/>
+              </a:rPr>
+              <a:t>28</a:t>
+            </a:r>
+          </a:p>
+        </p:txBody>
+      </p:sp>
+      <p:cxnSp>
+        <p:nvCxnSpPr>
+          <p:cNvPr id="8" name="Connector 7"/>
+          <p:cNvCxnSpPr/>
+          <p:nvPr/>
+        </p:nvCxnSpPr>
+        <p:spPr>
+          <a:xfrm>
+            <a:off x="502920" y="6473952"/>
+            <a:ext cx="11183112" cy="0"/>
+          </a:xfrm>
+          <a:prstGeom prst="line">
+            <a:avLst/>
+          </a:prstGeom>
+          <a:ln w="9525">
+            <a:solidFill>
+              <a:srgbClr val="E2E8F0"/>
+            </a:solidFill>
+          </a:ln>
+        </p:spPr>
+        <p:style>
+          <a:lnRef idx="2">
+            <a:schemeClr val="accent1"/>
+          </a:lnRef>
+          <a:fillRef idx="0">
+            <a:schemeClr val="accent1"/>
+          </a:fillRef>
+          <a:effectRef idx="1">
+            <a:schemeClr val="accent1"/>
+          </a:effectRef>
+          <a:fontRef idx="minor">
+            <a:schemeClr val="tx1"/>
+          </a:fontRef>
+        </p:style>
+      </p:cxnSp>
+      <p:sp>
+        <p:nvSpPr>
+          <p:cNvPr id="9" name="Rounded Rectangle 8"/>
+          <p:cNvSpPr/>
+          <p:nvPr/>
+        </p:nvSpPr>
+        <p:spPr>
+          <a:xfrm>
+            <a:off x="2360096" y="1500000"/>
+            <a:ext cx="7468760" cy="4300000"/>
+          </a:xfrm>
+          <a:prstGeom prst="roundRect">
+            <a:avLst>
+              <a:gd name="adj" fmla="val 4500"/>
+            </a:avLst>
+          </a:prstGeom>
+          <a:solidFill>
+            <a:srgbClr val="FFFFFF"/>
+          </a:solidFill>
+          <a:ln w="12700">
+            <a:solidFill>
+              <a:srgbClr val="E2E8F0"/>
+            </a:solidFill>
+          </a:ln>
+          <a:effectLst/>
+        </p:spPr>
+        <p:style>
+          <a:lnRef idx="1">
+            <a:schemeClr val="accent1"/>
+          </a:lnRef>
+          <a:fillRef idx="3">
+            <a:schemeClr val="accent1"/>
+          </a:fillRef>
+          <a:effectRef idx="2">
+            <a:schemeClr val="accent1"/>
+          </a:effectRef>
+          <a:fontRef idx="minor">
+            <a:schemeClr val="lt1"/>
+          </a:fontRef>
+        </p:style>
+        <p:txBody>
+          <a:bodyPr rtlCol="0" anchor="ctr"/>
+          <a:lstStyle/>
+          <a:p>
+            <a:pPr algn="ctr"/>
+          </a:p>
+        </p:txBody>
+      </p:sp>
+      <p:pic>
+        <p:nvPicPr>
+          <p:cNvPr id="10" name="Picture 9" descr="03_Identites.png"/>
+          <p:cNvPicPr>
+            <a:picLocks noChangeAspect="1"/>
+          </p:cNvPicPr>
+          <p:nvPr/>
+        </p:nvPicPr>
+        <p:blipFill>
+          <a:blip r:embed="rId2"/>
+          <a:stretch>
+            <a:fillRect/>
+          </a:stretch>
+        </p:blipFill>
+        <p:spPr>
+          <a:xfrm>
+            <a:off x="2588696" y="1728600"/>
+            <a:ext cx="7011560" cy="3842800"/>
+          </a:xfrm>
+          <a:prstGeom prst="rect">
+            <a:avLst/>
+          </a:prstGeom>
+        </p:spPr>
+      </p:pic>
+      <p:sp>
+        <p:nvSpPr>
+          <p:cNvPr id="11" name="TextBox 10"/>
+          <p:cNvSpPr txBox="1"/>
+          <p:nvPr/>
+        </p:nvSpPr>
+        <p:spPr>
+          <a:xfrm>
+            <a:off x="502920" y="5950000"/>
+            <a:ext cx="11183112" cy="320000"/>
+          </a:xfrm>
+          <a:prstGeom prst="rect">
+            <a:avLst/>
+          </a:prstGeom>
+          <a:noFill/>
+        </p:spPr>
+        <p:txBody>
+          <a:bodyPr wrap="none" lIns="0" tIns="0" rIns="0" bIns="0">
+            <a:spAutoFit/>
+          </a:bodyPr>
+          <a:lstStyle/>
+          <a:p>
+            <a:pPr algn="ctr"/>
+            <a:r>
+              <a:rPr sz="1100" i="1">
+                <a:solidFill>
+                  <a:srgbClr val="64748B"/>
+                </a:solidFill>
+                <a:latin typeface="Segoe UI"/>
+              </a:rPr>
+              <a:t>Base du contrôle d'accès RBAC : Utilisateur, Compte, Role, Permission, SessionConnexion, JournalAudit.</a:t>
+            </a:r>
+          </a:p>
+        </p:txBody>
+      </p:sp>
+    </p:spTree>
+  </p:cSld>
+  <p:clrMapOvr>
+    <a:masterClrMapping/>
+  </p:clrMapOvr>
+</p:sld>
+</file>
+
+<file path=ppt/slides/slide29.xml><?xml version="1.0" encoding="utf-8"?>
+<p:sld xmlns:a="http://schemas.openxmlformats.org/drawingml/2006/main" xmlns:p="http://schemas.openxmlformats.org/presentationml/2006/main" xmlns:r="http://schemas.openxmlformats.org/officeDocument/2006/relationships">
+  <p:cSld>
+    <p:spTree>
+      <p:nvGrpSpPr>
+        <p:cNvPr id="1" name=""/>
+        <p:cNvGrpSpPr/>
+        <p:nvPr/>
+      </p:nvGrpSpPr>
+      <p:grpSpPr/>
+      <p:sp>
+        <p:nvSpPr>
+          <p:cNvPr id="2" name="Rectangle 1"/>
+          <p:cNvSpPr/>
+          <p:nvPr/>
+        </p:nvSpPr>
+        <p:spPr>
+          <a:xfrm>
+            <a:off x="0" y="0"/>
+            <a:ext cx="12191695" cy="6858000"/>
+          </a:xfrm>
+          <a:prstGeom prst="rect">
+            <a:avLst/>
+          </a:prstGeom>
+          <a:solidFill>
+            <a:srgbClr val="F8FAFC"/>
+          </a:solidFill>
+          <a:ln>
+            <a:noFill/>
+          </a:ln>
+          <a:effectLst/>
+        </p:spPr>
+        <p:style>
+          <a:lnRef idx="1">
+            <a:schemeClr val="accent1"/>
+          </a:lnRef>
+          <a:fillRef idx="3">
+            <a:schemeClr val="accent1"/>
+          </a:fillRef>
+          <a:effectRef idx="2">
+            <a:schemeClr val="accent1"/>
+          </a:effectRef>
+          <a:fontRef idx="minor">
+            <a:schemeClr val="lt1"/>
+          </a:fontRef>
+        </p:style>
+        <p:txBody>
+          <a:bodyPr rtlCol="0" anchor="ctr"/>
+          <a:lstStyle/>
+          <a:p>
+            <a:pPr algn="ctr"/>
+          </a:p>
+        </p:txBody>
+      </p:sp>
+      <p:sp>
+        <p:nvSpPr>
+          <p:cNvPr id="3" name="Rectangle 2"/>
+          <p:cNvSpPr/>
+          <p:nvPr/>
+        </p:nvSpPr>
+        <p:spPr>
+          <a:xfrm>
+            <a:off x="502920" y="457200"/>
+            <a:ext cx="54864" cy="777240"/>
+          </a:xfrm>
+          <a:prstGeom prst="rect">
+            <a:avLst/>
+          </a:prstGeom>
+          <a:solidFill>
+            <a:srgbClr val="2563EB"/>
+          </a:solidFill>
+          <a:ln>
+            <a:noFill/>
+          </a:ln>
+          <a:effectLst/>
+        </p:spPr>
+        <p:style>
+          <a:lnRef idx="1">
+            <a:schemeClr val="accent1"/>
+          </a:lnRef>
+          <a:fillRef idx="3">
+            <a:schemeClr val="accent1"/>
+          </a:fillRef>
+          <a:effectRef idx="2">
+            <a:schemeClr val="accent1"/>
+          </a:effectRef>
+          <a:fontRef idx="minor">
+            <a:schemeClr val="lt1"/>
+          </a:fontRef>
+        </p:style>
+        <p:txBody>
+          <a:bodyPr rtlCol="0" anchor="ctr"/>
+          <a:lstStyle/>
+          <a:p>
+            <a:pPr algn="ctr"/>
+          </a:p>
+        </p:txBody>
+      </p:sp>
+      <p:sp>
+        <p:nvSpPr>
+          <p:cNvPr id="4" name="TextBox 3"/>
+          <p:cNvSpPr txBox="1"/>
+          <p:nvPr/>
+        </p:nvSpPr>
+        <p:spPr>
+          <a:xfrm>
+            <a:off x="713232" y="438912"/>
+            <a:ext cx="10058400" cy="274320"/>
+          </a:xfrm>
+          <a:prstGeom prst="rect">
+            <a:avLst/>
+          </a:prstGeom>
+          <a:noFill/>
+        </p:spPr>
+        <p:txBody>
+          <a:bodyPr wrap="none" lIns="0" tIns="0" rIns="0" bIns="0">
+            <a:spAutoFit/>
+          </a:bodyPr>
+          <a:lstStyle/>
+          <a:p>
+            <a:pPr algn="l"/>
+            <a:r>
+              <a:rPr sz="1150" b="1">
+                <a:solidFill>
+                  <a:srgbClr val="2563EB"/>
+                </a:solidFill>
+                <a:latin typeface="Segoe UI"/>
+              </a:rPr>
+              <a:t>ANNEXES</a:t>
+            </a:r>
+          </a:p>
+        </p:txBody>
+      </p:sp>
+      <p:sp>
+        <p:nvSpPr>
+          <p:cNvPr id="5" name="TextBox 4"/>
+          <p:cNvSpPr txBox="1"/>
+          <p:nvPr/>
+        </p:nvSpPr>
+        <p:spPr>
+          <a:xfrm>
+            <a:off x="685800" y="694944"/>
+            <a:ext cx="10789920" cy="594360"/>
+          </a:xfrm>
+          <a:prstGeom prst="rect">
+            <a:avLst/>
+          </a:prstGeom>
+          <a:noFill/>
+        </p:spPr>
+        <p:txBody>
+          <a:bodyPr wrap="square" lIns="0" tIns="0" rIns="0" bIns="0">
+            <a:spAutoFit/>
+          </a:bodyPr>
+          <a:lstStyle/>
+          <a:p>
+            <a:pPr algn="l"/>
+            <a:r>
+              <a:rPr sz="2400" b="1">
+                <a:solidFill>
+                  <a:srgbClr val="0F172A"/>
+                </a:solidFill>
+                <a:latin typeface="Segoe UI Semibold"/>
+              </a:rPr>
+              <a:t>Structure LMD — niveaux, semestres, UE, EC, crédits</a:t>
+            </a:r>
+          </a:p>
+        </p:txBody>
+      </p:sp>
+      <p:sp>
+        <p:nvSpPr>
+          <p:cNvPr id="6" name="TextBox 5"/>
+          <p:cNvSpPr txBox="1"/>
+          <p:nvPr/>
+        </p:nvSpPr>
+        <p:spPr>
+          <a:xfrm>
+            <a:off x="502920" y="6528816"/>
+            <a:ext cx="5486400" cy="274320"/>
+          </a:xfrm>
+          <a:prstGeom prst="rect">
+            <a:avLst/>
+          </a:prstGeom>
+          <a:noFill/>
+        </p:spPr>
+        <p:txBody>
+          <a:bodyPr wrap="none" lIns="0" tIns="0" rIns="0" bIns="0">
+            <a:spAutoFit/>
+          </a:bodyPr>
+          <a:lstStyle/>
+          <a:p>
+            <a:r>
+              <a:rPr sz="900">
+                <a:solidFill>
+                  <a:srgbClr val="64748B"/>
+                </a:solidFill>
+                <a:latin typeface="Segoe UI"/>
+              </a:rPr>
+              <a:t>TIRAHOU — Soutenance de mémoire</a:t>
+            </a:r>
+          </a:p>
+        </p:txBody>
+      </p:sp>
+      <p:sp>
+        <p:nvSpPr>
+          <p:cNvPr id="7" name="TextBox 6"/>
+          <p:cNvSpPr txBox="1"/>
+          <p:nvPr/>
+        </p:nvSpPr>
+        <p:spPr>
+          <a:xfrm>
+            <a:off x="10972800" y="6528816"/>
+            <a:ext cx="731520" cy="274320"/>
+          </a:xfrm>
+          <a:prstGeom prst="rect">
+            <a:avLst/>
+          </a:prstGeom>
+          <a:noFill/>
+        </p:spPr>
+        <p:txBody>
+          <a:bodyPr wrap="none" lIns="0" tIns="0" rIns="0" bIns="0">
+            <a:spAutoFit/>
+          </a:bodyPr>
+          <a:lstStyle/>
+          <a:p>
+            <a:pPr algn="r"/>
+            <a:r>
+              <a:rPr sz="900">
+                <a:solidFill>
+                  <a:srgbClr val="64748B"/>
+                </a:solidFill>
+                <a:latin typeface="Segoe UI"/>
+              </a:rPr>
+              <a:t>29</a:t>
+            </a:r>
+          </a:p>
+        </p:txBody>
+      </p:sp>
+      <p:cxnSp>
+        <p:nvCxnSpPr>
+          <p:cNvPr id="8" name="Connector 7"/>
+          <p:cNvCxnSpPr/>
+          <p:nvPr/>
+        </p:nvCxnSpPr>
+        <p:spPr>
+          <a:xfrm>
+            <a:off x="502920" y="6473952"/>
+            <a:ext cx="11183112" cy="0"/>
+          </a:xfrm>
+          <a:prstGeom prst="line">
+            <a:avLst/>
+          </a:prstGeom>
+          <a:ln w="9525">
+            <a:solidFill>
+              <a:srgbClr val="E2E8F0"/>
+            </a:solidFill>
+          </a:ln>
+        </p:spPr>
+        <p:style>
+          <a:lnRef idx="2">
+            <a:schemeClr val="accent1"/>
+          </a:lnRef>
+          <a:fillRef idx="0">
+            <a:schemeClr val="accent1"/>
+          </a:fillRef>
+          <a:effectRef idx="1">
+            <a:schemeClr val="accent1"/>
+          </a:effectRef>
+          <a:fontRef idx="minor">
+            <a:schemeClr val="tx1"/>
+          </a:fontRef>
+        </p:style>
+      </p:cxnSp>
+      <p:sp>
+        <p:nvSpPr>
+          <p:cNvPr id="9" name="Rounded Rectangle 8"/>
+          <p:cNvSpPr/>
+          <p:nvPr/>
+        </p:nvSpPr>
+        <p:spPr>
+          <a:xfrm>
+            <a:off x="4676135" y="1500000"/>
+            <a:ext cx="2836682" cy="4300000"/>
+          </a:xfrm>
+          <a:prstGeom prst="roundRect">
+            <a:avLst>
+              <a:gd name="adj" fmla="val 4500"/>
+            </a:avLst>
+          </a:prstGeom>
+          <a:solidFill>
+            <a:srgbClr val="FFFFFF"/>
+          </a:solidFill>
+          <a:ln w="12700">
+            <a:solidFill>
+              <a:srgbClr val="E2E8F0"/>
+            </a:solidFill>
+          </a:ln>
+          <a:effectLst/>
+        </p:spPr>
+        <p:style>
+          <a:lnRef idx="1">
+            <a:schemeClr val="accent1"/>
+          </a:lnRef>
+          <a:fillRef idx="3">
+            <a:schemeClr val="accent1"/>
+          </a:fillRef>
+          <a:effectRef idx="2">
+            <a:schemeClr val="accent1"/>
+          </a:effectRef>
+          <a:fontRef idx="minor">
+            <a:schemeClr val="lt1"/>
+          </a:fontRef>
+        </p:style>
+        <p:txBody>
+          <a:bodyPr rtlCol="0" anchor="ctr"/>
+          <a:lstStyle/>
+          <a:p>
+            <a:pPr algn="ctr"/>
+          </a:p>
+        </p:txBody>
+      </p:sp>
+      <p:pic>
+        <p:nvPicPr>
+          <p:cNvPr id="10" name="Picture 9" descr="08_LMD.png"/>
+          <p:cNvPicPr>
+            <a:picLocks noChangeAspect="1"/>
+          </p:cNvPicPr>
+          <p:nvPr/>
+        </p:nvPicPr>
+        <p:blipFill>
+          <a:blip r:embed="rId2"/>
+          <a:stretch>
+            <a:fillRect/>
+          </a:stretch>
+        </p:blipFill>
+        <p:spPr>
+          <a:xfrm>
+            <a:off x="4904735" y="1728600"/>
+            <a:ext cx="2379482" cy="3842800"/>
+          </a:xfrm>
+          <a:prstGeom prst="rect">
+            <a:avLst/>
+          </a:prstGeom>
+        </p:spPr>
+      </p:pic>
+      <p:sp>
+        <p:nvSpPr>
+          <p:cNvPr id="11" name="TextBox 10"/>
+          <p:cNvSpPr txBox="1"/>
+          <p:nvPr/>
+        </p:nvSpPr>
+        <p:spPr>
+          <a:xfrm>
+            <a:off x="502920" y="5950000"/>
+            <a:ext cx="11183112" cy="320000"/>
+          </a:xfrm>
+          <a:prstGeom prst="rect">
+            <a:avLst/>
+          </a:prstGeom>
+          <a:noFill/>
+        </p:spPr>
+        <p:txBody>
+          <a:bodyPr wrap="none" lIns="0" tIns="0" rIns="0" bIns="0">
+            <a:spAutoFit/>
+          </a:bodyPr>
+          <a:lstStyle/>
+          <a:p>
+            <a:pPr algn="ctr"/>
+            <a:r>
+              <a:rPr sz="1100" i="1">
+                <a:solidFill>
+                  <a:srgbClr val="64748B"/>
+                </a:solidFill>
+                <a:latin typeface="Segoe UI"/>
+              </a:rPr>
+              <a:t>Modélisation générique du système LMD, réutilisable pour tout programme Licence ou Master.</a:t>
+            </a:r>
+          </a:p>
+        </p:txBody>
+      </p:sp>
+    </p:spTree>
+  </p:cSld>
+  <p:clrMapOvr>
+    <a:masterClrMapping/>
+  </p:clrMapOvr>
+</p:sld>
+</file>
+
 <file path=ppt/slides/slide3.xml><?xml version="1.0" encoding="utf-8"?>
 <p:sld xmlns:a="http://schemas.openxmlformats.org/drawingml/2006/main" xmlns:p="http://schemas.openxmlformats.org/presentationml/2006/main" xmlns:r="http://schemas.openxmlformats.org/officeDocument/2006/relationships">
   <p:cSld>
@@ -22311,6 +23834,780 @@
                 <a:latin typeface="Segoe UI"/>
               </a:rPr>
               <a:t>Communication étudiants quasi exclusivement papier</a:t>
+            </a:r>
+          </a:p>
+        </p:txBody>
+      </p:sp>
+    </p:spTree>
+  </p:cSld>
+  <p:clrMapOvr>
+    <a:masterClrMapping/>
+  </p:clrMapOvr>
+</p:sld>
+</file>
+
+<file path=ppt/slides/slide30.xml><?xml version="1.0" encoding="utf-8"?>
+<p:sld xmlns:a="http://schemas.openxmlformats.org/drawingml/2006/main" xmlns:p="http://schemas.openxmlformats.org/presentationml/2006/main" xmlns:r="http://schemas.openxmlformats.org/officeDocument/2006/relationships">
+  <p:cSld>
+    <p:spTree>
+      <p:nvGrpSpPr>
+        <p:cNvPr id="1" name=""/>
+        <p:cNvGrpSpPr/>
+        <p:nvPr/>
+      </p:nvGrpSpPr>
+      <p:grpSpPr/>
+      <p:sp>
+        <p:nvSpPr>
+          <p:cNvPr id="2" name="Rectangle 1"/>
+          <p:cNvSpPr/>
+          <p:nvPr/>
+        </p:nvSpPr>
+        <p:spPr>
+          <a:xfrm>
+            <a:off x="0" y="0"/>
+            <a:ext cx="12191695" cy="6858000"/>
+          </a:xfrm>
+          <a:prstGeom prst="rect">
+            <a:avLst/>
+          </a:prstGeom>
+          <a:solidFill>
+            <a:srgbClr val="F8FAFC"/>
+          </a:solidFill>
+          <a:ln>
+            <a:noFill/>
+          </a:ln>
+          <a:effectLst/>
+        </p:spPr>
+        <p:style>
+          <a:lnRef idx="1">
+            <a:schemeClr val="accent1"/>
+          </a:lnRef>
+          <a:fillRef idx="3">
+            <a:schemeClr val="accent1"/>
+          </a:fillRef>
+          <a:effectRef idx="2">
+            <a:schemeClr val="accent1"/>
+          </a:effectRef>
+          <a:fontRef idx="minor">
+            <a:schemeClr val="lt1"/>
+          </a:fontRef>
+        </p:style>
+        <p:txBody>
+          <a:bodyPr rtlCol="0" anchor="ctr"/>
+          <a:lstStyle/>
+          <a:p>
+            <a:pPr algn="ctr"/>
+          </a:p>
+        </p:txBody>
+      </p:sp>
+      <p:sp>
+        <p:nvSpPr>
+          <p:cNvPr id="3" name="Rectangle 2"/>
+          <p:cNvSpPr/>
+          <p:nvPr/>
+        </p:nvSpPr>
+        <p:spPr>
+          <a:xfrm>
+            <a:off x="502920" y="457200"/>
+            <a:ext cx="54864" cy="777240"/>
+          </a:xfrm>
+          <a:prstGeom prst="rect">
+            <a:avLst/>
+          </a:prstGeom>
+          <a:solidFill>
+            <a:srgbClr val="2563EB"/>
+          </a:solidFill>
+          <a:ln>
+            <a:noFill/>
+          </a:ln>
+          <a:effectLst/>
+        </p:spPr>
+        <p:style>
+          <a:lnRef idx="1">
+            <a:schemeClr val="accent1"/>
+          </a:lnRef>
+          <a:fillRef idx="3">
+            <a:schemeClr val="accent1"/>
+          </a:fillRef>
+          <a:effectRef idx="2">
+            <a:schemeClr val="accent1"/>
+          </a:effectRef>
+          <a:fontRef idx="minor">
+            <a:schemeClr val="lt1"/>
+          </a:fontRef>
+        </p:style>
+        <p:txBody>
+          <a:bodyPr rtlCol="0" anchor="ctr"/>
+          <a:lstStyle/>
+          <a:p>
+            <a:pPr algn="ctr"/>
+          </a:p>
+        </p:txBody>
+      </p:sp>
+      <p:sp>
+        <p:nvSpPr>
+          <p:cNvPr id="4" name="TextBox 3"/>
+          <p:cNvSpPr txBox="1"/>
+          <p:nvPr/>
+        </p:nvSpPr>
+        <p:spPr>
+          <a:xfrm>
+            <a:off x="713232" y="438912"/>
+            <a:ext cx="10058400" cy="274320"/>
+          </a:xfrm>
+          <a:prstGeom prst="rect">
+            <a:avLst/>
+          </a:prstGeom>
+          <a:noFill/>
+        </p:spPr>
+        <p:txBody>
+          <a:bodyPr wrap="none" lIns="0" tIns="0" rIns="0" bIns="0">
+            <a:spAutoFit/>
+          </a:bodyPr>
+          <a:lstStyle/>
+          <a:p>
+            <a:pPr algn="l"/>
+            <a:r>
+              <a:rPr sz="1150" b="1">
+                <a:solidFill>
+                  <a:srgbClr val="2563EB"/>
+                </a:solidFill>
+                <a:latin typeface="Segoe UI"/>
+              </a:rPr>
+              <a:t>ANNEXES</a:t>
+            </a:r>
+          </a:p>
+        </p:txBody>
+      </p:sp>
+      <p:sp>
+        <p:nvSpPr>
+          <p:cNvPr id="5" name="TextBox 4"/>
+          <p:cNvSpPr txBox="1"/>
+          <p:nvPr/>
+        </p:nvSpPr>
+        <p:spPr>
+          <a:xfrm>
+            <a:off x="685800" y="694944"/>
+            <a:ext cx="10789920" cy="594360"/>
+          </a:xfrm>
+          <a:prstGeom prst="rect">
+            <a:avLst/>
+          </a:prstGeom>
+          <a:noFill/>
+        </p:spPr>
+        <p:txBody>
+          <a:bodyPr wrap="square" lIns="0" tIns="0" rIns="0" bIns="0">
+            <a:spAutoFit/>
+          </a:bodyPr>
+          <a:lstStyle/>
+          <a:p>
+            <a:pPr algn="l"/>
+            <a:r>
+              <a:rPr sz="2400" b="1">
+                <a:solidFill>
+                  <a:srgbClr val="0F172A"/>
+                </a:solidFill>
+                <a:latin typeface="Segoe UI Semibold"/>
+              </a:rPr>
+              <a:t>Évaluations — modèle polymorphe</a:t>
+            </a:r>
+          </a:p>
+        </p:txBody>
+      </p:sp>
+      <p:sp>
+        <p:nvSpPr>
+          <p:cNvPr id="6" name="TextBox 5"/>
+          <p:cNvSpPr txBox="1"/>
+          <p:nvPr/>
+        </p:nvSpPr>
+        <p:spPr>
+          <a:xfrm>
+            <a:off x="502920" y="6528816"/>
+            <a:ext cx="5486400" cy="274320"/>
+          </a:xfrm>
+          <a:prstGeom prst="rect">
+            <a:avLst/>
+          </a:prstGeom>
+          <a:noFill/>
+        </p:spPr>
+        <p:txBody>
+          <a:bodyPr wrap="none" lIns="0" tIns="0" rIns="0" bIns="0">
+            <a:spAutoFit/>
+          </a:bodyPr>
+          <a:lstStyle/>
+          <a:p>
+            <a:r>
+              <a:rPr sz="900">
+                <a:solidFill>
+                  <a:srgbClr val="64748B"/>
+                </a:solidFill>
+                <a:latin typeface="Segoe UI"/>
+              </a:rPr>
+              <a:t>TIRAHOU — Soutenance de mémoire</a:t>
+            </a:r>
+          </a:p>
+        </p:txBody>
+      </p:sp>
+      <p:sp>
+        <p:nvSpPr>
+          <p:cNvPr id="7" name="TextBox 6"/>
+          <p:cNvSpPr txBox="1"/>
+          <p:nvPr/>
+        </p:nvSpPr>
+        <p:spPr>
+          <a:xfrm>
+            <a:off x="10972800" y="6528816"/>
+            <a:ext cx="731520" cy="274320"/>
+          </a:xfrm>
+          <a:prstGeom prst="rect">
+            <a:avLst/>
+          </a:prstGeom>
+          <a:noFill/>
+        </p:spPr>
+        <p:txBody>
+          <a:bodyPr wrap="none" lIns="0" tIns="0" rIns="0" bIns="0">
+            <a:spAutoFit/>
+          </a:bodyPr>
+          <a:lstStyle/>
+          <a:p>
+            <a:pPr algn="r"/>
+            <a:r>
+              <a:rPr sz="900">
+                <a:solidFill>
+                  <a:srgbClr val="64748B"/>
+                </a:solidFill>
+                <a:latin typeface="Segoe UI"/>
+              </a:rPr>
+              <a:t>30</a:t>
+            </a:r>
+          </a:p>
+        </p:txBody>
+      </p:sp>
+      <p:cxnSp>
+        <p:nvCxnSpPr>
+          <p:cNvPr id="8" name="Connector 7"/>
+          <p:cNvCxnSpPr/>
+          <p:nvPr/>
+        </p:nvCxnSpPr>
+        <p:spPr>
+          <a:xfrm>
+            <a:off x="502920" y="6473952"/>
+            <a:ext cx="11183112" cy="0"/>
+          </a:xfrm>
+          <a:prstGeom prst="line">
+            <a:avLst/>
+          </a:prstGeom>
+          <a:ln w="9525">
+            <a:solidFill>
+              <a:srgbClr val="E2E8F0"/>
+            </a:solidFill>
+          </a:ln>
+        </p:spPr>
+        <p:style>
+          <a:lnRef idx="2">
+            <a:schemeClr val="accent1"/>
+          </a:lnRef>
+          <a:fillRef idx="0">
+            <a:schemeClr val="accent1"/>
+          </a:fillRef>
+          <a:effectRef idx="1">
+            <a:schemeClr val="accent1"/>
+          </a:effectRef>
+          <a:fontRef idx="minor">
+            <a:schemeClr val="tx1"/>
+          </a:fontRef>
+        </p:style>
+      </p:cxnSp>
+      <p:sp>
+        <p:nvSpPr>
+          <p:cNvPr id="9" name="Rounded Rectangle 8"/>
+          <p:cNvSpPr/>
+          <p:nvPr/>
+        </p:nvSpPr>
+        <p:spPr>
+          <a:xfrm>
+            <a:off x="3516278" y="1500000"/>
+            <a:ext cx="5156395" cy="4300000"/>
+          </a:xfrm>
+          <a:prstGeom prst="roundRect">
+            <a:avLst>
+              <a:gd name="adj" fmla="val 4500"/>
+            </a:avLst>
+          </a:prstGeom>
+          <a:solidFill>
+            <a:srgbClr val="FFFFFF"/>
+          </a:solidFill>
+          <a:ln w="12700">
+            <a:solidFill>
+              <a:srgbClr val="E2E8F0"/>
+            </a:solidFill>
+          </a:ln>
+          <a:effectLst/>
+        </p:spPr>
+        <p:style>
+          <a:lnRef idx="1">
+            <a:schemeClr val="accent1"/>
+          </a:lnRef>
+          <a:fillRef idx="3">
+            <a:schemeClr val="accent1"/>
+          </a:fillRef>
+          <a:effectRef idx="2">
+            <a:schemeClr val="accent1"/>
+          </a:effectRef>
+          <a:fontRef idx="minor">
+            <a:schemeClr val="lt1"/>
+          </a:fontRef>
+        </p:style>
+        <p:txBody>
+          <a:bodyPr rtlCol="0" anchor="ctr"/>
+          <a:lstStyle/>
+          <a:p>
+            <a:pPr algn="ctr"/>
+          </a:p>
+        </p:txBody>
+      </p:sp>
+      <p:pic>
+        <p:nvPicPr>
+          <p:cNvPr id="10" name="Picture 9" descr="17_Evaluations.png"/>
+          <p:cNvPicPr>
+            <a:picLocks noChangeAspect="1"/>
+          </p:cNvPicPr>
+          <p:nvPr/>
+        </p:nvPicPr>
+        <p:blipFill>
+          <a:blip r:embed="rId2"/>
+          <a:stretch>
+            <a:fillRect/>
+          </a:stretch>
+        </p:blipFill>
+        <p:spPr>
+          <a:xfrm>
+            <a:off x="3744878" y="1728600"/>
+            <a:ext cx="4699195" cy="3842800"/>
+          </a:xfrm>
+          <a:prstGeom prst="rect">
+            <a:avLst/>
+          </a:prstGeom>
+        </p:spPr>
+      </p:pic>
+      <p:sp>
+        <p:nvSpPr>
+          <p:cNvPr id="11" name="TextBox 10"/>
+          <p:cNvSpPr txBox="1"/>
+          <p:nvPr/>
+        </p:nvSpPr>
+        <p:spPr>
+          <a:xfrm>
+            <a:off x="502920" y="5950000"/>
+            <a:ext cx="11183112" cy="320000"/>
+          </a:xfrm>
+          <a:prstGeom prst="rect">
+            <a:avLst/>
+          </a:prstGeom>
+          <a:noFill/>
+        </p:spPr>
+        <p:txBody>
+          <a:bodyPr wrap="none" lIns="0" tIns="0" rIns="0" bIns="0">
+            <a:spAutoFit/>
+          </a:bodyPr>
+          <a:lstStyle/>
+          <a:p>
+            <a:pPr algn="ctr"/>
+            <a:r>
+              <a:rPr sz="1100" i="1">
+                <a:solidFill>
+                  <a:srgbClr val="64748B"/>
+                </a:solidFill>
+                <a:latin typeface="Segoe UI"/>
+              </a:rPr>
+              <a:t>Une évaluation abstraite spécialisée en Examen, Quiz, Devoir ou Projet — extensible sans casser l'existant.</a:t>
+            </a:r>
+          </a:p>
+        </p:txBody>
+      </p:sp>
+    </p:spTree>
+  </p:cSld>
+  <p:clrMapOvr>
+    <a:masterClrMapping/>
+  </p:clrMapOvr>
+</p:sld>
+</file>
+
+<file path=ppt/slides/slide31.xml><?xml version="1.0" encoding="utf-8"?>
+<p:sld xmlns:a="http://schemas.openxmlformats.org/drawingml/2006/main" xmlns:p="http://schemas.openxmlformats.org/presentationml/2006/main" xmlns:r="http://schemas.openxmlformats.org/officeDocument/2006/relationships">
+  <p:cSld>
+    <p:spTree>
+      <p:nvGrpSpPr>
+        <p:cNvPr id="1" name=""/>
+        <p:cNvGrpSpPr/>
+        <p:nvPr/>
+      </p:nvGrpSpPr>
+      <p:grpSpPr/>
+      <p:sp>
+        <p:nvSpPr>
+          <p:cNvPr id="2" name="Rectangle 1"/>
+          <p:cNvSpPr/>
+          <p:nvPr/>
+        </p:nvSpPr>
+        <p:spPr>
+          <a:xfrm>
+            <a:off x="0" y="0"/>
+            <a:ext cx="12191695" cy="6858000"/>
+          </a:xfrm>
+          <a:prstGeom prst="rect">
+            <a:avLst/>
+          </a:prstGeom>
+          <a:solidFill>
+            <a:srgbClr val="F8FAFC"/>
+          </a:solidFill>
+          <a:ln>
+            <a:noFill/>
+          </a:ln>
+          <a:effectLst/>
+        </p:spPr>
+        <p:style>
+          <a:lnRef idx="1">
+            <a:schemeClr val="accent1"/>
+          </a:lnRef>
+          <a:fillRef idx="3">
+            <a:schemeClr val="accent1"/>
+          </a:fillRef>
+          <a:effectRef idx="2">
+            <a:schemeClr val="accent1"/>
+          </a:effectRef>
+          <a:fontRef idx="minor">
+            <a:schemeClr val="lt1"/>
+          </a:fontRef>
+        </p:style>
+        <p:txBody>
+          <a:bodyPr rtlCol="0" anchor="ctr"/>
+          <a:lstStyle/>
+          <a:p>
+            <a:pPr algn="ctr"/>
+          </a:p>
+        </p:txBody>
+      </p:sp>
+      <p:sp>
+        <p:nvSpPr>
+          <p:cNvPr id="3" name="Rectangle 2"/>
+          <p:cNvSpPr/>
+          <p:nvPr/>
+        </p:nvSpPr>
+        <p:spPr>
+          <a:xfrm>
+            <a:off x="502920" y="457200"/>
+            <a:ext cx="54864" cy="777240"/>
+          </a:xfrm>
+          <a:prstGeom prst="rect">
+            <a:avLst/>
+          </a:prstGeom>
+          <a:solidFill>
+            <a:srgbClr val="2563EB"/>
+          </a:solidFill>
+          <a:ln>
+            <a:noFill/>
+          </a:ln>
+          <a:effectLst/>
+        </p:spPr>
+        <p:style>
+          <a:lnRef idx="1">
+            <a:schemeClr val="accent1"/>
+          </a:lnRef>
+          <a:fillRef idx="3">
+            <a:schemeClr val="accent1"/>
+          </a:fillRef>
+          <a:effectRef idx="2">
+            <a:schemeClr val="accent1"/>
+          </a:effectRef>
+          <a:fontRef idx="minor">
+            <a:schemeClr val="lt1"/>
+          </a:fontRef>
+        </p:style>
+        <p:txBody>
+          <a:bodyPr rtlCol="0" anchor="ctr"/>
+          <a:lstStyle/>
+          <a:p>
+            <a:pPr algn="ctr"/>
+          </a:p>
+        </p:txBody>
+      </p:sp>
+      <p:sp>
+        <p:nvSpPr>
+          <p:cNvPr id="4" name="TextBox 3"/>
+          <p:cNvSpPr txBox="1"/>
+          <p:nvPr/>
+        </p:nvSpPr>
+        <p:spPr>
+          <a:xfrm>
+            <a:off x="713232" y="438912"/>
+            <a:ext cx="10058400" cy="274320"/>
+          </a:xfrm>
+          <a:prstGeom prst="rect">
+            <a:avLst/>
+          </a:prstGeom>
+          <a:noFill/>
+        </p:spPr>
+        <p:txBody>
+          <a:bodyPr wrap="none" lIns="0" tIns="0" rIns="0" bIns="0">
+            <a:spAutoFit/>
+          </a:bodyPr>
+          <a:lstStyle/>
+          <a:p>
+            <a:pPr algn="l"/>
+            <a:r>
+              <a:rPr sz="1150" b="1">
+                <a:solidFill>
+                  <a:srgbClr val="2563EB"/>
+                </a:solidFill>
+                <a:latin typeface="Segoe UI"/>
+              </a:rPr>
+              <a:t>ANNEXES</a:t>
+            </a:r>
+          </a:p>
+        </p:txBody>
+      </p:sp>
+      <p:sp>
+        <p:nvSpPr>
+          <p:cNvPr id="5" name="TextBox 4"/>
+          <p:cNvSpPr txBox="1"/>
+          <p:nvPr/>
+        </p:nvSpPr>
+        <p:spPr>
+          <a:xfrm>
+            <a:off x="685800" y="694944"/>
+            <a:ext cx="10789920" cy="594360"/>
+          </a:xfrm>
+          <a:prstGeom prst="rect">
+            <a:avLst/>
+          </a:prstGeom>
+          <a:noFill/>
+        </p:spPr>
+        <p:txBody>
+          <a:bodyPr wrap="square" lIns="0" tIns="0" rIns="0" bIns="0">
+            <a:spAutoFit/>
+          </a:bodyPr>
+          <a:lstStyle/>
+          <a:p>
+            <a:pPr algn="l"/>
+            <a:r>
+              <a:rPr sz="2400" b="1">
+                <a:solidFill>
+                  <a:srgbClr val="0F172A"/>
+                </a:solidFill>
+                <a:latin typeface="Segoe UI Semibold"/>
+              </a:rPr>
+              <a:t>Emploi du temps — créneaux, salles, réservations</a:t>
+            </a:r>
+          </a:p>
+        </p:txBody>
+      </p:sp>
+      <p:sp>
+        <p:nvSpPr>
+          <p:cNvPr id="6" name="TextBox 5"/>
+          <p:cNvSpPr txBox="1"/>
+          <p:nvPr/>
+        </p:nvSpPr>
+        <p:spPr>
+          <a:xfrm>
+            <a:off x="502920" y="6528816"/>
+            <a:ext cx="5486400" cy="274320"/>
+          </a:xfrm>
+          <a:prstGeom prst="rect">
+            <a:avLst/>
+          </a:prstGeom>
+          <a:noFill/>
+        </p:spPr>
+        <p:txBody>
+          <a:bodyPr wrap="none" lIns="0" tIns="0" rIns="0" bIns="0">
+            <a:spAutoFit/>
+          </a:bodyPr>
+          <a:lstStyle/>
+          <a:p>
+            <a:r>
+              <a:rPr sz="900">
+                <a:solidFill>
+                  <a:srgbClr val="64748B"/>
+                </a:solidFill>
+                <a:latin typeface="Segoe UI"/>
+              </a:rPr>
+              <a:t>TIRAHOU — Soutenance de mémoire</a:t>
+            </a:r>
+          </a:p>
+        </p:txBody>
+      </p:sp>
+      <p:sp>
+        <p:nvSpPr>
+          <p:cNvPr id="7" name="TextBox 6"/>
+          <p:cNvSpPr txBox="1"/>
+          <p:nvPr/>
+        </p:nvSpPr>
+        <p:spPr>
+          <a:xfrm>
+            <a:off x="10972800" y="6528816"/>
+            <a:ext cx="731520" cy="274320"/>
+          </a:xfrm>
+          <a:prstGeom prst="rect">
+            <a:avLst/>
+          </a:prstGeom>
+          <a:noFill/>
+        </p:spPr>
+        <p:txBody>
+          <a:bodyPr wrap="none" lIns="0" tIns="0" rIns="0" bIns="0">
+            <a:spAutoFit/>
+          </a:bodyPr>
+          <a:lstStyle/>
+          <a:p>
+            <a:pPr algn="r"/>
+            <a:r>
+              <a:rPr sz="900">
+                <a:solidFill>
+                  <a:srgbClr val="64748B"/>
+                </a:solidFill>
+                <a:latin typeface="Segoe UI"/>
+              </a:rPr>
+              <a:t>31</a:t>
+            </a:r>
+          </a:p>
+        </p:txBody>
+      </p:sp>
+      <p:cxnSp>
+        <p:nvCxnSpPr>
+          <p:cNvPr id="8" name="Connector 7"/>
+          <p:cNvCxnSpPr/>
+          <p:nvPr/>
+        </p:nvCxnSpPr>
+        <p:spPr>
+          <a:xfrm>
+            <a:off x="502920" y="6473952"/>
+            <a:ext cx="11183112" cy="0"/>
+          </a:xfrm>
+          <a:prstGeom prst="line">
+            <a:avLst/>
+          </a:prstGeom>
+          <a:ln w="9525">
+            <a:solidFill>
+              <a:srgbClr val="E2E8F0"/>
+            </a:solidFill>
+          </a:ln>
+        </p:spPr>
+        <p:style>
+          <a:lnRef idx="2">
+            <a:schemeClr val="accent1"/>
+          </a:lnRef>
+          <a:fillRef idx="0">
+            <a:schemeClr val="accent1"/>
+          </a:fillRef>
+          <a:effectRef idx="1">
+            <a:schemeClr val="accent1"/>
+          </a:effectRef>
+          <a:fontRef idx="minor">
+            <a:schemeClr val="tx1"/>
+          </a:fontRef>
+        </p:style>
+      </p:cxnSp>
+      <p:sp>
+        <p:nvSpPr>
+          <p:cNvPr id="9" name="Rounded Rectangle 8"/>
+          <p:cNvSpPr/>
+          <p:nvPr/>
+        </p:nvSpPr>
+        <p:spPr>
+          <a:xfrm>
+            <a:off x="4231177" y="1500000"/>
+            <a:ext cx="3726597" cy="4300000"/>
+          </a:xfrm>
+          <a:prstGeom prst="roundRect">
+            <a:avLst>
+              <a:gd name="adj" fmla="val 4500"/>
+            </a:avLst>
+          </a:prstGeom>
+          <a:solidFill>
+            <a:srgbClr val="FFFFFF"/>
+          </a:solidFill>
+          <a:ln w="12700">
+            <a:solidFill>
+              <a:srgbClr val="E2E8F0"/>
+            </a:solidFill>
+          </a:ln>
+          <a:effectLst/>
+        </p:spPr>
+        <p:style>
+          <a:lnRef idx="1">
+            <a:schemeClr val="accent1"/>
+          </a:lnRef>
+          <a:fillRef idx="3">
+            <a:schemeClr val="accent1"/>
+          </a:fillRef>
+          <a:effectRef idx="2">
+            <a:schemeClr val="accent1"/>
+          </a:effectRef>
+          <a:fontRef idx="minor">
+            <a:schemeClr val="lt1"/>
+          </a:fontRef>
+        </p:style>
+        <p:txBody>
+          <a:bodyPr rtlCol="0" anchor="ctr"/>
+          <a:lstStyle/>
+          <a:p>
+            <a:pPr algn="ctr"/>
+          </a:p>
+        </p:txBody>
+      </p:sp>
+      <p:pic>
+        <p:nvPicPr>
+          <p:cNvPr id="10" name="Picture 9" descr="24_EmploiTemps.png"/>
+          <p:cNvPicPr>
+            <a:picLocks noChangeAspect="1"/>
+          </p:cNvPicPr>
+          <p:nvPr/>
+        </p:nvPicPr>
+        <p:blipFill>
+          <a:blip r:embed="rId2"/>
+          <a:stretch>
+            <a:fillRect/>
+          </a:stretch>
+        </p:blipFill>
+        <p:spPr>
+          <a:xfrm>
+            <a:off x="4459777" y="1728600"/>
+            <a:ext cx="3269397" cy="3842800"/>
+          </a:xfrm>
+          <a:prstGeom prst="rect">
+            <a:avLst/>
+          </a:prstGeom>
+        </p:spPr>
+      </p:pic>
+      <p:sp>
+        <p:nvSpPr>
+          <p:cNvPr id="11" name="TextBox 10"/>
+          <p:cNvSpPr txBox="1"/>
+          <p:nvPr/>
+        </p:nvSpPr>
+        <p:spPr>
+          <a:xfrm>
+            <a:off x="502920" y="5950000"/>
+            <a:ext cx="11183112" cy="320000"/>
+          </a:xfrm>
+          <a:prstGeom prst="rect">
+            <a:avLst/>
+          </a:prstGeom>
+          <a:noFill/>
+        </p:spPr>
+        <p:txBody>
+          <a:bodyPr wrap="none" lIns="0" tIns="0" rIns="0" bIns="0">
+            <a:spAutoFit/>
+          </a:bodyPr>
+          <a:lstStyle/>
+          <a:p>
+            <a:pPr algn="ctr"/>
+            <a:r>
+              <a:rPr sz="1100" i="1">
+                <a:solidFill>
+                  <a:srgbClr val="64748B"/>
+                </a:solidFill>
+                <a:latin typeface="Segoe UI"/>
+              </a:rPr>
+              <a:t>Structure support de la planification des séances et de la gestion des salles (présentiel/hybride).</a:t>
             </a:r>
           </a:p>
         </p:txBody>

--- a/TIRAHOU_Soutenance.pptx
+++ b/TIRAHOU_Soutenance.pptx
@@ -5,39 +5,39 @@
     <p:sldMasterId id="2147483648" r:id="rId1"/>
   </p:sldMasterIdLst>
   <p:sldIdLst>
-    <p:sldId id="256" r:id="rId7"/>
-    <p:sldId id="257" r:id="rId8"/>
-    <p:sldId id="258" r:id="rId9"/>
-    <p:sldId id="259" r:id="rId10"/>
-    <p:sldId id="260" r:id="rId11"/>
-    <p:sldId id="261" r:id="rId12"/>
-    <p:sldId id="262" r:id="rId13"/>
-    <p:sldId id="263" r:id="rId14"/>
-    <p:sldId id="264" r:id="rId15"/>
-    <p:sldId id="265" r:id="rId16"/>
-    <p:sldId id="266" r:id="rId17"/>
-    <p:sldId id="267" r:id="rId18"/>
-    <p:sldId id="268" r:id="rId19"/>
-    <p:sldId id="269" r:id="rId20"/>
-    <p:sldId id="270" r:id="rId21"/>
-    <p:sldId id="271" r:id="rId22"/>
-    <p:sldId id="272" r:id="rId23"/>
-    <p:sldId id="273" r:id="rId24"/>
-    <p:sldId id="274" r:id="rId25"/>
-    <p:sldId id="275" r:id="rId26"/>
-    <p:sldId id="276" r:id="rId27"/>
-    <p:sldId id="277" r:id="rId28"/>
-    <p:sldId id="278" r:id="rId29"/>
-    <p:sldId id="279" r:id="rId30"/>
-    <p:sldId id="280" r:id="rId31"/>
-    <p:sldId id="281" r:id="rId32"/>
-    <p:sldId id="282" r:id="rId33"/>
-    <p:sldId id="283" r:id="rId34"/>
-    <p:sldId id="284" r:id="rId35"/>
-    <p:sldId id="285" r:id="rId36"/>
-    <p:sldId id="286" r:id="rId37"/>
+    <p:sldId id="256" r:id="rId2"/>
+    <p:sldId id="257" r:id="rId3"/>
+    <p:sldId id="258" r:id="rId4"/>
+    <p:sldId id="259" r:id="rId5"/>
+    <p:sldId id="260" r:id="rId6"/>
+    <p:sldId id="261" r:id="rId7"/>
+    <p:sldId id="262" r:id="rId8"/>
+    <p:sldId id="263" r:id="rId9"/>
+    <p:sldId id="264" r:id="rId10"/>
+    <p:sldId id="265" r:id="rId11"/>
+    <p:sldId id="266" r:id="rId12"/>
+    <p:sldId id="267" r:id="rId13"/>
+    <p:sldId id="268" r:id="rId14"/>
+    <p:sldId id="269" r:id="rId15"/>
+    <p:sldId id="270" r:id="rId16"/>
+    <p:sldId id="271" r:id="rId17"/>
+    <p:sldId id="272" r:id="rId18"/>
+    <p:sldId id="273" r:id="rId19"/>
+    <p:sldId id="274" r:id="rId20"/>
+    <p:sldId id="275" r:id="rId21"/>
+    <p:sldId id="276" r:id="rId22"/>
+    <p:sldId id="277" r:id="rId23"/>
+    <p:sldId id="278" r:id="rId24"/>
+    <p:sldId id="279" r:id="rId25"/>
+    <p:sldId id="280" r:id="rId26"/>
+    <p:sldId id="281" r:id="rId27"/>
+    <p:sldId id="282" r:id="rId28"/>
+    <p:sldId id="283" r:id="rId29"/>
+    <p:sldId id="284" r:id="rId30"/>
+    <p:sldId id="285" r:id="rId31"/>
+    <p:sldId id="286" r:id="rId32"/>
   </p:sldIdLst>
-  <p:sldSz cx="12191695" cy="6858000" type="screen4x3"/>
+  <p:sldSz cx="12192000" cy="6858000"/>
   <p:notesSz cx="6858000" cy="9144000"/>
   <p:defaultTextStyle>
     <a:defPPr>
@@ -134,6 +134,22 @@
       </a:defRPr>
     </a:lvl9pPr>
   </p:defaultTextStyle>
+  <p:extLst>
+    <p:ext uri="{EFAFB233-063F-42B5-8137-9DF3F51BA10A}">
+      <p15:sldGuideLst xmlns:p15="http://schemas.microsoft.com/office/powerpoint/2012/main">
+        <p15:guide id="1" orient="horz" pos="2160">
+          <p15:clr>
+            <a:srgbClr val="A4A3A4"/>
+          </p15:clr>
+        </p15:guide>
+        <p15:guide id="2" pos="2880">
+          <p15:clr>
+            <a:srgbClr val="A4A3A4"/>
+          </p15:clr>
+        </p15:guide>
+      </p15:sldGuideLst>
+    </p:ext>
+  </p:extLst>
 </p:presentation>
 </file>
 
@@ -175,10 +191,9 @@
           <a:lstStyle/>
           <a:p>
             <a:r>
-              <a:rPr lang="en-US" smtClean="0"/>
+              <a:rPr lang="en-US"/>
               <a:t>Click to edit Master title style</a:t>
             </a:r>
-            <a:endParaRPr lang="en-US"/>
           </a:p>
         </p:txBody>
       </p:sp>
@@ -294,10 +309,9 @@
           </a:lstStyle>
           <a:p>
             <a:r>
-              <a:rPr lang="en-US" smtClean="0"/>
+              <a:rPr lang="en-US"/>
               <a:t>Click to edit Master subtitle style</a:t>
             </a:r>
-            <a:endParaRPr lang="en-US"/>
           </a:p>
         </p:txBody>
       </p:sp>
@@ -318,7 +332,7 @@
           <a:p>
             <a:fld id="{5BCAD085-E8A6-8845-BD4E-CB4CCA059FC4}" type="datetimeFigureOut">
               <a:rPr lang="en-US" smtClean="0"/>
-              <a:t>1/27/13</a:t>
+              <a:t>7/21/2026</a:t>
             </a:fld>
             <a:endParaRPr lang="en-US"/>
           </a:p>
@@ -412,10 +426,9 @@
           <a:lstStyle/>
           <a:p>
             <a:r>
-              <a:rPr lang="en-US" smtClean="0"/>
+              <a:rPr lang="en-US"/>
               <a:t>Click to edit Master title style</a:t>
             </a:r>
-            <a:endParaRPr lang="en-US"/>
           </a:p>
         </p:txBody>
       </p:sp>
@@ -436,38 +449,37 @@
           <a:p>
             <a:pPr lvl="0"/>
             <a:r>
-              <a:rPr lang="en-US" smtClean="0"/>
+              <a:rPr lang="en-US"/>
               <a:t>Click to edit Master text styles</a:t>
             </a:r>
           </a:p>
           <a:p>
             <a:pPr lvl="1"/>
             <a:r>
-              <a:rPr lang="en-US" smtClean="0"/>
+              <a:rPr lang="en-US"/>
               <a:t>Second level</a:t>
             </a:r>
           </a:p>
           <a:p>
             <a:pPr lvl="2"/>
             <a:r>
-              <a:rPr lang="en-US" smtClean="0"/>
+              <a:rPr lang="en-US"/>
               <a:t>Third level</a:t>
             </a:r>
           </a:p>
           <a:p>
             <a:pPr lvl="3"/>
             <a:r>
-              <a:rPr lang="en-US" smtClean="0"/>
+              <a:rPr lang="en-US"/>
               <a:t>Fourth level</a:t>
             </a:r>
           </a:p>
           <a:p>
             <a:pPr lvl="4"/>
             <a:r>
-              <a:rPr lang="en-US" smtClean="0"/>
+              <a:rPr lang="en-US"/>
               <a:t>Fifth level</a:t>
             </a:r>
-            <a:endParaRPr lang="en-US"/>
           </a:p>
         </p:txBody>
       </p:sp>
@@ -488,7 +500,7 @@
           <a:p>
             <a:fld id="{5BCAD085-E8A6-8845-BD4E-CB4CCA059FC4}" type="datetimeFigureOut">
               <a:rPr lang="en-US" smtClean="0"/>
-              <a:t>1/27/13</a:t>
+              <a:t>7/21/2026</a:t>
             </a:fld>
             <a:endParaRPr lang="en-US"/>
           </a:p>
@@ -587,10 +599,9 @@
           <a:lstStyle/>
           <a:p>
             <a:r>
-              <a:rPr lang="en-US" smtClean="0"/>
+              <a:rPr lang="en-US"/>
               <a:t>Click to edit Master title style</a:t>
             </a:r>
-            <a:endParaRPr lang="en-US"/>
           </a:p>
         </p:txBody>
       </p:sp>
@@ -616,38 +627,37 @@
           <a:p>
             <a:pPr lvl="0"/>
             <a:r>
-              <a:rPr lang="en-US" smtClean="0"/>
+              <a:rPr lang="en-US"/>
               <a:t>Click to edit Master text styles</a:t>
             </a:r>
           </a:p>
           <a:p>
             <a:pPr lvl="1"/>
             <a:r>
-              <a:rPr lang="en-US" smtClean="0"/>
+              <a:rPr lang="en-US"/>
               <a:t>Second level</a:t>
             </a:r>
           </a:p>
           <a:p>
             <a:pPr lvl="2"/>
             <a:r>
-              <a:rPr lang="en-US" smtClean="0"/>
+              <a:rPr lang="en-US"/>
               <a:t>Third level</a:t>
             </a:r>
           </a:p>
           <a:p>
             <a:pPr lvl="3"/>
             <a:r>
-              <a:rPr lang="en-US" smtClean="0"/>
+              <a:rPr lang="en-US"/>
               <a:t>Fourth level</a:t>
             </a:r>
           </a:p>
           <a:p>
             <a:pPr lvl="4"/>
             <a:r>
-              <a:rPr lang="en-US" smtClean="0"/>
+              <a:rPr lang="en-US"/>
               <a:t>Fifth level</a:t>
             </a:r>
-            <a:endParaRPr lang="en-US"/>
           </a:p>
         </p:txBody>
       </p:sp>
@@ -668,7 +678,7 @@
           <a:p>
             <a:fld id="{5BCAD085-E8A6-8845-BD4E-CB4CCA059FC4}" type="datetimeFigureOut">
               <a:rPr lang="en-US" smtClean="0"/>
-              <a:t>1/27/13</a:t>
+              <a:t>7/21/2026</a:t>
             </a:fld>
             <a:endParaRPr lang="en-US"/>
           </a:p>
@@ -762,10 +772,9 @@
           <a:lstStyle/>
           <a:p>
             <a:r>
-              <a:rPr lang="en-US" smtClean="0"/>
+              <a:rPr lang="en-US"/>
               <a:t>Click to edit Master title style</a:t>
             </a:r>
-            <a:endParaRPr lang="en-US"/>
           </a:p>
         </p:txBody>
       </p:sp>
@@ -786,38 +795,37 @@
           <a:p>
             <a:pPr lvl="0"/>
             <a:r>
-              <a:rPr lang="en-US" smtClean="0"/>
+              <a:rPr lang="en-US"/>
               <a:t>Click to edit Master text styles</a:t>
             </a:r>
           </a:p>
           <a:p>
             <a:pPr lvl="1"/>
             <a:r>
-              <a:rPr lang="en-US" smtClean="0"/>
+              <a:rPr lang="en-US"/>
               <a:t>Second level</a:t>
             </a:r>
           </a:p>
           <a:p>
             <a:pPr lvl="2"/>
             <a:r>
-              <a:rPr lang="en-US" smtClean="0"/>
+              <a:rPr lang="en-US"/>
               <a:t>Third level</a:t>
             </a:r>
           </a:p>
           <a:p>
             <a:pPr lvl="3"/>
             <a:r>
-              <a:rPr lang="en-US" smtClean="0"/>
+              <a:rPr lang="en-US"/>
               <a:t>Fourth level</a:t>
             </a:r>
           </a:p>
           <a:p>
             <a:pPr lvl="4"/>
             <a:r>
-              <a:rPr lang="en-US" smtClean="0"/>
+              <a:rPr lang="en-US"/>
               <a:t>Fifth level</a:t>
             </a:r>
-            <a:endParaRPr lang="en-US"/>
           </a:p>
         </p:txBody>
       </p:sp>
@@ -838,7 +846,7 @@
           <a:p>
             <a:fld id="{5BCAD085-E8A6-8845-BD4E-CB4CCA059FC4}" type="datetimeFigureOut">
               <a:rPr lang="en-US" smtClean="0"/>
-              <a:t>1/27/13</a:t>
+              <a:t>7/21/2026</a:t>
             </a:fld>
             <a:endParaRPr lang="en-US"/>
           </a:p>
@@ -941,10 +949,9 @@
           </a:lstStyle>
           <a:p>
             <a:r>
-              <a:rPr lang="en-US" smtClean="0"/>
+              <a:rPr lang="en-US"/>
               <a:t>Click to edit Master title style</a:t>
             </a:r>
-            <a:endParaRPr lang="en-US"/>
           </a:p>
         </p:txBody>
       </p:sp>
@@ -1061,7 +1068,7 @@
           <a:p>
             <a:pPr lvl="0"/>
             <a:r>
-              <a:rPr lang="en-US" smtClean="0"/>
+              <a:rPr lang="en-US"/>
               <a:t>Click to edit Master text styles</a:t>
             </a:r>
           </a:p>
@@ -1084,7 +1091,7 @@
           <a:p>
             <a:fld id="{5BCAD085-E8A6-8845-BD4E-CB4CCA059FC4}" type="datetimeFigureOut">
               <a:rPr lang="en-US" smtClean="0"/>
-              <a:t>1/27/13</a:t>
+              <a:t>7/21/2026</a:t>
             </a:fld>
             <a:endParaRPr lang="en-US"/>
           </a:p>
@@ -1178,10 +1185,9 @@
           <a:lstStyle/>
           <a:p>
             <a:r>
-              <a:rPr lang="en-US" smtClean="0"/>
+              <a:rPr lang="en-US"/>
               <a:t>Click to edit Master title style</a:t>
             </a:r>
-            <a:endParaRPr lang="en-US"/>
           </a:p>
         </p:txBody>
       </p:sp>
@@ -1235,38 +1241,37 @@
           <a:p>
             <a:pPr lvl="0"/>
             <a:r>
-              <a:rPr lang="en-US" smtClean="0"/>
+              <a:rPr lang="en-US"/>
               <a:t>Click to edit Master text styles</a:t>
             </a:r>
           </a:p>
           <a:p>
             <a:pPr lvl="1"/>
             <a:r>
-              <a:rPr lang="en-US" smtClean="0"/>
+              <a:rPr lang="en-US"/>
               <a:t>Second level</a:t>
             </a:r>
           </a:p>
           <a:p>
             <a:pPr lvl="2"/>
             <a:r>
-              <a:rPr lang="en-US" smtClean="0"/>
+              <a:rPr lang="en-US"/>
               <a:t>Third level</a:t>
             </a:r>
           </a:p>
           <a:p>
             <a:pPr lvl="3"/>
             <a:r>
-              <a:rPr lang="en-US" smtClean="0"/>
+              <a:rPr lang="en-US"/>
               <a:t>Fourth level</a:t>
             </a:r>
           </a:p>
           <a:p>
             <a:pPr lvl="4"/>
             <a:r>
-              <a:rPr lang="en-US" smtClean="0"/>
+              <a:rPr lang="en-US"/>
               <a:t>Fifth level</a:t>
             </a:r>
-            <a:endParaRPr lang="en-US"/>
           </a:p>
         </p:txBody>
       </p:sp>
@@ -1320,38 +1325,37 @@
           <a:p>
             <a:pPr lvl="0"/>
             <a:r>
-              <a:rPr lang="en-US" smtClean="0"/>
+              <a:rPr lang="en-US"/>
               <a:t>Click to edit Master text styles</a:t>
             </a:r>
           </a:p>
           <a:p>
             <a:pPr lvl="1"/>
             <a:r>
-              <a:rPr lang="en-US" smtClean="0"/>
+              <a:rPr lang="en-US"/>
               <a:t>Second level</a:t>
             </a:r>
           </a:p>
           <a:p>
             <a:pPr lvl="2"/>
             <a:r>
-              <a:rPr lang="en-US" smtClean="0"/>
+              <a:rPr lang="en-US"/>
               <a:t>Third level</a:t>
             </a:r>
           </a:p>
           <a:p>
             <a:pPr lvl="3"/>
             <a:r>
-              <a:rPr lang="en-US" smtClean="0"/>
+              <a:rPr lang="en-US"/>
               <a:t>Fourth level</a:t>
             </a:r>
           </a:p>
           <a:p>
             <a:pPr lvl="4"/>
             <a:r>
-              <a:rPr lang="en-US" smtClean="0"/>
+              <a:rPr lang="en-US"/>
               <a:t>Fifth level</a:t>
             </a:r>
-            <a:endParaRPr lang="en-US"/>
           </a:p>
         </p:txBody>
       </p:sp>
@@ -1372,7 +1376,7 @@
           <a:p>
             <a:fld id="{5BCAD085-E8A6-8845-BD4E-CB4CCA059FC4}" type="datetimeFigureOut">
               <a:rPr lang="en-US" smtClean="0"/>
-              <a:t>1/27/13</a:t>
+              <a:t>7/21/2026</a:t>
             </a:fld>
             <a:endParaRPr lang="en-US"/>
           </a:p>
@@ -1470,10 +1474,9 @@
           </a:lstStyle>
           <a:p>
             <a:r>
-              <a:rPr lang="en-US" smtClean="0"/>
+              <a:rPr lang="en-US"/>
               <a:t>Click to edit Master title style</a:t>
             </a:r>
-            <a:endParaRPr lang="en-US"/>
           </a:p>
         </p:txBody>
       </p:sp>
@@ -1536,7 +1539,7 @@
           <a:p>
             <a:pPr lvl="0"/>
             <a:r>
-              <a:rPr lang="en-US" smtClean="0"/>
+              <a:rPr lang="en-US"/>
               <a:t>Click to edit Master text styles</a:t>
             </a:r>
           </a:p>
@@ -1592,38 +1595,37 @@
           <a:p>
             <a:pPr lvl="0"/>
             <a:r>
-              <a:rPr lang="en-US" smtClean="0"/>
+              <a:rPr lang="en-US"/>
               <a:t>Click to edit Master text styles</a:t>
             </a:r>
           </a:p>
           <a:p>
             <a:pPr lvl="1"/>
             <a:r>
-              <a:rPr lang="en-US" smtClean="0"/>
+              <a:rPr lang="en-US"/>
               <a:t>Second level</a:t>
             </a:r>
           </a:p>
           <a:p>
             <a:pPr lvl="2"/>
             <a:r>
-              <a:rPr lang="en-US" smtClean="0"/>
+              <a:rPr lang="en-US"/>
               <a:t>Third level</a:t>
             </a:r>
           </a:p>
           <a:p>
             <a:pPr lvl="3"/>
             <a:r>
-              <a:rPr lang="en-US" smtClean="0"/>
+              <a:rPr lang="en-US"/>
               <a:t>Fourth level</a:t>
             </a:r>
           </a:p>
           <a:p>
             <a:pPr lvl="4"/>
             <a:r>
-              <a:rPr lang="en-US" smtClean="0"/>
+              <a:rPr lang="en-US"/>
               <a:t>Fifth level</a:t>
             </a:r>
-            <a:endParaRPr lang="en-US"/>
           </a:p>
         </p:txBody>
       </p:sp>
@@ -1686,7 +1688,7 @@
           <a:p>
             <a:pPr lvl="0"/>
             <a:r>
-              <a:rPr lang="en-US" smtClean="0"/>
+              <a:rPr lang="en-US"/>
               <a:t>Click to edit Master text styles</a:t>
             </a:r>
           </a:p>
@@ -1742,38 +1744,37 @@
           <a:p>
             <a:pPr lvl="0"/>
             <a:r>
-              <a:rPr lang="en-US" smtClean="0"/>
+              <a:rPr lang="en-US"/>
               <a:t>Click to edit Master text styles</a:t>
             </a:r>
           </a:p>
           <a:p>
             <a:pPr lvl="1"/>
             <a:r>
-              <a:rPr lang="en-US" smtClean="0"/>
+              <a:rPr lang="en-US"/>
               <a:t>Second level</a:t>
             </a:r>
           </a:p>
           <a:p>
             <a:pPr lvl="2"/>
             <a:r>
-              <a:rPr lang="en-US" smtClean="0"/>
+              <a:rPr lang="en-US"/>
               <a:t>Third level</a:t>
             </a:r>
           </a:p>
           <a:p>
             <a:pPr lvl="3"/>
             <a:r>
-              <a:rPr lang="en-US" smtClean="0"/>
+              <a:rPr lang="en-US"/>
               <a:t>Fourth level</a:t>
             </a:r>
           </a:p>
           <a:p>
             <a:pPr lvl="4"/>
             <a:r>
-              <a:rPr lang="en-US" smtClean="0"/>
+              <a:rPr lang="en-US"/>
               <a:t>Fifth level</a:t>
             </a:r>
-            <a:endParaRPr lang="en-US"/>
           </a:p>
         </p:txBody>
       </p:sp>
@@ -1794,7 +1795,7 @@
           <a:p>
             <a:fld id="{5BCAD085-E8A6-8845-BD4E-CB4CCA059FC4}" type="datetimeFigureOut">
               <a:rPr lang="en-US" smtClean="0"/>
-              <a:t>1/27/13</a:t>
+              <a:t>7/21/2026</a:t>
             </a:fld>
             <a:endParaRPr lang="en-US"/>
           </a:p>
@@ -1888,10 +1889,9 @@
           <a:lstStyle/>
           <a:p>
             <a:r>
-              <a:rPr lang="en-US" smtClean="0"/>
+              <a:rPr lang="en-US"/>
               <a:t>Click to edit Master title style</a:t>
             </a:r>
-            <a:endParaRPr lang="en-US"/>
           </a:p>
         </p:txBody>
       </p:sp>
@@ -1912,7 +1912,7 @@
           <a:p>
             <a:fld id="{5BCAD085-E8A6-8845-BD4E-CB4CCA059FC4}" type="datetimeFigureOut">
               <a:rPr lang="en-US" smtClean="0"/>
-              <a:t>1/27/13</a:t>
+              <a:t>7/21/2026</a:t>
             </a:fld>
             <a:endParaRPr lang="en-US"/>
           </a:p>
@@ -2007,7 +2007,7 @@
           <a:p>
             <a:fld id="{5BCAD085-E8A6-8845-BD4E-CB4CCA059FC4}" type="datetimeFigureOut">
               <a:rPr lang="en-US" smtClean="0"/>
-              <a:t>1/27/13</a:t>
+              <a:t>7/21/2026</a:t>
             </a:fld>
             <a:endParaRPr lang="en-US"/>
           </a:p>
@@ -2110,10 +2110,9 @@
           </a:lstStyle>
           <a:p>
             <a:r>
-              <a:rPr lang="en-US" smtClean="0"/>
+              <a:rPr lang="en-US"/>
               <a:t>Click to edit Master title style</a:t>
             </a:r>
-            <a:endParaRPr lang="en-US"/>
           </a:p>
         </p:txBody>
       </p:sp>
@@ -2167,38 +2166,37 @@
           <a:p>
             <a:pPr lvl="0"/>
             <a:r>
-              <a:rPr lang="en-US" smtClean="0"/>
+              <a:rPr lang="en-US"/>
               <a:t>Click to edit Master text styles</a:t>
             </a:r>
           </a:p>
           <a:p>
             <a:pPr lvl="1"/>
             <a:r>
-              <a:rPr lang="en-US" smtClean="0"/>
+              <a:rPr lang="en-US"/>
               <a:t>Second level</a:t>
             </a:r>
           </a:p>
           <a:p>
             <a:pPr lvl="2"/>
             <a:r>
-              <a:rPr lang="en-US" smtClean="0"/>
+              <a:rPr lang="en-US"/>
               <a:t>Third level</a:t>
             </a:r>
           </a:p>
           <a:p>
             <a:pPr lvl="3"/>
             <a:r>
-              <a:rPr lang="en-US" smtClean="0"/>
+              <a:rPr lang="en-US"/>
               <a:t>Fourth level</a:t>
             </a:r>
           </a:p>
           <a:p>
             <a:pPr lvl="4"/>
             <a:r>
-              <a:rPr lang="en-US" smtClean="0"/>
+              <a:rPr lang="en-US"/>
               <a:t>Fifth level</a:t>
             </a:r>
-            <a:endParaRPr lang="en-US"/>
           </a:p>
         </p:txBody>
       </p:sp>
@@ -2261,7 +2259,7 @@
           <a:p>
             <a:pPr lvl="0"/>
             <a:r>
-              <a:rPr lang="en-US" smtClean="0"/>
+              <a:rPr lang="en-US"/>
               <a:t>Click to edit Master text styles</a:t>
             </a:r>
           </a:p>
@@ -2284,7 +2282,7 @@
           <a:p>
             <a:fld id="{5BCAD085-E8A6-8845-BD4E-CB4CCA059FC4}" type="datetimeFigureOut">
               <a:rPr lang="en-US" smtClean="0"/>
-              <a:t>1/27/13</a:t>
+              <a:t>7/21/2026</a:t>
             </a:fld>
             <a:endParaRPr lang="en-US"/>
           </a:p>
@@ -2387,10 +2385,9 @@
           </a:lstStyle>
           <a:p>
             <a:r>
-              <a:rPr lang="en-US" smtClean="0"/>
+              <a:rPr lang="en-US"/>
               <a:t>Click to edit Master title style</a:t>
             </a:r>
-            <a:endParaRPr lang="en-US"/>
           </a:p>
         </p:txBody>
       </p:sp>
@@ -2514,7 +2511,7 @@
           <a:p>
             <a:pPr lvl="0"/>
             <a:r>
-              <a:rPr lang="en-US" smtClean="0"/>
+              <a:rPr lang="en-US"/>
               <a:t>Click to edit Master text styles</a:t>
             </a:r>
           </a:p>
@@ -2537,7 +2534,7 @@
           <a:p>
             <a:fld id="{5BCAD085-E8A6-8845-BD4E-CB4CCA059FC4}" type="datetimeFigureOut">
               <a:rPr lang="en-US" smtClean="0"/>
-              <a:t>1/27/13</a:t>
+              <a:t>7/21/2026</a:t>
             </a:fld>
             <a:endParaRPr lang="en-US"/>
           </a:p>
@@ -2646,10 +2643,9 @@
           <a:lstStyle/>
           <a:p>
             <a:r>
-              <a:rPr lang="en-US" smtClean="0"/>
+              <a:rPr lang="en-US"/>
               <a:t>Click to edit Master title style</a:t>
             </a:r>
-            <a:endParaRPr lang="en-US"/>
           </a:p>
         </p:txBody>
       </p:sp>
@@ -2680,38 +2676,37 @@
           <a:p>
             <a:pPr lvl="0"/>
             <a:r>
-              <a:rPr lang="en-US" smtClean="0"/>
+              <a:rPr lang="en-US"/>
               <a:t>Click to edit Master text styles</a:t>
             </a:r>
           </a:p>
           <a:p>
             <a:pPr lvl="1"/>
             <a:r>
-              <a:rPr lang="en-US" smtClean="0"/>
+              <a:rPr lang="en-US"/>
               <a:t>Second level</a:t>
             </a:r>
           </a:p>
           <a:p>
             <a:pPr lvl="2"/>
             <a:r>
-              <a:rPr lang="en-US" smtClean="0"/>
+              <a:rPr lang="en-US"/>
               <a:t>Third level</a:t>
             </a:r>
           </a:p>
           <a:p>
             <a:pPr lvl="3"/>
             <a:r>
-              <a:rPr lang="en-US" smtClean="0"/>
+              <a:rPr lang="en-US"/>
               <a:t>Fourth level</a:t>
             </a:r>
           </a:p>
           <a:p>
             <a:pPr lvl="4"/>
             <a:r>
-              <a:rPr lang="en-US" smtClean="0"/>
+              <a:rPr lang="en-US"/>
               <a:t>Fifth level</a:t>
             </a:r>
-            <a:endParaRPr lang="en-US"/>
           </a:p>
         </p:txBody>
       </p:sp>
@@ -2750,7 +2745,7 @@
           <a:p>
             <a:fld id="{5BCAD085-E8A6-8845-BD4E-CB4CCA059FC4}" type="datetimeFigureOut">
               <a:rPr lang="en-US" smtClean="0"/>
-              <a:t>1/27/13</a:t>
+              <a:t>7/21/2026</a:t>
             </a:fld>
             <a:endParaRPr lang="en-US"/>
           </a:p>
@@ -3109,7 +3104,7 @@
 </file>
 
 <file path=ppt/slides/slide1.xml><?xml version="1.0" encoding="utf-8"?>
-<p:sld xmlns:a="http://schemas.openxmlformats.org/drawingml/2006/main" xmlns:p="http://schemas.openxmlformats.org/presentationml/2006/main" xmlns:r="http://schemas.openxmlformats.org/officeDocument/2006/relationships">
+<p:sld xmlns:a="http://schemas.openxmlformats.org/drawingml/2006/main" xmlns:r="http://schemas.openxmlformats.org/officeDocument/2006/relationships" xmlns:p="http://schemas.openxmlformats.org/presentationml/2006/main">
   <p:cSld>
     <p:spTree>
       <p:nvGrpSpPr>
@@ -3117,7 +3112,14 @@
         <p:cNvGrpSpPr/>
         <p:nvPr/>
       </p:nvGrpSpPr>
-      <p:grpSpPr/>
+      <p:grpSpPr>
+        <a:xfrm>
+          <a:off x="0" y="0"/>
+          <a:ext cx="0" cy="0"/>
+          <a:chOff x="0" y="0"/>
+          <a:chExt cx="0" cy="0"/>
+        </a:xfrm>
+      </p:grpSpPr>
       <p:sp>
         <p:nvSpPr>
           <p:cNvPr id="3" name="Rectangle 2"/>
@@ -3159,6 +3161,7 @@
           <a:lstStyle/>
           <a:p>
             <a:pPr algn="ctr"/>
+            <a:endParaRPr/>
           </a:p>
         </p:txBody>
       </p:sp>
@@ -3203,6 +3206,7 @@
           <a:lstStyle/>
           <a:p>
             <a:pPr algn="ctr"/>
+            <a:endParaRPr/>
           </a:p>
         </p:txBody>
       </p:sp>
@@ -3277,7 +3281,7 @@
           <a:noFill/>
         </p:spPr>
         <p:txBody>
-          <a:bodyPr wrap="square" anchor="t" lIns="0" rIns="0" tIns="0" bIns="0">
+          <a:bodyPr wrap="square" lIns="0" tIns="0" rIns="0" bIns="0" anchor="t">
             <a:spAutoFit/>
           </a:bodyPr>
           <a:lstStyle/>
@@ -3316,7 +3320,7 @@
           <a:noFill/>
         </p:spPr>
         <p:txBody>
-          <a:bodyPr wrap="square" anchor="t" lIns="0" rIns="0" tIns="0" bIns="0">
+          <a:bodyPr wrap="square" lIns="0" tIns="0" rIns="0" bIns="0" anchor="t">
             <a:spAutoFit/>
           </a:bodyPr>
           <a:lstStyle/>
@@ -3355,7 +3359,7 @@
           <a:noFill/>
         </p:spPr>
         <p:txBody>
-          <a:bodyPr wrap="square" anchor="t" lIns="0" rIns="0" tIns="0" bIns="0">
+          <a:bodyPr wrap="square" lIns="0" tIns="0" rIns="0" bIns="0" anchor="t">
             <a:spAutoFit/>
           </a:bodyPr>
           <a:lstStyle/>
@@ -3394,7 +3398,7 @@
           <a:noFill/>
         </p:spPr>
         <p:txBody>
-          <a:bodyPr wrap="square" anchor="t" lIns="0" rIns="0" tIns="0" bIns="0">
+          <a:bodyPr wrap="square" lIns="0" tIns="0" rIns="0" bIns="0" anchor="t">
             <a:spAutoFit/>
           </a:bodyPr>
           <a:lstStyle/>
@@ -3471,7 +3475,7 @@
           </a:fontRef>
         </p:style>
         <p:txBody>
-          <a:bodyPr rtlCol="0" anchor="ctr" lIns="0" rIns="0" wrap="none"/>
+          <a:bodyPr wrap="none" lIns="0" rIns="0" rtlCol="0" anchor="ctr"/>
           <a:lstStyle/>
           <a:p>
             <a:pPr algn="ctr"/>
@@ -3504,7 +3508,7 @@
           <a:noFill/>
         </p:spPr>
         <p:txBody>
-          <a:bodyPr wrap="square" anchor="t" lIns="0" rIns="0" tIns="0" bIns="0">
+          <a:bodyPr wrap="square" lIns="0" tIns="0" rIns="0" bIns="0" anchor="t">
             <a:spAutoFit/>
           </a:bodyPr>
           <a:lstStyle/>
@@ -3591,7 +3595,7 @@
           <a:noFill/>
         </p:spPr>
         <p:txBody>
-          <a:bodyPr wrap="square" anchor="t" lIns="0" rIns="0" tIns="0" bIns="0">
+          <a:bodyPr wrap="square" lIns="0" tIns="0" rIns="0" bIns="0" anchor="t">
             <a:spAutoFit/>
           </a:bodyPr>
           <a:lstStyle/>
@@ -3622,7 +3626,7 @@
 </file>
 
 <file path=ppt/slides/slide10.xml><?xml version="1.0" encoding="utf-8"?>
-<p:sld xmlns:a="http://schemas.openxmlformats.org/drawingml/2006/main" xmlns:p="http://schemas.openxmlformats.org/presentationml/2006/main" xmlns:r="http://schemas.openxmlformats.org/officeDocument/2006/relationships">
+<p:sld xmlns:a="http://schemas.openxmlformats.org/drawingml/2006/main" xmlns:r="http://schemas.openxmlformats.org/officeDocument/2006/relationships" xmlns:p="http://schemas.openxmlformats.org/presentationml/2006/main">
   <p:cSld>
     <p:spTree>
       <p:nvGrpSpPr>
@@ -3630,7 +3634,14 @@
         <p:cNvGrpSpPr/>
         <p:nvPr/>
       </p:nvGrpSpPr>
-      <p:grpSpPr/>
+      <p:grpSpPr>
+        <a:xfrm>
+          <a:off x="0" y="0"/>
+          <a:ext cx="0" cy="0"/>
+          <a:chOff x="0" y="0"/>
+          <a:chExt cx="0" cy="0"/>
+        </a:xfrm>
+      </p:grpSpPr>
       <p:sp>
         <p:nvSpPr>
           <p:cNvPr id="2" name="Rectangle 1"/>
@@ -3672,6 +3683,7 @@
           <a:lstStyle/>
           <a:p>
             <a:pPr algn="ctr"/>
+            <a:endParaRPr/>
           </a:p>
         </p:txBody>
       </p:sp>
@@ -3716,6 +3728,7 @@
           <a:lstStyle/>
           <a:p>
             <a:pPr algn="ctr"/>
+            <a:endParaRPr/>
           </a:p>
         </p:txBody>
       </p:sp>
@@ -3736,7 +3749,7 @@
           <a:noFill/>
         </p:spPr>
         <p:txBody>
-          <a:bodyPr wrap="square" anchor="t" lIns="0" rIns="0" tIns="0" bIns="0">
+          <a:bodyPr wrap="square" lIns="0" tIns="0" rIns="0" bIns="0" anchor="t">
             <a:spAutoFit/>
           </a:bodyPr>
           <a:lstStyle/>
@@ -3775,7 +3788,7 @@
           <a:noFill/>
         </p:spPr>
         <p:txBody>
-          <a:bodyPr wrap="square" anchor="t" lIns="0" rIns="0" tIns="0" bIns="0">
+          <a:bodyPr wrap="square" lIns="0" tIns="0" rIns="0" bIns="0" anchor="t">
             <a:spAutoFit/>
           </a:bodyPr>
           <a:lstStyle/>
@@ -3814,7 +3827,7 @@
           <a:noFill/>
         </p:spPr>
         <p:txBody>
-          <a:bodyPr wrap="square" anchor="t" lIns="0" rIns="0" tIns="0" bIns="0">
+          <a:bodyPr wrap="square" lIns="0" tIns="0" rIns="0" bIns="0" anchor="t">
             <a:spAutoFit/>
           </a:bodyPr>
           <a:lstStyle/>
@@ -3853,7 +3866,7 @@
           <a:noFill/>
         </p:spPr>
         <p:txBody>
-          <a:bodyPr wrap="square" anchor="t" lIns="0" rIns="0" tIns="0" bIns="0">
+          <a:bodyPr wrap="square" lIns="0" tIns="0" rIns="0" bIns="0" anchor="t">
             <a:spAutoFit/>
           </a:bodyPr>
           <a:lstStyle/>
@@ -3955,6 +3968,7 @@
           <a:lstStyle/>
           <a:p>
             <a:pPr algn="ctr"/>
+            <a:endParaRPr/>
           </a:p>
         </p:txBody>
       </p:sp>
@@ -3999,6 +4013,7 @@
           <a:lstStyle/>
           <a:p>
             <a:pPr algn="ctr"/>
+            <a:endParaRPr/>
           </a:p>
         </p:txBody>
       </p:sp>
@@ -4019,7 +4034,7 @@
           <a:noFill/>
         </p:spPr>
         <p:txBody>
-          <a:bodyPr wrap="square" anchor="t" lIns="0" rIns="0" tIns="0" bIns="0">
+          <a:bodyPr wrap="square" lIns="0" tIns="0" rIns="0" bIns="0" anchor="t">
             <a:spAutoFit/>
           </a:bodyPr>
           <a:lstStyle/>
@@ -4361,6 +4376,7 @@
           <a:lstStyle/>
           <a:p>
             <a:pPr algn="ctr"/>
+            <a:endParaRPr/>
           </a:p>
         </p:txBody>
       </p:sp>
@@ -4405,6 +4421,7 @@
           <a:lstStyle/>
           <a:p>
             <a:pPr algn="ctr"/>
+            <a:endParaRPr/>
           </a:p>
         </p:txBody>
       </p:sp>
@@ -4425,7 +4442,7 @@
           <a:noFill/>
         </p:spPr>
         <p:txBody>
-          <a:bodyPr wrap="square" anchor="t" lIns="0" rIns="0" tIns="0" bIns="0">
+          <a:bodyPr wrap="square" lIns="0" tIns="0" rIns="0" bIns="0" anchor="t">
             <a:spAutoFit/>
           </a:bodyPr>
           <a:lstStyle/>
@@ -4571,6 +4588,7 @@
           <a:lstStyle/>
           <a:p>
             <a:pPr algn="ctr"/>
+            <a:endParaRPr/>
           </a:p>
         </p:txBody>
       </p:sp>
@@ -4615,6 +4633,7 @@
           <a:lstStyle/>
           <a:p>
             <a:pPr algn="ctr"/>
+            <a:endParaRPr/>
           </a:p>
         </p:txBody>
       </p:sp>
@@ -4635,7 +4654,7 @@
           <a:noFill/>
         </p:spPr>
         <p:txBody>
-          <a:bodyPr wrap="square" anchor="t" lIns="0" rIns="0" tIns="0" bIns="0">
+          <a:bodyPr wrap="square" lIns="0" tIns="0" rIns="0" bIns="0" anchor="t">
             <a:spAutoFit/>
           </a:bodyPr>
           <a:lstStyle/>
@@ -4688,7 +4707,7 @@
               </a:spcAft>
             </a:pPr>
             <a:r>
-              <a:rPr sz="950">
+              <a:rPr sz="950" dirty="0">
                 <a:solidFill>
                   <a:srgbClr val="7C3AED"/>
                 </a:solidFill>
@@ -4697,13 +4716,40 @@
               <a:t>●  </a:t>
             </a:r>
             <a:r>
-              <a:rPr sz="1250">
+              <a:rPr sz="1250" dirty="0" err="1">
                 <a:solidFill>
                   <a:srgbClr val="334155"/>
                 </a:solidFill>
                 <a:latin typeface="Segoe UI"/>
               </a:rPr>
-              <a:t>Candidat (non inscrit)</a:t>
+              <a:t>Candidat</a:t>
+            </a:r>
+            <a:r>
+              <a:rPr sz="1250" dirty="0">
+                <a:solidFill>
+                  <a:srgbClr val="334155"/>
+                </a:solidFill>
+                <a:latin typeface="Segoe UI"/>
+              </a:rPr>
+              <a:t> (non </a:t>
+            </a:r>
+            <a:r>
+              <a:rPr sz="1250" dirty="0" err="1">
+                <a:solidFill>
+                  <a:srgbClr val="334155"/>
+                </a:solidFill>
+                <a:latin typeface="Segoe UI"/>
+              </a:rPr>
+              <a:t>inscrit</a:t>
+            </a:r>
+            <a:r>
+              <a:rPr sz="1250" dirty="0">
+                <a:solidFill>
+                  <a:srgbClr val="334155"/>
+                </a:solidFill>
+                <a:latin typeface="Segoe UI"/>
+              </a:rPr>
+              <a:t>)</a:t>
             </a:r>
           </a:p>
           <a:p>
@@ -4716,7 +4762,7 @@
               </a:spcAft>
             </a:pPr>
             <a:r>
-              <a:rPr sz="950">
+              <a:rPr sz="950" dirty="0">
                 <a:solidFill>
                   <a:srgbClr val="7C3AED"/>
                 </a:solidFill>
@@ -4725,13 +4771,40 @@
               <a:t>●  </a:t>
             </a:r>
             <a:r>
-              <a:rPr sz="1250">
+              <a:rPr sz="1250" dirty="0" err="1">
                 <a:solidFill>
                   <a:srgbClr val="334155"/>
                 </a:solidFill>
                 <a:latin typeface="Segoe UI"/>
               </a:rPr>
-              <a:t>Vérificateur (public, sans compte)</a:t>
+              <a:t>Vérificateur</a:t>
+            </a:r>
+            <a:r>
+              <a:rPr sz="1250" dirty="0">
+                <a:solidFill>
+                  <a:srgbClr val="334155"/>
+                </a:solidFill>
+                <a:latin typeface="Segoe UI"/>
+              </a:rPr>
+              <a:t> (public, sans </a:t>
+            </a:r>
+            <a:r>
+              <a:rPr sz="1250" dirty="0" err="1">
+                <a:solidFill>
+                  <a:srgbClr val="334155"/>
+                </a:solidFill>
+                <a:latin typeface="Segoe UI"/>
+              </a:rPr>
+              <a:t>compte</a:t>
+            </a:r>
+            <a:r>
+              <a:rPr sz="1250" dirty="0">
+                <a:solidFill>
+                  <a:srgbClr val="334155"/>
+                </a:solidFill>
+                <a:latin typeface="Segoe UI"/>
+              </a:rPr>
+              <a:t>)</a:t>
             </a:r>
           </a:p>
           <a:p>
@@ -4744,7 +4817,7 @@
               </a:spcAft>
             </a:pPr>
             <a:r>
-              <a:rPr sz="950">
+              <a:rPr sz="950" dirty="0">
                 <a:solidFill>
                   <a:srgbClr val="7C3AED"/>
                 </a:solidFill>
@@ -4753,14 +4826,56 @@
               <a:t>●  </a:t>
             </a:r>
             <a:r>
-              <a:rPr sz="1250">
+              <a:rPr sz="1250" dirty="0" err="1">
                 <a:solidFill>
                   <a:srgbClr val="334155"/>
                 </a:solidFill>
                 <a:latin typeface="Segoe UI"/>
               </a:rPr>
-              <a:t>Invité / Intervenant externe</a:t>
-            </a:r>
+              <a:t>Invité</a:t>
+            </a:r>
+            <a:r>
+              <a:rPr sz="1250" dirty="0">
+                <a:solidFill>
+                  <a:srgbClr val="334155"/>
+                </a:solidFill>
+                <a:latin typeface="Segoe UI"/>
+              </a:rPr>
+              <a:t> / </a:t>
+            </a:r>
+            <a:r>
+              <a:rPr sz="1250" dirty="0" err="1">
+                <a:solidFill>
+                  <a:srgbClr val="334155"/>
+                </a:solidFill>
+                <a:latin typeface="Segoe UI"/>
+              </a:rPr>
+              <a:t>Intervenant</a:t>
+            </a:r>
+            <a:r>
+              <a:rPr sz="1250" dirty="0">
+                <a:solidFill>
+                  <a:srgbClr val="334155"/>
+                </a:solidFill>
+                <a:latin typeface="Segoe UI"/>
+              </a:rPr>
+              <a:t> </a:t>
+            </a:r>
+            <a:r>
+              <a:rPr sz="1250" dirty="0" err="1">
+                <a:solidFill>
+                  <a:srgbClr val="334155"/>
+                </a:solidFill>
+                <a:latin typeface="Segoe UI"/>
+              </a:rPr>
+              <a:t>externe</a:t>
+            </a:r>
+            <a:endParaRPr sz="1250" dirty="0">
+              <a:solidFill>
+                <a:srgbClr val="334155"/>
+              </a:solidFill>
+              <a:latin typeface="Segoe UI"/>
+            </a:endParaRPr>
           </a:p>
         </p:txBody>
       </p:sp>
@@ -4773,7 +4888,7 @@
 </file>
 
 <file path=ppt/slides/slide11.xml><?xml version="1.0" encoding="utf-8"?>
-<p:sld xmlns:a="http://schemas.openxmlformats.org/drawingml/2006/main" xmlns:p="http://schemas.openxmlformats.org/presentationml/2006/main" xmlns:r="http://schemas.openxmlformats.org/officeDocument/2006/relationships">
+<p:sld xmlns:a="http://schemas.openxmlformats.org/drawingml/2006/main" xmlns:r="http://schemas.openxmlformats.org/officeDocument/2006/relationships" xmlns:p="http://schemas.openxmlformats.org/presentationml/2006/main">
   <p:cSld>
     <p:spTree>
       <p:nvGrpSpPr>
@@ -4781,7 +4896,14 @@
         <p:cNvGrpSpPr/>
         <p:nvPr/>
       </p:nvGrpSpPr>
-      <p:grpSpPr/>
+      <p:grpSpPr>
+        <a:xfrm>
+          <a:off x="0" y="0"/>
+          <a:ext cx="0" cy="0"/>
+          <a:chOff x="0" y="0"/>
+          <a:chExt cx="0" cy="0"/>
+        </a:xfrm>
+      </p:grpSpPr>
       <p:sp>
         <p:nvSpPr>
           <p:cNvPr id="2" name="Rectangle 1"/>
@@ -4823,6 +4945,7 @@
           <a:lstStyle/>
           <a:p>
             <a:pPr algn="ctr"/>
+            <a:endParaRPr/>
           </a:p>
         </p:txBody>
       </p:sp>
@@ -4867,6 +4990,7 @@
           <a:lstStyle/>
           <a:p>
             <a:pPr algn="ctr"/>
+            <a:endParaRPr/>
           </a:p>
         </p:txBody>
       </p:sp>
@@ -4887,7 +5011,7 @@
           <a:noFill/>
         </p:spPr>
         <p:txBody>
-          <a:bodyPr wrap="square" anchor="t" lIns="0" rIns="0" tIns="0" bIns="0">
+          <a:bodyPr wrap="square" lIns="0" tIns="0" rIns="0" bIns="0" anchor="t">
             <a:spAutoFit/>
           </a:bodyPr>
           <a:lstStyle/>
@@ -4926,7 +5050,7 @@
           <a:noFill/>
         </p:spPr>
         <p:txBody>
-          <a:bodyPr wrap="square" anchor="t" lIns="0" rIns="0" tIns="0" bIns="0">
+          <a:bodyPr wrap="square" lIns="0" tIns="0" rIns="0" bIns="0" anchor="t">
             <a:spAutoFit/>
           </a:bodyPr>
           <a:lstStyle/>
@@ -4965,7 +5089,7 @@
           <a:noFill/>
         </p:spPr>
         <p:txBody>
-          <a:bodyPr wrap="square" anchor="t" lIns="0" rIns="0" tIns="0" bIns="0">
+          <a:bodyPr wrap="square" lIns="0" tIns="0" rIns="0" bIns="0" anchor="t">
             <a:spAutoFit/>
           </a:bodyPr>
           <a:lstStyle/>
@@ -5004,7 +5128,7 @@
           <a:noFill/>
         </p:spPr>
         <p:txBody>
-          <a:bodyPr wrap="square" anchor="t" lIns="0" rIns="0" tIns="0" bIns="0">
+          <a:bodyPr wrap="square" lIns="0" tIns="0" rIns="0" bIns="0" anchor="t">
             <a:spAutoFit/>
           </a:bodyPr>
           <a:lstStyle/>
@@ -5098,7 +5222,7 @@
           </a:fontRef>
         </p:style>
         <p:txBody>
-          <a:bodyPr rtlCol="0" anchor="ctr" wrap="square"/>
+          <a:bodyPr wrap="square" rtlCol="0" anchor="ctr"/>
           <a:lstStyle/>
           <a:p>
             <a:pPr algn="ctr"/>
@@ -5152,7 +5276,7 @@
           </a:fontRef>
         </p:style>
         <p:txBody>
-          <a:bodyPr rtlCol="0" anchor="ctr" lIns="0" rIns="0" wrap="none"/>
+          <a:bodyPr wrap="none" lIns="0" rIns="0" rtlCol="0" anchor="ctr"/>
           <a:lstStyle/>
           <a:p>
             <a:pPr algn="ctr"/>
@@ -5242,7 +5366,7 @@
           </a:fontRef>
         </p:style>
         <p:txBody>
-          <a:bodyPr rtlCol="0" anchor="ctr" lIns="0" rIns="0" wrap="none"/>
+          <a:bodyPr wrap="none" lIns="0" rIns="0" rtlCol="0" anchor="ctr"/>
           <a:lstStyle/>
           <a:p>
             <a:pPr algn="ctr"/>
@@ -5332,7 +5456,7 @@
           </a:fontRef>
         </p:style>
         <p:txBody>
-          <a:bodyPr rtlCol="0" anchor="ctr" lIns="0" rIns="0" wrap="none"/>
+          <a:bodyPr wrap="none" lIns="0" rIns="0" rtlCol="0" anchor="ctr"/>
           <a:lstStyle/>
           <a:p>
             <a:pPr algn="ctr"/>
@@ -5422,7 +5546,7 @@
           </a:fontRef>
         </p:style>
         <p:txBody>
-          <a:bodyPr rtlCol="0" anchor="ctr" lIns="0" rIns="0" wrap="none"/>
+          <a:bodyPr wrap="none" lIns="0" rIns="0" rtlCol="0" anchor="ctr"/>
           <a:lstStyle/>
           <a:p>
             <a:pPr algn="ctr"/>
@@ -5510,7 +5634,7 @@
           </a:fontRef>
         </p:style>
         <p:txBody>
-          <a:bodyPr rtlCol="0" anchor="ctr" wrap="square"/>
+          <a:bodyPr wrap="square" rtlCol="0" anchor="ctr"/>
           <a:lstStyle/>
           <a:p>
             <a:pPr algn="ctr"/>
@@ -5564,7 +5688,7 @@
           </a:fontRef>
         </p:style>
         <p:txBody>
-          <a:bodyPr rtlCol="0" anchor="ctr" lIns="0" rIns="0" wrap="none"/>
+          <a:bodyPr wrap="none" lIns="0" rIns="0" rtlCol="0" anchor="ctr"/>
           <a:lstStyle/>
           <a:p>
             <a:pPr algn="ctr"/>
@@ -5654,7 +5778,7 @@
           </a:fontRef>
         </p:style>
         <p:txBody>
-          <a:bodyPr rtlCol="0" anchor="ctr" lIns="0" rIns="0" wrap="none"/>
+          <a:bodyPr wrap="none" lIns="0" rIns="0" rtlCol="0" anchor="ctr"/>
           <a:lstStyle/>
           <a:p>
             <a:pPr algn="ctr"/>
@@ -5744,7 +5868,7 @@
           </a:fontRef>
         </p:style>
         <p:txBody>
-          <a:bodyPr rtlCol="0" anchor="ctr" lIns="0" rIns="0" wrap="none"/>
+          <a:bodyPr wrap="none" lIns="0" rIns="0" rtlCol="0" anchor="ctr"/>
           <a:lstStyle/>
           <a:p>
             <a:pPr algn="ctr"/>
@@ -5834,7 +5958,7 @@
           </a:fontRef>
         </p:style>
         <p:txBody>
-          <a:bodyPr rtlCol="0" anchor="ctr" lIns="0" rIns="0" wrap="none"/>
+          <a:bodyPr wrap="none" lIns="0" rIns="0" rtlCol="0" anchor="ctr"/>
           <a:lstStyle/>
           <a:p>
             <a:pPr algn="ctr"/>
@@ -5922,7 +6046,7 @@
           </a:fontRef>
         </p:style>
         <p:txBody>
-          <a:bodyPr rtlCol="0" anchor="ctr" wrap="square"/>
+          <a:bodyPr wrap="square" rtlCol="0" anchor="ctr"/>
           <a:lstStyle/>
           <a:p>
             <a:pPr algn="ctr"/>
@@ -5976,7 +6100,7 @@
           </a:fontRef>
         </p:style>
         <p:txBody>
-          <a:bodyPr rtlCol="0" anchor="ctr" lIns="0" rIns="0" wrap="none"/>
+          <a:bodyPr wrap="none" lIns="0" rIns="0" rtlCol="0" anchor="ctr"/>
           <a:lstStyle/>
           <a:p>
             <a:pPr algn="ctr"/>
@@ -6066,7 +6190,7 @@
           </a:fontRef>
         </p:style>
         <p:txBody>
-          <a:bodyPr rtlCol="0" anchor="ctr" lIns="0" rIns="0" wrap="none"/>
+          <a:bodyPr wrap="none" lIns="0" rIns="0" rtlCol="0" anchor="ctr"/>
           <a:lstStyle/>
           <a:p>
             <a:pPr algn="ctr"/>
@@ -6156,7 +6280,7 @@
           </a:fontRef>
         </p:style>
         <p:txBody>
-          <a:bodyPr rtlCol="0" anchor="ctr" lIns="0" rIns="0" wrap="none"/>
+          <a:bodyPr wrap="none" lIns="0" rIns="0" rtlCol="0" anchor="ctr"/>
           <a:lstStyle/>
           <a:p>
             <a:pPr algn="ctr"/>
@@ -6246,7 +6370,7 @@
           </a:fontRef>
         </p:style>
         <p:txBody>
-          <a:bodyPr rtlCol="0" anchor="ctr" lIns="0" rIns="0" wrap="none"/>
+          <a:bodyPr wrap="none" lIns="0" rIns="0" rtlCol="0" anchor="ctr"/>
           <a:lstStyle/>
           <a:p>
             <a:pPr algn="ctr"/>
@@ -6334,7 +6458,7 @@
           </a:fontRef>
         </p:style>
         <p:txBody>
-          <a:bodyPr rtlCol="0" anchor="ctr" wrap="square"/>
+          <a:bodyPr wrap="square" rtlCol="0" anchor="ctr"/>
           <a:lstStyle/>
           <a:p>
             <a:pPr algn="ctr"/>
@@ -6388,7 +6512,7 @@
           </a:fontRef>
         </p:style>
         <p:txBody>
-          <a:bodyPr rtlCol="0" anchor="ctr" lIns="0" rIns="0" wrap="none"/>
+          <a:bodyPr wrap="none" lIns="0" rIns="0" rtlCol="0" anchor="ctr"/>
           <a:lstStyle/>
           <a:p>
             <a:pPr algn="ctr"/>
@@ -6478,7 +6602,7 @@
           </a:fontRef>
         </p:style>
         <p:txBody>
-          <a:bodyPr rtlCol="0" anchor="ctr" lIns="0" rIns="0" wrap="none"/>
+          <a:bodyPr wrap="none" lIns="0" rIns="0" rtlCol="0" anchor="ctr"/>
           <a:lstStyle/>
           <a:p>
             <a:pPr algn="ctr"/>
@@ -6568,7 +6692,7 @@
           </a:fontRef>
         </p:style>
         <p:txBody>
-          <a:bodyPr rtlCol="0" anchor="ctr" lIns="0" rIns="0" wrap="none"/>
+          <a:bodyPr wrap="none" lIns="0" rIns="0" rtlCol="0" anchor="ctr"/>
           <a:lstStyle/>
           <a:p>
             <a:pPr algn="ctr"/>
@@ -6658,7 +6782,7 @@
           </a:fontRef>
         </p:style>
         <p:txBody>
-          <a:bodyPr rtlCol="0" anchor="ctr" lIns="0" rIns="0" wrap="none"/>
+          <a:bodyPr wrap="none" lIns="0" rIns="0" rtlCol="0" anchor="ctr"/>
           <a:lstStyle/>
           <a:p>
             <a:pPr algn="ctr"/>
@@ -6718,7 +6842,7 @@
 </file>
 
 <file path=ppt/slides/slide12.xml><?xml version="1.0" encoding="utf-8"?>
-<p:sld xmlns:a="http://schemas.openxmlformats.org/drawingml/2006/main" xmlns:p="http://schemas.openxmlformats.org/presentationml/2006/main" xmlns:r="http://schemas.openxmlformats.org/officeDocument/2006/relationships">
+<p:sld xmlns:a="http://schemas.openxmlformats.org/drawingml/2006/main" xmlns:r="http://schemas.openxmlformats.org/officeDocument/2006/relationships" xmlns:p="http://schemas.openxmlformats.org/presentationml/2006/main">
   <p:cSld>
     <p:spTree>
       <p:nvGrpSpPr>
@@ -6726,7 +6850,14 @@
         <p:cNvGrpSpPr/>
         <p:nvPr/>
       </p:nvGrpSpPr>
-      <p:grpSpPr/>
+      <p:grpSpPr>
+        <a:xfrm>
+          <a:off x="0" y="0"/>
+          <a:ext cx="0" cy="0"/>
+          <a:chOff x="0" y="0"/>
+          <a:chExt cx="0" cy="0"/>
+        </a:xfrm>
+      </p:grpSpPr>
       <p:sp>
         <p:nvSpPr>
           <p:cNvPr id="2" name="Rectangle 1"/>
@@ -6768,6 +6899,7 @@
           <a:lstStyle/>
           <a:p>
             <a:pPr algn="ctr"/>
+            <a:endParaRPr/>
           </a:p>
         </p:txBody>
       </p:sp>
@@ -6812,6 +6944,7 @@
           <a:lstStyle/>
           <a:p>
             <a:pPr algn="ctr"/>
+            <a:endParaRPr/>
           </a:p>
         </p:txBody>
       </p:sp>
@@ -6832,7 +6965,7 @@
           <a:noFill/>
         </p:spPr>
         <p:txBody>
-          <a:bodyPr wrap="square" anchor="t" lIns="0" rIns="0" tIns="0" bIns="0">
+          <a:bodyPr wrap="square" lIns="0" tIns="0" rIns="0" bIns="0" anchor="t">
             <a:spAutoFit/>
           </a:bodyPr>
           <a:lstStyle/>
@@ -6871,7 +7004,7 @@
           <a:noFill/>
         </p:spPr>
         <p:txBody>
-          <a:bodyPr wrap="square" anchor="t" lIns="0" rIns="0" tIns="0" bIns="0">
+          <a:bodyPr wrap="square" lIns="0" tIns="0" rIns="0" bIns="0" anchor="t">
             <a:spAutoFit/>
           </a:bodyPr>
           <a:lstStyle/>
@@ -6910,7 +7043,7 @@
           <a:noFill/>
         </p:spPr>
         <p:txBody>
-          <a:bodyPr wrap="square" anchor="t" lIns="0" rIns="0" tIns="0" bIns="0">
+          <a:bodyPr wrap="square" lIns="0" tIns="0" rIns="0" bIns="0" anchor="t">
             <a:spAutoFit/>
           </a:bodyPr>
           <a:lstStyle/>
@@ -6949,7 +7082,7 @@
           <a:noFill/>
         </p:spPr>
         <p:txBody>
-          <a:bodyPr wrap="square" anchor="t" lIns="0" rIns="0" tIns="0" bIns="0">
+          <a:bodyPr wrap="square" lIns="0" tIns="0" rIns="0" bIns="0" anchor="t">
             <a:spAutoFit/>
           </a:bodyPr>
           <a:lstStyle/>
@@ -7049,6 +7182,7 @@
           <a:lstStyle/>
           <a:p>
             <a:pPr algn="ctr"/>
+            <a:endParaRPr/>
           </a:p>
         </p:txBody>
       </p:sp>
@@ -7069,7 +7203,7 @@
           <a:noFill/>
         </p:spPr>
         <p:txBody>
-          <a:bodyPr wrap="square" anchor="t" lIns="0" rIns="0" tIns="0" bIns="0">
+          <a:bodyPr wrap="square" lIns="0" tIns="0" rIns="0" bIns="0" anchor="t">
             <a:spAutoFit/>
           </a:bodyPr>
           <a:lstStyle/>
@@ -7108,7 +7242,7 @@
           <a:noFill/>
         </p:spPr>
         <p:txBody>
-          <a:bodyPr wrap="square" anchor="t" lIns="0" rIns="0" tIns="0" bIns="0">
+          <a:bodyPr wrap="square" lIns="0" tIns="0" rIns="0" bIns="0" anchor="t">
             <a:spAutoFit/>
           </a:bodyPr>
           <a:lstStyle/>
@@ -7147,7 +7281,7 @@
           <a:noFill/>
         </p:spPr>
         <p:txBody>
-          <a:bodyPr wrap="square" anchor="t" lIns="0" rIns="0" tIns="0" bIns="0">
+          <a:bodyPr wrap="square" lIns="0" tIns="0" rIns="0" bIns="0" anchor="t">
             <a:spAutoFit/>
           </a:bodyPr>
           <a:lstStyle/>
@@ -7210,6 +7344,7 @@
           <a:lstStyle/>
           <a:p>
             <a:pPr algn="ctr"/>
+            <a:endParaRPr/>
           </a:p>
         </p:txBody>
       </p:sp>
@@ -7256,6 +7391,7 @@
           <a:lstStyle/>
           <a:p>
             <a:pPr algn="ctr"/>
+            <a:endParaRPr/>
           </a:p>
         </p:txBody>
       </p:sp>
@@ -7276,7 +7412,7 @@
           <a:noFill/>
         </p:spPr>
         <p:txBody>
-          <a:bodyPr wrap="square" anchor="t" lIns="0" rIns="0" tIns="0" bIns="0">
+          <a:bodyPr wrap="square" lIns="0" tIns="0" rIns="0" bIns="0" anchor="t">
             <a:spAutoFit/>
           </a:bodyPr>
           <a:lstStyle/>
@@ -7315,7 +7451,7 @@
           <a:noFill/>
         </p:spPr>
         <p:txBody>
-          <a:bodyPr wrap="square" anchor="t" lIns="0" rIns="0" tIns="0" bIns="0">
+          <a:bodyPr wrap="square" lIns="0" tIns="0" rIns="0" bIns="0" anchor="t">
             <a:spAutoFit/>
           </a:bodyPr>
           <a:lstStyle/>
@@ -7378,6 +7514,7 @@
           <a:lstStyle/>
           <a:p>
             <a:pPr algn="ctr"/>
+            <a:endParaRPr/>
           </a:p>
         </p:txBody>
       </p:sp>
@@ -7422,6 +7559,7 @@
           <a:lstStyle/>
           <a:p>
             <a:pPr algn="ctr"/>
+            <a:endParaRPr/>
           </a:p>
         </p:txBody>
       </p:sp>
@@ -7468,6 +7606,7 @@
           <a:lstStyle/>
           <a:p>
             <a:pPr algn="ctr"/>
+            <a:endParaRPr/>
           </a:p>
         </p:txBody>
       </p:sp>
@@ -7488,7 +7627,7 @@
           <a:noFill/>
         </p:spPr>
         <p:txBody>
-          <a:bodyPr wrap="square" anchor="t" lIns="0" rIns="0" tIns="0" bIns="0">
+          <a:bodyPr wrap="square" lIns="0" tIns="0" rIns="0" bIns="0" anchor="t">
             <a:spAutoFit/>
           </a:bodyPr>
           <a:lstStyle/>
@@ -7527,7 +7666,7 @@
           <a:noFill/>
         </p:spPr>
         <p:txBody>
-          <a:bodyPr wrap="square" anchor="t" lIns="0" rIns="0" tIns="0" bIns="0">
+          <a:bodyPr wrap="square" lIns="0" tIns="0" rIns="0" bIns="0" anchor="t">
             <a:spAutoFit/>
           </a:bodyPr>
           <a:lstStyle/>
@@ -7592,6 +7731,7 @@
           <a:lstStyle/>
           <a:p>
             <a:pPr algn="ctr"/>
+            <a:endParaRPr/>
           </a:p>
         </p:txBody>
       </p:sp>
@@ -7612,7 +7752,7 @@
           <a:noFill/>
         </p:spPr>
         <p:txBody>
-          <a:bodyPr wrap="square" anchor="t" lIns="0" rIns="0" tIns="0" bIns="0">
+          <a:bodyPr wrap="square" lIns="0" tIns="0" rIns="0" bIns="0" anchor="t">
             <a:spAutoFit/>
           </a:bodyPr>
           <a:lstStyle/>
@@ -7651,7 +7791,7 @@
           <a:noFill/>
         </p:spPr>
         <p:txBody>
-          <a:bodyPr wrap="square" anchor="t" lIns="0" rIns="0" tIns="0" bIns="0">
+          <a:bodyPr wrap="square" lIns="0" tIns="0" rIns="0" bIns="0" anchor="t">
             <a:spAutoFit/>
           </a:bodyPr>
           <a:lstStyle/>
@@ -7682,7 +7822,7 @@
 </file>
 
 <file path=ppt/slides/slide13.xml><?xml version="1.0" encoding="utf-8"?>
-<p:sld xmlns:a="http://schemas.openxmlformats.org/drawingml/2006/main" xmlns:p="http://schemas.openxmlformats.org/presentationml/2006/main" xmlns:r="http://schemas.openxmlformats.org/officeDocument/2006/relationships">
+<p:sld xmlns:a="http://schemas.openxmlformats.org/drawingml/2006/main" xmlns:r="http://schemas.openxmlformats.org/officeDocument/2006/relationships" xmlns:p="http://schemas.openxmlformats.org/presentationml/2006/main">
   <p:cSld>
     <p:spTree>
       <p:nvGrpSpPr>
@@ -7690,7 +7830,14 @@
         <p:cNvGrpSpPr/>
         <p:nvPr/>
       </p:nvGrpSpPr>
-      <p:grpSpPr/>
+      <p:grpSpPr>
+        <a:xfrm>
+          <a:off x="0" y="0"/>
+          <a:ext cx="0" cy="0"/>
+          <a:chOff x="0" y="0"/>
+          <a:chExt cx="0" cy="0"/>
+        </a:xfrm>
+      </p:grpSpPr>
       <p:sp>
         <p:nvSpPr>
           <p:cNvPr id="2" name="Rectangle 1"/>
@@ -7732,6 +7879,7 @@
           <a:lstStyle/>
           <a:p>
             <a:pPr algn="ctr"/>
+            <a:endParaRPr/>
           </a:p>
         </p:txBody>
       </p:sp>
@@ -7776,6 +7924,7 @@
           <a:lstStyle/>
           <a:p>
             <a:pPr algn="ctr"/>
+            <a:endParaRPr/>
           </a:p>
         </p:txBody>
       </p:sp>
@@ -7796,7 +7945,7 @@
           <a:noFill/>
         </p:spPr>
         <p:txBody>
-          <a:bodyPr wrap="square" anchor="t" lIns="0" rIns="0" tIns="0" bIns="0">
+          <a:bodyPr wrap="square" lIns="0" tIns="0" rIns="0" bIns="0" anchor="t">
             <a:spAutoFit/>
           </a:bodyPr>
           <a:lstStyle/>
@@ -7835,7 +7984,7 @@
           <a:noFill/>
         </p:spPr>
         <p:txBody>
-          <a:bodyPr wrap="square" anchor="t" lIns="0" rIns="0" tIns="0" bIns="0">
+          <a:bodyPr wrap="square" lIns="0" tIns="0" rIns="0" bIns="0" anchor="t">
             <a:spAutoFit/>
           </a:bodyPr>
           <a:lstStyle/>
@@ -7874,7 +8023,7 @@
           <a:noFill/>
         </p:spPr>
         <p:txBody>
-          <a:bodyPr wrap="square" anchor="t" lIns="0" rIns="0" tIns="0" bIns="0">
+          <a:bodyPr wrap="square" lIns="0" tIns="0" rIns="0" bIns="0" anchor="t">
             <a:spAutoFit/>
           </a:bodyPr>
           <a:lstStyle/>
@@ -7913,7 +8062,7 @@
           <a:noFill/>
         </p:spPr>
         <p:txBody>
-          <a:bodyPr wrap="square" anchor="t" lIns="0" rIns="0" tIns="0" bIns="0">
+          <a:bodyPr wrap="square" lIns="0" tIns="0" rIns="0" bIns="0" anchor="t">
             <a:spAutoFit/>
           </a:bodyPr>
           <a:lstStyle/>
@@ -8015,6 +8164,7 @@
           <a:lstStyle/>
           <a:p>
             <a:pPr algn="ctr"/>
+            <a:endParaRPr/>
           </a:p>
         </p:txBody>
       </p:sp>
@@ -8035,7 +8185,7 @@
           <a:noFill/>
         </p:spPr>
         <p:txBody>
-          <a:bodyPr wrap="square" anchor="t" lIns="0" rIns="0" tIns="0" bIns="0">
+          <a:bodyPr wrap="square" lIns="0" tIns="0" rIns="0" bIns="0" anchor="t">
             <a:spAutoFit/>
           </a:bodyPr>
           <a:lstStyle/>
@@ -8096,7 +8246,7 @@
           </a:fontRef>
         </p:style>
         <p:txBody>
-          <a:bodyPr rtlCol="0" anchor="ctr" lIns="0" rIns="0" wrap="none"/>
+          <a:bodyPr wrap="none" lIns="0" rIns="0" rtlCol="0" anchor="ctr"/>
           <a:lstStyle/>
           <a:p>
             <a:pPr algn="ctr"/>
@@ -8151,7 +8301,7 @@
           </a:fontRef>
         </p:style>
         <p:txBody>
-          <a:bodyPr rtlCol="0" anchor="ctr" lIns="0" rIns="0" wrap="none"/>
+          <a:bodyPr wrap="none" lIns="0" rIns="0" rtlCol="0" anchor="ctr"/>
           <a:lstStyle/>
           <a:p>
             <a:pPr algn="ctr"/>
@@ -8206,7 +8356,7 @@
           </a:fontRef>
         </p:style>
         <p:txBody>
-          <a:bodyPr rtlCol="0" anchor="ctr" lIns="0" rIns="0" wrap="none"/>
+          <a:bodyPr wrap="none" lIns="0" rIns="0" rtlCol="0" anchor="ctr"/>
           <a:lstStyle/>
           <a:p>
             <a:pPr algn="ctr"/>
@@ -8261,7 +8411,7 @@
           </a:fontRef>
         </p:style>
         <p:txBody>
-          <a:bodyPr rtlCol="0" anchor="ctr" lIns="0" rIns="0" wrap="none"/>
+          <a:bodyPr wrap="none" lIns="0" rIns="0" rtlCol="0" anchor="ctr"/>
           <a:lstStyle/>
           <a:p>
             <a:pPr algn="ctr"/>
@@ -8316,7 +8466,7 @@
           </a:fontRef>
         </p:style>
         <p:txBody>
-          <a:bodyPr rtlCol="0" anchor="ctr" lIns="0" rIns="0" wrap="none"/>
+          <a:bodyPr wrap="none" lIns="0" rIns="0" rtlCol="0" anchor="ctr"/>
           <a:lstStyle/>
           <a:p>
             <a:pPr algn="ctr"/>
@@ -8377,6 +8527,7 @@
           <a:lstStyle/>
           <a:p>
             <a:pPr algn="ctr"/>
+            <a:endParaRPr/>
           </a:p>
         </p:txBody>
       </p:sp>
@@ -8397,7 +8548,7 @@
           <a:noFill/>
         </p:spPr>
         <p:txBody>
-          <a:bodyPr wrap="square" anchor="t" lIns="0" rIns="0" tIns="0" bIns="0">
+          <a:bodyPr wrap="square" lIns="0" tIns="0" rIns="0" bIns="0" anchor="t">
             <a:spAutoFit/>
           </a:bodyPr>
           <a:lstStyle/>
@@ -8458,7 +8609,7 @@
           </a:fontRef>
         </p:style>
         <p:txBody>
-          <a:bodyPr rtlCol="0" anchor="ctr" lIns="0" rIns="0" wrap="none"/>
+          <a:bodyPr wrap="none" lIns="0" rIns="0" rtlCol="0" anchor="ctr"/>
           <a:lstStyle/>
           <a:p>
             <a:pPr algn="ctr"/>
@@ -8513,7 +8664,7 @@
           </a:fontRef>
         </p:style>
         <p:txBody>
-          <a:bodyPr rtlCol="0" anchor="ctr" lIns="0" rIns="0" wrap="none"/>
+          <a:bodyPr wrap="none" lIns="0" rIns="0" rtlCol="0" anchor="ctr"/>
           <a:lstStyle/>
           <a:p>
             <a:pPr algn="ctr"/>
@@ -8568,7 +8719,7 @@
           </a:fontRef>
         </p:style>
         <p:txBody>
-          <a:bodyPr rtlCol="0" anchor="ctr" lIns="0" rIns="0" wrap="none"/>
+          <a:bodyPr wrap="none" lIns="0" rIns="0" rtlCol="0" anchor="ctr"/>
           <a:lstStyle/>
           <a:p>
             <a:pPr algn="ctr"/>
@@ -8623,7 +8774,7 @@
           </a:fontRef>
         </p:style>
         <p:txBody>
-          <a:bodyPr rtlCol="0" anchor="ctr" lIns="0" rIns="0" wrap="none"/>
+          <a:bodyPr wrap="none" lIns="0" rIns="0" rtlCol="0" anchor="ctr"/>
           <a:lstStyle/>
           <a:p>
             <a:pPr algn="ctr"/>
@@ -8684,6 +8835,7 @@
           <a:lstStyle/>
           <a:p>
             <a:pPr algn="ctr"/>
+            <a:endParaRPr/>
           </a:p>
         </p:txBody>
       </p:sp>
@@ -8704,7 +8856,7 @@
           <a:noFill/>
         </p:spPr>
         <p:txBody>
-          <a:bodyPr wrap="square" anchor="t" lIns="0" rIns="0" tIns="0" bIns="0">
+          <a:bodyPr wrap="square" lIns="0" tIns="0" rIns="0" bIns="0" anchor="t">
             <a:spAutoFit/>
           </a:bodyPr>
           <a:lstStyle/>
@@ -8765,7 +8917,7 @@
           </a:fontRef>
         </p:style>
         <p:txBody>
-          <a:bodyPr rtlCol="0" anchor="ctr" lIns="0" rIns="0" wrap="none"/>
+          <a:bodyPr wrap="none" lIns="0" rIns="0" rtlCol="0" anchor="ctr"/>
           <a:lstStyle/>
           <a:p>
             <a:pPr algn="ctr"/>
@@ -8820,7 +8972,7 @@
           </a:fontRef>
         </p:style>
         <p:txBody>
-          <a:bodyPr rtlCol="0" anchor="ctr" lIns="0" rIns="0" wrap="none"/>
+          <a:bodyPr wrap="none" lIns="0" rIns="0" rtlCol="0" anchor="ctr"/>
           <a:lstStyle/>
           <a:p>
             <a:pPr algn="ctr"/>
@@ -8875,7 +9027,7 @@
           </a:fontRef>
         </p:style>
         <p:txBody>
-          <a:bodyPr rtlCol="0" anchor="ctr" lIns="0" rIns="0" wrap="none"/>
+          <a:bodyPr wrap="none" lIns="0" rIns="0" rtlCol="0" anchor="ctr"/>
           <a:lstStyle/>
           <a:p>
             <a:pPr algn="ctr"/>
@@ -8930,7 +9082,7 @@
           </a:fontRef>
         </p:style>
         <p:txBody>
-          <a:bodyPr rtlCol="0" anchor="ctr" lIns="0" rIns="0" wrap="none"/>
+          <a:bodyPr wrap="none" lIns="0" rIns="0" rtlCol="0" anchor="ctr"/>
           <a:lstStyle/>
           <a:p>
             <a:pPr algn="ctr"/>
@@ -8985,7 +9137,7 @@
           </a:fontRef>
         </p:style>
         <p:txBody>
-          <a:bodyPr rtlCol="0" anchor="ctr" lIns="0" rIns="0" wrap="none"/>
+          <a:bodyPr wrap="none" lIns="0" rIns="0" rtlCol="0" anchor="ctr"/>
           <a:lstStyle/>
           <a:p>
             <a:pPr algn="ctr"/>
@@ -9046,6 +9198,7 @@
           <a:lstStyle/>
           <a:p>
             <a:pPr algn="ctr"/>
+            <a:endParaRPr/>
           </a:p>
         </p:txBody>
       </p:sp>
@@ -9066,7 +9219,7 @@
           <a:noFill/>
         </p:spPr>
         <p:txBody>
-          <a:bodyPr wrap="square" anchor="t" lIns="0" rIns="0" tIns="0" bIns="0">
+          <a:bodyPr wrap="square" lIns="0" tIns="0" rIns="0" bIns="0" anchor="t">
             <a:spAutoFit/>
           </a:bodyPr>
           <a:lstStyle/>
@@ -9127,7 +9280,7 @@
           </a:fontRef>
         </p:style>
         <p:txBody>
-          <a:bodyPr rtlCol="0" anchor="ctr" lIns="0" rIns="0" wrap="none"/>
+          <a:bodyPr wrap="none" lIns="0" rIns="0" rtlCol="0" anchor="ctr"/>
           <a:lstStyle/>
           <a:p>
             <a:pPr algn="ctr"/>
@@ -9182,7 +9335,7 @@
           </a:fontRef>
         </p:style>
         <p:txBody>
-          <a:bodyPr rtlCol="0" anchor="ctr" lIns="0" rIns="0" wrap="none"/>
+          <a:bodyPr wrap="none" lIns="0" rIns="0" rtlCol="0" anchor="ctr"/>
           <a:lstStyle/>
           <a:p>
             <a:pPr algn="ctr"/>
@@ -9237,7 +9390,7 @@
           </a:fontRef>
         </p:style>
         <p:txBody>
-          <a:bodyPr rtlCol="0" anchor="ctr" lIns="0" rIns="0" wrap="none"/>
+          <a:bodyPr wrap="none" lIns="0" rIns="0" rtlCol="0" anchor="ctr"/>
           <a:lstStyle/>
           <a:p>
             <a:pPr algn="ctr"/>
@@ -9292,7 +9445,7 @@
           </a:fontRef>
         </p:style>
         <p:txBody>
-          <a:bodyPr rtlCol="0" anchor="ctr" lIns="0" rIns="0" wrap="none"/>
+          <a:bodyPr wrap="none" lIns="0" rIns="0" rtlCol="0" anchor="ctr"/>
           <a:lstStyle/>
           <a:p>
             <a:pPr algn="ctr"/>
@@ -9347,7 +9500,7 @@
           </a:fontRef>
         </p:style>
         <p:txBody>
-          <a:bodyPr rtlCol="0" anchor="ctr" lIns="0" rIns="0" wrap="none"/>
+          <a:bodyPr wrap="none" lIns="0" rIns="0" rtlCol="0" anchor="ctr"/>
           <a:lstStyle/>
           <a:p>
             <a:pPr algn="ctr"/>
@@ -9372,7 +9525,7 @@
 </file>
 
 <file path=ppt/slides/slide14.xml><?xml version="1.0" encoding="utf-8"?>
-<p:sld xmlns:a="http://schemas.openxmlformats.org/drawingml/2006/main" xmlns:p="http://schemas.openxmlformats.org/presentationml/2006/main" xmlns:r="http://schemas.openxmlformats.org/officeDocument/2006/relationships">
+<p:sld xmlns:a="http://schemas.openxmlformats.org/drawingml/2006/main" xmlns:r="http://schemas.openxmlformats.org/officeDocument/2006/relationships" xmlns:p="http://schemas.openxmlformats.org/presentationml/2006/main">
   <p:cSld>
     <p:spTree>
       <p:nvGrpSpPr>
@@ -9380,7 +9533,14 @@
         <p:cNvGrpSpPr/>
         <p:nvPr/>
       </p:nvGrpSpPr>
-      <p:grpSpPr/>
+      <p:grpSpPr>
+        <a:xfrm>
+          <a:off x="0" y="0"/>
+          <a:ext cx="0" cy="0"/>
+          <a:chOff x="0" y="0"/>
+          <a:chExt cx="0" cy="0"/>
+        </a:xfrm>
+      </p:grpSpPr>
       <p:sp>
         <p:nvSpPr>
           <p:cNvPr id="2" name="Rectangle 1"/>
@@ -9422,6 +9582,7 @@
           <a:lstStyle/>
           <a:p>
             <a:pPr algn="ctr"/>
+            <a:endParaRPr/>
           </a:p>
         </p:txBody>
       </p:sp>
@@ -9466,6 +9627,7 @@
           <a:lstStyle/>
           <a:p>
             <a:pPr algn="ctr"/>
+            <a:endParaRPr/>
           </a:p>
         </p:txBody>
       </p:sp>
@@ -9486,7 +9648,7 @@
           <a:noFill/>
         </p:spPr>
         <p:txBody>
-          <a:bodyPr wrap="square" anchor="t" lIns="0" rIns="0" tIns="0" bIns="0">
+          <a:bodyPr wrap="square" lIns="0" tIns="0" rIns="0" bIns="0" anchor="t">
             <a:spAutoFit/>
           </a:bodyPr>
           <a:lstStyle/>
@@ -9525,7 +9687,7 @@
           <a:noFill/>
         </p:spPr>
         <p:txBody>
-          <a:bodyPr wrap="square" anchor="t" lIns="0" rIns="0" tIns="0" bIns="0">
+          <a:bodyPr wrap="square" lIns="0" tIns="0" rIns="0" bIns="0" anchor="t">
             <a:spAutoFit/>
           </a:bodyPr>
           <a:lstStyle/>
@@ -9564,7 +9726,7 @@
           <a:noFill/>
         </p:spPr>
         <p:txBody>
-          <a:bodyPr wrap="square" anchor="t" lIns="0" rIns="0" tIns="0" bIns="0">
+          <a:bodyPr wrap="square" lIns="0" tIns="0" rIns="0" bIns="0" anchor="t">
             <a:spAutoFit/>
           </a:bodyPr>
           <a:lstStyle/>
@@ -9603,7 +9765,7 @@
           <a:noFill/>
         </p:spPr>
         <p:txBody>
-          <a:bodyPr wrap="square" anchor="t" lIns="0" rIns="0" tIns="0" bIns="0">
+          <a:bodyPr wrap="square" lIns="0" tIns="0" rIns="0" bIns="0" anchor="t">
             <a:spAutoFit/>
           </a:bodyPr>
           <a:lstStyle/>
@@ -9705,6 +9867,7 @@
           <a:lstStyle/>
           <a:p>
             <a:pPr algn="ctr"/>
+            <a:endParaRPr/>
           </a:p>
         </p:txBody>
       </p:sp>
@@ -9753,6 +9916,7 @@
           <a:lstStyle/>
           <a:p>
             <a:pPr algn="ctr"/>
+            <a:endParaRPr/>
           </a:p>
         </p:txBody>
       </p:sp>
@@ -9773,7 +9937,7 @@
           <a:noFill/>
         </p:spPr>
         <p:txBody>
-          <a:bodyPr wrap="square" anchor="t" lIns="0" rIns="0" tIns="0" bIns="0">
+          <a:bodyPr wrap="square" lIns="0" tIns="0" rIns="0" bIns="0" anchor="t">
             <a:spAutoFit/>
           </a:bodyPr>
           <a:lstStyle/>
@@ -9812,7 +9976,7 @@
           <a:noFill/>
         </p:spPr>
         <p:txBody>
-          <a:bodyPr wrap="square" anchor="t" lIns="0" rIns="0" tIns="0" bIns="0">
+          <a:bodyPr wrap="square" lIns="0" tIns="0" rIns="0" bIns="0" anchor="t">
             <a:spAutoFit/>
           </a:bodyPr>
           <a:lstStyle/>
@@ -9879,6 +10043,7 @@
           <a:lstStyle/>
           <a:p>
             <a:pPr algn="ctr"/>
+            <a:endParaRPr/>
           </a:p>
         </p:txBody>
       </p:sp>
@@ -9927,6 +10092,7 @@
           <a:lstStyle/>
           <a:p>
             <a:pPr algn="ctr"/>
+            <a:endParaRPr/>
           </a:p>
         </p:txBody>
       </p:sp>
@@ -9947,7 +10113,7 @@
           <a:noFill/>
         </p:spPr>
         <p:txBody>
-          <a:bodyPr wrap="square" anchor="t" lIns="0" rIns="0" tIns="0" bIns="0">
+          <a:bodyPr wrap="square" lIns="0" tIns="0" rIns="0" bIns="0" anchor="t">
             <a:spAutoFit/>
           </a:bodyPr>
           <a:lstStyle/>
@@ -9986,7 +10152,7 @@
           <a:noFill/>
         </p:spPr>
         <p:txBody>
-          <a:bodyPr wrap="square" anchor="t" lIns="0" rIns="0" tIns="0" bIns="0">
+          <a:bodyPr wrap="square" lIns="0" tIns="0" rIns="0" bIns="0" anchor="t">
             <a:spAutoFit/>
           </a:bodyPr>
           <a:lstStyle/>
@@ -10053,6 +10219,7 @@
           <a:lstStyle/>
           <a:p>
             <a:pPr algn="ctr"/>
+            <a:endParaRPr/>
           </a:p>
         </p:txBody>
       </p:sp>
@@ -10101,6 +10268,7 @@
           <a:lstStyle/>
           <a:p>
             <a:pPr algn="ctr"/>
+            <a:endParaRPr/>
           </a:p>
         </p:txBody>
       </p:sp>
@@ -10121,7 +10289,7 @@
           <a:noFill/>
         </p:spPr>
         <p:txBody>
-          <a:bodyPr wrap="square" anchor="t" lIns="0" rIns="0" tIns="0" bIns="0">
+          <a:bodyPr wrap="square" lIns="0" tIns="0" rIns="0" bIns="0" anchor="t">
             <a:spAutoFit/>
           </a:bodyPr>
           <a:lstStyle/>
@@ -10160,7 +10328,7 @@
           <a:noFill/>
         </p:spPr>
         <p:txBody>
-          <a:bodyPr wrap="square" anchor="t" lIns="0" rIns="0" tIns="0" bIns="0">
+          <a:bodyPr wrap="square" lIns="0" tIns="0" rIns="0" bIns="0" anchor="t">
             <a:spAutoFit/>
           </a:bodyPr>
           <a:lstStyle/>
@@ -10227,6 +10395,7 @@
           <a:lstStyle/>
           <a:p>
             <a:pPr algn="ctr"/>
+            <a:endParaRPr/>
           </a:p>
         </p:txBody>
       </p:sp>
@@ -10275,6 +10444,7 @@
           <a:lstStyle/>
           <a:p>
             <a:pPr algn="ctr"/>
+            <a:endParaRPr/>
           </a:p>
         </p:txBody>
       </p:sp>
@@ -10295,7 +10465,7 @@
           <a:noFill/>
         </p:spPr>
         <p:txBody>
-          <a:bodyPr wrap="square" anchor="t" lIns="0" rIns="0" tIns="0" bIns="0">
+          <a:bodyPr wrap="square" lIns="0" tIns="0" rIns="0" bIns="0" anchor="t">
             <a:spAutoFit/>
           </a:bodyPr>
           <a:lstStyle/>
@@ -10334,7 +10504,7 @@
           <a:noFill/>
         </p:spPr>
         <p:txBody>
-          <a:bodyPr wrap="square" anchor="t" lIns="0" rIns="0" tIns="0" bIns="0">
+          <a:bodyPr wrap="square" lIns="0" tIns="0" rIns="0" bIns="0" anchor="t">
             <a:spAutoFit/>
           </a:bodyPr>
           <a:lstStyle/>
@@ -10401,6 +10571,7 @@
           <a:lstStyle/>
           <a:p>
             <a:pPr algn="ctr"/>
+            <a:endParaRPr/>
           </a:p>
         </p:txBody>
       </p:sp>
@@ -10449,6 +10620,7 @@
           <a:lstStyle/>
           <a:p>
             <a:pPr algn="ctr"/>
+            <a:endParaRPr/>
           </a:p>
         </p:txBody>
       </p:sp>
@@ -10469,7 +10641,7 @@
           <a:noFill/>
         </p:spPr>
         <p:txBody>
-          <a:bodyPr wrap="square" anchor="t" lIns="0" rIns="0" tIns="0" bIns="0">
+          <a:bodyPr wrap="square" lIns="0" tIns="0" rIns="0" bIns="0" anchor="t">
             <a:spAutoFit/>
           </a:bodyPr>
           <a:lstStyle/>
@@ -10508,7 +10680,7 @@
           <a:noFill/>
         </p:spPr>
         <p:txBody>
-          <a:bodyPr wrap="square" anchor="t" lIns="0" rIns="0" tIns="0" bIns="0">
+          <a:bodyPr wrap="square" lIns="0" tIns="0" rIns="0" bIns="0" anchor="t">
             <a:spAutoFit/>
           </a:bodyPr>
           <a:lstStyle/>
@@ -10575,6 +10747,7 @@
           <a:lstStyle/>
           <a:p>
             <a:pPr algn="ctr"/>
+            <a:endParaRPr/>
           </a:p>
         </p:txBody>
       </p:sp>
@@ -10623,6 +10796,7 @@
           <a:lstStyle/>
           <a:p>
             <a:pPr algn="ctr"/>
+            <a:endParaRPr/>
           </a:p>
         </p:txBody>
       </p:sp>
@@ -10643,7 +10817,7 @@
           <a:noFill/>
         </p:spPr>
         <p:txBody>
-          <a:bodyPr wrap="square" anchor="t" lIns="0" rIns="0" tIns="0" bIns="0">
+          <a:bodyPr wrap="square" lIns="0" tIns="0" rIns="0" bIns="0" anchor="t">
             <a:spAutoFit/>
           </a:bodyPr>
           <a:lstStyle/>
@@ -10682,7 +10856,7 @@
           <a:noFill/>
         </p:spPr>
         <p:txBody>
-          <a:bodyPr wrap="square" anchor="t" lIns="0" rIns="0" tIns="0" bIns="0">
+          <a:bodyPr wrap="square" lIns="0" tIns="0" rIns="0" bIns="0" anchor="t">
             <a:spAutoFit/>
           </a:bodyPr>
           <a:lstStyle/>
@@ -10713,7 +10887,7 @@
 </file>
 
 <file path=ppt/slides/slide15.xml><?xml version="1.0" encoding="utf-8"?>
-<p:sld xmlns:a="http://schemas.openxmlformats.org/drawingml/2006/main" xmlns:p="http://schemas.openxmlformats.org/presentationml/2006/main" xmlns:r="http://schemas.openxmlformats.org/officeDocument/2006/relationships">
+<p:sld xmlns:a="http://schemas.openxmlformats.org/drawingml/2006/main" xmlns:r="http://schemas.openxmlformats.org/officeDocument/2006/relationships" xmlns:p="http://schemas.openxmlformats.org/presentationml/2006/main">
   <p:cSld>
     <p:spTree>
       <p:nvGrpSpPr>
@@ -10721,7 +10895,14 @@
         <p:cNvGrpSpPr/>
         <p:nvPr/>
       </p:nvGrpSpPr>
-      <p:grpSpPr/>
+      <p:grpSpPr>
+        <a:xfrm>
+          <a:off x="0" y="0"/>
+          <a:ext cx="0" cy="0"/>
+          <a:chOff x="0" y="0"/>
+          <a:chExt cx="0" cy="0"/>
+        </a:xfrm>
+      </p:grpSpPr>
       <p:sp>
         <p:nvSpPr>
           <p:cNvPr id="2" name="Rectangle 1"/>
@@ -10763,6 +10944,7 @@
           <a:lstStyle/>
           <a:p>
             <a:pPr algn="ctr"/>
+            <a:endParaRPr/>
           </a:p>
         </p:txBody>
       </p:sp>
@@ -10807,6 +10989,7 @@
           <a:lstStyle/>
           <a:p>
             <a:pPr algn="ctr"/>
+            <a:endParaRPr/>
           </a:p>
         </p:txBody>
       </p:sp>
@@ -10827,7 +11010,7 @@
           <a:noFill/>
         </p:spPr>
         <p:txBody>
-          <a:bodyPr wrap="square" anchor="t" lIns="0" rIns="0" tIns="0" bIns="0">
+          <a:bodyPr wrap="square" lIns="0" tIns="0" rIns="0" bIns="0" anchor="t">
             <a:spAutoFit/>
           </a:bodyPr>
           <a:lstStyle/>
@@ -10866,7 +11049,7 @@
           <a:noFill/>
         </p:spPr>
         <p:txBody>
-          <a:bodyPr wrap="square" anchor="t" lIns="0" rIns="0" tIns="0" bIns="0">
+          <a:bodyPr wrap="square" lIns="0" tIns="0" rIns="0" bIns="0" anchor="t">
             <a:spAutoFit/>
           </a:bodyPr>
           <a:lstStyle/>
@@ -10905,7 +11088,7 @@
           <a:noFill/>
         </p:spPr>
         <p:txBody>
-          <a:bodyPr wrap="square" anchor="t" lIns="0" rIns="0" tIns="0" bIns="0">
+          <a:bodyPr wrap="square" lIns="0" tIns="0" rIns="0" bIns="0" anchor="t">
             <a:spAutoFit/>
           </a:bodyPr>
           <a:lstStyle/>
@@ -10944,7 +11127,7 @@
           <a:noFill/>
         </p:spPr>
         <p:txBody>
-          <a:bodyPr wrap="square" anchor="t" lIns="0" rIns="0" tIns="0" bIns="0">
+          <a:bodyPr wrap="square" lIns="0" tIns="0" rIns="0" bIns="0" anchor="t">
             <a:spAutoFit/>
           </a:bodyPr>
           <a:lstStyle/>
@@ -10983,7 +11166,7 @@
           <a:noFill/>
         </p:spPr>
         <p:txBody>
-          <a:bodyPr wrap="square" anchor="t" lIns="0" rIns="0" tIns="0" bIns="0">
+          <a:bodyPr wrap="square" lIns="0" tIns="0" rIns="0" bIns="0" anchor="t">
             <a:spAutoFit/>
           </a:bodyPr>
           <a:lstStyle/>
@@ -11085,6 +11268,7 @@
           <a:lstStyle/>
           <a:p>
             <a:pPr algn="ctr"/>
+            <a:endParaRPr/>
           </a:p>
         </p:txBody>
       </p:sp>
@@ -11129,7 +11313,7 @@
           <a:noFill/>
         </p:spPr>
         <p:txBody>
-          <a:bodyPr wrap="square" anchor="t" lIns="0" rIns="0" tIns="0" bIns="0">
+          <a:bodyPr wrap="square" lIns="0" tIns="0" rIns="0" bIns="0" anchor="t">
             <a:spAutoFit/>
           </a:bodyPr>
           <a:lstStyle/>
@@ -11295,7 +11479,7 @@
 </file>
 
 <file path=ppt/slides/slide16.xml><?xml version="1.0" encoding="utf-8"?>
-<p:sld xmlns:a="http://schemas.openxmlformats.org/drawingml/2006/main" xmlns:p="http://schemas.openxmlformats.org/presentationml/2006/main" xmlns:r="http://schemas.openxmlformats.org/officeDocument/2006/relationships">
+<p:sld xmlns:a="http://schemas.openxmlformats.org/drawingml/2006/main" xmlns:r="http://schemas.openxmlformats.org/officeDocument/2006/relationships" xmlns:p="http://schemas.openxmlformats.org/presentationml/2006/main">
   <p:cSld>
     <p:spTree>
       <p:nvGrpSpPr>
@@ -11303,7 +11487,14 @@
         <p:cNvGrpSpPr/>
         <p:nvPr/>
       </p:nvGrpSpPr>
-      <p:grpSpPr/>
+      <p:grpSpPr>
+        <a:xfrm>
+          <a:off x="0" y="0"/>
+          <a:ext cx="0" cy="0"/>
+          <a:chOff x="0" y="0"/>
+          <a:chExt cx="0" cy="0"/>
+        </a:xfrm>
+      </p:grpSpPr>
       <p:sp>
         <p:nvSpPr>
           <p:cNvPr id="2" name="Rectangle 1"/>
@@ -11345,6 +11536,7 @@
           <a:lstStyle/>
           <a:p>
             <a:pPr algn="ctr"/>
+            <a:endParaRPr/>
           </a:p>
         </p:txBody>
       </p:sp>
@@ -11389,6 +11581,7 @@
           <a:lstStyle/>
           <a:p>
             <a:pPr algn="ctr"/>
+            <a:endParaRPr/>
           </a:p>
         </p:txBody>
       </p:sp>
@@ -11409,7 +11602,7 @@
           <a:noFill/>
         </p:spPr>
         <p:txBody>
-          <a:bodyPr wrap="square" anchor="t" lIns="0" rIns="0" tIns="0" bIns="0">
+          <a:bodyPr wrap="square" lIns="0" tIns="0" rIns="0" bIns="0" anchor="t">
             <a:spAutoFit/>
           </a:bodyPr>
           <a:lstStyle/>
@@ -11448,7 +11641,7 @@
           <a:noFill/>
         </p:spPr>
         <p:txBody>
-          <a:bodyPr wrap="square" anchor="t" lIns="0" rIns="0" tIns="0" bIns="0">
+          <a:bodyPr wrap="square" lIns="0" tIns="0" rIns="0" bIns="0" anchor="t">
             <a:spAutoFit/>
           </a:bodyPr>
           <a:lstStyle/>
@@ -11487,7 +11680,7 @@
           <a:noFill/>
         </p:spPr>
         <p:txBody>
-          <a:bodyPr wrap="square" anchor="t" lIns="0" rIns="0" tIns="0" bIns="0">
+          <a:bodyPr wrap="square" lIns="0" tIns="0" rIns="0" bIns="0" anchor="t">
             <a:spAutoFit/>
           </a:bodyPr>
           <a:lstStyle/>
@@ -11526,7 +11719,7 @@
           <a:noFill/>
         </p:spPr>
         <p:txBody>
-          <a:bodyPr wrap="square" anchor="t" lIns="0" rIns="0" tIns="0" bIns="0">
+          <a:bodyPr wrap="square" lIns="0" tIns="0" rIns="0" bIns="0" anchor="t">
             <a:spAutoFit/>
           </a:bodyPr>
           <a:lstStyle/>
@@ -11565,7 +11758,7 @@
           <a:noFill/>
         </p:spPr>
         <p:txBody>
-          <a:bodyPr wrap="square" anchor="t" lIns="0" rIns="0" tIns="0" bIns="0">
+          <a:bodyPr wrap="square" lIns="0" tIns="0" rIns="0" bIns="0" anchor="t">
             <a:spAutoFit/>
           </a:bodyPr>
           <a:lstStyle/>
@@ -11667,6 +11860,7 @@
           <a:lstStyle/>
           <a:p>
             <a:pPr algn="ctr"/>
+            <a:endParaRPr/>
           </a:p>
         </p:txBody>
       </p:sp>
@@ -11711,7 +11905,7 @@
           <a:noFill/>
         </p:spPr>
         <p:txBody>
-          <a:bodyPr wrap="square" anchor="t" lIns="0" rIns="0" tIns="0" bIns="0">
+          <a:bodyPr wrap="square" lIns="0" tIns="0" rIns="0" bIns="0" anchor="t">
             <a:spAutoFit/>
           </a:bodyPr>
           <a:lstStyle/>
@@ -11778,6 +11972,7 @@
           <a:lstStyle/>
           <a:p>
             <a:pPr algn="ctr"/>
+            <a:endParaRPr/>
           </a:p>
         </p:txBody>
       </p:sp>
@@ -11822,7 +12017,7 @@
           <a:noFill/>
         </p:spPr>
         <p:txBody>
-          <a:bodyPr wrap="square" anchor="t" lIns="0" rIns="0" tIns="0" bIns="0">
+          <a:bodyPr wrap="square" lIns="0" tIns="0" rIns="0" bIns="0" anchor="t">
             <a:spAutoFit/>
           </a:bodyPr>
           <a:lstStyle/>
@@ -11853,7 +12048,7 @@
 </file>
 
 <file path=ppt/slides/slide17.xml><?xml version="1.0" encoding="utf-8"?>
-<p:sld xmlns:a="http://schemas.openxmlformats.org/drawingml/2006/main" xmlns:p="http://schemas.openxmlformats.org/presentationml/2006/main" xmlns:r="http://schemas.openxmlformats.org/officeDocument/2006/relationships">
+<p:sld xmlns:a="http://schemas.openxmlformats.org/drawingml/2006/main" xmlns:r="http://schemas.openxmlformats.org/officeDocument/2006/relationships" xmlns:p="http://schemas.openxmlformats.org/presentationml/2006/main">
   <p:cSld>
     <p:spTree>
       <p:nvGrpSpPr>
@@ -11861,7 +12056,14 @@
         <p:cNvGrpSpPr/>
         <p:nvPr/>
       </p:nvGrpSpPr>
-      <p:grpSpPr/>
+      <p:grpSpPr>
+        <a:xfrm>
+          <a:off x="0" y="0"/>
+          <a:ext cx="0" cy="0"/>
+          <a:chOff x="0" y="0"/>
+          <a:chExt cx="0" cy="0"/>
+        </a:xfrm>
+      </p:grpSpPr>
       <p:sp>
         <p:nvSpPr>
           <p:cNvPr id="2" name="Rectangle 1"/>
@@ -11903,6 +12105,7 @@
           <a:lstStyle/>
           <a:p>
             <a:pPr algn="ctr"/>
+            <a:endParaRPr/>
           </a:p>
         </p:txBody>
       </p:sp>
@@ -11947,6 +12150,7 @@
           <a:lstStyle/>
           <a:p>
             <a:pPr algn="ctr"/>
+            <a:endParaRPr/>
           </a:p>
         </p:txBody>
       </p:sp>
@@ -11967,7 +12171,7 @@
           <a:noFill/>
         </p:spPr>
         <p:txBody>
-          <a:bodyPr wrap="square" anchor="t" lIns="0" rIns="0" tIns="0" bIns="0">
+          <a:bodyPr wrap="square" lIns="0" tIns="0" rIns="0" bIns="0" anchor="t">
             <a:spAutoFit/>
           </a:bodyPr>
           <a:lstStyle/>
@@ -12006,7 +12210,7 @@
           <a:noFill/>
         </p:spPr>
         <p:txBody>
-          <a:bodyPr wrap="square" anchor="t" lIns="0" rIns="0" tIns="0" bIns="0">
+          <a:bodyPr wrap="square" lIns="0" tIns="0" rIns="0" bIns="0" anchor="t">
             <a:spAutoFit/>
           </a:bodyPr>
           <a:lstStyle/>
@@ -12045,7 +12249,7 @@
           <a:noFill/>
         </p:spPr>
         <p:txBody>
-          <a:bodyPr wrap="square" anchor="t" lIns="0" rIns="0" tIns="0" bIns="0">
+          <a:bodyPr wrap="square" lIns="0" tIns="0" rIns="0" bIns="0" anchor="t">
             <a:spAutoFit/>
           </a:bodyPr>
           <a:lstStyle/>
@@ -12084,7 +12288,7 @@
           <a:noFill/>
         </p:spPr>
         <p:txBody>
-          <a:bodyPr wrap="square" anchor="t" lIns="0" rIns="0" tIns="0" bIns="0">
+          <a:bodyPr wrap="square" lIns="0" tIns="0" rIns="0" bIns="0" anchor="t">
             <a:spAutoFit/>
           </a:bodyPr>
           <a:lstStyle/>
@@ -12180,7 +12384,7 @@
           </a:fontRef>
         </p:style>
         <p:txBody>
-          <a:bodyPr rtlCol="0" anchor="ctr" wrap="square"/>
+          <a:bodyPr wrap="square" rtlCol="0" anchor="ctr"/>
           <a:lstStyle/>
           <a:p>
             <a:pPr algn="ctr"/>
@@ -12237,6 +12441,7 @@
           <a:lstStyle/>
           <a:p>
             <a:pPr algn="ctr"/>
+            <a:endParaRPr/>
           </a:p>
         </p:txBody>
       </p:sp>
@@ -12279,7 +12484,7 @@
           </a:fontRef>
         </p:style>
         <p:txBody>
-          <a:bodyPr rtlCol="0" anchor="ctr" wrap="square"/>
+          <a:bodyPr wrap="square" rtlCol="0" anchor="ctr"/>
           <a:lstStyle/>
           <a:p>
             <a:pPr algn="ctr"/>
@@ -12336,6 +12541,7 @@
           <a:lstStyle/>
           <a:p>
             <a:pPr algn="ctr"/>
+            <a:endParaRPr/>
           </a:p>
         </p:txBody>
       </p:sp>
@@ -12378,7 +12584,7 @@
           </a:fontRef>
         </p:style>
         <p:txBody>
-          <a:bodyPr rtlCol="0" anchor="ctr" wrap="square"/>
+          <a:bodyPr wrap="square" rtlCol="0" anchor="ctr"/>
           <a:lstStyle/>
           <a:p>
             <a:pPr algn="ctr"/>
@@ -12435,6 +12641,7 @@
           <a:lstStyle/>
           <a:p>
             <a:pPr algn="ctr"/>
+            <a:endParaRPr/>
           </a:p>
         </p:txBody>
       </p:sp>
@@ -12477,7 +12684,7 @@
           </a:fontRef>
         </p:style>
         <p:txBody>
-          <a:bodyPr rtlCol="0" anchor="ctr" wrap="square"/>
+          <a:bodyPr wrap="square" rtlCol="0" anchor="ctr"/>
           <a:lstStyle/>
           <a:p>
             <a:pPr algn="ctr"/>
@@ -12534,6 +12741,7 @@
           <a:lstStyle/>
           <a:p>
             <a:pPr algn="ctr"/>
+            <a:endParaRPr/>
           </a:p>
         </p:txBody>
       </p:sp>
@@ -12576,7 +12784,7 @@
           </a:fontRef>
         </p:style>
         <p:txBody>
-          <a:bodyPr rtlCol="0" anchor="ctr" wrap="square"/>
+          <a:bodyPr wrap="square" rtlCol="0" anchor="ctr"/>
           <a:lstStyle/>
           <a:p>
             <a:pPr algn="ctr"/>
@@ -12632,7 +12840,7 @@
               <a:t>●  </a:t>
             </a:r>
             <a:r>
-              <a:rPr b="1" sz="1400">
+              <a:rPr sz="1400" b="1">
                 <a:solidFill>
                   <a:srgbClr val="0F172A"/>
                 </a:solidFill>
@@ -12669,7 +12877,7 @@
               <a:t>●  </a:t>
             </a:r>
             <a:r>
-              <a:rPr b="1" sz="1400">
+              <a:rPr sz="1400" b="1">
                 <a:solidFill>
                   <a:srgbClr val="0F172A"/>
                 </a:solidFill>
@@ -12706,7 +12914,7 @@
               <a:t>●  </a:t>
             </a:r>
             <a:r>
-              <a:rPr b="1" sz="1400">
+              <a:rPr sz="1400" b="1">
                 <a:solidFill>
                   <a:srgbClr val="0F172A"/>
                 </a:solidFill>
@@ -12743,7 +12951,7 @@
               <a:t>●  </a:t>
             </a:r>
             <a:r>
-              <a:rPr b="1" sz="1400">
+              <a:rPr sz="1400" b="1">
                 <a:solidFill>
                   <a:srgbClr val="0F172A"/>
                 </a:solidFill>
@@ -12772,7 +12980,7 @@
 </file>
 
 <file path=ppt/slides/slide18.xml><?xml version="1.0" encoding="utf-8"?>
-<p:sld xmlns:a="http://schemas.openxmlformats.org/drawingml/2006/main" xmlns:p="http://schemas.openxmlformats.org/presentationml/2006/main" xmlns:r="http://schemas.openxmlformats.org/officeDocument/2006/relationships">
+<p:sld xmlns:a="http://schemas.openxmlformats.org/drawingml/2006/main" xmlns:r="http://schemas.openxmlformats.org/officeDocument/2006/relationships" xmlns:p="http://schemas.openxmlformats.org/presentationml/2006/main">
   <p:cSld>
     <p:spTree>
       <p:nvGrpSpPr>
@@ -12780,7 +12988,14 @@
         <p:cNvGrpSpPr/>
         <p:nvPr/>
       </p:nvGrpSpPr>
-      <p:grpSpPr/>
+      <p:grpSpPr>
+        <a:xfrm>
+          <a:off x="0" y="0"/>
+          <a:ext cx="0" cy="0"/>
+          <a:chOff x="0" y="0"/>
+          <a:chExt cx="0" cy="0"/>
+        </a:xfrm>
+      </p:grpSpPr>
       <p:sp>
         <p:nvSpPr>
           <p:cNvPr id="2" name="Rectangle 1"/>
@@ -12822,6 +13037,7 @@
           <a:lstStyle/>
           <a:p>
             <a:pPr algn="ctr"/>
+            <a:endParaRPr/>
           </a:p>
         </p:txBody>
       </p:sp>
@@ -12866,6 +13082,7 @@
           <a:lstStyle/>
           <a:p>
             <a:pPr algn="ctr"/>
+            <a:endParaRPr/>
           </a:p>
         </p:txBody>
       </p:sp>
@@ -12886,7 +13103,7 @@
           <a:noFill/>
         </p:spPr>
         <p:txBody>
-          <a:bodyPr wrap="square" anchor="t" lIns="0" rIns="0" tIns="0" bIns="0">
+          <a:bodyPr wrap="square" lIns="0" tIns="0" rIns="0" bIns="0" anchor="t">
             <a:spAutoFit/>
           </a:bodyPr>
           <a:lstStyle/>
@@ -12925,7 +13142,7 @@
           <a:noFill/>
         </p:spPr>
         <p:txBody>
-          <a:bodyPr wrap="square" anchor="t" lIns="0" rIns="0" tIns="0" bIns="0">
+          <a:bodyPr wrap="square" lIns="0" tIns="0" rIns="0" bIns="0" anchor="t">
             <a:spAutoFit/>
           </a:bodyPr>
           <a:lstStyle/>
@@ -12964,7 +13181,7 @@
           <a:noFill/>
         </p:spPr>
         <p:txBody>
-          <a:bodyPr wrap="square" anchor="t" lIns="0" rIns="0" tIns="0" bIns="0">
+          <a:bodyPr wrap="square" lIns="0" tIns="0" rIns="0" bIns="0" anchor="t">
             <a:spAutoFit/>
           </a:bodyPr>
           <a:lstStyle/>
@@ -13003,7 +13220,7 @@
           <a:noFill/>
         </p:spPr>
         <p:txBody>
-          <a:bodyPr wrap="square" anchor="t" lIns="0" rIns="0" tIns="0" bIns="0">
+          <a:bodyPr wrap="square" lIns="0" tIns="0" rIns="0" bIns="0" anchor="t">
             <a:spAutoFit/>
           </a:bodyPr>
           <a:lstStyle/>
@@ -13077,7 +13294,7 @@
           <a:noFill/>
         </p:spPr>
         <p:txBody>
-          <a:bodyPr wrap="square" anchor="t" lIns="0" rIns="0" tIns="0" bIns="0">
+          <a:bodyPr wrap="square" lIns="0" tIns="0" rIns="0" bIns="0" anchor="t">
             <a:spAutoFit/>
           </a:bodyPr>
           <a:lstStyle/>
@@ -13335,7 +13552,7 @@
           <a:noFill/>
         </p:spPr>
         <p:txBody>
-          <a:bodyPr wrap="square" anchor="t" lIns="0" rIns="0" tIns="0" bIns="0">
+          <a:bodyPr wrap="square" lIns="0" tIns="0" rIns="0" bIns="0" anchor="t">
             <a:spAutoFit/>
           </a:bodyPr>
           <a:lstStyle/>
@@ -13398,6 +13615,7 @@
           <a:lstStyle/>
           <a:p>
             <a:pPr algn="ctr"/>
+            <a:endParaRPr/>
           </a:p>
         </p:txBody>
       </p:sp>
@@ -13418,7 +13636,7 @@
           <a:noFill/>
         </p:spPr>
         <p:txBody>
-          <a:bodyPr wrap="square" anchor="t" lIns="0" rIns="0" tIns="0" bIns="0">
+          <a:bodyPr wrap="square" lIns="0" tIns="0" rIns="0" bIns="0" anchor="t">
             <a:spAutoFit/>
           </a:bodyPr>
           <a:lstStyle/>
@@ -13481,6 +13699,7 @@
           <a:lstStyle/>
           <a:p>
             <a:pPr algn="ctr"/>
+            <a:endParaRPr/>
           </a:p>
         </p:txBody>
       </p:sp>
@@ -13501,7 +13720,7 @@
           <a:noFill/>
         </p:spPr>
         <p:txBody>
-          <a:bodyPr wrap="square" anchor="t" lIns="0" rIns="0" tIns="0" bIns="0">
+          <a:bodyPr wrap="square" lIns="0" tIns="0" rIns="0" bIns="0" anchor="t">
             <a:spAutoFit/>
           </a:bodyPr>
           <a:lstStyle/>
@@ -13564,6 +13783,7 @@
           <a:lstStyle/>
           <a:p>
             <a:pPr algn="ctr"/>
+            <a:endParaRPr/>
           </a:p>
         </p:txBody>
       </p:sp>
@@ -13584,7 +13804,7 @@
           <a:noFill/>
         </p:spPr>
         <p:txBody>
-          <a:bodyPr wrap="square" anchor="t" lIns="0" rIns="0" tIns="0" bIns="0">
+          <a:bodyPr wrap="square" lIns="0" tIns="0" rIns="0" bIns="0" anchor="t">
             <a:spAutoFit/>
           </a:bodyPr>
           <a:lstStyle/>
@@ -13647,6 +13867,7 @@
           <a:lstStyle/>
           <a:p>
             <a:pPr algn="ctr"/>
+            <a:endParaRPr/>
           </a:p>
         </p:txBody>
       </p:sp>
@@ -13667,7 +13888,7 @@
           <a:noFill/>
         </p:spPr>
         <p:txBody>
-          <a:bodyPr wrap="square" anchor="t" lIns="0" rIns="0" tIns="0" bIns="0">
+          <a:bodyPr wrap="square" lIns="0" tIns="0" rIns="0" bIns="0" anchor="t">
             <a:spAutoFit/>
           </a:bodyPr>
           <a:lstStyle/>
@@ -13734,6 +13955,7 @@
           <a:lstStyle/>
           <a:p>
             <a:pPr algn="ctr"/>
+            <a:endParaRPr/>
           </a:p>
         </p:txBody>
       </p:sp>
@@ -13754,7 +13976,7 @@
           <a:noFill/>
         </p:spPr>
         <p:txBody>
-          <a:bodyPr wrap="square" anchor="t" lIns="0" rIns="0" tIns="0" bIns="0">
+          <a:bodyPr wrap="square" lIns="0" tIns="0" rIns="0" bIns="0" anchor="t">
             <a:spAutoFit/>
           </a:bodyPr>
           <a:lstStyle/>
@@ -13785,7 +14007,7 @@
 </file>
 
 <file path=ppt/slides/slide19.xml><?xml version="1.0" encoding="utf-8"?>
-<p:sld xmlns:a="http://schemas.openxmlformats.org/drawingml/2006/main" xmlns:p="http://schemas.openxmlformats.org/presentationml/2006/main" xmlns:r="http://schemas.openxmlformats.org/officeDocument/2006/relationships">
+<p:sld xmlns:a="http://schemas.openxmlformats.org/drawingml/2006/main" xmlns:r="http://schemas.openxmlformats.org/officeDocument/2006/relationships" xmlns:p="http://schemas.openxmlformats.org/presentationml/2006/main">
   <p:cSld>
     <p:spTree>
       <p:nvGrpSpPr>
@@ -13793,7 +14015,14 @@
         <p:cNvGrpSpPr/>
         <p:nvPr/>
       </p:nvGrpSpPr>
-      <p:grpSpPr/>
+      <p:grpSpPr>
+        <a:xfrm>
+          <a:off x="0" y="0"/>
+          <a:ext cx="0" cy="0"/>
+          <a:chOff x="0" y="0"/>
+          <a:chExt cx="0" cy="0"/>
+        </a:xfrm>
+      </p:grpSpPr>
       <p:sp>
         <p:nvSpPr>
           <p:cNvPr id="2" name="Rectangle 1"/>
@@ -13835,6 +14064,7 @@
           <a:lstStyle/>
           <a:p>
             <a:pPr algn="ctr"/>
+            <a:endParaRPr/>
           </a:p>
         </p:txBody>
       </p:sp>
@@ -13879,6 +14109,7 @@
           <a:lstStyle/>
           <a:p>
             <a:pPr algn="ctr"/>
+            <a:endParaRPr/>
           </a:p>
         </p:txBody>
       </p:sp>
@@ -13899,7 +14130,7 @@
           <a:noFill/>
         </p:spPr>
         <p:txBody>
-          <a:bodyPr wrap="square" anchor="t" lIns="0" rIns="0" tIns="0" bIns="0">
+          <a:bodyPr wrap="square" lIns="0" tIns="0" rIns="0" bIns="0" anchor="t">
             <a:spAutoFit/>
           </a:bodyPr>
           <a:lstStyle/>
@@ -13938,7 +14169,7 @@
           <a:noFill/>
         </p:spPr>
         <p:txBody>
-          <a:bodyPr wrap="square" anchor="t" lIns="0" rIns="0" tIns="0" bIns="0">
+          <a:bodyPr wrap="square" lIns="0" tIns="0" rIns="0" bIns="0" anchor="t">
             <a:spAutoFit/>
           </a:bodyPr>
           <a:lstStyle/>
@@ -13977,7 +14208,7 @@
           <a:noFill/>
         </p:spPr>
         <p:txBody>
-          <a:bodyPr wrap="square" anchor="t" lIns="0" rIns="0" tIns="0" bIns="0">
+          <a:bodyPr wrap="square" lIns="0" tIns="0" rIns="0" bIns="0" anchor="t">
             <a:spAutoFit/>
           </a:bodyPr>
           <a:lstStyle/>
@@ -14016,7 +14247,7 @@
           <a:noFill/>
         </p:spPr>
         <p:txBody>
-          <a:bodyPr wrap="square" anchor="t" lIns="0" rIns="0" tIns="0" bIns="0">
+          <a:bodyPr wrap="square" lIns="0" tIns="0" rIns="0" bIns="0" anchor="t">
             <a:spAutoFit/>
           </a:bodyPr>
           <a:lstStyle/>
@@ -14118,6 +14349,7 @@
           <a:lstStyle/>
           <a:p>
             <a:pPr algn="ctr"/>
+            <a:endParaRPr/>
           </a:p>
         </p:txBody>
       </p:sp>
@@ -14162,6 +14394,7 @@
           <a:lstStyle/>
           <a:p>
             <a:pPr algn="ctr"/>
+            <a:endParaRPr/>
           </a:p>
         </p:txBody>
       </p:sp>
@@ -14182,7 +14415,7 @@
           <a:noFill/>
         </p:spPr>
         <p:txBody>
-          <a:bodyPr wrap="square" anchor="t" lIns="0" rIns="0" tIns="0" bIns="0">
+          <a:bodyPr wrap="square" lIns="0" tIns="0" rIns="0" bIns="0" anchor="t">
             <a:spAutoFit/>
           </a:bodyPr>
           <a:lstStyle/>
@@ -14384,6 +14617,7 @@
           <a:lstStyle/>
           <a:p>
             <a:pPr algn="ctr"/>
+            <a:endParaRPr/>
           </a:p>
         </p:txBody>
       </p:sp>
@@ -14428,6 +14662,7 @@
           <a:lstStyle/>
           <a:p>
             <a:pPr algn="ctr"/>
+            <a:endParaRPr/>
           </a:p>
         </p:txBody>
       </p:sp>
@@ -14448,7 +14683,7 @@
           <a:noFill/>
         </p:spPr>
         <p:txBody>
-          <a:bodyPr wrap="square" anchor="t" lIns="0" rIns="0" tIns="0" bIns="0">
+          <a:bodyPr wrap="square" lIns="0" tIns="0" rIns="0" bIns="0" anchor="t">
             <a:spAutoFit/>
           </a:bodyPr>
           <a:lstStyle/>
@@ -14622,6 +14857,7 @@
           <a:lstStyle/>
           <a:p>
             <a:pPr algn="ctr"/>
+            <a:endParaRPr/>
           </a:p>
         </p:txBody>
       </p:sp>
@@ -14666,6 +14902,7 @@
           <a:lstStyle/>
           <a:p>
             <a:pPr algn="ctr"/>
+            <a:endParaRPr/>
           </a:p>
         </p:txBody>
       </p:sp>
@@ -14686,7 +14923,7 @@
           <a:noFill/>
         </p:spPr>
         <p:txBody>
-          <a:bodyPr wrap="square" anchor="t" lIns="0" rIns="0" tIns="0" bIns="0">
+          <a:bodyPr wrap="square" lIns="0" tIns="0" rIns="0" bIns="0" anchor="t">
             <a:spAutoFit/>
           </a:bodyPr>
           <a:lstStyle/>
@@ -14852,7 +15089,7 @@
 </file>
 
 <file path=ppt/slides/slide2.xml><?xml version="1.0" encoding="utf-8"?>
-<p:sld xmlns:a="http://schemas.openxmlformats.org/drawingml/2006/main" xmlns:p="http://schemas.openxmlformats.org/presentationml/2006/main" xmlns:r="http://schemas.openxmlformats.org/officeDocument/2006/relationships">
+<p:sld xmlns:a="http://schemas.openxmlformats.org/drawingml/2006/main" xmlns:r="http://schemas.openxmlformats.org/officeDocument/2006/relationships" xmlns:p="http://schemas.openxmlformats.org/presentationml/2006/main">
   <p:cSld>
     <p:spTree>
       <p:nvGrpSpPr>
@@ -14860,7 +15097,14 @@
         <p:cNvGrpSpPr/>
         <p:nvPr/>
       </p:nvGrpSpPr>
-      <p:grpSpPr/>
+      <p:grpSpPr>
+        <a:xfrm>
+          <a:off x="0" y="0"/>
+          <a:ext cx="0" cy="0"/>
+          <a:chOff x="0" y="0"/>
+          <a:chExt cx="0" cy="0"/>
+        </a:xfrm>
+      </p:grpSpPr>
       <p:sp>
         <p:nvSpPr>
           <p:cNvPr id="2" name="Rectangle 1"/>
@@ -14902,6 +15146,7 @@
           <a:lstStyle/>
           <a:p>
             <a:pPr algn="ctr"/>
+            <a:endParaRPr/>
           </a:p>
         </p:txBody>
       </p:sp>
@@ -14946,6 +15191,7 @@
           <a:lstStyle/>
           <a:p>
             <a:pPr algn="ctr"/>
+            <a:endParaRPr/>
           </a:p>
         </p:txBody>
       </p:sp>
@@ -14966,7 +15212,7 @@
           <a:noFill/>
         </p:spPr>
         <p:txBody>
-          <a:bodyPr wrap="square" anchor="t" lIns="0" rIns="0" tIns="0" bIns="0">
+          <a:bodyPr wrap="square" lIns="0" tIns="0" rIns="0" bIns="0" anchor="t">
             <a:spAutoFit/>
           </a:bodyPr>
           <a:lstStyle/>
@@ -15005,7 +15251,7 @@
           <a:noFill/>
         </p:spPr>
         <p:txBody>
-          <a:bodyPr wrap="square" anchor="t" lIns="0" rIns="0" tIns="0" bIns="0">
+          <a:bodyPr wrap="square" lIns="0" tIns="0" rIns="0" bIns="0" anchor="t">
             <a:spAutoFit/>
           </a:bodyPr>
           <a:lstStyle/>
@@ -15044,7 +15290,7 @@
           <a:noFill/>
         </p:spPr>
         <p:txBody>
-          <a:bodyPr wrap="square" anchor="t" lIns="0" rIns="0" tIns="0" bIns="0">
+          <a:bodyPr wrap="square" lIns="0" tIns="0" rIns="0" bIns="0" anchor="t">
             <a:spAutoFit/>
           </a:bodyPr>
           <a:lstStyle/>
@@ -15083,7 +15329,7 @@
           <a:noFill/>
         </p:spPr>
         <p:txBody>
-          <a:bodyPr wrap="square" anchor="t" lIns="0" rIns="0" tIns="0" bIns="0">
+          <a:bodyPr wrap="square" lIns="0" tIns="0" rIns="0" bIns="0" anchor="t">
             <a:spAutoFit/>
           </a:bodyPr>
           <a:lstStyle/>
@@ -15185,6 +15431,7 @@
           <a:lstStyle/>
           <a:p>
             <a:pPr algn="ctr"/>
+            <a:endParaRPr/>
           </a:p>
         </p:txBody>
       </p:sp>
@@ -15205,7 +15452,7 @@
           <a:noFill/>
         </p:spPr>
         <p:txBody>
-          <a:bodyPr wrap="square" anchor="t" lIns="0" rIns="0" tIns="0" bIns="0">
+          <a:bodyPr wrap="square" lIns="0" tIns="0" rIns="0" bIns="0" anchor="t">
             <a:spAutoFit/>
           </a:bodyPr>
           <a:lstStyle/>
@@ -15244,7 +15491,7 @@
           <a:noFill/>
         </p:spPr>
         <p:txBody>
-          <a:bodyPr wrap="square" anchor="t" lIns="0" rIns="0" tIns="0" bIns="0">
+          <a:bodyPr wrap="square" lIns="0" tIns="0" rIns="0" bIns="0" anchor="t">
             <a:spAutoFit/>
           </a:bodyPr>
           <a:lstStyle/>
@@ -15311,6 +15558,7 @@
           <a:lstStyle/>
           <a:p>
             <a:pPr algn="ctr"/>
+            <a:endParaRPr/>
           </a:p>
         </p:txBody>
       </p:sp>
@@ -15331,7 +15579,7 @@
           <a:noFill/>
         </p:spPr>
         <p:txBody>
-          <a:bodyPr wrap="square" anchor="t" lIns="0" rIns="0" tIns="0" bIns="0">
+          <a:bodyPr wrap="square" lIns="0" tIns="0" rIns="0" bIns="0" anchor="t">
             <a:spAutoFit/>
           </a:bodyPr>
           <a:lstStyle/>
@@ -15370,7 +15618,7 @@
           <a:noFill/>
         </p:spPr>
         <p:txBody>
-          <a:bodyPr wrap="square" anchor="t" lIns="0" rIns="0" tIns="0" bIns="0">
+          <a:bodyPr wrap="square" lIns="0" tIns="0" rIns="0" bIns="0" anchor="t">
             <a:spAutoFit/>
           </a:bodyPr>
           <a:lstStyle/>
@@ -15437,6 +15685,7 @@
           <a:lstStyle/>
           <a:p>
             <a:pPr algn="ctr"/>
+            <a:endParaRPr/>
           </a:p>
         </p:txBody>
       </p:sp>
@@ -15457,7 +15706,7 @@
           <a:noFill/>
         </p:spPr>
         <p:txBody>
-          <a:bodyPr wrap="square" anchor="t" lIns="0" rIns="0" tIns="0" bIns="0">
+          <a:bodyPr wrap="square" lIns="0" tIns="0" rIns="0" bIns="0" anchor="t">
             <a:spAutoFit/>
           </a:bodyPr>
           <a:lstStyle/>
@@ -15496,7 +15745,7 @@
           <a:noFill/>
         </p:spPr>
         <p:txBody>
-          <a:bodyPr wrap="square" anchor="t" lIns="0" rIns="0" tIns="0" bIns="0">
+          <a:bodyPr wrap="square" lIns="0" tIns="0" rIns="0" bIns="0" anchor="t">
             <a:spAutoFit/>
           </a:bodyPr>
           <a:lstStyle/>
@@ -15563,6 +15812,7 @@
           <a:lstStyle/>
           <a:p>
             <a:pPr algn="ctr"/>
+            <a:endParaRPr/>
           </a:p>
         </p:txBody>
       </p:sp>
@@ -15583,7 +15833,7 @@
           <a:noFill/>
         </p:spPr>
         <p:txBody>
-          <a:bodyPr wrap="square" anchor="t" lIns="0" rIns="0" tIns="0" bIns="0">
+          <a:bodyPr wrap="square" lIns="0" tIns="0" rIns="0" bIns="0" anchor="t">
             <a:spAutoFit/>
           </a:bodyPr>
           <a:lstStyle/>
@@ -15622,7 +15872,7 @@
           <a:noFill/>
         </p:spPr>
         <p:txBody>
-          <a:bodyPr wrap="square" anchor="t" lIns="0" rIns="0" tIns="0" bIns="0">
+          <a:bodyPr wrap="square" lIns="0" tIns="0" rIns="0" bIns="0" anchor="t">
             <a:spAutoFit/>
           </a:bodyPr>
           <a:lstStyle/>
@@ -15689,6 +15939,7 @@
           <a:lstStyle/>
           <a:p>
             <a:pPr algn="ctr"/>
+            <a:endParaRPr/>
           </a:p>
         </p:txBody>
       </p:sp>
@@ -15709,7 +15960,7 @@
           <a:noFill/>
         </p:spPr>
         <p:txBody>
-          <a:bodyPr wrap="square" anchor="t" lIns="0" rIns="0" tIns="0" bIns="0">
+          <a:bodyPr wrap="square" lIns="0" tIns="0" rIns="0" bIns="0" anchor="t">
             <a:spAutoFit/>
           </a:bodyPr>
           <a:lstStyle/>
@@ -15748,7 +15999,7 @@
           <a:noFill/>
         </p:spPr>
         <p:txBody>
-          <a:bodyPr wrap="square" anchor="t" lIns="0" rIns="0" tIns="0" bIns="0">
+          <a:bodyPr wrap="square" lIns="0" tIns="0" rIns="0" bIns="0" anchor="t">
             <a:spAutoFit/>
           </a:bodyPr>
           <a:lstStyle/>
@@ -15815,6 +16066,7 @@
           <a:lstStyle/>
           <a:p>
             <a:pPr algn="ctr"/>
+            <a:endParaRPr/>
           </a:p>
         </p:txBody>
       </p:sp>
@@ -15835,7 +16087,7 @@
           <a:noFill/>
         </p:spPr>
         <p:txBody>
-          <a:bodyPr wrap="square" anchor="t" lIns="0" rIns="0" tIns="0" bIns="0">
+          <a:bodyPr wrap="square" lIns="0" tIns="0" rIns="0" bIns="0" anchor="t">
             <a:spAutoFit/>
           </a:bodyPr>
           <a:lstStyle/>
@@ -15874,7 +16126,7 @@
           <a:noFill/>
         </p:spPr>
         <p:txBody>
-          <a:bodyPr wrap="square" anchor="t" lIns="0" rIns="0" tIns="0" bIns="0">
+          <a:bodyPr wrap="square" lIns="0" tIns="0" rIns="0" bIns="0" anchor="t">
             <a:spAutoFit/>
           </a:bodyPr>
           <a:lstStyle/>
@@ -15941,6 +16193,7 @@
           <a:lstStyle/>
           <a:p>
             <a:pPr algn="ctr"/>
+            <a:endParaRPr/>
           </a:p>
         </p:txBody>
       </p:sp>
@@ -15961,7 +16214,7 @@
           <a:noFill/>
         </p:spPr>
         <p:txBody>
-          <a:bodyPr wrap="square" anchor="t" lIns="0" rIns="0" tIns="0" bIns="0">
+          <a:bodyPr wrap="square" lIns="0" tIns="0" rIns="0" bIns="0" anchor="t">
             <a:spAutoFit/>
           </a:bodyPr>
           <a:lstStyle/>
@@ -16000,7 +16253,7 @@
           <a:noFill/>
         </p:spPr>
         <p:txBody>
-          <a:bodyPr wrap="square" anchor="t" lIns="0" rIns="0" tIns="0" bIns="0">
+          <a:bodyPr wrap="square" lIns="0" tIns="0" rIns="0" bIns="0" anchor="t">
             <a:spAutoFit/>
           </a:bodyPr>
           <a:lstStyle/>
@@ -16067,6 +16320,7 @@
           <a:lstStyle/>
           <a:p>
             <a:pPr algn="ctr"/>
+            <a:endParaRPr/>
           </a:p>
         </p:txBody>
       </p:sp>
@@ -16087,7 +16341,7 @@
           <a:noFill/>
         </p:spPr>
         <p:txBody>
-          <a:bodyPr wrap="square" anchor="t" lIns="0" rIns="0" tIns="0" bIns="0">
+          <a:bodyPr wrap="square" lIns="0" tIns="0" rIns="0" bIns="0" anchor="t">
             <a:spAutoFit/>
           </a:bodyPr>
           <a:lstStyle/>
@@ -16126,7 +16380,7 @@
           <a:noFill/>
         </p:spPr>
         <p:txBody>
-          <a:bodyPr wrap="square" anchor="t" lIns="0" rIns="0" tIns="0" bIns="0">
+          <a:bodyPr wrap="square" lIns="0" tIns="0" rIns="0" bIns="0" anchor="t">
             <a:spAutoFit/>
           </a:bodyPr>
           <a:lstStyle/>
@@ -16193,6 +16447,7 @@
           <a:lstStyle/>
           <a:p>
             <a:pPr algn="ctr"/>
+            <a:endParaRPr/>
           </a:p>
         </p:txBody>
       </p:sp>
@@ -16213,7 +16468,7 @@
           <a:noFill/>
         </p:spPr>
         <p:txBody>
-          <a:bodyPr wrap="square" anchor="t" lIns="0" rIns="0" tIns="0" bIns="0">
+          <a:bodyPr wrap="square" lIns="0" tIns="0" rIns="0" bIns="0" anchor="t">
             <a:spAutoFit/>
           </a:bodyPr>
           <a:lstStyle/>
@@ -16252,7 +16507,7 @@
           <a:noFill/>
         </p:spPr>
         <p:txBody>
-          <a:bodyPr wrap="square" anchor="t" lIns="0" rIns="0" tIns="0" bIns="0">
+          <a:bodyPr wrap="square" lIns="0" tIns="0" rIns="0" bIns="0" anchor="t">
             <a:spAutoFit/>
           </a:bodyPr>
           <a:lstStyle/>
@@ -16283,7 +16538,7 @@
 </file>
 
 <file path=ppt/slides/slide20.xml><?xml version="1.0" encoding="utf-8"?>
-<p:sld xmlns:a="http://schemas.openxmlformats.org/drawingml/2006/main" xmlns:p="http://schemas.openxmlformats.org/presentationml/2006/main" xmlns:r="http://schemas.openxmlformats.org/officeDocument/2006/relationships">
+<p:sld xmlns:a="http://schemas.openxmlformats.org/drawingml/2006/main" xmlns:r="http://schemas.openxmlformats.org/officeDocument/2006/relationships" xmlns:p="http://schemas.openxmlformats.org/presentationml/2006/main">
   <p:cSld>
     <p:spTree>
       <p:nvGrpSpPr>
@@ -16291,7 +16546,14 @@
         <p:cNvGrpSpPr/>
         <p:nvPr/>
       </p:nvGrpSpPr>
-      <p:grpSpPr/>
+      <p:grpSpPr>
+        <a:xfrm>
+          <a:off x="0" y="0"/>
+          <a:ext cx="0" cy="0"/>
+          <a:chOff x="0" y="0"/>
+          <a:chExt cx="0" cy="0"/>
+        </a:xfrm>
+      </p:grpSpPr>
       <p:sp>
         <p:nvSpPr>
           <p:cNvPr id="2" name="Rectangle 1"/>
@@ -16333,6 +16595,7 @@
           <a:lstStyle/>
           <a:p>
             <a:pPr algn="ctr"/>
+            <a:endParaRPr/>
           </a:p>
         </p:txBody>
       </p:sp>
@@ -16377,6 +16640,7 @@
           <a:lstStyle/>
           <a:p>
             <a:pPr algn="ctr"/>
+            <a:endParaRPr/>
           </a:p>
         </p:txBody>
       </p:sp>
@@ -16397,7 +16661,7 @@
           <a:noFill/>
         </p:spPr>
         <p:txBody>
-          <a:bodyPr wrap="square" anchor="t" lIns="0" rIns="0" tIns="0" bIns="0">
+          <a:bodyPr wrap="square" lIns="0" tIns="0" rIns="0" bIns="0" anchor="t">
             <a:spAutoFit/>
           </a:bodyPr>
           <a:lstStyle/>
@@ -16436,7 +16700,7 @@
           <a:noFill/>
         </p:spPr>
         <p:txBody>
-          <a:bodyPr wrap="square" anchor="t" lIns="0" rIns="0" tIns="0" bIns="0">
+          <a:bodyPr wrap="square" lIns="0" tIns="0" rIns="0" bIns="0" anchor="t">
             <a:spAutoFit/>
           </a:bodyPr>
           <a:lstStyle/>
@@ -16475,7 +16739,7 @@
           <a:noFill/>
         </p:spPr>
         <p:txBody>
-          <a:bodyPr wrap="square" anchor="t" lIns="0" rIns="0" tIns="0" bIns="0">
+          <a:bodyPr wrap="square" lIns="0" tIns="0" rIns="0" bIns="0" anchor="t">
             <a:spAutoFit/>
           </a:bodyPr>
           <a:lstStyle/>
@@ -16514,7 +16778,7 @@
           <a:noFill/>
         </p:spPr>
         <p:txBody>
-          <a:bodyPr wrap="square" anchor="t" lIns="0" rIns="0" tIns="0" bIns="0">
+          <a:bodyPr wrap="square" lIns="0" tIns="0" rIns="0" bIns="0" anchor="t">
             <a:spAutoFit/>
           </a:bodyPr>
           <a:lstStyle/>
@@ -16553,7 +16817,7 @@
           <a:noFill/>
         </p:spPr>
         <p:txBody>
-          <a:bodyPr wrap="square" anchor="t" lIns="0" rIns="0" tIns="0" bIns="0">
+          <a:bodyPr wrap="square" lIns="0" tIns="0" rIns="0" bIns="0" anchor="t">
             <a:spAutoFit/>
           </a:bodyPr>
           <a:lstStyle/>
@@ -16655,6 +16919,7 @@
           <a:lstStyle/>
           <a:p>
             <a:pPr algn="ctr"/>
+            <a:endParaRPr/>
           </a:p>
         </p:txBody>
       </p:sp>
@@ -16699,7 +16964,7 @@
           <a:noFill/>
         </p:spPr>
         <p:txBody>
-          <a:bodyPr wrap="square" anchor="t" lIns="0" rIns="0" tIns="0" bIns="0">
+          <a:bodyPr wrap="square" lIns="0" tIns="0" rIns="0" bIns="0" anchor="t">
             <a:spAutoFit/>
           </a:bodyPr>
           <a:lstStyle/>
@@ -16766,6 +17031,7 @@
           <a:lstStyle/>
           <a:p>
             <a:pPr algn="ctr"/>
+            <a:endParaRPr/>
           </a:p>
         </p:txBody>
       </p:sp>
@@ -16810,7 +17076,7 @@
           <a:noFill/>
         </p:spPr>
         <p:txBody>
-          <a:bodyPr wrap="square" anchor="t" lIns="0" rIns="0" tIns="0" bIns="0">
+          <a:bodyPr wrap="square" lIns="0" tIns="0" rIns="0" bIns="0" anchor="t">
             <a:spAutoFit/>
           </a:bodyPr>
           <a:lstStyle/>
@@ -16849,7 +17115,7 @@
           <a:noFill/>
         </p:spPr>
         <p:txBody>
-          <a:bodyPr wrap="square" anchor="t" lIns="0" rIns="0" tIns="0" bIns="0">
+          <a:bodyPr wrap="square" lIns="0" tIns="0" rIns="0" bIns="0" anchor="t">
             <a:spAutoFit/>
           </a:bodyPr>
           <a:lstStyle/>
@@ -16995,7 +17261,7 @@
           <a:noFill/>
         </p:spPr>
         <p:txBody>
-          <a:bodyPr wrap="square" anchor="t" lIns="0" rIns="0" tIns="0" bIns="0">
+          <a:bodyPr wrap="square" lIns="0" tIns="0" rIns="0" bIns="0" anchor="t">
             <a:spAutoFit/>
           </a:bodyPr>
           <a:lstStyle/>
@@ -17105,7 +17371,7 @@
 </file>
 
 <file path=ppt/slides/slide21.xml><?xml version="1.0" encoding="utf-8"?>
-<p:sld xmlns:a="http://schemas.openxmlformats.org/drawingml/2006/main" xmlns:p="http://schemas.openxmlformats.org/presentationml/2006/main" xmlns:r="http://schemas.openxmlformats.org/officeDocument/2006/relationships">
+<p:sld xmlns:a="http://schemas.openxmlformats.org/drawingml/2006/main" xmlns:r="http://schemas.openxmlformats.org/officeDocument/2006/relationships" xmlns:p="http://schemas.openxmlformats.org/presentationml/2006/main">
   <p:cSld>
     <p:spTree>
       <p:nvGrpSpPr>
@@ -17113,7 +17379,14 @@
         <p:cNvGrpSpPr/>
         <p:nvPr/>
       </p:nvGrpSpPr>
-      <p:grpSpPr/>
+      <p:grpSpPr>
+        <a:xfrm>
+          <a:off x="0" y="0"/>
+          <a:ext cx="0" cy="0"/>
+          <a:chOff x="0" y="0"/>
+          <a:chExt cx="0" cy="0"/>
+        </a:xfrm>
+      </p:grpSpPr>
       <p:sp>
         <p:nvSpPr>
           <p:cNvPr id="2" name="Rectangle 1"/>
@@ -17155,6 +17428,7 @@
           <a:lstStyle/>
           <a:p>
             <a:pPr algn="ctr"/>
+            <a:endParaRPr/>
           </a:p>
         </p:txBody>
       </p:sp>
@@ -17199,6 +17473,7 @@
           <a:lstStyle/>
           <a:p>
             <a:pPr algn="ctr"/>
+            <a:endParaRPr/>
           </a:p>
         </p:txBody>
       </p:sp>
@@ -17219,7 +17494,7 @@
           <a:noFill/>
         </p:spPr>
         <p:txBody>
-          <a:bodyPr wrap="square" anchor="t" lIns="0" rIns="0" tIns="0" bIns="0">
+          <a:bodyPr wrap="square" lIns="0" tIns="0" rIns="0" bIns="0" anchor="t">
             <a:spAutoFit/>
           </a:bodyPr>
           <a:lstStyle/>
@@ -17258,7 +17533,7 @@
           <a:noFill/>
         </p:spPr>
         <p:txBody>
-          <a:bodyPr wrap="square" anchor="t" lIns="0" rIns="0" tIns="0" bIns="0">
+          <a:bodyPr wrap="square" lIns="0" tIns="0" rIns="0" bIns="0" anchor="t">
             <a:spAutoFit/>
           </a:bodyPr>
           <a:lstStyle/>
@@ -17297,7 +17572,7 @@
           <a:noFill/>
         </p:spPr>
         <p:txBody>
-          <a:bodyPr wrap="square" anchor="t" lIns="0" rIns="0" tIns="0" bIns="0">
+          <a:bodyPr wrap="square" lIns="0" tIns="0" rIns="0" bIns="0" anchor="t">
             <a:spAutoFit/>
           </a:bodyPr>
           <a:lstStyle/>
@@ -17336,7 +17611,7 @@
           <a:noFill/>
         </p:spPr>
         <p:txBody>
-          <a:bodyPr wrap="square" anchor="t" lIns="0" rIns="0" tIns="0" bIns="0">
+          <a:bodyPr wrap="square" lIns="0" tIns="0" rIns="0" bIns="0" anchor="t">
             <a:spAutoFit/>
           </a:bodyPr>
           <a:lstStyle/>
@@ -17438,6 +17713,7 @@
           <a:lstStyle/>
           <a:p>
             <a:pPr algn="ctr"/>
+            <a:endParaRPr/>
           </a:p>
         </p:txBody>
       </p:sp>
@@ -17480,7 +17756,7 @@
           </a:fontRef>
         </p:style>
         <p:txBody>
-          <a:bodyPr rtlCol="0" anchor="ctr" lIns="0" rIns="0" wrap="none"/>
+          <a:bodyPr wrap="none" lIns="0" rIns="0" rtlCol="0" anchor="ctr"/>
           <a:lstStyle/>
           <a:p>
             <a:pPr algn="ctr"/>
@@ -17513,7 +17789,7 @@
           <a:noFill/>
         </p:spPr>
         <p:txBody>
-          <a:bodyPr wrap="square" anchor="t" lIns="0" rIns="0" tIns="0" bIns="0">
+          <a:bodyPr wrap="square" lIns="0" tIns="0" rIns="0" bIns="0" anchor="t">
             <a:spAutoFit/>
           </a:bodyPr>
           <a:lstStyle/>
@@ -17552,7 +17828,7 @@
           <a:noFill/>
         </p:spPr>
         <p:txBody>
-          <a:bodyPr wrap="square" anchor="t" lIns="0" rIns="0" tIns="0" bIns="0">
+          <a:bodyPr wrap="square" lIns="0" tIns="0" rIns="0" bIns="0" anchor="t">
             <a:spAutoFit/>
           </a:bodyPr>
           <a:lstStyle/>
@@ -17619,6 +17895,7 @@
           <a:lstStyle/>
           <a:p>
             <a:pPr algn="ctr"/>
+            <a:endParaRPr/>
           </a:p>
         </p:txBody>
       </p:sp>
@@ -17661,7 +17938,7 @@
           </a:fontRef>
         </p:style>
         <p:txBody>
-          <a:bodyPr rtlCol="0" anchor="ctr" lIns="0" rIns="0" wrap="none"/>
+          <a:bodyPr wrap="none" lIns="0" rIns="0" rtlCol="0" anchor="ctr"/>
           <a:lstStyle/>
           <a:p>
             <a:pPr algn="ctr"/>
@@ -17694,7 +17971,7 @@
           <a:noFill/>
         </p:spPr>
         <p:txBody>
-          <a:bodyPr wrap="square" anchor="t" lIns="0" rIns="0" tIns="0" bIns="0">
+          <a:bodyPr wrap="square" lIns="0" tIns="0" rIns="0" bIns="0" anchor="t">
             <a:spAutoFit/>
           </a:bodyPr>
           <a:lstStyle/>
@@ -17733,7 +18010,7 @@
           <a:noFill/>
         </p:spPr>
         <p:txBody>
-          <a:bodyPr wrap="square" anchor="t" lIns="0" rIns="0" tIns="0" bIns="0">
+          <a:bodyPr wrap="square" lIns="0" tIns="0" rIns="0" bIns="0" anchor="t">
             <a:spAutoFit/>
           </a:bodyPr>
           <a:lstStyle/>
@@ -17800,6 +18077,7 @@
           <a:lstStyle/>
           <a:p>
             <a:pPr algn="ctr"/>
+            <a:endParaRPr/>
           </a:p>
         </p:txBody>
       </p:sp>
@@ -17842,7 +18120,7 @@
           </a:fontRef>
         </p:style>
         <p:txBody>
-          <a:bodyPr rtlCol="0" anchor="ctr" lIns="0" rIns="0" wrap="none"/>
+          <a:bodyPr wrap="none" lIns="0" rIns="0" rtlCol="0" anchor="ctr"/>
           <a:lstStyle/>
           <a:p>
             <a:pPr algn="ctr"/>
@@ -17875,7 +18153,7 @@
           <a:noFill/>
         </p:spPr>
         <p:txBody>
-          <a:bodyPr wrap="square" anchor="t" lIns="0" rIns="0" tIns="0" bIns="0">
+          <a:bodyPr wrap="square" lIns="0" tIns="0" rIns="0" bIns="0" anchor="t">
             <a:spAutoFit/>
           </a:bodyPr>
           <a:lstStyle/>
@@ -17914,7 +18192,7 @@
           <a:noFill/>
         </p:spPr>
         <p:txBody>
-          <a:bodyPr wrap="square" anchor="t" lIns="0" rIns="0" tIns="0" bIns="0">
+          <a:bodyPr wrap="square" lIns="0" tIns="0" rIns="0" bIns="0" anchor="t">
             <a:spAutoFit/>
           </a:bodyPr>
           <a:lstStyle/>
@@ -17981,6 +18259,7 @@
           <a:lstStyle/>
           <a:p>
             <a:pPr algn="ctr"/>
+            <a:endParaRPr/>
           </a:p>
         </p:txBody>
       </p:sp>
@@ -18023,7 +18302,7 @@
           </a:fontRef>
         </p:style>
         <p:txBody>
-          <a:bodyPr rtlCol="0" anchor="ctr" lIns="0" rIns="0" wrap="none"/>
+          <a:bodyPr wrap="none" lIns="0" rIns="0" rtlCol="0" anchor="ctr"/>
           <a:lstStyle/>
           <a:p>
             <a:pPr algn="ctr"/>
@@ -18056,7 +18335,7 @@
           <a:noFill/>
         </p:spPr>
         <p:txBody>
-          <a:bodyPr wrap="square" anchor="t" lIns="0" rIns="0" tIns="0" bIns="0">
+          <a:bodyPr wrap="square" lIns="0" tIns="0" rIns="0" bIns="0" anchor="t">
             <a:spAutoFit/>
           </a:bodyPr>
           <a:lstStyle/>
@@ -18095,7 +18374,7 @@
           <a:noFill/>
         </p:spPr>
         <p:txBody>
-          <a:bodyPr wrap="square" anchor="t" lIns="0" rIns="0" tIns="0" bIns="0">
+          <a:bodyPr wrap="square" lIns="0" tIns="0" rIns="0" bIns="0" anchor="t">
             <a:spAutoFit/>
           </a:bodyPr>
           <a:lstStyle/>
@@ -18160,6 +18439,7 @@
           <a:lstStyle/>
           <a:p>
             <a:pPr algn="ctr"/>
+            <a:endParaRPr/>
           </a:p>
         </p:txBody>
       </p:sp>
@@ -18180,7 +18460,7 @@
           <a:noFill/>
         </p:spPr>
         <p:txBody>
-          <a:bodyPr wrap="square" anchor="t" lIns="0" rIns="0" tIns="0" bIns="0">
+          <a:bodyPr wrap="square" lIns="0" tIns="0" rIns="0" bIns="0" anchor="t">
             <a:spAutoFit/>
           </a:bodyPr>
           <a:lstStyle/>
@@ -18219,7 +18499,7 @@
           <a:noFill/>
         </p:spPr>
         <p:txBody>
-          <a:bodyPr wrap="square" anchor="t" lIns="0" rIns="0" tIns="0" bIns="0">
+          <a:bodyPr wrap="square" lIns="0" tIns="0" rIns="0" bIns="0" anchor="t">
             <a:spAutoFit/>
           </a:bodyPr>
           <a:lstStyle/>
@@ -18250,7 +18530,7 @@
 </file>
 
 <file path=ppt/slides/slide22.xml><?xml version="1.0" encoding="utf-8"?>
-<p:sld xmlns:a="http://schemas.openxmlformats.org/drawingml/2006/main" xmlns:p="http://schemas.openxmlformats.org/presentationml/2006/main" xmlns:r="http://schemas.openxmlformats.org/officeDocument/2006/relationships">
+<p:sld xmlns:a="http://schemas.openxmlformats.org/drawingml/2006/main" xmlns:r="http://schemas.openxmlformats.org/officeDocument/2006/relationships" xmlns:p="http://schemas.openxmlformats.org/presentationml/2006/main">
   <p:cSld>
     <p:spTree>
       <p:nvGrpSpPr>
@@ -18258,7 +18538,14 @@
         <p:cNvGrpSpPr/>
         <p:nvPr/>
       </p:nvGrpSpPr>
-      <p:grpSpPr/>
+      <p:grpSpPr>
+        <a:xfrm>
+          <a:off x="0" y="0"/>
+          <a:ext cx="0" cy="0"/>
+          <a:chOff x="0" y="0"/>
+          <a:chExt cx="0" cy="0"/>
+        </a:xfrm>
+      </p:grpSpPr>
       <p:sp>
         <p:nvSpPr>
           <p:cNvPr id="2" name="Rectangle 1"/>
@@ -18300,6 +18587,7 @@
           <a:lstStyle/>
           <a:p>
             <a:pPr algn="ctr"/>
+            <a:endParaRPr/>
           </a:p>
         </p:txBody>
       </p:sp>
@@ -18344,6 +18632,7 @@
           <a:lstStyle/>
           <a:p>
             <a:pPr algn="ctr"/>
+            <a:endParaRPr/>
           </a:p>
         </p:txBody>
       </p:sp>
@@ -18364,7 +18653,7 @@
           <a:noFill/>
         </p:spPr>
         <p:txBody>
-          <a:bodyPr wrap="square" anchor="t" lIns="0" rIns="0" tIns="0" bIns="0">
+          <a:bodyPr wrap="square" lIns="0" tIns="0" rIns="0" bIns="0" anchor="t">
             <a:spAutoFit/>
           </a:bodyPr>
           <a:lstStyle/>
@@ -18403,7 +18692,7 @@
           <a:noFill/>
         </p:spPr>
         <p:txBody>
-          <a:bodyPr wrap="square" anchor="t" lIns="0" rIns="0" tIns="0" bIns="0">
+          <a:bodyPr wrap="square" lIns="0" tIns="0" rIns="0" bIns="0" anchor="t">
             <a:spAutoFit/>
           </a:bodyPr>
           <a:lstStyle/>
@@ -18442,7 +18731,7 @@
           <a:noFill/>
         </p:spPr>
         <p:txBody>
-          <a:bodyPr wrap="square" anchor="t" lIns="0" rIns="0" tIns="0" bIns="0">
+          <a:bodyPr wrap="square" lIns="0" tIns="0" rIns="0" bIns="0" anchor="t">
             <a:spAutoFit/>
           </a:bodyPr>
           <a:lstStyle/>
@@ -18481,7 +18770,7 @@
           <a:noFill/>
         </p:spPr>
         <p:txBody>
-          <a:bodyPr wrap="square" anchor="t" lIns="0" rIns="0" tIns="0" bIns="0">
+          <a:bodyPr wrap="square" lIns="0" tIns="0" rIns="0" bIns="0" anchor="t">
             <a:spAutoFit/>
           </a:bodyPr>
           <a:lstStyle/>
@@ -18583,6 +18872,7 @@
           <a:lstStyle/>
           <a:p>
             <a:pPr algn="ctr"/>
+            <a:endParaRPr/>
           </a:p>
         </p:txBody>
       </p:sp>
@@ -18603,7 +18893,7 @@
           <a:noFill/>
         </p:spPr>
         <p:txBody>
-          <a:bodyPr wrap="square" anchor="t" lIns="0" rIns="0" tIns="0" bIns="0">
+          <a:bodyPr wrap="square" lIns="0" tIns="0" rIns="0" bIns="0" anchor="t">
             <a:spAutoFit/>
           </a:bodyPr>
           <a:lstStyle/>
@@ -18642,7 +18932,7 @@
           <a:noFill/>
         </p:spPr>
         <p:txBody>
-          <a:bodyPr wrap="square" anchor="t" lIns="0" rIns="0" tIns="0" bIns="0">
+          <a:bodyPr wrap="square" lIns="0" tIns="0" rIns="0" bIns="0" anchor="t">
             <a:spAutoFit/>
           </a:bodyPr>
           <a:lstStyle/>
@@ -18709,6 +18999,7 @@
           <a:lstStyle/>
           <a:p>
             <a:pPr algn="ctr"/>
+            <a:endParaRPr/>
           </a:p>
         </p:txBody>
       </p:sp>
@@ -18729,7 +19020,7 @@
           <a:noFill/>
         </p:spPr>
         <p:txBody>
-          <a:bodyPr wrap="square" anchor="t" lIns="0" rIns="0" tIns="0" bIns="0">
+          <a:bodyPr wrap="square" lIns="0" tIns="0" rIns="0" bIns="0" anchor="t">
             <a:spAutoFit/>
           </a:bodyPr>
           <a:lstStyle/>
@@ -18768,7 +19059,7 @@
           <a:noFill/>
         </p:spPr>
         <p:txBody>
-          <a:bodyPr wrap="square" anchor="t" lIns="0" rIns="0" tIns="0" bIns="0">
+          <a:bodyPr wrap="square" lIns="0" tIns="0" rIns="0" bIns="0" anchor="t">
             <a:spAutoFit/>
           </a:bodyPr>
           <a:lstStyle/>
@@ -18835,6 +19126,7 @@
           <a:lstStyle/>
           <a:p>
             <a:pPr algn="ctr"/>
+            <a:endParaRPr/>
           </a:p>
         </p:txBody>
       </p:sp>
@@ -18855,7 +19147,7 @@
           <a:noFill/>
         </p:spPr>
         <p:txBody>
-          <a:bodyPr wrap="square" anchor="t" lIns="0" rIns="0" tIns="0" bIns="0">
+          <a:bodyPr wrap="square" lIns="0" tIns="0" rIns="0" bIns="0" anchor="t">
             <a:spAutoFit/>
           </a:bodyPr>
           <a:lstStyle/>
@@ -18894,7 +19186,7 @@
           <a:noFill/>
         </p:spPr>
         <p:txBody>
-          <a:bodyPr wrap="square" anchor="t" lIns="0" rIns="0" tIns="0" bIns="0">
+          <a:bodyPr wrap="square" lIns="0" tIns="0" rIns="0" bIns="0" anchor="t">
             <a:spAutoFit/>
           </a:bodyPr>
           <a:lstStyle/>
@@ -18961,6 +19253,7 @@
           <a:lstStyle/>
           <a:p>
             <a:pPr algn="ctr"/>
+            <a:endParaRPr/>
           </a:p>
         </p:txBody>
       </p:sp>
@@ -18981,7 +19274,7 @@
           <a:noFill/>
         </p:spPr>
         <p:txBody>
-          <a:bodyPr wrap="square" anchor="t" lIns="0" rIns="0" tIns="0" bIns="0">
+          <a:bodyPr wrap="square" lIns="0" tIns="0" rIns="0" bIns="0" anchor="t">
             <a:spAutoFit/>
           </a:bodyPr>
           <a:lstStyle/>
@@ -19020,7 +19313,7 @@
           <a:noFill/>
         </p:spPr>
         <p:txBody>
-          <a:bodyPr wrap="square" anchor="t" lIns="0" rIns="0" tIns="0" bIns="0">
+          <a:bodyPr wrap="square" lIns="0" tIns="0" rIns="0" bIns="0" anchor="t">
             <a:spAutoFit/>
           </a:bodyPr>
           <a:lstStyle/>
@@ -19087,6 +19380,7 @@
           <a:lstStyle/>
           <a:p>
             <a:pPr algn="ctr"/>
+            <a:endParaRPr/>
           </a:p>
         </p:txBody>
       </p:sp>
@@ -19107,7 +19401,7 @@
           <a:noFill/>
         </p:spPr>
         <p:txBody>
-          <a:bodyPr wrap="square" anchor="t" lIns="0" rIns="0" tIns="0" bIns="0">
+          <a:bodyPr wrap="square" lIns="0" tIns="0" rIns="0" bIns="0" anchor="t">
             <a:spAutoFit/>
           </a:bodyPr>
           <a:lstStyle/>
@@ -19146,7 +19440,7 @@
           <a:noFill/>
         </p:spPr>
         <p:txBody>
-          <a:bodyPr wrap="square" anchor="t" lIns="0" rIns="0" tIns="0" bIns="0">
+          <a:bodyPr wrap="square" lIns="0" tIns="0" rIns="0" bIns="0" anchor="t">
             <a:spAutoFit/>
           </a:bodyPr>
           <a:lstStyle/>
@@ -19213,6 +19507,7 @@
           <a:lstStyle/>
           <a:p>
             <a:pPr algn="ctr"/>
+            <a:endParaRPr/>
           </a:p>
         </p:txBody>
       </p:sp>
@@ -19233,7 +19528,7 @@
           <a:noFill/>
         </p:spPr>
         <p:txBody>
-          <a:bodyPr wrap="square" anchor="t" lIns="0" rIns="0" tIns="0" bIns="0">
+          <a:bodyPr wrap="square" lIns="0" tIns="0" rIns="0" bIns="0" anchor="t">
             <a:spAutoFit/>
           </a:bodyPr>
           <a:lstStyle/>
@@ -19272,7 +19567,7 @@
           <a:noFill/>
         </p:spPr>
         <p:txBody>
-          <a:bodyPr wrap="square" anchor="t" lIns="0" rIns="0" tIns="0" bIns="0">
+          <a:bodyPr wrap="square" lIns="0" tIns="0" rIns="0" bIns="0" anchor="t">
             <a:spAutoFit/>
           </a:bodyPr>
           <a:lstStyle/>
@@ -19339,6 +19634,7 @@
           <a:lstStyle/>
           <a:p>
             <a:pPr algn="ctr"/>
+            <a:endParaRPr/>
           </a:p>
         </p:txBody>
       </p:sp>
@@ -19359,7 +19655,7 @@
           <a:noFill/>
         </p:spPr>
         <p:txBody>
-          <a:bodyPr wrap="square" anchor="t" lIns="0" rIns="0" tIns="0" bIns="0">
+          <a:bodyPr wrap="square" lIns="0" tIns="0" rIns="0" bIns="0" anchor="t">
             <a:spAutoFit/>
           </a:bodyPr>
           <a:lstStyle/>
@@ -19398,7 +19694,7 @@
           <a:noFill/>
         </p:spPr>
         <p:txBody>
-          <a:bodyPr wrap="square" anchor="t" lIns="0" rIns="0" tIns="0" bIns="0">
+          <a:bodyPr wrap="square" lIns="0" tIns="0" rIns="0" bIns="0" anchor="t">
             <a:spAutoFit/>
           </a:bodyPr>
           <a:lstStyle/>
@@ -19465,6 +19761,7 @@
           <a:lstStyle/>
           <a:p>
             <a:pPr algn="ctr"/>
+            <a:endParaRPr/>
           </a:p>
         </p:txBody>
       </p:sp>
@@ -19485,7 +19782,7 @@
           <a:noFill/>
         </p:spPr>
         <p:txBody>
-          <a:bodyPr wrap="square" anchor="t" lIns="0" rIns="0" tIns="0" bIns="0">
+          <a:bodyPr wrap="square" lIns="0" tIns="0" rIns="0" bIns="0" anchor="t">
             <a:spAutoFit/>
           </a:bodyPr>
           <a:lstStyle/>
@@ -19524,7 +19821,7 @@
           <a:noFill/>
         </p:spPr>
         <p:txBody>
-          <a:bodyPr wrap="square" anchor="t" lIns="0" rIns="0" tIns="0" bIns="0">
+          <a:bodyPr wrap="square" lIns="0" tIns="0" rIns="0" bIns="0" anchor="t">
             <a:spAutoFit/>
           </a:bodyPr>
           <a:lstStyle/>
@@ -19591,6 +19888,7 @@
           <a:lstStyle/>
           <a:p>
             <a:pPr algn="ctr"/>
+            <a:endParaRPr/>
           </a:p>
         </p:txBody>
       </p:sp>
@@ -19611,7 +19909,7 @@
           <a:noFill/>
         </p:spPr>
         <p:txBody>
-          <a:bodyPr wrap="square" anchor="t" lIns="0" rIns="0" tIns="0" bIns="0">
+          <a:bodyPr wrap="square" lIns="0" tIns="0" rIns="0" bIns="0" anchor="t">
             <a:spAutoFit/>
           </a:bodyPr>
           <a:lstStyle/>
@@ -19642,7 +19940,7 @@
 </file>
 
 <file path=ppt/slides/slide23.xml><?xml version="1.0" encoding="utf-8"?>
-<p:sld xmlns:a="http://schemas.openxmlformats.org/drawingml/2006/main" xmlns:p="http://schemas.openxmlformats.org/presentationml/2006/main" xmlns:r="http://schemas.openxmlformats.org/officeDocument/2006/relationships">
+<p:sld xmlns:a="http://schemas.openxmlformats.org/drawingml/2006/main" xmlns:r="http://schemas.openxmlformats.org/officeDocument/2006/relationships" xmlns:p="http://schemas.openxmlformats.org/presentationml/2006/main">
   <p:cSld>
     <p:spTree>
       <p:nvGrpSpPr>
@@ -19650,7 +19948,14 @@
         <p:cNvGrpSpPr/>
         <p:nvPr/>
       </p:nvGrpSpPr>
-      <p:grpSpPr/>
+      <p:grpSpPr>
+        <a:xfrm>
+          <a:off x="0" y="0"/>
+          <a:ext cx="0" cy="0"/>
+          <a:chOff x="0" y="0"/>
+          <a:chExt cx="0" cy="0"/>
+        </a:xfrm>
+      </p:grpSpPr>
       <p:sp>
         <p:nvSpPr>
           <p:cNvPr id="2" name="Rectangle 1"/>
@@ -19692,6 +19997,7 @@
           <a:lstStyle/>
           <a:p>
             <a:pPr algn="ctr"/>
+            <a:endParaRPr/>
           </a:p>
         </p:txBody>
       </p:sp>
@@ -19736,6 +20042,7 @@
           <a:lstStyle/>
           <a:p>
             <a:pPr algn="ctr"/>
+            <a:endParaRPr/>
           </a:p>
         </p:txBody>
       </p:sp>
@@ -19756,7 +20063,7 @@
           <a:noFill/>
         </p:spPr>
         <p:txBody>
-          <a:bodyPr wrap="square" anchor="t" lIns="0" rIns="0" tIns="0" bIns="0">
+          <a:bodyPr wrap="square" lIns="0" tIns="0" rIns="0" bIns="0" anchor="t">
             <a:spAutoFit/>
           </a:bodyPr>
           <a:lstStyle/>
@@ -19795,7 +20102,7 @@
           <a:noFill/>
         </p:spPr>
         <p:txBody>
-          <a:bodyPr wrap="square" anchor="t" lIns="0" rIns="0" tIns="0" bIns="0">
+          <a:bodyPr wrap="square" lIns="0" tIns="0" rIns="0" bIns="0" anchor="t">
             <a:spAutoFit/>
           </a:bodyPr>
           <a:lstStyle/>
@@ -19834,7 +20141,7 @@
           <a:noFill/>
         </p:spPr>
         <p:txBody>
-          <a:bodyPr wrap="square" anchor="t" lIns="0" rIns="0" tIns="0" bIns="0">
+          <a:bodyPr wrap="square" lIns="0" tIns="0" rIns="0" bIns="0" anchor="t">
             <a:spAutoFit/>
           </a:bodyPr>
           <a:lstStyle/>
@@ -19873,7 +20180,7 @@
           <a:noFill/>
         </p:spPr>
         <p:txBody>
-          <a:bodyPr wrap="square" anchor="t" lIns="0" rIns="0" tIns="0" bIns="0">
+          <a:bodyPr wrap="square" lIns="0" tIns="0" rIns="0" bIns="0" anchor="t">
             <a:spAutoFit/>
           </a:bodyPr>
           <a:lstStyle/>
@@ -19975,6 +20282,7 @@
           <a:lstStyle/>
           <a:p>
             <a:pPr algn="ctr"/>
+            <a:endParaRPr/>
           </a:p>
         </p:txBody>
       </p:sp>
@@ -20019,6 +20327,7 @@
           <a:lstStyle/>
           <a:p>
             <a:pPr algn="ctr"/>
+            <a:endParaRPr/>
           </a:p>
         </p:txBody>
       </p:sp>
@@ -20039,7 +20348,7 @@
           <a:noFill/>
         </p:spPr>
         <p:txBody>
-          <a:bodyPr wrap="square" anchor="t" lIns="0" rIns="0" tIns="0" bIns="0">
+          <a:bodyPr wrap="square" lIns="0" tIns="0" rIns="0" bIns="0" anchor="t">
             <a:spAutoFit/>
           </a:bodyPr>
           <a:lstStyle/>
@@ -20269,6 +20578,7 @@
           <a:lstStyle/>
           <a:p>
             <a:pPr algn="ctr"/>
+            <a:endParaRPr/>
           </a:p>
         </p:txBody>
       </p:sp>
@@ -20313,6 +20623,7 @@
           <a:lstStyle/>
           <a:p>
             <a:pPr algn="ctr"/>
+            <a:endParaRPr/>
           </a:p>
         </p:txBody>
       </p:sp>
@@ -20333,7 +20644,7 @@
           <a:noFill/>
         </p:spPr>
         <p:txBody>
-          <a:bodyPr wrap="square" anchor="t" lIns="0" rIns="0" tIns="0" bIns="0">
+          <a:bodyPr wrap="square" lIns="0" tIns="0" rIns="0" bIns="0" anchor="t">
             <a:spAutoFit/>
           </a:bodyPr>
           <a:lstStyle/>
@@ -20344,14 +20655,29 @@
               </a:lnSpc>
             </a:pPr>
             <a:r>
-              <a:rPr sz="1350" b="1" i="0">
+              <a:rPr sz="1350" b="1" i="0" dirty="0">
                 <a:solidFill>
                   <a:srgbClr val="FFFFFF"/>
                 </a:solidFill>
                 <a:latin typeface="Segoe UI"/>
               </a:rPr>
-              <a:t>Frontend — Vercel</a:t>
-            </a:r>
+              <a:t>Frontend — </a:t>
+            </a:r>
+            <a:r>
+              <a:rPr sz="1350" b="1" i="0" dirty="0" err="1">
+                <a:solidFill>
+                  <a:srgbClr val="FFFFFF"/>
+                </a:solidFill>
+                <a:latin typeface="Segoe UI"/>
+              </a:rPr>
+              <a:t>Vercel</a:t>
+            </a:r>
+            <a:endParaRPr sz="1350" b="1" i="0" dirty="0">
+              <a:solidFill>
+                <a:srgbClr val="FFFFFF"/>
+              </a:solidFill>
+              <a:latin typeface="Segoe UI"/>
+            </a:endParaRPr>
           </a:p>
         </p:txBody>
       </p:sp>
@@ -20507,7 +20833,7 @@
           <a:noFill/>
         </p:spPr>
         <p:txBody>
-          <a:bodyPr wrap="square" anchor="t" lIns="0" rIns="0" tIns="0" bIns="0">
+          <a:bodyPr wrap="square" lIns="0" tIns="0" rIns="0" bIns="0" anchor="t">
             <a:spAutoFit/>
           </a:bodyPr>
           <a:lstStyle/>
@@ -20538,7 +20864,7 @@
 </file>
 
 <file path=ppt/slides/slide24.xml><?xml version="1.0" encoding="utf-8"?>
-<p:sld xmlns:a="http://schemas.openxmlformats.org/drawingml/2006/main" xmlns:p="http://schemas.openxmlformats.org/presentationml/2006/main" xmlns:r="http://schemas.openxmlformats.org/officeDocument/2006/relationships">
+<p:sld xmlns:a="http://schemas.openxmlformats.org/drawingml/2006/main" xmlns:r="http://schemas.openxmlformats.org/officeDocument/2006/relationships" xmlns:p="http://schemas.openxmlformats.org/presentationml/2006/main">
   <p:cSld>
     <p:spTree>
       <p:nvGrpSpPr>
@@ -20546,7 +20872,14 @@
         <p:cNvGrpSpPr/>
         <p:nvPr/>
       </p:nvGrpSpPr>
-      <p:grpSpPr/>
+      <p:grpSpPr>
+        <a:xfrm>
+          <a:off x="0" y="0"/>
+          <a:ext cx="0" cy="0"/>
+          <a:chOff x="0" y="0"/>
+          <a:chExt cx="0" cy="0"/>
+        </a:xfrm>
+      </p:grpSpPr>
       <p:sp>
         <p:nvSpPr>
           <p:cNvPr id="2" name="Rectangle 1"/>
@@ -20588,6 +20921,7 @@
           <a:lstStyle/>
           <a:p>
             <a:pPr algn="ctr"/>
+            <a:endParaRPr/>
           </a:p>
         </p:txBody>
       </p:sp>
@@ -20632,6 +20966,7 @@
           <a:lstStyle/>
           <a:p>
             <a:pPr algn="ctr"/>
+            <a:endParaRPr/>
           </a:p>
         </p:txBody>
       </p:sp>
@@ -20652,7 +20987,7 @@
           <a:noFill/>
         </p:spPr>
         <p:txBody>
-          <a:bodyPr wrap="square" anchor="t" lIns="0" rIns="0" tIns="0" bIns="0">
+          <a:bodyPr wrap="square" lIns="0" tIns="0" rIns="0" bIns="0" anchor="t">
             <a:spAutoFit/>
           </a:bodyPr>
           <a:lstStyle/>
@@ -20691,7 +21026,7 @@
           <a:noFill/>
         </p:spPr>
         <p:txBody>
-          <a:bodyPr wrap="square" anchor="t" lIns="0" rIns="0" tIns="0" bIns="0">
+          <a:bodyPr wrap="square" lIns="0" tIns="0" rIns="0" bIns="0" anchor="t">
             <a:spAutoFit/>
           </a:bodyPr>
           <a:lstStyle/>
@@ -20730,7 +21065,7 @@
           <a:noFill/>
         </p:spPr>
         <p:txBody>
-          <a:bodyPr wrap="square" anchor="t" lIns="0" rIns="0" tIns="0" bIns="0">
+          <a:bodyPr wrap="square" lIns="0" tIns="0" rIns="0" bIns="0" anchor="t">
             <a:spAutoFit/>
           </a:bodyPr>
           <a:lstStyle/>
@@ -20769,7 +21104,7 @@
           <a:noFill/>
         </p:spPr>
         <p:txBody>
-          <a:bodyPr wrap="square" anchor="t" lIns="0" rIns="0" tIns="0" bIns="0">
+          <a:bodyPr wrap="square" lIns="0" tIns="0" rIns="0" bIns="0" anchor="t">
             <a:spAutoFit/>
           </a:bodyPr>
           <a:lstStyle/>
@@ -20843,7 +21178,7 @@
           <a:noFill/>
         </p:spPr>
         <p:txBody>
-          <a:bodyPr wrap="square" anchor="t" lIns="0" rIns="0" tIns="0" bIns="0">
+          <a:bodyPr wrap="square" lIns="0" tIns="0" rIns="0" bIns="0" anchor="t">
             <a:spAutoFit/>
           </a:bodyPr>
           <a:lstStyle/>
@@ -20896,7 +21231,7 @@
               </a:spcAft>
             </a:pPr>
             <a:r>
-              <a:rPr sz="900">
+              <a:rPr sz="900" dirty="0">
                 <a:solidFill>
                   <a:srgbClr val="DC2626"/>
                 </a:solidFill>
@@ -20905,13 +21240,67 @@
               <a:t>●  </a:t>
             </a:r>
             <a:r>
-              <a:rPr sz="1200">
+              <a:rPr sz="1200" dirty="0">
                 <a:solidFill>
                   <a:srgbClr val="334155"/>
                 </a:solidFill>
                 <a:latin typeface="Segoe UI"/>
               </a:rPr>
-              <a:t>Mobile Money (CinetPay) &amp; notifications push : déjà opérationnels de bout en bout</a:t>
+              <a:t>Mobile Money (</a:t>
+            </a:r>
+            <a:r>
+              <a:rPr sz="1200" dirty="0" err="1">
+                <a:solidFill>
+                  <a:srgbClr val="334155"/>
+                </a:solidFill>
+                <a:latin typeface="Segoe UI"/>
+              </a:rPr>
+              <a:t>CinetPay</a:t>
+            </a:r>
+            <a:r>
+              <a:rPr sz="1200" dirty="0">
+                <a:solidFill>
+                  <a:srgbClr val="334155"/>
+                </a:solidFill>
+                <a:latin typeface="Segoe UI"/>
+              </a:rPr>
+              <a:t>) &amp; notifications push : déjà </a:t>
+            </a:r>
+            <a:r>
+              <a:rPr sz="1200" dirty="0" err="1">
+                <a:solidFill>
+                  <a:srgbClr val="334155"/>
+                </a:solidFill>
+                <a:latin typeface="Segoe UI"/>
+              </a:rPr>
+              <a:t>opérationnels</a:t>
+            </a:r>
+            <a:r>
+              <a:rPr sz="1200" dirty="0">
+                <a:solidFill>
+                  <a:srgbClr val="334155"/>
+                </a:solidFill>
+                <a:latin typeface="Segoe UI"/>
+              </a:rPr>
+              <a:t> de bout </a:t>
+            </a:r>
+            <a:r>
+              <a:rPr sz="1200" dirty="0" err="1">
+                <a:solidFill>
+                  <a:srgbClr val="334155"/>
+                </a:solidFill>
+                <a:latin typeface="Segoe UI"/>
+              </a:rPr>
+              <a:t>en</a:t>
+            </a:r>
+            <a:r>
+              <a:rPr sz="1200" dirty="0">
+                <a:solidFill>
+                  <a:srgbClr val="334155"/>
+                </a:solidFill>
+                <a:latin typeface="Segoe UI"/>
+              </a:rPr>
+              <a:t> bout</a:t>
             </a:r>
           </a:p>
           <a:p>
@@ -20924,7 +21313,7 @@
               </a:spcAft>
             </a:pPr>
             <a:r>
-              <a:rPr sz="900">
+              <a:rPr sz="900" dirty="0">
                 <a:solidFill>
                   <a:srgbClr val="DC2626"/>
                 </a:solidFill>
@@ -20933,14 +21322,83 @@
               <a:t>●  </a:t>
             </a:r>
             <a:r>
-              <a:rPr sz="1200">
+              <a:rPr sz="1200" dirty="0">
                 <a:solidFill>
                   <a:srgbClr val="334155"/>
                 </a:solidFill>
                 <a:latin typeface="Segoe UI"/>
               </a:rPr>
-              <a:t>Bug critique corrigé sur le score prédictif + calibration empirique outillée</a:t>
-            </a:r>
+              <a:t>Bug critique </a:t>
+            </a:r>
+            <a:r>
+              <a:rPr sz="1200" dirty="0" err="1">
+                <a:solidFill>
+                  <a:srgbClr val="334155"/>
+                </a:solidFill>
+                <a:latin typeface="Segoe UI"/>
+              </a:rPr>
+              <a:t>corrigé</a:t>
+            </a:r>
+            <a:r>
+              <a:rPr sz="1200" dirty="0">
+                <a:solidFill>
+                  <a:srgbClr val="334155"/>
+                </a:solidFill>
+                <a:latin typeface="Segoe UI"/>
+              </a:rPr>
+              <a:t> sur le score </a:t>
+            </a:r>
+            <a:r>
+              <a:rPr sz="1200" dirty="0" err="1">
+                <a:solidFill>
+                  <a:srgbClr val="334155"/>
+                </a:solidFill>
+                <a:latin typeface="Segoe UI"/>
+              </a:rPr>
+              <a:t>prédictif</a:t>
+            </a:r>
+            <a:r>
+              <a:rPr sz="1200" dirty="0">
+                <a:solidFill>
+                  <a:srgbClr val="334155"/>
+                </a:solidFill>
+                <a:latin typeface="Segoe UI"/>
+              </a:rPr>
+              <a:t> + calibration </a:t>
+            </a:r>
+            <a:r>
+              <a:rPr sz="1200" dirty="0" err="1">
+                <a:solidFill>
+                  <a:srgbClr val="334155"/>
+                </a:solidFill>
+                <a:latin typeface="Segoe UI"/>
+              </a:rPr>
+              <a:t>empirique</a:t>
+            </a:r>
+            <a:r>
+              <a:rPr sz="1200" dirty="0">
+                <a:solidFill>
+                  <a:srgbClr val="334155"/>
+                </a:solidFill>
+                <a:latin typeface="Segoe UI"/>
+              </a:rPr>
+              <a:t> </a:t>
+            </a:r>
+            <a:r>
+              <a:rPr sz="1200" dirty="0" err="1">
+                <a:solidFill>
+                  <a:srgbClr val="334155"/>
+                </a:solidFill>
+                <a:latin typeface="Segoe UI"/>
+              </a:rPr>
+              <a:t>outillée</a:t>
+            </a:r>
+            <a:endParaRPr sz="1200" dirty="0">
+              <a:solidFill>
+                <a:srgbClr val="334155"/>
+              </a:solidFill>
+              <a:latin typeface="Segoe UI"/>
+            </a:endParaRPr>
           </a:p>
           <a:p>
             <a:pPr>
@@ -20952,7 +21410,7 @@
               </a:spcAft>
             </a:pPr>
             <a:r>
-              <a:rPr sz="900">
+              <a:rPr sz="900" dirty="0">
                 <a:solidFill>
                   <a:srgbClr val="DC2626"/>
                 </a:solidFill>
@@ -20961,14 +21419,119 @@
               <a:t>●  </a:t>
             </a:r>
             <a:r>
-              <a:rPr sz="1200">
+              <a:rPr sz="1200" dirty="0">
                 <a:solidFill>
                   <a:srgbClr val="334155"/>
                 </a:solidFill>
                 <a:latin typeface="Segoe UI"/>
               </a:rPr>
-              <a:t>Test de charge réel exécuté (40 util.) — rate limiting confirmé, latence de connexion identifiée</a:t>
-            </a:r>
+              <a:t>Test de charge </a:t>
+            </a:r>
+            <a:r>
+              <a:rPr sz="1200" dirty="0" err="1">
+                <a:solidFill>
+                  <a:srgbClr val="334155"/>
+                </a:solidFill>
+                <a:latin typeface="Segoe UI"/>
+              </a:rPr>
+              <a:t>réel</a:t>
+            </a:r>
+            <a:r>
+              <a:rPr sz="1200" dirty="0">
+                <a:solidFill>
+                  <a:srgbClr val="334155"/>
+                </a:solidFill>
+                <a:latin typeface="Segoe UI"/>
+              </a:rPr>
+              <a:t> </a:t>
+            </a:r>
+            <a:r>
+              <a:rPr sz="1200" dirty="0" err="1">
+                <a:solidFill>
+                  <a:srgbClr val="334155"/>
+                </a:solidFill>
+                <a:latin typeface="Segoe UI"/>
+              </a:rPr>
+              <a:t>exécuté</a:t>
+            </a:r>
+            <a:r>
+              <a:rPr sz="1200" dirty="0">
+                <a:solidFill>
+                  <a:srgbClr val="334155"/>
+                </a:solidFill>
+                <a:latin typeface="Segoe UI"/>
+              </a:rPr>
+              <a:t> (40 util.) — rate limiting </a:t>
+            </a:r>
+            <a:r>
+              <a:rPr sz="1200" dirty="0" err="1">
+                <a:solidFill>
+                  <a:srgbClr val="334155"/>
+                </a:solidFill>
+                <a:latin typeface="Segoe UI"/>
+              </a:rPr>
+              <a:t>confirmé</a:t>
+            </a:r>
+            <a:r>
+              <a:rPr sz="1200" dirty="0">
+                <a:solidFill>
+                  <a:srgbClr val="334155"/>
+                </a:solidFill>
+                <a:latin typeface="Segoe UI"/>
+              </a:rPr>
+              <a:t>, </a:t>
+            </a:r>
+            <a:r>
+              <a:rPr sz="1200" dirty="0" err="1">
+                <a:solidFill>
+                  <a:srgbClr val="334155"/>
+                </a:solidFill>
+                <a:latin typeface="Segoe UI"/>
+              </a:rPr>
+              <a:t>latence</a:t>
+            </a:r>
+            <a:r>
+              <a:rPr sz="1200" dirty="0">
+                <a:solidFill>
+                  <a:srgbClr val="334155"/>
+                </a:solidFill>
+                <a:latin typeface="Segoe UI"/>
+              </a:rPr>
+              <a:t> de </a:t>
+            </a:r>
+            <a:r>
+              <a:rPr sz="1200" dirty="0" err="1">
+                <a:solidFill>
+                  <a:srgbClr val="334155"/>
+                </a:solidFill>
+                <a:latin typeface="Segoe UI"/>
+              </a:rPr>
+              <a:t>connexion</a:t>
+            </a:r>
+            <a:r>
+              <a:rPr sz="1200" dirty="0">
+                <a:solidFill>
+                  <a:srgbClr val="334155"/>
+                </a:solidFill>
+                <a:latin typeface="Segoe UI"/>
+              </a:rPr>
+              <a:t> </a:t>
+            </a:r>
+            <a:r>
+              <a:rPr sz="1200" dirty="0" err="1">
+                <a:solidFill>
+                  <a:srgbClr val="334155"/>
+                </a:solidFill>
+                <a:latin typeface="Segoe UI"/>
+              </a:rPr>
+              <a:t>identifiée</a:t>
+            </a:r>
+            <a:endParaRPr sz="1200" dirty="0">
+              <a:solidFill>
+                <a:srgbClr val="334155"/>
+              </a:solidFill>
+              <a:latin typeface="Segoe UI"/>
+            </a:endParaRPr>
           </a:p>
           <a:p>
             <a:pPr>
@@ -20980,7 +21543,7 @@
               </a:spcAft>
             </a:pPr>
             <a:r>
-              <a:rPr sz="900">
+              <a:rPr sz="900" dirty="0">
                 <a:solidFill>
                   <a:srgbClr val="DC2626"/>
                 </a:solidFill>
@@ -20989,13 +21552,103 @@
               <a:t>●  </a:t>
             </a:r>
             <a:r>
-              <a:rPr sz="1200">
+              <a:rPr sz="1200" dirty="0">
                 <a:solidFill>
                   <a:srgbClr val="334155"/>
                 </a:solidFill>
                 <a:latin typeface="Segoe UI"/>
               </a:rPr>
-              <a:t>Row-Level Security PostgreSQL implémentée et testée (défense en profondeur)</a:t>
+              <a:t>Row-Level Security PostgreSQL </a:t>
+            </a:r>
+            <a:r>
+              <a:rPr sz="1200" dirty="0" err="1">
+                <a:solidFill>
+                  <a:srgbClr val="334155"/>
+                </a:solidFill>
+                <a:latin typeface="Segoe UI"/>
+              </a:rPr>
+              <a:t>implémentée</a:t>
+            </a:r>
+            <a:r>
+              <a:rPr sz="1200" dirty="0">
+                <a:solidFill>
+                  <a:srgbClr val="334155"/>
+                </a:solidFill>
+                <a:latin typeface="Segoe UI"/>
+              </a:rPr>
+              <a:t> et </a:t>
+            </a:r>
+            <a:r>
+              <a:rPr sz="1200" dirty="0" err="1">
+                <a:solidFill>
+                  <a:srgbClr val="334155"/>
+                </a:solidFill>
+                <a:latin typeface="Segoe UI"/>
+              </a:rPr>
+              <a:t>testée</a:t>
+            </a:r>
+            <a:r>
+              <a:rPr sz="1200" dirty="0">
+                <a:solidFill>
+                  <a:srgbClr val="334155"/>
+                </a:solidFill>
+                <a:latin typeface="Segoe UI"/>
+              </a:rPr>
+              <a:t> (</a:t>
+            </a:r>
+            <a:r>
+              <a:rPr sz="1200" dirty="0" err="1">
+                <a:solidFill>
+                  <a:srgbClr val="334155"/>
+                </a:solidFill>
+                <a:latin typeface="Segoe UI"/>
+              </a:rPr>
+              <a:t>défense</a:t>
+            </a:r>
+            <a:r>
+              <a:rPr sz="1200" dirty="0">
+                <a:solidFill>
+                  <a:srgbClr val="334155"/>
+                </a:solidFill>
+                <a:latin typeface="Segoe UI"/>
+              </a:rPr>
+              <a:t> </a:t>
+            </a:r>
+            <a:r>
+              <a:rPr sz="1200" dirty="0" err="1">
+                <a:solidFill>
+                  <a:srgbClr val="334155"/>
+                </a:solidFill>
+                <a:latin typeface="Segoe UI"/>
+              </a:rPr>
+              <a:t>en</a:t>
+            </a:r>
+            <a:r>
+              <a:rPr sz="1200" dirty="0">
+                <a:solidFill>
+                  <a:srgbClr val="334155"/>
+                </a:solidFill>
+                <a:latin typeface="Segoe UI"/>
+              </a:rPr>
+              <a:t> </a:t>
+            </a:r>
+            <a:r>
+              <a:rPr sz="1200" dirty="0" err="1">
+                <a:solidFill>
+                  <a:srgbClr val="334155"/>
+                </a:solidFill>
+                <a:latin typeface="Segoe UI"/>
+              </a:rPr>
+              <a:t>profondeur</a:t>
+            </a:r>
+            <a:r>
+              <a:rPr sz="1200" dirty="0">
+                <a:solidFill>
+                  <a:srgbClr val="334155"/>
+                </a:solidFill>
+                <a:latin typeface="Segoe UI"/>
+              </a:rPr>
+              <a:t>)</a:t>
             </a:r>
           </a:p>
         </p:txBody>
@@ -21017,7 +21670,7 @@
           <a:noFill/>
         </p:spPr>
         <p:txBody>
-          <a:bodyPr wrap="square" anchor="t" lIns="0" rIns="0" tIns="0" bIns="0">
+          <a:bodyPr wrap="square" lIns="0" tIns="0" rIns="0" bIns="0" anchor="t">
             <a:spAutoFit/>
           </a:bodyPr>
           <a:lstStyle/>
@@ -21079,7 +21732,7 @@
               <a:t>●  </a:t>
             </a:r>
             <a:r>
-              <a:rPr b="1" sz="1200">
+              <a:rPr sz="1200" b="1">
                 <a:solidFill>
                   <a:srgbClr val="0F172A"/>
                 </a:solidFill>
@@ -21116,7 +21769,7 @@
               <a:t>●  </a:t>
             </a:r>
             <a:r>
-              <a:rPr b="1" sz="1200">
+              <a:rPr sz="1200" b="1">
                 <a:solidFill>
                   <a:srgbClr val="0F172A"/>
                 </a:solidFill>
@@ -21153,7 +21806,7 @@
               <a:t>●  </a:t>
             </a:r>
             <a:r>
-              <a:rPr b="1" sz="1200">
+              <a:rPr sz="1200" b="1">
                 <a:solidFill>
                   <a:srgbClr val="0F172A"/>
                 </a:solidFill>
@@ -21182,7 +21835,7 @@
 </file>
 
 <file path=ppt/slides/slide25.xml><?xml version="1.0" encoding="utf-8"?>
-<p:sld xmlns:a="http://schemas.openxmlformats.org/drawingml/2006/main" xmlns:p="http://schemas.openxmlformats.org/presentationml/2006/main" xmlns:r="http://schemas.openxmlformats.org/officeDocument/2006/relationships">
+<p:sld xmlns:a="http://schemas.openxmlformats.org/drawingml/2006/main" xmlns:r="http://schemas.openxmlformats.org/officeDocument/2006/relationships" xmlns:p="http://schemas.openxmlformats.org/presentationml/2006/main">
   <p:cSld>
     <p:spTree>
       <p:nvGrpSpPr>
@@ -21190,7 +21843,14 @@
         <p:cNvGrpSpPr/>
         <p:nvPr/>
       </p:nvGrpSpPr>
-      <p:grpSpPr/>
+      <p:grpSpPr>
+        <a:xfrm>
+          <a:off x="0" y="0"/>
+          <a:ext cx="0" cy="0"/>
+          <a:chOff x="0" y="0"/>
+          <a:chExt cx="0" cy="0"/>
+        </a:xfrm>
+      </p:grpSpPr>
       <p:sp>
         <p:nvSpPr>
           <p:cNvPr id="3" name="Rectangle 2"/>
@@ -21232,6 +21892,7 @@
           <a:lstStyle/>
           <a:p>
             <a:pPr algn="ctr"/>
+            <a:endParaRPr/>
           </a:p>
         </p:txBody>
       </p:sp>
@@ -21276,6 +21937,7 @@
           <a:lstStyle/>
           <a:p>
             <a:pPr algn="ctr"/>
+            <a:endParaRPr/>
           </a:p>
         </p:txBody>
       </p:sp>
@@ -21296,7 +21958,7 @@
           <a:noFill/>
         </p:spPr>
         <p:txBody>
-          <a:bodyPr wrap="square" anchor="t" lIns="0" rIns="0" tIns="0" bIns="0">
+          <a:bodyPr wrap="square" lIns="0" tIns="0" rIns="0" bIns="0" anchor="t">
             <a:spAutoFit/>
           </a:bodyPr>
           <a:lstStyle/>
@@ -21520,7 +22182,7 @@
           </a:fontRef>
         </p:style>
         <p:txBody>
-          <a:bodyPr rtlCol="0" anchor="ctr" lIns="0" rIns="0" wrap="none"/>
+          <a:bodyPr wrap="none" lIns="0" rIns="0" rtlCol="0" anchor="ctr"/>
           <a:lstStyle/>
           <a:p>
             <a:pPr algn="ctr"/>
@@ -21553,7 +22215,7 @@
           <a:noFill/>
         </p:spPr>
         <p:txBody>
-          <a:bodyPr wrap="square" anchor="t" lIns="0" rIns="0" tIns="0" bIns="0">
+          <a:bodyPr wrap="square" lIns="0" tIns="0" rIns="0" bIns="0" anchor="t">
             <a:spAutoFit/>
           </a:bodyPr>
           <a:lstStyle/>
@@ -21584,7 +22246,7 @@
 </file>
 
 <file path=ppt/slides/slide26.xml><?xml version="1.0" encoding="utf-8"?>
-<p:sld xmlns:a="http://schemas.openxmlformats.org/drawingml/2006/main" xmlns:p="http://schemas.openxmlformats.org/presentationml/2006/main" xmlns:r="http://schemas.openxmlformats.org/officeDocument/2006/relationships">
+<p:sld xmlns:a="http://schemas.openxmlformats.org/drawingml/2006/main" xmlns:r="http://schemas.openxmlformats.org/officeDocument/2006/relationships" xmlns:p="http://schemas.openxmlformats.org/presentationml/2006/main">
   <p:cSld>
     <p:spTree>
       <p:nvGrpSpPr>
@@ -21592,7 +22254,14 @@
         <p:cNvGrpSpPr/>
         <p:nvPr/>
       </p:nvGrpSpPr>
-      <p:grpSpPr/>
+      <p:grpSpPr>
+        <a:xfrm>
+          <a:off x="0" y="0"/>
+          <a:ext cx="0" cy="0"/>
+          <a:chOff x="0" y="0"/>
+          <a:chExt cx="0" cy="0"/>
+        </a:xfrm>
+      </p:grpSpPr>
       <p:sp>
         <p:nvSpPr>
           <p:cNvPr id="2" name="Rectangle 1"/>
@@ -21634,6 +22303,7 @@
           <a:lstStyle/>
           <a:p>
             <a:pPr algn="ctr"/>
+            <a:endParaRPr/>
           </a:p>
         </p:txBody>
       </p:sp>
@@ -21678,6 +22348,7 @@
           <a:lstStyle/>
           <a:p>
             <a:pPr algn="ctr"/>
+            <a:endParaRPr/>
           </a:p>
         </p:txBody>
       </p:sp>
@@ -21930,15 +22601,12 @@
                 <a:spcPts val="1000"/>
               </a:spcAft>
             </a:pPr>
-            <a:r>
-              <a:rPr sz="1500" b="0">
-                <a:solidFill>
-                  <a:srgbClr val="64748B"/>
-                </a:solidFill>
-                <a:latin typeface="Segoe UI"/>
-              </a:rPr>
-              <a:t/>
-            </a:r>
+            <a:endParaRPr sz="1500" b="0">
+              <a:solidFill>
+                <a:srgbClr val="64748B"/>
+              </a:solidFill>
+              <a:latin typeface="Segoe UI"/>
+            </a:endParaRPr>
           </a:p>
           <a:p>
             <a:pPr>
@@ -22031,7 +22699,7 @@
 </file>
 
 <file path=ppt/slides/slide27.xml><?xml version="1.0" encoding="utf-8"?>
-<p:sld xmlns:a="http://schemas.openxmlformats.org/drawingml/2006/main" xmlns:p="http://schemas.openxmlformats.org/presentationml/2006/main" xmlns:r="http://schemas.openxmlformats.org/officeDocument/2006/relationships">
+<p:sld xmlns:a="http://schemas.openxmlformats.org/drawingml/2006/main" xmlns:r="http://schemas.openxmlformats.org/officeDocument/2006/relationships" xmlns:p="http://schemas.openxmlformats.org/presentationml/2006/main">
   <p:cSld>
     <p:spTree>
       <p:nvGrpSpPr>
@@ -22039,7 +22707,14 @@
         <p:cNvGrpSpPr/>
         <p:nvPr/>
       </p:nvGrpSpPr>
-      <p:grpSpPr/>
+      <p:grpSpPr>
+        <a:xfrm>
+          <a:off x="0" y="0"/>
+          <a:ext cx="0" cy="0"/>
+          <a:chOff x="0" y="0"/>
+          <a:chExt cx="0" cy="0"/>
+        </a:xfrm>
+      </p:grpSpPr>
       <p:sp>
         <p:nvSpPr>
           <p:cNvPr id="2" name="Rectangle 1"/>
@@ -22081,6 +22756,7 @@
           <a:lstStyle/>
           <a:p>
             <a:pPr algn="ctr"/>
+            <a:endParaRPr/>
           </a:p>
         </p:txBody>
       </p:sp>
@@ -22125,6 +22801,7 @@
           <a:lstStyle/>
           <a:p>
             <a:pPr algn="ctr"/>
+            <a:endParaRPr/>
           </a:p>
         </p:txBody>
       </p:sp>
@@ -22347,6 +23024,7 @@
           <a:lstStyle/>
           <a:p>
             <a:pPr algn="ctr"/>
+            <a:endParaRPr/>
           </a:p>
         </p:txBody>
       </p:sp>
@@ -22383,7 +23061,7 @@
 </file>
 
 <file path=ppt/slides/slide28.xml><?xml version="1.0" encoding="utf-8"?>
-<p:sld xmlns:a="http://schemas.openxmlformats.org/drawingml/2006/main" xmlns:p="http://schemas.openxmlformats.org/presentationml/2006/main" xmlns:r="http://schemas.openxmlformats.org/officeDocument/2006/relationships">
+<p:sld xmlns:a="http://schemas.openxmlformats.org/drawingml/2006/main" xmlns:r="http://schemas.openxmlformats.org/officeDocument/2006/relationships" xmlns:p="http://schemas.openxmlformats.org/presentationml/2006/main">
   <p:cSld>
     <p:spTree>
       <p:nvGrpSpPr>
@@ -22391,7 +23069,14 @@
         <p:cNvGrpSpPr/>
         <p:nvPr/>
       </p:nvGrpSpPr>
-      <p:grpSpPr/>
+      <p:grpSpPr>
+        <a:xfrm>
+          <a:off x="0" y="0"/>
+          <a:ext cx="0" cy="0"/>
+          <a:chOff x="0" y="0"/>
+          <a:chExt cx="0" cy="0"/>
+        </a:xfrm>
+      </p:grpSpPr>
       <p:sp>
         <p:nvSpPr>
           <p:cNvPr id="2" name="Rectangle 1"/>
@@ -22433,6 +23118,7 @@
           <a:lstStyle/>
           <a:p>
             <a:pPr algn="ctr"/>
+            <a:endParaRPr/>
           </a:p>
         </p:txBody>
       </p:sp>
@@ -22477,6 +23163,7 @@
           <a:lstStyle/>
           <a:p>
             <a:pPr algn="ctr"/>
+            <a:endParaRPr/>
           </a:p>
         </p:txBody>
       </p:sp>
@@ -22699,6 +23386,7 @@
           <a:lstStyle/>
           <a:p>
             <a:pPr algn="ctr"/>
+            <a:endParaRPr/>
           </a:p>
         </p:txBody>
       </p:sp>
@@ -22770,7 +23458,7 @@
 </file>
 
 <file path=ppt/slides/slide29.xml><?xml version="1.0" encoding="utf-8"?>
-<p:sld xmlns:a="http://schemas.openxmlformats.org/drawingml/2006/main" xmlns:p="http://schemas.openxmlformats.org/presentationml/2006/main" xmlns:r="http://schemas.openxmlformats.org/officeDocument/2006/relationships">
+<p:sld xmlns:a="http://schemas.openxmlformats.org/drawingml/2006/main" xmlns:r="http://schemas.openxmlformats.org/officeDocument/2006/relationships" xmlns:p="http://schemas.openxmlformats.org/presentationml/2006/main">
   <p:cSld>
     <p:spTree>
       <p:nvGrpSpPr>
@@ -22778,7 +23466,14 @@
         <p:cNvGrpSpPr/>
         <p:nvPr/>
       </p:nvGrpSpPr>
-      <p:grpSpPr/>
+      <p:grpSpPr>
+        <a:xfrm>
+          <a:off x="0" y="0"/>
+          <a:ext cx="0" cy="0"/>
+          <a:chOff x="0" y="0"/>
+          <a:chExt cx="0" cy="0"/>
+        </a:xfrm>
+      </p:grpSpPr>
       <p:sp>
         <p:nvSpPr>
           <p:cNvPr id="2" name="Rectangle 1"/>
@@ -22820,6 +23515,7 @@
           <a:lstStyle/>
           <a:p>
             <a:pPr algn="ctr"/>
+            <a:endParaRPr/>
           </a:p>
         </p:txBody>
       </p:sp>
@@ -22864,6 +23560,7 @@
           <a:lstStyle/>
           <a:p>
             <a:pPr algn="ctr"/>
+            <a:endParaRPr/>
           </a:p>
         </p:txBody>
       </p:sp>
@@ -23086,6 +23783,7 @@
           <a:lstStyle/>
           <a:p>
             <a:pPr algn="ctr"/>
+            <a:endParaRPr/>
           </a:p>
         </p:txBody>
       </p:sp>
@@ -23157,7 +23855,7 @@
 </file>
 
 <file path=ppt/slides/slide3.xml><?xml version="1.0" encoding="utf-8"?>
-<p:sld xmlns:a="http://schemas.openxmlformats.org/drawingml/2006/main" xmlns:p="http://schemas.openxmlformats.org/presentationml/2006/main" xmlns:r="http://schemas.openxmlformats.org/officeDocument/2006/relationships">
+<p:sld xmlns:a="http://schemas.openxmlformats.org/drawingml/2006/main" xmlns:r="http://schemas.openxmlformats.org/officeDocument/2006/relationships" xmlns:p="http://schemas.openxmlformats.org/presentationml/2006/main">
   <p:cSld>
     <p:spTree>
       <p:nvGrpSpPr>
@@ -23165,7 +23863,14 @@
         <p:cNvGrpSpPr/>
         <p:nvPr/>
       </p:nvGrpSpPr>
-      <p:grpSpPr/>
+      <p:grpSpPr>
+        <a:xfrm>
+          <a:off x="0" y="0"/>
+          <a:ext cx="0" cy="0"/>
+          <a:chOff x="0" y="0"/>
+          <a:chExt cx="0" cy="0"/>
+        </a:xfrm>
+      </p:grpSpPr>
       <p:sp>
         <p:nvSpPr>
           <p:cNvPr id="2" name="Rectangle 1"/>
@@ -23207,6 +23912,7 @@
           <a:lstStyle/>
           <a:p>
             <a:pPr algn="ctr"/>
+            <a:endParaRPr/>
           </a:p>
         </p:txBody>
       </p:sp>
@@ -23251,6 +23957,7 @@
           <a:lstStyle/>
           <a:p>
             <a:pPr algn="ctr"/>
+            <a:endParaRPr/>
           </a:p>
         </p:txBody>
       </p:sp>
@@ -23271,7 +23978,7 @@
           <a:noFill/>
         </p:spPr>
         <p:txBody>
-          <a:bodyPr wrap="square" anchor="t" lIns="0" rIns="0" tIns="0" bIns="0">
+          <a:bodyPr wrap="square" lIns="0" tIns="0" rIns="0" bIns="0" anchor="t">
             <a:spAutoFit/>
           </a:bodyPr>
           <a:lstStyle/>
@@ -23310,7 +24017,7 @@
           <a:noFill/>
         </p:spPr>
         <p:txBody>
-          <a:bodyPr wrap="square" anchor="t" lIns="0" rIns="0" tIns="0" bIns="0">
+          <a:bodyPr wrap="square" lIns="0" tIns="0" rIns="0" bIns="0" anchor="t">
             <a:spAutoFit/>
           </a:bodyPr>
           <a:lstStyle/>
@@ -23349,7 +24056,7 @@
           <a:noFill/>
         </p:spPr>
         <p:txBody>
-          <a:bodyPr wrap="square" anchor="t" lIns="0" rIns="0" tIns="0" bIns="0">
+          <a:bodyPr wrap="square" lIns="0" tIns="0" rIns="0" bIns="0" anchor="t">
             <a:spAutoFit/>
           </a:bodyPr>
           <a:lstStyle/>
@@ -23388,7 +24095,7 @@
           <a:noFill/>
         </p:spPr>
         <p:txBody>
-          <a:bodyPr wrap="square" anchor="t" lIns="0" rIns="0" tIns="0" bIns="0">
+          <a:bodyPr wrap="square" lIns="0" tIns="0" rIns="0" bIns="0" anchor="t">
             <a:spAutoFit/>
           </a:bodyPr>
           <a:lstStyle/>
@@ -23485,7 +24192,7 @@
               <a:t>●  </a:t>
             </a:r>
             <a:r>
-              <a:rPr b="1" sz="1500">
+              <a:rPr sz="1500" b="1">
                 <a:solidFill>
                   <a:srgbClr val="0F172A"/>
                 </a:solidFill>
@@ -23522,7 +24229,7 @@
               <a:t>●  </a:t>
             </a:r>
             <a:r>
-              <a:rPr b="1" sz="1500">
+              <a:rPr sz="1500" b="1">
                 <a:solidFill>
                   <a:srgbClr val="0F172A"/>
                 </a:solidFill>
@@ -23559,7 +24266,7 @@
               <a:t>●  </a:t>
             </a:r>
             <a:r>
-              <a:rPr b="1" sz="1500">
+              <a:rPr sz="1500" b="1">
                 <a:solidFill>
                   <a:srgbClr val="0F172A"/>
                 </a:solidFill>
@@ -23596,7 +24303,7 @@
               <a:t>●  </a:t>
             </a:r>
             <a:r>
-              <a:rPr b="1" sz="1500">
+              <a:rPr sz="1500" b="1">
                 <a:solidFill>
                   <a:srgbClr val="0F172A"/>
                 </a:solidFill>
@@ -23661,6 +24368,7 @@
           <a:lstStyle/>
           <a:p>
             <a:pPr algn="ctr"/>
+            <a:endParaRPr/>
           </a:p>
         </p:txBody>
       </p:sp>
@@ -23681,7 +24389,7 @@
           <a:noFill/>
         </p:spPr>
         <p:txBody>
-          <a:bodyPr wrap="square" anchor="t" lIns="0" rIns="0" tIns="0" bIns="0">
+          <a:bodyPr wrap="square" lIns="0" tIns="0" rIns="0" bIns="0" anchor="t">
             <a:spAutoFit/>
           </a:bodyPr>
           <a:lstStyle/>
@@ -23847,7 +24555,7 @@
 </file>
 
 <file path=ppt/slides/slide30.xml><?xml version="1.0" encoding="utf-8"?>
-<p:sld xmlns:a="http://schemas.openxmlformats.org/drawingml/2006/main" xmlns:p="http://schemas.openxmlformats.org/presentationml/2006/main" xmlns:r="http://schemas.openxmlformats.org/officeDocument/2006/relationships">
+<p:sld xmlns:a="http://schemas.openxmlformats.org/drawingml/2006/main" xmlns:r="http://schemas.openxmlformats.org/officeDocument/2006/relationships" xmlns:p="http://schemas.openxmlformats.org/presentationml/2006/main">
   <p:cSld>
     <p:spTree>
       <p:nvGrpSpPr>
@@ -23855,7 +24563,14 @@
         <p:cNvGrpSpPr/>
         <p:nvPr/>
       </p:nvGrpSpPr>
-      <p:grpSpPr/>
+      <p:grpSpPr>
+        <a:xfrm>
+          <a:off x="0" y="0"/>
+          <a:ext cx="0" cy="0"/>
+          <a:chOff x="0" y="0"/>
+          <a:chExt cx="0" cy="0"/>
+        </a:xfrm>
+      </p:grpSpPr>
       <p:sp>
         <p:nvSpPr>
           <p:cNvPr id="2" name="Rectangle 1"/>
@@ -23897,6 +24612,7 @@
           <a:lstStyle/>
           <a:p>
             <a:pPr algn="ctr"/>
+            <a:endParaRPr/>
           </a:p>
         </p:txBody>
       </p:sp>
@@ -23941,6 +24657,7 @@
           <a:lstStyle/>
           <a:p>
             <a:pPr algn="ctr"/>
+            <a:endParaRPr/>
           </a:p>
         </p:txBody>
       </p:sp>
@@ -24163,6 +24880,7 @@
           <a:lstStyle/>
           <a:p>
             <a:pPr algn="ctr"/>
+            <a:endParaRPr/>
           </a:p>
         </p:txBody>
       </p:sp>
@@ -24234,7 +24952,7 @@
 </file>
 
 <file path=ppt/slides/slide31.xml><?xml version="1.0" encoding="utf-8"?>
-<p:sld xmlns:a="http://schemas.openxmlformats.org/drawingml/2006/main" xmlns:p="http://schemas.openxmlformats.org/presentationml/2006/main" xmlns:r="http://schemas.openxmlformats.org/officeDocument/2006/relationships">
+<p:sld xmlns:a="http://schemas.openxmlformats.org/drawingml/2006/main" xmlns:r="http://schemas.openxmlformats.org/officeDocument/2006/relationships" xmlns:p="http://schemas.openxmlformats.org/presentationml/2006/main">
   <p:cSld>
     <p:spTree>
       <p:nvGrpSpPr>
@@ -24242,7 +24960,14 @@
         <p:cNvGrpSpPr/>
         <p:nvPr/>
       </p:nvGrpSpPr>
-      <p:grpSpPr/>
+      <p:grpSpPr>
+        <a:xfrm>
+          <a:off x="0" y="0"/>
+          <a:ext cx="0" cy="0"/>
+          <a:chOff x="0" y="0"/>
+          <a:chExt cx="0" cy="0"/>
+        </a:xfrm>
+      </p:grpSpPr>
       <p:sp>
         <p:nvSpPr>
           <p:cNvPr id="2" name="Rectangle 1"/>
@@ -24284,6 +25009,7 @@
           <a:lstStyle/>
           <a:p>
             <a:pPr algn="ctr"/>
+            <a:endParaRPr/>
           </a:p>
         </p:txBody>
       </p:sp>
@@ -24328,6 +25054,7 @@
           <a:lstStyle/>
           <a:p>
             <a:pPr algn="ctr"/>
+            <a:endParaRPr/>
           </a:p>
         </p:txBody>
       </p:sp>
@@ -24550,6 +25277,7 @@
           <a:lstStyle/>
           <a:p>
             <a:pPr algn="ctr"/>
+            <a:endParaRPr/>
           </a:p>
         </p:txBody>
       </p:sp>
@@ -24621,7 +25349,7 @@
 </file>
 
 <file path=ppt/slides/slide4.xml><?xml version="1.0" encoding="utf-8"?>
-<p:sld xmlns:a="http://schemas.openxmlformats.org/drawingml/2006/main" xmlns:p="http://schemas.openxmlformats.org/presentationml/2006/main" xmlns:r="http://schemas.openxmlformats.org/officeDocument/2006/relationships">
+<p:sld xmlns:a="http://schemas.openxmlformats.org/drawingml/2006/main" xmlns:r="http://schemas.openxmlformats.org/officeDocument/2006/relationships" xmlns:p="http://schemas.openxmlformats.org/presentationml/2006/main">
   <p:cSld>
     <p:spTree>
       <p:nvGrpSpPr>
@@ -24629,7 +25357,14 @@
         <p:cNvGrpSpPr/>
         <p:nvPr/>
       </p:nvGrpSpPr>
-      <p:grpSpPr/>
+      <p:grpSpPr>
+        <a:xfrm>
+          <a:off x="0" y="0"/>
+          <a:ext cx="0" cy="0"/>
+          <a:chOff x="0" y="0"/>
+          <a:chExt cx="0" cy="0"/>
+        </a:xfrm>
+      </p:grpSpPr>
       <p:sp>
         <p:nvSpPr>
           <p:cNvPr id="2" name="Rectangle 1"/>
@@ -24671,6 +25406,7 @@
           <a:lstStyle/>
           <a:p>
             <a:pPr algn="ctr"/>
+            <a:endParaRPr/>
           </a:p>
         </p:txBody>
       </p:sp>
@@ -24715,6 +25451,7 @@
           <a:lstStyle/>
           <a:p>
             <a:pPr algn="ctr"/>
+            <a:endParaRPr/>
           </a:p>
         </p:txBody>
       </p:sp>
@@ -24735,7 +25472,7 @@
           <a:noFill/>
         </p:spPr>
         <p:txBody>
-          <a:bodyPr wrap="square" anchor="t" lIns="0" rIns="0" tIns="0" bIns="0">
+          <a:bodyPr wrap="square" lIns="0" tIns="0" rIns="0" bIns="0" anchor="t">
             <a:spAutoFit/>
           </a:bodyPr>
           <a:lstStyle/>
@@ -24774,7 +25511,7 @@
           <a:noFill/>
         </p:spPr>
         <p:txBody>
-          <a:bodyPr wrap="square" anchor="t" lIns="0" rIns="0" tIns="0" bIns="0">
+          <a:bodyPr wrap="square" lIns="0" tIns="0" rIns="0" bIns="0" anchor="t">
             <a:spAutoFit/>
           </a:bodyPr>
           <a:lstStyle/>
@@ -24813,7 +25550,7 @@
           <a:noFill/>
         </p:spPr>
         <p:txBody>
-          <a:bodyPr wrap="square" anchor="t" lIns="0" rIns="0" tIns="0" bIns="0">
+          <a:bodyPr wrap="square" lIns="0" tIns="0" rIns="0" bIns="0" anchor="t">
             <a:spAutoFit/>
           </a:bodyPr>
           <a:lstStyle/>
@@ -24852,7 +25589,7 @@
           <a:noFill/>
         </p:spPr>
         <p:txBody>
-          <a:bodyPr wrap="square" anchor="t" lIns="0" rIns="0" tIns="0" bIns="0">
+          <a:bodyPr wrap="square" lIns="0" tIns="0" rIns="0" bIns="0" anchor="t">
             <a:spAutoFit/>
           </a:bodyPr>
           <a:lstStyle/>
@@ -24954,6 +25691,7 @@
           <a:lstStyle/>
           <a:p>
             <a:pPr algn="ctr"/>
+            <a:endParaRPr/>
           </a:p>
         </p:txBody>
       </p:sp>
@@ -24966,7 +25704,7 @@
         <p:spPr>
           <a:xfrm>
             <a:off x="960120" y="2029968"/>
-            <a:ext cx="10241280" cy="1097280"/>
+            <a:ext cx="10241280" cy="837024"/>
           </a:xfrm>
           <a:prstGeom prst="rect">
             <a:avLst/>
@@ -24974,7 +25712,7 @@
           <a:noFill/>
         </p:spPr>
         <p:txBody>
-          <a:bodyPr wrap="square" anchor="t" lIns="0" rIns="0" tIns="0" bIns="0">
+          <a:bodyPr wrap="square" lIns="0" tIns="0" rIns="0" bIns="0" anchor="t">
             <a:spAutoFit/>
           </a:bodyPr>
           <a:lstStyle/>
@@ -24985,13 +25723,355 @@
               </a:lnSpc>
             </a:pPr>
             <a:r>
-              <a:rPr sz="1500" b="0" i="1">
+              <a:rPr sz="1500" b="0" i="1" dirty="0">
                 <a:solidFill>
                   <a:srgbClr val="0F172A"/>
                 </a:solidFill>
                 <a:latin typeface="Segoe UI"/>
               </a:rPr>
-              <a:t>« Comment concevoir et développer un système d'information universitaire intégré, capable de couvrir l'ensemble des domaines de gestion d'un établissement — académique, pédagogique, financier et analytique — tout en respectant les contraintes du LMD, le contexte ivoirien, et les exigences de sécurité et de performance d'une application web moderne ? »</a:t>
+              <a:t>« Comment </a:t>
+            </a:r>
+            <a:r>
+              <a:rPr sz="1500" b="0" i="1" dirty="0" err="1">
+                <a:solidFill>
+                  <a:srgbClr val="0F172A"/>
+                </a:solidFill>
+                <a:latin typeface="Segoe UI"/>
+              </a:rPr>
+              <a:t>concevoir</a:t>
+            </a:r>
+            <a:r>
+              <a:rPr sz="1500" b="0" i="1" dirty="0">
+                <a:solidFill>
+                  <a:srgbClr val="0F172A"/>
+                </a:solidFill>
+                <a:latin typeface="Segoe UI"/>
+              </a:rPr>
+              <a:t> et </a:t>
+            </a:r>
+            <a:r>
+              <a:rPr sz="1500" b="0" i="1" dirty="0" err="1">
+                <a:solidFill>
+                  <a:srgbClr val="0F172A"/>
+                </a:solidFill>
+                <a:latin typeface="Segoe UI"/>
+              </a:rPr>
+              <a:t>développer</a:t>
+            </a:r>
+            <a:r>
+              <a:rPr sz="1500" b="0" i="1" dirty="0">
+                <a:solidFill>
+                  <a:srgbClr val="0F172A"/>
+                </a:solidFill>
+                <a:latin typeface="Segoe UI"/>
+              </a:rPr>
+              <a:t> un </a:t>
+            </a:r>
+            <a:r>
+              <a:rPr sz="1500" b="0" i="1" dirty="0" err="1">
+                <a:solidFill>
+                  <a:srgbClr val="0F172A"/>
+                </a:solidFill>
+                <a:latin typeface="Segoe UI"/>
+              </a:rPr>
+              <a:t>système</a:t>
+            </a:r>
+            <a:r>
+              <a:rPr sz="1500" b="0" i="1" dirty="0">
+                <a:solidFill>
+                  <a:srgbClr val="0F172A"/>
+                </a:solidFill>
+                <a:latin typeface="Segoe UI"/>
+              </a:rPr>
+              <a:t> </a:t>
+            </a:r>
+            <a:r>
+              <a:rPr sz="1500" b="0" i="1" dirty="0" err="1">
+                <a:solidFill>
+                  <a:srgbClr val="0F172A"/>
+                </a:solidFill>
+                <a:latin typeface="Segoe UI"/>
+              </a:rPr>
+              <a:t>d'information</a:t>
+            </a:r>
+            <a:r>
+              <a:rPr sz="1500" b="0" i="1" dirty="0">
+                <a:solidFill>
+                  <a:srgbClr val="0F172A"/>
+                </a:solidFill>
+                <a:latin typeface="Segoe UI"/>
+              </a:rPr>
+              <a:t> </a:t>
+            </a:r>
+            <a:r>
+              <a:rPr sz="1500" b="0" i="1" dirty="0" err="1">
+                <a:solidFill>
+                  <a:srgbClr val="0F172A"/>
+                </a:solidFill>
+                <a:latin typeface="Segoe UI"/>
+              </a:rPr>
+              <a:t>universitaire</a:t>
+            </a:r>
+            <a:r>
+              <a:rPr sz="1500" b="0" i="1" dirty="0">
+                <a:solidFill>
+                  <a:srgbClr val="0F172A"/>
+                </a:solidFill>
+                <a:latin typeface="Segoe UI"/>
+              </a:rPr>
+              <a:t> </a:t>
+            </a:r>
+            <a:r>
+              <a:rPr sz="1500" b="0" i="1" dirty="0" err="1">
+                <a:solidFill>
+                  <a:srgbClr val="0F172A"/>
+                </a:solidFill>
+                <a:latin typeface="Segoe UI"/>
+              </a:rPr>
+              <a:t>intégré</a:t>
+            </a:r>
+            <a:r>
+              <a:rPr sz="1500" b="0" i="1" dirty="0">
+                <a:solidFill>
+                  <a:srgbClr val="0F172A"/>
+                </a:solidFill>
+                <a:latin typeface="Segoe UI"/>
+              </a:rPr>
+              <a:t>, capable de </a:t>
+            </a:r>
+            <a:r>
+              <a:rPr sz="1500" b="0" i="1" dirty="0" err="1">
+                <a:solidFill>
+                  <a:srgbClr val="0F172A"/>
+                </a:solidFill>
+                <a:latin typeface="Segoe UI"/>
+              </a:rPr>
+              <a:t>couvrir</a:t>
+            </a:r>
+            <a:r>
+              <a:rPr sz="1500" b="0" i="1" dirty="0">
+                <a:solidFill>
+                  <a:srgbClr val="0F172A"/>
+                </a:solidFill>
+                <a:latin typeface="Segoe UI"/>
+              </a:rPr>
+              <a:t> </a:t>
+            </a:r>
+            <a:r>
+              <a:rPr sz="1500" b="0" i="1" dirty="0" err="1">
+                <a:solidFill>
+                  <a:srgbClr val="0F172A"/>
+                </a:solidFill>
+                <a:latin typeface="Segoe UI"/>
+              </a:rPr>
+              <a:t>l'ensemble</a:t>
+            </a:r>
+            <a:r>
+              <a:rPr sz="1500" b="0" i="1" dirty="0">
+                <a:solidFill>
+                  <a:srgbClr val="0F172A"/>
+                </a:solidFill>
+                <a:latin typeface="Segoe UI"/>
+              </a:rPr>
+              <a:t> des </a:t>
+            </a:r>
+            <a:r>
+              <a:rPr sz="1500" b="0" i="1" dirty="0" err="1">
+                <a:solidFill>
+                  <a:srgbClr val="0F172A"/>
+                </a:solidFill>
+                <a:latin typeface="Segoe UI"/>
+              </a:rPr>
+              <a:t>domaines</a:t>
+            </a:r>
+            <a:r>
+              <a:rPr sz="1500" b="0" i="1" dirty="0">
+                <a:solidFill>
+                  <a:srgbClr val="0F172A"/>
+                </a:solidFill>
+                <a:latin typeface="Segoe UI"/>
+              </a:rPr>
+              <a:t> de gestion d'un </a:t>
+            </a:r>
+            <a:r>
+              <a:rPr sz="1500" b="0" i="1" dirty="0" err="1">
+                <a:solidFill>
+                  <a:srgbClr val="0F172A"/>
+                </a:solidFill>
+                <a:latin typeface="Segoe UI"/>
+              </a:rPr>
+              <a:t>établissement</a:t>
+            </a:r>
+            <a:r>
+              <a:rPr sz="1500" b="0" i="1" dirty="0">
+                <a:solidFill>
+                  <a:srgbClr val="0F172A"/>
+                </a:solidFill>
+                <a:latin typeface="Segoe UI"/>
+              </a:rPr>
+              <a:t> — </a:t>
+            </a:r>
+            <a:r>
+              <a:rPr sz="1500" b="0" i="1" dirty="0" err="1">
+                <a:solidFill>
+                  <a:srgbClr val="0F172A"/>
+                </a:solidFill>
+                <a:latin typeface="Segoe UI"/>
+              </a:rPr>
+              <a:t>académique</a:t>
+            </a:r>
+            <a:r>
+              <a:rPr sz="1500" b="0" i="1" dirty="0">
+                <a:solidFill>
+                  <a:srgbClr val="0F172A"/>
+                </a:solidFill>
+                <a:latin typeface="Segoe UI"/>
+              </a:rPr>
+              <a:t>, </a:t>
+            </a:r>
+            <a:r>
+              <a:rPr sz="1500" b="0" i="1" dirty="0" err="1">
+                <a:solidFill>
+                  <a:srgbClr val="0F172A"/>
+                </a:solidFill>
+                <a:latin typeface="Segoe UI"/>
+              </a:rPr>
+              <a:t>pédagogique</a:t>
+            </a:r>
+            <a:r>
+              <a:rPr sz="1500" b="0" i="1" dirty="0">
+                <a:solidFill>
+                  <a:srgbClr val="0F172A"/>
+                </a:solidFill>
+                <a:latin typeface="Segoe UI"/>
+              </a:rPr>
+              <a:t>, financier et </a:t>
+            </a:r>
+            <a:r>
+              <a:rPr sz="1500" b="0" i="1" dirty="0" err="1">
+                <a:solidFill>
+                  <a:srgbClr val="0F172A"/>
+                </a:solidFill>
+                <a:latin typeface="Segoe UI"/>
+              </a:rPr>
+              <a:t>analytique</a:t>
+            </a:r>
+            <a:r>
+              <a:rPr sz="1500" b="0" i="1" dirty="0">
+                <a:solidFill>
+                  <a:srgbClr val="0F172A"/>
+                </a:solidFill>
+                <a:latin typeface="Segoe UI"/>
+              </a:rPr>
+              <a:t> — tout </a:t>
+            </a:r>
+            <a:r>
+              <a:rPr sz="1500" b="0" i="1" dirty="0" err="1">
+                <a:solidFill>
+                  <a:srgbClr val="0F172A"/>
+                </a:solidFill>
+                <a:latin typeface="Segoe UI"/>
+              </a:rPr>
+              <a:t>en</a:t>
+            </a:r>
+            <a:r>
+              <a:rPr sz="1500" b="0" i="1" dirty="0">
+                <a:solidFill>
+                  <a:srgbClr val="0F172A"/>
+                </a:solidFill>
+                <a:latin typeface="Segoe UI"/>
+              </a:rPr>
+              <a:t> </a:t>
+            </a:r>
+            <a:r>
+              <a:rPr sz="1500" b="0" i="1" dirty="0" err="1">
+                <a:solidFill>
+                  <a:srgbClr val="0F172A"/>
+                </a:solidFill>
+                <a:latin typeface="Segoe UI"/>
+              </a:rPr>
+              <a:t>respectant</a:t>
+            </a:r>
+            <a:r>
+              <a:rPr sz="1500" b="0" i="1" dirty="0">
+                <a:solidFill>
+                  <a:srgbClr val="0F172A"/>
+                </a:solidFill>
+                <a:latin typeface="Segoe UI"/>
+              </a:rPr>
+              <a:t> les </a:t>
+            </a:r>
+            <a:r>
+              <a:rPr sz="1500" b="0" i="1" dirty="0" err="1">
+                <a:solidFill>
+                  <a:srgbClr val="0F172A"/>
+                </a:solidFill>
+                <a:latin typeface="Segoe UI"/>
+              </a:rPr>
+              <a:t>contraintes</a:t>
+            </a:r>
+            <a:r>
+              <a:rPr sz="1500" b="0" i="1" dirty="0">
+                <a:solidFill>
+                  <a:srgbClr val="0F172A"/>
+                </a:solidFill>
+                <a:latin typeface="Segoe UI"/>
+              </a:rPr>
+              <a:t> du LMD et les exigences de </a:t>
+            </a:r>
+            <a:r>
+              <a:rPr sz="1500" b="0" i="1" dirty="0" err="1">
+                <a:solidFill>
+                  <a:srgbClr val="0F172A"/>
+                </a:solidFill>
+                <a:latin typeface="Segoe UI"/>
+              </a:rPr>
+              <a:t>sécurité</a:t>
+            </a:r>
+            <a:r>
+              <a:rPr sz="1500" b="0" i="1" dirty="0">
+                <a:solidFill>
+                  <a:srgbClr val="0F172A"/>
+                </a:solidFill>
+                <a:latin typeface="Segoe UI"/>
+              </a:rPr>
+              <a:t> et de performance </a:t>
+            </a:r>
+            <a:r>
+              <a:rPr sz="1500" b="0" i="1" dirty="0" err="1">
+                <a:solidFill>
+                  <a:srgbClr val="0F172A"/>
+                </a:solidFill>
+                <a:latin typeface="Segoe UI"/>
+              </a:rPr>
+              <a:t>d'une</a:t>
+            </a:r>
+            <a:r>
+              <a:rPr sz="1500" b="0" i="1" dirty="0">
+                <a:solidFill>
+                  <a:srgbClr val="0F172A"/>
+                </a:solidFill>
+                <a:latin typeface="Segoe UI"/>
+              </a:rPr>
+              <a:t> application web </a:t>
+            </a:r>
+            <a:r>
+              <a:rPr sz="1500" b="0" i="1" dirty="0" err="1">
+                <a:solidFill>
+                  <a:srgbClr val="0F172A"/>
+                </a:solidFill>
+                <a:latin typeface="Segoe UI"/>
+              </a:rPr>
+              <a:t>moderne</a:t>
+            </a:r>
+            <a:r>
+              <a:rPr sz="1500" b="0" i="1" dirty="0">
+                <a:solidFill>
+                  <a:srgbClr val="0F172A"/>
+                </a:solidFill>
+                <a:latin typeface="Segoe UI"/>
+              </a:rPr>
+              <a:t> ? »</a:t>
             </a:r>
           </a:p>
         </p:txBody>
@@ -25013,7 +26093,7 @@
           <a:noFill/>
         </p:spPr>
         <p:txBody>
-          <a:bodyPr wrap="square" anchor="t" lIns="0" rIns="0" tIns="0" bIns="0">
+          <a:bodyPr wrap="square" lIns="0" tIns="0" rIns="0" bIns="0" anchor="t">
             <a:spAutoFit/>
           </a:bodyPr>
           <a:lstStyle/>
@@ -25066,7 +26146,7 @@
               </a:spcAft>
             </a:pPr>
             <a:r>
-              <a:rPr sz="1050">
+              <a:rPr sz="1050" dirty="0">
                 <a:solidFill>
                   <a:srgbClr val="2563EB"/>
                 </a:solidFill>
@@ -25075,13 +26155,121 @@
               <a:t>●  </a:t>
             </a:r>
             <a:r>
-              <a:rPr sz="1350">
+              <a:rPr sz="1350" dirty="0">
                 <a:solidFill>
                   <a:srgbClr val="334155"/>
                 </a:solidFill>
                 <a:latin typeface="Segoe UI"/>
               </a:rPr>
-              <a:t>Comment modéliser la structure académique LMD de manière générique, pour s'adapter à des établissements différents ?</a:t>
+              <a:t>Comment </a:t>
+            </a:r>
+            <a:r>
+              <a:rPr sz="1350" dirty="0" err="1">
+                <a:solidFill>
+                  <a:srgbClr val="334155"/>
+                </a:solidFill>
+                <a:latin typeface="Segoe UI"/>
+              </a:rPr>
+              <a:t>modéliser</a:t>
+            </a:r>
+            <a:r>
+              <a:rPr sz="1350" dirty="0">
+                <a:solidFill>
+                  <a:srgbClr val="334155"/>
+                </a:solidFill>
+                <a:latin typeface="Segoe UI"/>
+              </a:rPr>
+              <a:t> la structure </a:t>
+            </a:r>
+            <a:r>
+              <a:rPr sz="1350" dirty="0" err="1">
+                <a:solidFill>
+                  <a:srgbClr val="334155"/>
+                </a:solidFill>
+                <a:latin typeface="Segoe UI"/>
+              </a:rPr>
+              <a:t>académique</a:t>
+            </a:r>
+            <a:r>
+              <a:rPr sz="1350" dirty="0">
+                <a:solidFill>
+                  <a:srgbClr val="334155"/>
+                </a:solidFill>
+                <a:latin typeface="Segoe UI"/>
+              </a:rPr>
+              <a:t> LMD de manière </a:t>
+            </a:r>
+            <a:r>
+              <a:rPr sz="1350" dirty="0" err="1">
+                <a:solidFill>
+                  <a:srgbClr val="334155"/>
+                </a:solidFill>
+                <a:latin typeface="Segoe UI"/>
+              </a:rPr>
+              <a:t>générique</a:t>
+            </a:r>
+            <a:r>
+              <a:rPr sz="1350" dirty="0">
+                <a:solidFill>
+                  <a:srgbClr val="334155"/>
+                </a:solidFill>
+                <a:latin typeface="Segoe UI"/>
+              </a:rPr>
+              <a:t>, pour </a:t>
+            </a:r>
+            <a:r>
+              <a:rPr sz="1350" dirty="0" err="1">
+                <a:solidFill>
+                  <a:srgbClr val="334155"/>
+                </a:solidFill>
+                <a:latin typeface="Segoe UI"/>
+              </a:rPr>
+              <a:t>s'adapter</a:t>
+            </a:r>
+            <a:r>
+              <a:rPr sz="1350" dirty="0">
+                <a:solidFill>
+                  <a:srgbClr val="334155"/>
+                </a:solidFill>
+                <a:latin typeface="Segoe UI"/>
+              </a:rPr>
+              <a:t> à des </a:t>
+            </a:r>
+            <a:r>
+              <a:rPr sz="1350" dirty="0" err="1">
+                <a:solidFill>
+                  <a:srgbClr val="334155"/>
+                </a:solidFill>
+                <a:latin typeface="Segoe UI"/>
+              </a:rPr>
+              <a:t>établissements</a:t>
+            </a:r>
+            <a:r>
+              <a:rPr sz="1350" dirty="0">
+                <a:solidFill>
+                  <a:srgbClr val="334155"/>
+                </a:solidFill>
+                <a:latin typeface="Segoe UI"/>
+              </a:rPr>
+              <a:t> </a:t>
+            </a:r>
+            <a:r>
+              <a:rPr sz="1350" dirty="0" err="1">
+                <a:solidFill>
+                  <a:srgbClr val="334155"/>
+                </a:solidFill>
+                <a:latin typeface="Segoe UI"/>
+              </a:rPr>
+              <a:t>différents</a:t>
+            </a:r>
+            <a:r>
+              <a:rPr sz="1350" dirty="0">
+                <a:solidFill>
+                  <a:srgbClr val="334155"/>
+                </a:solidFill>
+                <a:latin typeface="Segoe UI"/>
+              </a:rPr>
+              <a:t> ?</a:t>
             </a:r>
           </a:p>
           <a:p>
@@ -25094,7 +26282,7 @@
               </a:spcAft>
             </a:pPr>
             <a:r>
-              <a:rPr sz="1050">
+              <a:rPr sz="1050" dirty="0">
                 <a:solidFill>
                   <a:srgbClr val="2563EB"/>
                 </a:solidFill>
@@ -25103,13 +26291,139 @@
               <a:t>●  </a:t>
             </a:r>
             <a:r>
-              <a:rPr sz="1350">
+              <a:rPr sz="1350" dirty="0">
                 <a:solidFill>
                   <a:srgbClr val="334155"/>
                 </a:solidFill>
                 <a:latin typeface="Segoe UI"/>
               </a:rPr>
-              <a:t>Comment garantir la cohérence des données entre modules fortement interdépendants (inscription, finance, évaluation, présences) ?</a:t>
+              <a:t>Comment </a:t>
+            </a:r>
+            <a:r>
+              <a:rPr sz="1350" dirty="0" err="1">
+                <a:solidFill>
+                  <a:srgbClr val="334155"/>
+                </a:solidFill>
+                <a:latin typeface="Segoe UI"/>
+              </a:rPr>
+              <a:t>garantir</a:t>
+            </a:r>
+            <a:r>
+              <a:rPr sz="1350" dirty="0">
+                <a:solidFill>
+                  <a:srgbClr val="334155"/>
+                </a:solidFill>
+                <a:latin typeface="Segoe UI"/>
+              </a:rPr>
+              <a:t> la </a:t>
+            </a:r>
+            <a:r>
+              <a:rPr sz="1350" dirty="0" err="1">
+                <a:solidFill>
+                  <a:srgbClr val="334155"/>
+                </a:solidFill>
+                <a:latin typeface="Segoe UI"/>
+              </a:rPr>
+              <a:t>cohérence</a:t>
+            </a:r>
+            <a:r>
+              <a:rPr sz="1350" dirty="0">
+                <a:solidFill>
+                  <a:srgbClr val="334155"/>
+                </a:solidFill>
+                <a:latin typeface="Segoe UI"/>
+              </a:rPr>
+              <a:t> des </a:t>
+            </a:r>
+            <a:r>
+              <a:rPr sz="1350" dirty="0" err="1">
+                <a:solidFill>
+                  <a:srgbClr val="334155"/>
+                </a:solidFill>
+                <a:latin typeface="Segoe UI"/>
+              </a:rPr>
+              <a:t>données</a:t>
+            </a:r>
+            <a:r>
+              <a:rPr sz="1350" dirty="0">
+                <a:solidFill>
+                  <a:srgbClr val="334155"/>
+                </a:solidFill>
+                <a:latin typeface="Segoe UI"/>
+              </a:rPr>
+              <a:t> entre modules </a:t>
+            </a:r>
+            <a:r>
+              <a:rPr sz="1350" dirty="0" err="1">
+                <a:solidFill>
+                  <a:srgbClr val="334155"/>
+                </a:solidFill>
+                <a:latin typeface="Segoe UI"/>
+              </a:rPr>
+              <a:t>fortement</a:t>
+            </a:r>
+            <a:r>
+              <a:rPr sz="1350" dirty="0">
+                <a:solidFill>
+                  <a:srgbClr val="334155"/>
+                </a:solidFill>
+                <a:latin typeface="Segoe UI"/>
+              </a:rPr>
+              <a:t> </a:t>
+            </a:r>
+            <a:r>
+              <a:rPr sz="1350" dirty="0" err="1">
+                <a:solidFill>
+                  <a:srgbClr val="334155"/>
+                </a:solidFill>
+                <a:latin typeface="Segoe UI"/>
+              </a:rPr>
+              <a:t>interdépendants</a:t>
+            </a:r>
+            <a:r>
+              <a:rPr sz="1350" dirty="0">
+                <a:solidFill>
+                  <a:srgbClr val="334155"/>
+                </a:solidFill>
+                <a:latin typeface="Segoe UI"/>
+              </a:rPr>
+              <a:t> (inscription, finance, </a:t>
+            </a:r>
+            <a:r>
+              <a:rPr sz="1350" dirty="0" err="1">
+                <a:solidFill>
+                  <a:srgbClr val="334155"/>
+                </a:solidFill>
+                <a:latin typeface="Segoe UI"/>
+              </a:rPr>
+              <a:t>évaluation</a:t>
+            </a:r>
+            <a:r>
+              <a:rPr sz="1350" dirty="0">
+                <a:solidFill>
+                  <a:srgbClr val="334155"/>
+                </a:solidFill>
+                <a:latin typeface="Segoe UI"/>
+              </a:rPr>
+              <a:t>, </a:t>
+            </a:r>
+            <a:r>
+              <a:rPr sz="1350" dirty="0" err="1">
+                <a:solidFill>
+                  <a:srgbClr val="334155"/>
+                </a:solidFill>
+                <a:latin typeface="Segoe UI"/>
+              </a:rPr>
+              <a:t>présences</a:t>
+            </a:r>
+            <a:r>
+              <a:rPr sz="1350" dirty="0">
+                <a:solidFill>
+                  <a:srgbClr val="334155"/>
+                </a:solidFill>
+                <a:latin typeface="Segoe UI"/>
+              </a:rPr>
+              <a:t>) ?</a:t>
             </a:r>
           </a:p>
           <a:p>
@@ -25122,7 +26436,7 @@
               </a:spcAft>
             </a:pPr>
             <a:r>
-              <a:rPr sz="1050">
+              <a:rPr sz="1050" dirty="0">
                 <a:solidFill>
                   <a:srgbClr val="2563EB"/>
                 </a:solidFill>
@@ -25131,13 +26445,139 @@
               <a:t>●  </a:t>
             </a:r>
             <a:r>
-              <a:rPr sz="1350">
+              <a:rPr sz="1350" dirty="0">
                 <a:solidFill>
                   <a:srgbClr val="334155"/>
                 </a:solidFill>
                 <a:latin typeface="Segoe UI"/>
               </a:rPr>
-              <a:t>Comment implémenter un contrôle d'accès fin pour 13 profils d'utilisateurs sans alourdir l'expérience ?</a:t>
+              <a:t>Comment </a:t>
+            </a:r>
+            <a:r>
+              <a:rPr sz="1350" dirty="0" err="1">
+                <a:solidFill>
+                  <a:srgbClr val="334155"/>
+                </a:solidFill>
+                <a:latin typeface="Segoe UI"/>
+              </a:rPr>
+              <a:t>implémenter</a:t>
+            </a:r>
+            <a:r>
+              <a:rPr sz="1350" dirty="0">
+                <a:solidFill>
+                  <a:srgbClr val="334155"/>
+                </a:solidFill>
+                <a:latin typeface="Segoe UI"/>
+              </a:rPr>
+              <a:t> un </a:t>
+            </a:r>
+            <a:r>
+              <a:rPr sz="1350" dirty="0" err="1">
+                <a:solidFill>
+                  <a:srgbClr val="334155"/>
+                </a:solidFill>
+                <a:latin typeface="Segoe UI"/>
+              </a:rPr>
+              <a:t>contrôle</a:t>
+            </a:r>
+            <a:r>
+              <a:rPr sz="1350" dirty="0">
+                <a:solidFill>
+                  <a:srgbClr val="334155"/>
+                </a:solidFill>
+                <a:latin typeface="Segoe UI"/>
+              </a:rPr>
+              <a:t> </a:t>
+            </a:r>
+            <a:r>
+              <a:rPr sz="1350" dirty="0" err="1">
+                <a:solidFill>
+                  <a:srgbClr val="334155"/>
+                </a:solidFill>
+                <a:latin typeface="Segoe UI"/>
+              </a:rPr>
+              <a:t>d'accès</a:t>
+            </a:r>
+            <a:r>
+              <a:rPr sz="1350" dirty="0">
+                <a:solidFill>
+                  <a:srgbClr val="334155"/>
+                </a:solidFill>
+                <a:latin typeface="Segoe UI"/>
+              </a:rPr>
+              <a:t> fin pour 13 </a:t>
+            </a:r>
+            <a:r>
+              <a:rPr sz="1350" dirty="0" err="1">
+                <a:solidFill>
+                  <a:srgbClr val="334155"/>
+                </a:solidFill>
+                <a:latin typeface="Segoe UI"/>
+              </a:rPr>
+              <a:t>profils</a:t>
+            </a:r>
+            <a:r>
+              <a:rPr sz="1350" dirty="0">
+                <a:solidFill>
+                  <a:srgbClr val="334155"/>
+                </a:solidFill>
+                <a:latin typeface="Segoe UI"/>
+              </a:rPr>
+              <a:t> </a:t>
+            </a:r>
+            <a:r>
+              <a:rPr sz="1350" dirty="0" err="1">
+                <a:solidFill>
+                  <a:srgbClr val="334155"/>
+                </a:solidFill>
+                <a:latin typeface="Segoe UI"/>
+              </a:rPr>
+              <a:t>d'utilisateurs</a:t>
+            </a:r>
+            <a:r>
+              <a:rPr sz="1350" dirty="0">
+                <a:solidFill>
+                  <a:srgbClr val="334155"/>
+                </a:solidFill>
+                <a:latin typeface="Segoe UI"/>
+              </a:rPr>
+              <a:t> sans </a:t>
+            </a:r>
+            <a:r>
+              <a:rPr sz="1350" dirty="0" err="1">
+                <a:solidFill>
+                  <a:srgbClr val="334155"/>
+                </a:solidFill>
+                <a:latin typeface="Segoe UI"/>
+              </a:rPr>
+              <a:t>alourdir</a:t>
+            </a:r>
+            <a:r>
+              <a:rPr sz="1350" dirty="0">
+                <a:solidFill>
+                  <a:srgbClr val="334155"/>
+                </a:solidFill>
+                <a:latin typeface="Segoe UI"/>
+              </a:rPr>
+              <a:t> </a:t>
+            </a:r>
+            <a:r>
+              <a:rPr sz="1350" dirty="0" err="1">
+                <a:solidFill>
+                  <a:srgbClr val="334155"/>
+                </a:solidFill>
+                <a:latin typeface="Segoe UI"/>
+              </a:rPr>
+              <a:t>l'expérience</a:t>
+            </a:r>
+            <a:r>
+              <a:rPr sz="1350" dirty="0">
+                <a:solidFill>
+                  <a:srgbClr val="334155"/>
+                </a:solidFill>
+                <a:latin typeface="Segoe UI"/>
+              </a:rPr>
+              <a:t> ?</a:t>
             </a:r>
           </a:p>
           <a:p>
@@ -25150,7 +26590,7 @@
               </a:spcAft>
             </a:pPr>
             <a:r>
-              <a:rPr sz="1050">
+              <a:rPr sz="1050" dirty="0">
                 <a:solidFill>
                   <a:srgbClr val="2563EB"/>
                 </a:solidFill>
@@ -25159,13 +26599,139 @@
               <a:t>●  </a:t>
             </a:r>
             <a:r>
-              <a:rPr sz="1350">
+              <a:rPr sz="1350" dirty="0">
                 <a:solidFill>
                   <a:srgbClr val="334155"/>
                 </a:solidFill>
                 <a:latin typeface="Segoe UI"/>
               </a:rPr>
-              <a:t>Comment exploiter les données comportementales pour détecter précocement le risque de décrochage scolaire ?</a:t>
+              <a:t>Comment exploiter les </a:t>
+            </a:r>
+            <a:r>
+              <a:rPr sz="1350" dirty="0" err="1">
+                <a:solidFill>
+                  <a:srgbClr val="334155"/>
+                </a:solidFill>
+                <a:latin typeface="Segoe UI"/>
+              </a:rPr>
+              <a:t>données</a:t>
+            </a:r>
+            <a:r>
+              <a:rPr sz="1350" dirty="0">
+                <a:solidFill>
+                  <a:srgbClr val="334155"/>
+                </a:solidFill>
+                <a:latin typeface="Segoe UI"/>
+              </a:rPr>
+              <a:t> </a:t>
+            </a:r>
+            <a:r>
+              <a:rPr sz="1350" dirty="0" err="1">
+                <a:solidFill>
+                  <a:srgbClr val="334155"/>
+                </a:solidFill>
+                <a:latin typeface="Segoe UI"/>
+              </a:rPr>
+              <a:t>comportementales</a:t>
+            </a:r>
+            <a:r>
+              <a:rPr sz="1350" dirty="0">
+                <a:solidFill>
+                  <a:srgbClr val="334155"/>
+                </a:solidFill>
+                <a:latin typeface="Segoe UI"/>
+              </a:rPr>
+              <a:t> pour </a:t>
+            </a:r>
+            <a:r>
+              <a:rPr sz="1350" dirty="0" err="1">
+                <a:solidFill>
+                  <a:srgbClr val="334155"/>
+                </a:solidFill>
+                <a:latin typeface="Segoe UI"/>
+              </a:rPr>
+              <a:t>détecter</a:t>
+            </a:r>
+            <a:r>
+              <a:rPr sz="1350" dirty="0">
+                <a:solidFill>
+                  <a:srgbClr val="334155"/>
+                </a:solidFill>
+                <a:latin typeface="Segoe UI"/>
+              </a:rPr>
+              <a:t> </a:t>
+            </a:r>
+            <a:r>
+              <a:rPr sz="1350" dirty="0" err="1">
+                <a:solidFill>
+                  <a:srgbClr val="334155"/>
+                </a:solidFill>
+                <a:latin typeface="Segoe UI"/>
+              </a:rPr>
+              <a:t>précocement</a:t>
+            </a:r>
+            <a:r>
+              <a:rPr sz="1350" dirty="0">
+                <a:solidFill>
+                  <a:srgbClr val="334155"/>
+                </a:solidFill>
+                <a:latin typeface="Segoe UI"/>
+              </a:rPr>
+              <a:t> le </a:t>
+            </a:r>
+            <a:r>
+              <a:rPr sz="1350" dirty="0" err="1">
+                <a:solidFill>
+                  <a:srgbClr val="334155"/>
+                </a:solidFill>
+                <a:latin typeface="Segoe UI"/>
+              </a:rPr>
+              <a:t>risque</a:t>
+            </a:r>
+            <a:r>
+              <a:rPr sz="1350" dirty="0">
+                <a:solidFill>
+                  <a:srgbClr val="334155"/>
+                </a:solidFill>
+                <a:latin typeface="Segoe UI"/>
+              </a:rPr>
+              <a:t> de </a:t>
+            </a:r>
+            <a:r>
+              <a:rPr sz="1350" dirty="0" err="1">
+                <a:solidFill>
+                  <a:srgbClr val="334155"/>
+                </a:solidFill>
+                <a:latin typeface="Segoe UI"/>
+              </a:rPr>
+              <a:t>décrochage</a:t>
+            </a:r>
+            <a:r>
+              <a:rPr sz="1350" dirty="0">
+                <a:solidFill>
+                  <a:srgbClr val="334155"/>
+                </a:solidFill>
+                <a:latin typeface="Segoe UI"/>
+              </a:rPr>
+              <a:t> </a:t>
+            </a:r>
+            <a:r>
+              <a:rPr sz="1350" dirty="0" err="1">
+                <a:solidFill>
+                  <a:srgbClr val="334155"/>
+                </a:solidFill>
+                <a:latin typeface="Segoe UI"/>
+              </a:rPr>
+              <a:t>scolaire</a:t>
+            </a:r>
+            <a:r>
+              <a:rPr sz="1350" dirty="0">
+                <a:solidFill>
+                  <a:srgbClr val="334155"/>
+                </a:solidFill>
+                <a:latin typeface="Segoe UI"/>
+              </a:rPr>
+              <a:t> ?</a:t>
             </a:r>
           </a:p>
           <a:p>
@@ -25178,7 +26744,7 @@
               </a:spcAft>
             </a:pPr>
             <a:r>
-              <a:rPr sz="1050">
+              <a:rPr sz="1050" dirty="0">
                 <a:solidFill>
                   <a:srgbClr val="2563EB"/>
                 </a:solidFill>
@@ -25187,13 +26753,139 @@
               <a:t>●  </a:t>
             </a:r>
             <a:r>
-              <a:rPr sz="1350">
+              <a:rPr sz="1350" dirty="0">
                 <a:solidFill>
                   <a:srgbClr val="334155"/>
                 </a:solidFill>
                 <a:latin typeface="Segoe UI"/>
               </a:rPr>
-              <a:t>Quelle architecture garantit à la fois richesse fonctionnelle, réactivité et capacité d'évolution multi-établissements ?</a:t>
+              <a:t>Quelle architecture </a:t>
+            </a:r>
+            <a:r>
+              <a:rPr sz="1350" dirty="0" err="1">
+                <a:solidFill>
+                  <a:srgbClr val="334155"/>
+                </a:solidFill>
+                <a:latin typeface="Segoe UI"/>
+              </a:rPr>
+              <a:t>garantit</a:t>
+            </a:r>
+            <a:r>
+              <a:rPr sz="1350" dirty="0">
+                <a:solidFill>
+                  <a:srgbClr val="334155"/>
+                </a:solidFill>
+                <a:latin typeface="Segoe UI"/>
+              </a:rPr>
+              <a:t> à la </a:t>
+            </a:r>
+            <a:r>
+              <a:rPr sz="1350" dirty="0" err="1">
+                <a:solidFill>
+                  <a:srgbClr val="334155"/>
+                </a:solidFill>
+                <a:latin typeface="Segoe UI"/>
+              </a:rPr>
+              <a:t>fois</a:t>
+            </a:r>
+            <a:r>
+              <a:rPr sz="1350" dirty="0">
+                <a:solidFill>
+                  <a:srgbClr val="334155"/>
+                </a:solidFill>
+                <a:latin typeface="Segoe UI"/>
+              </a:rPr>
+              <a:t> richesse </a:t>
+            </a:r>
+            <a:r>
+              <a:rPr sz="1350" dirty="0" err="1">
+                <a:solidFill>
+                  <a:srgbClr val="334155"/>
+                </a:solidFill>
+                <a:latin typeface="Segoe UI"/>
+              </a:rPr>
+              <a:t>fonctionnelle</a:t>
+            </a:r>
+            <a:r>
+              <a:rPr sz="1350" dirty="0">
+                <a:solidFill>
+                  <a:srgbClr val="334155"/>
+                </a:solidFill>
+                <a:latin typeface="Segoe UI"/>
+              </a:rPr>
+              <a:t>, </a:t>
+            </a:r>
+            <a:r>
+              <a:rPr sz="1350" dirty="0" err="1">
+                <a:solidFill>
+                  <a:srgbClr val="334155"/>
+                </a:solidFill>
+                <a:latin typeface="Segoe UI"/>
+              </a:rPr>
+              <a:t>réactivité</a:t>
+            </a:r>
+            <a:r>
+              <a:rPr sz="1350" dirty="0">
+                <a:solidFill>
+                  <a:srgbClr val="334155"/>
+                </a:solidFill>
+                <a:latin typeface="Segoe UI"/>
+              </a:rPr>
+              <a:t> et </a:t>
+            </a:r>
+            <a:r>
+              <a:rPr sz="1350" dirty="0" err="1">
+                <a:solidFill>
+                  <a:srgbClr val="334155"/>
+                </a:solidFill>
+                <a:latin typeface="Segoe UI"/>
+              </a:rPr>
+              <a:t>capacité</a:t>
+            </a:r>
+            <a:r>
+              <a:rPr sz="1350" dirty="0">
+                <a:solidFill>
+                  <a:srgbClr val="334155"/>
+                </a:solidFill>
+                <a:latin typeface="Segoe UI"/>
+              </a:rPr>
+              <a:t> </a:t>
+            </a:r>
+            <a:r>
+              <a:rPr sz="1350" dirty="0" err="1">
+                <a:solidFill>
+                  <a:srgbClr val="334155"/>
+                </a:solidFill>
+                <a:latin typeface="Segoe UI"/>
+              </a:rPr>
+              <a:t>d'évolution</a:t>
+            </a:r>
+            <a:r>
+              <a:rPr sz="1350" dirty="0">
+                <a:solidFill>
+                  <a:srgbClr val="334155"/>
+                </a:solidFill>
+                <a:latin typeface="Segoe UI"/>
+              </a:rPr>
+              <a:t> multi-</a:t>
+            </a:r>
+            <a:r>
+              <a:rPr sz="1350" dirty="0" err="1">
+                <a:solidFill>
+                  <a:srgbClr val="334155"/>
+                </a:solidFill>
+                <a:latin typeface="Segoe UI"/>
+              </a:rPr>
+              <a:t>établissements</a:t>
+            </a:r>
+            <a:r>
+              <a:rPr sz="1350" dirty="0">
+                <a:solidFill>
+                  <a:srgbClr val="334155"/>
+                </a:solidFill>
+                <a:latin typeface="Segoe UI"/>
+              </a:rPr>
+              <a:t> ?</a:t>
             </a:r>
           </a:p>
         </p:txBody>
@@ -25207,7 +26899,7 @@
 </file>
 
 <file path=ppt/slides/slide5.xml><?xml version="1.0" encoding="utf-8"?>
-<p:sld xmlns:a="http://schemas.openxmlformats.org/drawingml/2006/main" xmlns:p="http://schemas.openxmlformats.org/presentationml/2006/main" xmlns:r="http://schemas.openxmlformats.org/officeDocument/2006/relationships">
+<p:sld xmlns:a="http://schemas.openxmlformats.org/drawingml/2006/main" xmlns:r="http://schemas.openxmlformats.org/officeDocument/2006/relationships" xmlns:p="http://schemas.openxmlformats.org/presentationml/2006/main">
   <p:cSld>
     <p:spTree>
       <p:nvGrpSpPr>
@@ -25215,7 +26907,14 @@
         <p:cNvGrpSpPr/>
         <p:nvPr/>
       </p:nvGrpSpPr>
-      <p:grpSpPr/>
+      <p:grpSpPr>
+        <a:xfrm>
+          <a:off x="0" y="0"/>
+          <a:ext cx="0" cy="0"/>
+          <a:chOff x="0" y="0"/>
+          <a:chExt cx="0" cy="0"/>
+        </a:xfrm>
+      </p:grpSpPr>
       <p:sp>
         <p:nvSpPr>
           <p:cNvPr id="2" name="Rectangle 1"/>
@@ -25257,6 +26956,7 @@
           <a:lstStyle/>
           <a:p>
             <a:pPr algn="ctr"/>
+            <a:endParaRPr/>
           </a:p>
         </p:txBody>
       </p:sp>
@@ -25301,6 +27001,7 @@
           <a:lstStyle/>
           <a:p>
             <a:pPr algn="ctr"/>
+            <a:endParaRPr/>
           </a:p>
         </p:txBody>
       </p:sp>
@@ -25321,7 +27022,7 @@
           <a:noFill/>
         </p:spPr>
         <p:txBody>
-          <a:bodyPr wrap="square" anchor="t" lIns="0" rIns="0" tIns="0" bIns="0">
+          <a:bodyPr wrap="square" lIns="0" tIns="0" rIns="0" bIns="0" anchor="t">
             <a:spAutoFit/>
           </a:bodyPr>
           <a:lstStyle/>
@@ -25360,7 +27061,7 @@
           <a:noFill/>
         </p:spPr>
         <p:txBody>
-          <a:bodyPr wrap="square" anchor="t" lIns="0" rIns="0" tIns="0" bIns="0">
+          <a:bodyPr wrap="square" lIns="0" tIns="0" rIns="0" bIns="0" anchor="t">
             <a:spAutoFit/>
           </a:bodyPr>
           <a:lstStyle/>
@@ -25399,7 +27100,7 @@
           <a:noFill/>
         </p:spPr>
         <p:txBody>
-          <a:bodyPr wrap="square" anchor="t" lIns="0" rIns="0" tIns="0" bIns="0">
+          <a:bodyPr wrap="square" lIns="0" tIns="0" rIns="0" bIns="0" anchor="t">
             <a:spAutoFit/>
           </a:bodyPr>
           <a:lstStyle/>
@@ -25438,7 +27139,7 @@
           <a:noFill/>
         </p:spPr>
         <p:txBody>
-          <a:bodyPr wrap="square" anchor="t" lIns="0" rIns="0" tIns="0" bIns="0">
+          <a:bodyPr wrap="square" lIns="0" tIns="0" rIns="0" bIns="0" anchor="t">
             <a:spAutoFit/>
           </a:bodyPr>
           <a:lstStyle/>
@@ -25512,7 +27213,7 @@
           <a:noFill/>
         </p:spPr>
         <p:txBody>
-          <a:bodyPr wrap="square" anchor="t" lIns="0" rIns="0" tIns="0" bIns="0">
+          <a:bodyPr wrap="square" lIns="0" tIns="0" rIns="0" bIns="0" anchor="t">
             <a:spAutoFit/>
           </a:bodyPr>
           <a:lstStyle/>
@@ -25579,6 +27280,7 @@
           <a:lstStyle/>
           <a:p>
             <a:pPr algn="ctr"/>
+            <a:endParaRPr/>
           </a:p>
         </p:txBody>
       </p:sp>
@@ -25621,7 +27323,7 @@
           </a:fontRef>
         </p:style>
         <p:txBody>
-          <a:bodyPr rtlCol="0" anchor="ctr" lIns="0" rIns="0" wrap="none"/>
+          <a:bodyPr wrap="none" lIns="0" rIns="0" rtlCol="0" anchor="ctr"/>
           <a:lstStyle/>
           <a:p>
             <a:pPr algn="ctr"/>
@@ -25654,7 +27356,7 @@
           <a:noFill/>
         </p:spPr>
         <p:txBody>
-          <a:bodyPr wrap="square" anchor="t" lIns="0" rIns="0" tIns="0" bIns="0">
+          <a:bodyPr wrap="square" lIns="0" tIns="0" rIns="0" bIns="0" anchor="t">
             <a:spAutoFit/>
           </a:bodyPr>
           <a:lstStyle/>
@@ -25721,6 +27423,7 @@
           <a:lstStyle/>
           <a:p>
             <a:pPr algn="ctr"/>
+            <a:endParaRPr/>
           </a:p>
         </p:txBody>
       </p:sp>
@@ -25763,7 +27466,7 @@
           </a:fontRef>
         </p:style>
         <p:txBody>
-          <a:bodyPr rtlCol="0" anchor="ctr" lIns="0" rIns="0" wrap="none"/>
+          <a:bodyPr wrap="none" lIns="0" rIns="0" rtlCol="0" anchor="ctr"/>
           <a:lstStyle/>
           <a:p>
             <a:pPr algn="ctr"/>
@@ -25796,7 +27499,7 @@
           <a:noFill/>
         </p:spPr>
         <p:txBody>
-          <a:bodyPr wrap="square" anchor="t" lIns="0" rIns="0" tIns="0" bIns="0">
+          <a:bodyPr wrap="square" lIns="0" tIns="0" rIns="0" bIns="0" anchor="t">
             <a:spAutoFit/>
           </a:bodyPr>
           <a:lstStyle/>
@@ -25863,6 +27566,7 @@
           <a:lstStyle/>
           <a:p>
             <a:pPr algn="ctr"/>
+            <a:endParaRPr/>
           </a:p>
         </p:txBody>
       </p:sp>
@@ -25905,7 +27609,7 @@
           </a:fontRef>
         </p:style>
         <p:txBody>
-          <a:bodyPr rtlCol="0" anchor="ctr" lIns="0" rIns="0" wrap="none"/>
+          <a:bodyPr wrap="none" lIns="0" rIns="0" rtlCol="0" anchor="ctr"/>
           <a:lstStyle/>
           <a:p>
             <a:pPr algn="ctr"/>
@@ -25938,7 +27642,7 @@
           <a:noFill/>
         </p:spPr>
         <p:txBody>
-          <a:bodyPr wrap="square" anchor="t" lIns="0" rIns="0" tIns="0" bIns="0">
+          <a:bodyPr wrap="square" lIns="0" tIns="0" rIns="0" bIns="0" anchor="t">
             <a:spAutoFit/>
           </a:bodyPr>
           <a:lstStyle/>
@@ -26005,6 +27709,7 @@
           <a:lstStyle/>
           <a:p>
             <a:pPr algn="ctr"/>
+            <a:endParaRPr/>
           </a:p>
         </p:txBody>
       </p:sp>
@@ -26047,7 +27752,7 @@
           </a:fontRef>
         </p:style>
         <p:txBody>
-          <a:bodyPr rtlCol="0" anchor="ctr" lIns="0" rIns="0" wrap="none"/>
+          <a:bodyPr wrap="none" lIns="0" rIns="0" rtlCol="0" anchor="ctr"/>
           <a:lstStyle/>
           <a:p>
             <a:pPr algn="ctr"/>
@@ -26080,7 +27785,7 @@
           <a:noFill/>
         </p:spPr>
         <p:txBody>
-          <a:bodyPr wrap="square" anchor="t" lIns="0" rIns="0" tIns="0" bIns="0">
+          <a:bodyPr wrap="square" lIns="0" tIns="0" rIns="0" bIns="0" anchor="t">
             <a:spAutoFit/>
           </a:bodyPr>
           <a:lstStyle/>
@@ -26147,6 +27852,7 @@
           <a:lstStyle/>
           <a:p>
             <a:pPr algn="ctr"/>
+            <a:endParaRPr/>
           </a:p>
         </p:txBody>
       </p:sp>
@@ -26189,7 +27895,7 @@
           </a:fontRef>
         </p:style>
         <p:txBody>
-          <a:bodyPr rtlCol="0" anchor="ctr" lIns="0" rIns="0" wrap="none"/>
+          <a:bodyPr wrap="none" lIns="0" rIns="0" rtlCol="0" anchor="ctr"/>
           <a:lstStyle/>
           <a:p>
             <a:pPr algn="ctr"/>
@@ -26222,7 +27928,7 @@
           <a:noFill/>
         </p:spPr>
         <p:txBody>
-          <a:bodyPr wrap="square" anchor="t" lIns="0" rIns="0" tIns="0" bIns="0">
+          <a:bodyPr wrap="square" lIns="0" tIns="0" rIns="0" bIns="0" anchor="t">
             <a:spAutoFit/>
           </a:bodyPr>
           <a:lstStyle/>
@@ -26289,6 +27995,7 @@
           <a:lstStyle/>
           <a:p>
             <a:pPr algn="ctr"/>
+            <a:endParaRPr/>
           </a:p>
         </p:txBody>
       </p:sp>
@@ -26331,7 +28038,7 @@
           </a:fontRef>
         </p:style>
         <p:txBody>
-          <a:bodyPr rtlCol="0" anchor="ctr" lIns="0" rIns="0" wrap="none"/>
+          <a:bodyPr wrap="none" lIns="0" rIns="0" rtlCol="0" anchor="ctr"/>
           <a:lstStyle/>
           <a:p>
             <a:pPr algn="ctr"/>
@@ -26364,7 +28071,7 @@
           <a:noFill/>
         </p:spPr>
         <p:txBody>
-          <a:bodyPr wrap="square" anchor="t" lIns="0" rIns="0" tIns="0" bIns="0">
+          <a:bodyPr wrap="square" lIns="0" tIns="0" rIns="0" bIns="0" anchor="t">
             <a:spAutoFit/>
           </a:bodyPr>
           <a:lstStyle/>
@@ -26375,14 +28082,74 @@
               </a:lnSpc>
             </a:pPr>
             <a:r>
-              <a:rPr sz="1250" b="1" i="0">
+              <a:rPr sz="1250" b="1" i="0" dirty="0" err="1">
                 <a:solidFill>
                   <a:srgbClr val="0F172A"/>
                 </a:solidFill>
                 <a:latin typeface="Segoe UI"/>
               </a:rPr>
-              <a:t>Implémenter un contrôle d'accès RBAC 13 rôles</a:t>
-            </a:r>
+              <a:t>Implémenter</a:t>
+            </a:r>
+            <a:r>
+              <a:rPr sz="1250" b="1" i="0" dirty="0">
+                <a:solidFill>
+                  <a:srgbClr val="0F172A"/>
+                </a:solidFill>
+                <a:latin typeface="Segoe UI"/>
+              </a:rPr>
+              <a:t> un </a:t>
+            </a:r>
+            <a:r>
+              <a:rPr sz="1250" b="1" i="0" dirty="0" err="1">
+                <a:solidFill>
+                  <a:srgbClr val="0F172A"/>
+                </a:solidFill>
+                <a:latin typeface="Segoe UI"/>
+              </a:rPr>
+              <a:t>contrôle</a:t>
+            </a:r>
+            <a:r>
+              <a:rPr sz="1250" b="1" i="0" dirty="0">
+                <a:solidFill>
+                  <a:srgbClr val="0F172A"/>
+                </a:solidFill>
+                <a:latin typeface="Segoe UI"/>
+              </a:rPr>
+              <a:t> </a:t>
+            </a:r>
+            <a:r>
+              <a:rPr sz="1250" b="1" i="0" dirty="0" err="1">
+                <a:solidFill>
+                  <a:srgbClr val="0F172A"/>
+                </a:solidFill>
+                <a:latin typeface="Segoe UI"/>
+              </a:rPr>
+              <a:t>d'accès</a:t>
+            </a:r>
+            <a:r>
+              <a:rPr sz="1250" b="1" i="0" dirty="0">
+                <a:solidFill>
+                  <a:srgbClr val="0F172A"/>
+                </a:solidFill>
+                <a:latin typeface="Segoe UI"/>
+              </a:rPr>
+              <a:t> RBAC 13 </a:t>
+            </a:r>
+            <a:r>
+              <a:rPr sz="1250" b="1" i="0" dirty="0" err="1">
+                <a:solidFill>
+                  <a:srgbClr val="0F172A"/>
+                </a:solidFill>
+                <a:latin typeface="Segoe UI"/>
+              </a:rPr>
+              <a:t>rôles</a:t>
+            </a:r>
+            <a:endParaRPr sz="1250" b="1" i="0" dirty="0">
+              <a:solidFill>
+                <a:srgbClr val="0F172A"/>
+              </a:solidFill>
+              <a:latin typeface="Segoe UI"/>
+            </a:endParaRPr>
           </a:p>
         </p:txBody>
       </p:sp>
@@ -26431,6 +28198,7 @@
           <a:lstStyle/>
           <a:p>
             <a:pPr algn="ctr"/>
+            <a:endParaRPr/>
           </a:p>
         </p:txBody>
       </p:sp>
@@ -26473,7 +28241,7 @@
           </a:fontRef>
         </p:style>
         <p:txBody>
-          <a:bodyPr rtlCol="0" anchor="ctr" lIns="0" rIns="0" wrap="none"/>
+          <a:bodyPr wrap="none" lIns="0" rIns="0" rtlCol="0" anchor="ctr"/>
           <a:lstStyle/>
           <a:p>
             <a:pPr algn="ctr"/>
@@ -26506,7 +28274,7 @@
           <a:noFill/>
         </p:spPr>
         <p:txBody>
-          <a:bodyPr wrap="square" anchor="t" lIns="0" rIns="0" tIns="0" bIns="0">
+          <a:bodyPr wrap="square" lIns="0" tIns="0" rIns="0" bIns="0" anchor="t">
             <a:spAutoFit/>
           </a:bodyPr>
           <a:lstStyle/>
@@ -26517,14 +28285,56 @@
               </a:lnSpc>
             </a:pPr>
             <a:r>
-              <a:rPr sz="1250" b="1" i="0">
+              <a:rPr sz="1250" b="1" i="0" dirty="0" err="1">
                 <a:solidFill>
                   <a:srgbClr val="0F172A"/>
                 </a:solidFill>
                 <a:latin typeface="Segoe UI"/>
               </a:rPr>
-              <a:t>Produire des analytics éducatifs prédictifs</a:t>
-            </a:r>
+              <a:t>Produire</a:t>
+            </a:r>
+            <a:r>
+              <a:rPr sz="1250" b="1" i="0" dirty="0">
+                <a:solidFill>
+                  <a:srgbClr val="0F172A"/>
+                </a:solidFill>
+                <a:latin typeface="Segoe UI"/>
+              </a:rPr>
+              <a:t> des analytics </a:t>
+            </a:r>
+            <a:r>
+              <a:rPr sz="1250" b="1" i="0" dirty="0" err="1">
+                <a:solidFill>
+                  <a:srgbClr val="0F172A"/>
+                </a:solidFill>
+                <a:latin typeface="Segoe UI"/>
+              </a:rPr>
+              <a:t>éducatifs</a:t>
+            </a:r>
+            <a:r>
+              <a:rPr sz="1250" b="1" i="0" dirty="0">
+                <a:solidFill>
+                  <a:srgbClr val="0F172A"/>
+                </a:solidFill>
+                <a:latin typeface="Segoe UI"/>
+              </a:rPr>
+              <a:t> </a:t>
+            </a:r>
+            <a:r>
+              <a:rPr sz="1250" b="1" i="0" dirty="0" err="1">
+                <a:solidFill>
+                  <a:srgbClr val="0F172A"/>
+                </a:solidFill>
+                <a:latin typeface="Segoe UI"/>
+              </a:rPr>
+              <a:t>prédictifs</a:t>
+            </a:r>
+            <a:endParaRPr sz="1250" b="1" i="0" dirty="0">
+              <a:solidFill>
+                <a:srgbClr val="0F172A"/>
+              </a:solidFill>
+              <a:latin typeface="Segoe UI"/>
+            </a:endParaRPr>
           </a:p>
         </p:txBody>
       </p:sp>
@@ -26573,6 +28383,7 @@
           <a:lstStyle/>
           <a:p>
             <a:pPr algn="ctr"/>
+            <a:endParaRPr/>
           </a:p>
         </p:txBody>
       </p:sp>
@@ -26615,7 +28426,7 @@
           </a:fontRef>
         </p:style>
         <p:txBody>
-          <a:bodyPr rtlCol="0" anchor="ctr" lIns="0" rIns="0" wrap="none"/>
+          <a:bodyPr wrap="none" lIns="0" rIns="0" rtlCol="0" anchor="ctr"/>
           <a:lstStyle/>
           <a:p>
             <a:pPr algn="ctr"/>
@@ -26648,7 +28459,7 @@
           <a:noFill/>
         </p:spPr>
         <p:txBody>
-          <a:bodyPr wrap="square" anchor="t" lIns="0" rIns="0" tIns="0" bIns="0">
+          <a:bodyPr wrap="square" lIns="0" tIns="0" rIns="0" bIns="0" anchor="t">
             <a:spAutoFit/>
           </a:bodyPr>
           <a:lstStyle/>
@@ -26659,14 +28470,74 @@
               </a:lnSpc>
             </a:pPr>
             <a:r>
-              <a:rPr sz="1250" b="1" i="0">
+              <a:rPr sz="1250" b="1" i="0" dirty="0" err="1">
                 <a:solidFill>
                   <a:srgbClr val="0F172A"/>
                 </a:solidFill>
                 <a:latin typeface="Segoe UI"/>
               </a:rPr>
-              <a:t>Garantir sécurité &amp; traçabilité complètes</a:t>
-            </a:r>
+              <a:t>Garantir</a:t>
+            </a:r>
+            <a:r>
+              <a:rPr sz="1250" b="1" i="0" dirty="0">
+                <a:solidFill>
+                  <a:srgbClr val="0F172A"/>
+                </a:solidFill>
+                <a:latin typeface="Segoe UI"/>
+              </a:rPr>
+              <a:t> </a:t>
+            </a:r>
+            <a:r>
+              <a:rPr sz="1250" b="1" i="0" dirty="0" err="1">
+                <a:solidFill>
+                  <a:srgbClr val="0F172A"/>
+                </a:solidFill>
+                <a:latin typeface="Segoe UI"/>
+              </a:rPr>
+              <a:t>sécurité</a:t>
+            </a:r>
+            <a:r>
+              <a:rPr sz="1250" b="1" i="0" dirty="0">
+                <a:solidFill>
+                  <a:srgbClr val="0F172A"/>
+                </a:solidFill>
+                <a:latin typeface="Segoe UI"/>
+              </a:rPr>
+              <a:t> &amp; </a:t>
+            </a:r>
+            <a:r>
+              <a:rPr sz="1250" b="1" i="0" dirty="0" err="1">
+                <a:solidFill>
+                  <a:srgbClr val="0F172A"/>
+                </a:solidFill>
+                <a:latin typeface="Segoe UI"/>
+              </a:rPr>
+              <a:t>traçabilité</a:t>
+            </a:r>
+            <a:r>
+              <a:rPr sz="1250" b="1" i="0" dirty="0">
+                <a:solidFill>
+                  <a:srgbClr val="0F172A"/>
+                </a:solidFill>
+                <a:latin typeface="Segoe UI"/>
+              </a:rPr>
+              <a:t> </a:t>
+            </a:r>
+            <a:r>
+              <a:rPr sz="1250" b="1" i="0" dirty="0" err="1">
+                <a:solidFill>
+                  <a:srgbClr val="0F172A"/>
+                </a:solidFill>
+                <a:latin typeface="Segoe UI"/>
+              </a:rPr>
+              <a:t>complètes</a:t>
+            </a:r>
+            <a:endParaRPr sz="1250" b="1" i="0" dirty="0">
+              <a:solidFill>
+                <a:srgbClr val="0F172A"/>
+              </a:solidFill>
+              <a:latin typeface="Segoe UI"/>
+            </a:endParaRPr>
           </a:p>
         </p:txBody>
       </p:sp>
@@ -26679,7 +28550,7 @@
 </file>
 
 <file path=ppt/slides/slide6.xml><?xml version="1.0" encoding="utf-8"?>
-<p:sld xmlns:a="http://schemas.openxmlformats.org/drawingml/2006/main" xmlns:p="http://schemas.openxmlformats.org/presentationml/2006/main" xmlns:r="http://schemas.openxmlformats.org/officeDocument/2006/relationships">
+<p:sld xmlns:a="http://schemas.openxmlformats.org/drawingml/2006/main" xmlns:r="http://schemas.openxmlformats.org/officeDocument/2006/relationships" xmlns:p="http://schemas.openxmlformats.org/presentationml/2006/main">
   <p:cSld>
     <p:spTree>
       <p:nvGrpSpPr>
@@ -26687,7 +28558,14 @@
         <p:cNvGrpSpPr/>
         <p:nvPr/>
       </p:nvGrpSpPr>
-      <p:grpSpPr/>
+      <p:grpSpPr>
+        <a:xfrm>
+          <a:off x="0" y="0"/>
+          <a:ext cx="0" cy="0"/>
+          <a:chOff x="0" y="0"/>
+          <a:chExt cx="0" cy="0"/>
+        </a:xfrm>
+      </p:grpSpPr>
       <p:sp>
         <p:nvSpPr>
           <p:cNvPr id="2" name="Rectangle 1"/>
@@ -26729,6 +28607,7 @@
           <a:lstStyle/>
           <a:p>
             <a:pPr algn="ctr"/>
+            <a:endParaRPr/>
           </a:p>
         </p:txBody>
       </p:sp>
@@ -26773,6 +28652,7 @@
           <a:lstStyle/>
           <a:p>
             <a:pPr algn="ctr"/>
+            <a:endParaRPr/>
           </a:p>
         </p:txBody>
       </p:sp>
@@ -26793,7 +28673,7 @@
           <a:noFill/>
         </p:spPr>
         <p:txBody>
-          <a:bodyPr wrap="square" anchor="t" lIns="0" rIns="0" tIns="0" bIns="0">
+          <a:bodyPr wrap="square" lIns="0" tIns="0" rIns="0" bIns="0" anchor="t">
             <a:spAutoFit/>
           </a:bodyPr>
           <a:lstStyle/>
@@ -26832,7 +28712,7 @@
           <a:noFill/>
         </p:spPr>
         <p:txBody>
-          <a:bodyPr wrap="square" anchor="t" lIns="0" rIns="0" tIns="0" bIns="0">
+          <a:bodyPr wrap="square" lIns="0" tIns="0" rIns="0" bIns="0" anchor="t">
             <a:spAutoFit/>
           </a:bodyPr>
           <a:lstStyle/>
@@ -26871,7 +28751,7 @@
           <a:noFill/>
         </p:spPr>
         <p:txBody>
-          <a:bodyPr wrap="square" anchor="t" lIns="0" rIns="0" tIns="0" bIns="0">
+          <a:bodyPr wrap="square" lIns="0" tIns="0" rIns="0" bIns="0" anchor="t">
             <a:spAutoFit/>
           </a:bodyPr>
           <a:lstStyle/>
@@ -26910,7 +28790,7 @@
           <a:noFill/>
         </p:spPr>
         <p:txBody>
-          <a:bodyPr wrap="square" anchor="t" lIns="0" rIns="0" tIns="0" bIns="0">
+          <a:bodyPr wrap="square" lIns="0" tIns="0" rIns="0" bIns="0" anchor="t">
             <a:spAutoFit/>
           </a:bodyPr>
           <a:lstStyle/>
@@ -27009,7 +28889,7 @@
           <a:p>
             <a:pPr algn="ctr"/>
             <a:r>
-              <a:rPr b="1" sz="1600">
+              <a:rPr sz="1600" b="1">
                 <a:solidFill>
                   <a:srgbClr val="FFFFFF"/>
                 </a:solidFill>
@@ -27060,6 +28940,7 @@
           <a:lstStyle/>
           <a:p>
             <a:pPr algn="ctr"/>
+            <a:endParaRPr/>
           </a:p>
         </p:txBody>
       </p:sp>
@@ -27080,7 +28961,7 @@
           <a:noFill/>
         </p:spPr>
         <p:txBody>
-          <a:bodyPr wrap="square" anchor="t" lIns="0" rIns="0" tIns="0" bIns="0">
+          <a:bodyPr wrap="square" lIns="0" tIns="0" rIns="0" bIns="0" anchor="t">
             <a:spAutoFit/>
           </a:bodyPr>
           <a:lstStyle/>
@@ -27119,7 +29000,7 @@
           <a:noFill/>
         </p:spPr>
         <p:txBody>
-          <a:bodyPr wrap="square" anchor="t" lIns="0" rIns="0" tIns="0" bIns="0">
+          <a:bodyPr wrap="square" lIns="0" tIns="0" rIns="0" bIns="0" anchor="t">
             <a:spAutoFit/>
           </a:bodyPr>
           <a:lstStyle/>
@@ -27183,7 +29064,7 @@
           <a:p>
             <a:pPr algn="ctr"/>
             <a:r>
-              <a:rPr b="1" sz="1600">
+              <a:rPr sz="1600" b="1">
                 <a:solidFill>
                   <a:srgbClr val="FFFFFF"/>
                 </a:solidFill>
@@ -27234,6 +29115,7 @@
           <a:lstStyle/>
           <a:p>
             <a:pPr algn="ctr"/>
+            <a:endParaRPr/>
           </a:p>
         </p:txBody>
       </p:sp>
@@ -27254,7 +29136,7 @@
           <a:noFill/>
         </p:spPr>
         <p:txBody>
-          <a:bodyPr wrap="square" anchor="t" lIns="0" rIns="0" tIns="0" bIns="0">
+          <a:bodyPr wrap="square" lIns="0" tIns="0" rIns="0" bIns="0" anchor="t">
             <a:spAutoFit/>
           </a:bodyPr>
           <a:lstStyle/>
@@ -27293,7 +29175,7 @@
           <a:noFill/>
         </p:spPr>
         <p:txBody>
-          <a:bodyPr wrap="square" anchor="t" lIns="0" rIns="0" tIns="0" bIns="0">
+          <a:bodyPr wrap="square" lIns="0" tIns="0" rIns="0" bIns="0" anchor="t">
             <a:spAutoFit/>
           </a:bodyPr>
           <a:lstStyle/>
@@ -27357,7 +29239,7 @@
           <a:p>
             <a:pPr algn="ctr"/>
             <a:r>
-              <a:rPr b="1" sz="1600">
+              <a:rPr sz="1600" b="1">
                 <a:solidFill>
                   <a:srgbClr val="FFFFFF"/>
                 </a:solidFill>
@@ -27408,6 +29290,7 @@
           <a:lstStyle/>
           <a:p>
             <a:pPr algn="ctr"/>
+            <a:endParaRPr/>
           </a:p>
         </p:txBody>
       </p:sp>
@@ -27428,7 +29311,7 @@
           <a:noFill/>
         </p:spPr>
         <p:txBody>
-          <a:bodyPr wrap="square" anchor="t" lIns="0" rIns="0" tIns="0" bIns="0">
+          <a:bodyPr wrap="square" lIns="0" tIns="0" rIns="0" bIns="0" anchor="t">
             <a:spAutoFit/>
           </a:bodyPr>
           <a:lstStyle/>
@@ -27467,7 +29350,7 @@
           <a:noFill/>
         </p:spPr>
         <p:txBody>
-          <a:bodyPr wrap="square" anchor="t" lIns="0" rIns="0" tIns="0" bIns="0">
+          <a:bodyPr wrap="square" lIns="0" tIns="0" rIns="0" bIns="0" anchor="t">
             <a:spAutoFit/>
           </a:bodyPr>
           <a:lstStyle/>
@@ -27531,7 +29414,7 @@
           <a:p>
             <a:pPr algn="ctr"/>
             <a:r>
-              <a:rPr b="1" sz="1600">
+              <a:rPr sz="1600" b="1">
                 <a:solidFill>
                   <a:srgbClr val="FFFFFF"/>
                 </a:solidFill>
@@ -27558,7 +29441,7 @@
           <a:noFill/>
         </p:spPr>
         <p:txBody>
-          <a:bodyPr wrap="square" anchor="t" lIns="0" rIns="0" tIns="0" bIns="0">
+          <a:bodyPr wrap="square" lIns="0" tIns="0" rIns="0" bIns="0" anchor="t">
             <a:spAutoFit/>
           </a:bodyPr>
           <a:lstStyle/>
@@ -27597,7 +29480,7 @@
           <a:noFill/>
         </p:spPr>
         <p:txBody>
-          <a:bodyPr wrap="square" anchor="t" lIns="0" rIns="0" tIns="0" bIns="0">
+          <a:bodyPr wrap="square" lIns="0" tIns="0" rIns="0" bIns="0" anchor="t">
             <a:spAutoFit/>
           </a:bodyPr>
           <a:lstStyle/>
@@ -27636,7 +29519,7 @@
           <a:noFill/>
         </p:spPr>
         <p:txBody>
-          <a:bodyPr wrap="square" anchor="t" lIns="0" rIns="0" tIns="0" bIns="0">
+          <a:bodyPr wrap="square" lIns="0" tIns="0" rIns="0" bIns="0" anchor="t">
             <a:spAutoFit/>
           </a:bodyPr>
           <a:lstStyle/>
@@ -27667,7 +29550,7 @@
 </file>
 
 <file path=ppt/slides/slide7.xml><?xml version="1.0" encoding="utf-8"?>
-<p:sld xmlns:a="http://schemas.openxmlformats.org/drawingml/2006/main" xmlns:p="http://schemas.openxmlformats.org/presentationml/2006/main" xmlns:r="http://schemas.openxmlformats.org/officeDocument/2006/relationships">
+<p:sld xmlns:a="http://schemas.openxmlformats.org/drawingml/2006/main" xmlns:r="http://schemas.openxmlformats.org/officeDocument/2006/relationships" xmlns:p="http://schemas.openxmlformats.org/presentationml/2006/main">
   <p:cSld>
     <p:spTree>
       <p:nvGrpSpPr>
@@ -27675,7 +29558,14 @@
         <p:cNvGrpSpPr/>
         <p:nvPr/>
       </p:nvGrpSpPr>
-      <p:grpSpPr/>
+      <p:grpSpPr>
+        <a:xfrm>
+          <a:off x="0" y="0"/>
+          <a:ext cx="0" cy="0"/>
+          <a:chOff x="0" y="0"/>
+          <a:chExt cx="0" cy="0"/>
+        </a:xfrm>
+      </p:grpSpPr>
       <p:sp>
         <p:nvSpPr>
           <p:cNvPr id="2" name="Rectangle 1"/>
@@ -27717,6 +29607,7 @@
           <a:lstStyle/>
           <a:p>
             <a:pPr algn="ctr"/>
+            <a:endParaRPr/>
           </a:p>
         </p:txBody>
       </p:sp>
@@ -27761,6 +29652,7 @@
           <a:lstStyle/>
           <a:p>
             <a:pPr algn="ctr"/>
+            <a:endParaRPr/>
           </a:p>
         </p:txBody>
       </p:sp>
@@ -27781,7 +29673,7 @@
           <a:noFill/>
         </p:spPr>
         <p:txBody>
-          <a:bodyPr wrap="square" anchor="t" lIns="0" rIns="0" tIns="0" bIns="0">
+          <a:bodyPr wrap="square" lIns="0" tIns="0" rIns="0" bIns="0" anchor="t">
             <a:spAutoFit/>
           </a:bodyPr>
           <a:lstStyle/>
@@ -27820,7 +29712,7 @@
           <a:noFill/>
         </p:spPr>
         <p:txBody>
-          <a:bodyPr wrap="square" anchor="t" lIns="0" rIns="0" tIns="0" bIns="0">
+          <a:bodyPr wrap="square" lIns="0" tIns="0" rIns="0" bIns="0" anchor="t">
             <a:spAutoFit/>
           </a:bodyPr>
           <a:lstStyle/>
@@ -27859,7 +29751,7 @@
           <a:noFill/>
         </p:spPr>
         <p:txBody>
-          <a:bodyPr wrap="square" anchor="t" lIns="0" rIns="0" tIns="0" bIns="0">
+          <a:bodyPr wrap="square" lIns="0" tIns="0" rIns="0" bIns="0" anchor="t">
             <a:spAutoFit/>
           </a:bodyPr>
           <a:lstStyle/>
@@ -27898,7 +29790,7 @@
           <a:noFill/>
         </p:spPr>
         <p:txBody>
-          <a:bodyPr wrap="square" anchor="t" lIns="0" rIns="0" tIns="0" bIns="0">
+          <a:bodyPr wrap="square" lIns="0" tIns="0" rIns="0" bIns="0" anchor="t">
             <a:spAutoFit/>
           </a:bodyPr>
           <a:lstStyle/>
@@ -27974,14 +29866,32 @@
                 <a:tableStyleId>{5C22544A-7EE6-4342-B048-85BDC9FD1C3A}</a:tableStyleId>
               </a:tblPr>
               <a:tblGrid>
-                <a:gridCol w="3017520"/>
-                <a:gridCol w="2377440"/>
-                <a:gridCol w="5349240"/>
+                <a:gridCol w="3017520">
+                  <a:extLst>
+                    <a:ext uri="{9D8B030D-6E8A-4147-A177-3AD203B41FA5}">
+                      <a16:colId xmlns:a16="http://schemas.microsoft.com/office/drawing/2014/main" val="20000"/>
+                    </a:ext>
+                  </a:extLst>
+                </a:gridCol>
+                <a:gridCol w="2377440">
+                  <a:extLst>
+                    <a:ext uri="{9D8B030D-6E8A-4147-A177-3AD203B41FA5}">
+                      <a16:colId xmlns:a16="http://schemas.microsoft.com/office/drawing/2014/main" val="20001"/>
+                    </a:ext>
+                  </a:extLst>
+                </a:gridCol>
+                <a:gridCol w="5349240">
+                  <a:extLst>
+                    <a:ext uri="{9D8B030D-6E8A-4147-A177-3AD203B41FA5}">
+                      <a16:colId xmlns:a16="http://schemas.microsoft.com/office/drawing/2014/main" val="20002"/>
+                    </a:ext>
+                  </a:extLst>
+                </a:gridCol>
               </a:tblGrid>
               <a:tr h="658368">
                 <a:tc>
                   <a:txBody>
-                    <a:bodyPr wrap="square"/>
+                    <a:bodyPr/>
                     <a:lstStyle/>
                     <a:p>
                       <a:r>
@@ -28003,7 +29913,7 @@
                 </a:tc>
                 <a:tc>
                   <a:txBody>
-                    <a:bodyPr wrap="square"/>
+                    <a:bodyPr/>
                     <a:lstStyle/>
                     <a:p>
                       <a:r>
@@ -28025,7 +29935,7 @@
                 </a:tc>
                 <a:tc>
                   <a:txBody>
-                    <a:bodyPr wrap="square"/>
+                    <a:bodyPr/>
                     <a:lstStyle/>
                     <a:p>
                       <a:r>
@@ -28045,11 +29955,16 @@
                     </a:solidFill>
                   </a:tcPr>
                 </a:tc>
+                <a:extLst>
+                  <a:ext uri="{0D108BD9-81ED-4DB2-BD59-A6C34878D82A}">
+                    <a16:rowId xmlns:a16="http://schemas.microsoft.com/office/drawing/2014/main" val="10000"/>
+                  </a:ext>
+                </a:extLst>
               </a:tr>
               <a:tr h="658368">
                 <a:tc>
                   <a:txBody>
-                    <a:bodyPr wrap="square"/>
+                    <a:bodyPr/>
                     <a:lstStyle/>
                     <a:p>
                       <a:r>
@@ -28071,7 +29986,7 @@
                 </a:tc>
                 <a:tc>
                   <a:txBody>
-                    <a:bodyPr wrap="square"/>
+                    <a:bodyPr/>
                     <a:lstStyle/>
                     <a:p>
                       <a:r>
@@ -28093,7 +30008,7 @@
                 </a:tc>
                 <a:tc>
                   <a:txBody>
-                    <a:bodyPr wrap="square"/>
+                    <a:bodyPr/>
                     <a:lstStyle/>
                     <a:p>
                       <a:r>
@@ -28113,11 +30028,16 @@
                     </a:solidFill>
                   </a:tcPr>
                 </a:tc>
+                <a:extLst>
+                  <a:ext uri="{0D108BD9-81ED-4DB2-BD59-A6C34878D82A}">
+                    <a16:rowId xmlns:a16="http://schemas.microsoft.com/office/drawing/2014/main" val="10001"/>
+                  </a:ext>
+                </a:extLst>
               </a:tr>
               <a:tr h="658368">
                 <a:tc>
                   <a:txBody>
-                    <a:bodyPr wrap="square"/>
+                    <a:bodyPr/>
                     <a:lstStyle/>
                     <a:p>
                       <a:r>
@@ -28139,7 +30059,7 @@
                 </a:tc>
                 <a:tc>
                   <a:txBody>
-                    <a:bodyPr wrap="square"/>
+                    <a:bodyPr/>
                     <a:lstStyle/>
                     <a:p>
                       <a:r>
@@ -28161,7 +30081,7 @@
                 </a:tc>
                 <a:tc>
                   <a:txBody>
-                    <a:bodyPr wrap="square"/>
+                    <a:bodyPr/>
                     <a:lstStyle/>
                     <a:p>
                       <a:r>
@@ -28181,11 +30101,16 @@
                     </a:solidFill>
                   </a:tcPr>
                 </a:tc>
+                <a:extLst>
+                  <a:ext uri="{0D108BD9-81ED-4DB2-BD59-A6C34878D82A}">
+                    <a16:rowId xmlns:a16="http://schemas.microsoft.com/office/drawing/2014/main" val="10002"/>
+                  </a:ext>
+                </a:extLst>
               </a:tr>
               <a:tr h="658368">
                 <a:tc>
                   <a:txBody>
-                    <a:bodyPr wrap="square"/>
+                    <a:bodyPr/>
                     <a:lstStyle/>
                     <a:p>
                       <a:r>
@@ -28207,7 +30132,7 @@
                 </a:tc>
                 <a:tc>
                   <a:txBody>
-                    <a:bodyPr wrap="square"/>
+                    <a:bodyPr/>
                     <a:lstStyle/>
                     <a:p>
                       <a:r>
@@ -28229,7 +30154,7 @@
                 </a:tc>
                 <a:tc>
                   <a:txBody>
-                    <a:bodyPr wrap="square"/>
+                    <a:bodyPr/>
                     <a:lstStyle/>
                     <a:p>
                       <a:r>
@@ -28249,11 +30174,16 @@
                     </a:solidFill>
                   </a:tcPr>
                 </a:tc>
+                <a:extLst>
+                  <a:ext uri="{0D108BD9-81ED-4DB2-BD59-A6C34878D82A}">
+                    <a16:rowId xmlns:a16="http://schemas.microsoft.com/office/drawing/2014/main" val="10003"/>
+                  </a:ext>
+                </a:extLst>
               </a:tr>
               <a:tr h="658368">
                 <a:tc>
                   <a:txBody>
-                    <a:bodyPr wrap="square"/>
+                    <a:bodyPr/>
                     <a:lstStyle/>
                     <a:p>
                       <a:r>
@@ -28275,7 +30205,7 @@
                 </a:tc>
                 <a:tc>
                   <a:txBody>
-                    <a:bodyPr wrap="square"/>
+                    <a:bodyPr/>
                     <a:lstStyle/>
                     <a:p>
                       <a:r>
@@ -28297,7 +30227,7 @@
                 </a:tc>
                 <a:tc>
                   <a:txBody>
-                    <a:bodyPr wrap="square"/>
+                    <a:bodyPr/>
                     <a:lstStyle/>
                     <a:p>
                       <a:r>
@@ -28317,6 +30247,11 @@
                     </a:solidFill>
                   </a:tcPr>
                 </a:tc>
+                <a:extLst>
+                  <a:ext uri="{0D108BD9-81ED-4DB2-BD59-A6C34878D82A}">
+                    <a16:rowId xmlns:a16="http://schemas.microsoft.com/office/drawing/2014/main" val="10004"/>
+                  </a:ext>
+                </a:extLst>
               </a:tr>
             </a:tbl>
           </a:graphicData>
@@ -28339,7 +30274,7 @@
           <a:noFill/>
         </p:spPr>
         <p:txBody>
-          <a:bodyPr wrap="square" anchor="t" lIns="0" rIns="0" tIns="0" bIns="0">
+          <a:bodyPr wrap="square" lIns="0" tIns="0" rIns="0" bIns="0" anchor="t">
             <a:spAutoFit/>
           </a:bodyPr>
           <a:lstStyle/>
@@ -28370,7 +30305,7 @@
 </file>
 
 <file path=ppt/slides/slide8.xml><?xml version="1.0" encoding="utf-8"?>
-<p:sld xmlns:a="http://schemas.openxmlformats.org/drawingml/2006/main" xmlns:p="http://schemas.openxmlformats.org/presentationml/2006/main" xmlns:r="http://schemas.openxmlformats.org/officeDocument/2006/relationships">
+<p:sld xmlns:a="http://schemas.openxmlformats.org/drawingml/2006/main" xmlns:r="http://schemas.openxmlformats.org/officeDocument/2006/relationships" xmlns:p="http://schemas.openxmlformats.org/presentationml/2006/main">
   <p:cSld>
     <p:spTree>
       <p:nvGrpSpPr>
@@ -28378,7 +30313,14 @@
         <p:cNvGrpSpPr/>
         <p:nvPr/>
       </p:nvGrpSpPr>
-      <p:grpSpPr/>
+      <p:grpSpPr>
+        <a:xfrm>
+          <a:off x="0" y="0"/>
+          <a:ext cx="0" cy="0"/>
+          <a:chOff x="0" y="0"/>
+          <a:chExt cx="0" cy="0"/>
+        </a:xfrm>
+      </p:grpSpPr>
       <p:sp>
         <p:nvSpPr>
           <p:cNvPr id="2" name="Rectangle 1"/>
@@ -28420,6 +30362,7 @@
           <a:lstStyle/>
           <a:p>
             <a:pPr algn="ctr"/>
+            <a:endParaRPr/>
           </a:p>
         </p:txBody>
       </p:sp>
@@ -28464,6 +30407,7 @@
           <a:lstStyle/>
           <a:p>
             <a:pPr algn="ctr"/>
+            <a:endParaRPr/>
           </a:p>
         </p:txBody>
       </p:sp>
@@ -28484,7 +30428,7 @@
           <a:noFill/>
         </p:spPr>
         <p:txBody>
-          <a:bodyPr wrap="square" anchor="t" lIns="0" rIns="0" tIns="0" bIns="0">
+          <a:bodyPr wrap="square" lIns="0" tIns="0" rIns="0" bIns="0" anchor="t">
             <a:spAutoFit/>
           </a:bodyPr>
           <a:lstStyle/>
@@ -28523,7 +30467,7 @@
           <a:noFill/>
         </p:spPr>
         <p:txBody>
-          <a:bodyPr wrap="square" anchor="t" lIns="0" rIns="0" tIns="0" bIns="0">
+          <a:bodyPr wrap="square" lIns="0" tIns="0" rIns="0" bIns="0" anchor="t">
             <a:spAutoFit/>
           </a:bodyPr>
           <a:lstStyle/>
@@ -28562,7 +30506,7 @@
           <a:noFill/>
         </p:spPr>
         <p:txBody>
-          <a:bodyPr wrap="square" anchor="t" lIns="0" rIns="0" tIns="0" bIns="0">
+          <a:bodyPr wrap="square" lIns="0" tIns="0" rIns="0" bIns="0" anchor="t">
             <a:spAutoFit/>
           </a:bodyPr>
           <a:lstStyle/>
@@ -28601,7 +30545,7 @@
           <a:noFill/>
         </p:spPr>
         <p:txBody>
-          <a:bodyPr wrap="square" anchor="t" lIns="0" rIns="0" tIns="0" bIns="0">
+          <a:bodyPr wrap="square" lIns="0" tIns="0" rIns="0" bIns="0" anchor="t">
             <a:spAutoFit/>
           </a:bodyPr>
           <a:lstStyle/>
@@ -28698,7 +30642,7 @@
               <a:t>●  </a:t>
             </a:r>
             <a:r>
-              <a:rPr b="1" sz="1350">
+              <a:rPr sz="1350" b="1">
                 <a:solidFill>
                   <a:srgbClr val="0F172A"/>
                 </a:solidFill>
@@ -28735,7 +30679,7 @@
               <a:t>●  </a:t>
             </a:r>
             <a:r>
-              <a:rPr b="1" sz="1350">
+              <a:rPr sz="1350" b="1">
                 <a:solidFill>
                   <a:srgbClr val="0F172A"/>
                 </a:solidFill>
@@ -28772,7 +30716,7 @@
               <a:t>●  </a:t>
             </a:r>
             <a:r>
-              <a:rPr b="1" sz="1350">
+              <a:rPr sz="1350" b="1">
                 <a:solidFill>
                   <a:srgbClr val="0F172A"/>
                 </a:solidFill>
@@ -28832,7 +30776,7 @@
               <a:t>●  </a:t>
             </a:r>
             <a:r>
-              <a:rPr b="1" sz="1350">
+              <a:rPr sz="1350" b="1">
                 <a:solidFill>
                   <a:srgbClr val="0F172A"/>
                 </a:solidFill>
@@ -28869,7 +30813,7 @@
               <a:t>●  </a:t>
             </a:r>
             <a:r>
-              <a:rPr b="1" sz="1350">
+              <a:rPr sz="1350" b="1">
                 <a:solidFill>
                   <a:srgbClr val="0F172A"/>
                 </a:solidFill>
@@ -28906,7 +30850,7 @@
               <a:t>●  </a:t>
             </a:r>
             <a:r>
-              <a:rPr b="1" sz="1350">
+              <a:rPr sz="1350" b="1">
                 <a:solidFill>
                   <a:srgbClr val="0F172A"/>
                 </a:solidFill>
@@ -28935,7 +30879,7 @@
 </file>
 
 <file path=ppt/slides/slide9.xml><?xml version="1.0" encoding="utf-8"?>
-<p:sld xmlns:a="http://schemas.openxmlformats.org/drawingml/2006/main" xmlns:p="http://schemas.openxmlformats.org/presentationml/2006/main" xmlns:r="http://schemas.openxmlformats.org/officeDocument/2006/relationships">
+<p:sld xmlns:a="http://schemas.openxmlformats.org/drawingml/2006/main" xmlns:r="http://schemas.openxmlformats.org/officeDocument/2006/relationships" xmlns:p="http://schemas.openxmlformats.org/presentationml/2006/main">
   <p:cSld>
     <p:spTree>
       <p:nvGrpSpPr>
@@ -28943,7 +30887,14 @@
         <p:cNvGrpSpPr/>
         <p:nvPr/>
       </p:nvGrpSpPr>
-      <p:grpSpPr/>
+      <p:grpSpPr>
+        <a:xfrm>
+          <a:off x="0" y="0"/>
+          <a:ext cx="0" cy="0"/>
+          <a:chOff x="0" y="0"/>
+          <a:chExt cx="0" cy="0"/>
+        </a:xfrm>
+      </p:grpSpPr>
       <p:sp>
         <p:nvSpPr>
           <p:cNvPr id="2" name="Rectangle 1"/>
@@ -28985,6 +30936,7 @@
           <a:lstStyle/>
           <a:p>
             <a:pPr algn="ctr"/>
+            <a:endParaRPr/>
           </a:p>
         </p:txBody>
       </p:sp>
@@ -29029,6 +30981,7 @@
           <a:lstStyle/>
           <a:p>
             <a:pPr algn="ctr"/>
+            <a:endParaRPr/>
           </a:p>
         </p:txBody>
       </p:sp>
@@ -29049,7 +31002,7 @@
           <a:noFill/>
         </p:spPr>
         <p:txBody>
-          <a:bodyPr wrap="square" anchor="t" lIns="0" rIns="0" tIns="0" bIns="0">
+          <a:bodyPr wrap="square" lIns="0" tIns="0" rIns="0" bIns="0" anchor="t">
             <a:spAutoFit/>
           </a:bodyPr>
           <a:lstStyle/>
@@ -29088,7 +31041,7 @@
           <a:noFill/>
         </p:spPr>
         <p:txBody>
-          <a:bodyPr wrap="square" anchor="t" lIns="0" rIns="0" tIns="0" bIns="0">
+          <a:bodyPr wrap="square" lIns="0" tIns="0" rIns="0" bIns="0" anchor="t">
             <a:spAutoFit/>
           </a:bodyPr>
           <a:lstStyle/>
@@ -29127,7 +31080,7 @@
           <a:noFill/>
         </p:spPr>
         <p:txBody>
-          <a:bodyPr wrap="square" anchor="t" lIns="0" rIns="0" tIns="0" bIns="0">
+          <a:bodyPr wrap="square" lIns="0" tIns="0" rIns="0" bIns="0" anchor="t">
             <a:spAutoFit/>
           </a:bodyPr>
           <a:lstStyle/>
@@ -29166,7 +31119,7 @@
           <a:noFill/>
         </p:spPr>
         <p:txBody>
-          <a:bodyPr wrap="square" anchor="t" lIns="0" rIns="0" tIns="0" bIns="0">
+          <a:bodyPr wrap="square" lIns="0" tIns="0" rIns="0" bIns="0" anchor="t">
             <a:spAutoFit/>
           </a:bodyPr>
           <a:lstStyle/>
@@ -29242,13 +31195,25 @@
                 <a:tableStyleId>{5C22544A-7EE6-4342-B048-85BDC9FD1C3A}</a:tableStyleId>
               </a:tblPr>
               <a:tblGrid>
-                <a:gridCol w="2743200"/>
-                <a:gridCol w="2834640"/>
+                <a:gridCol w="2743200">
+                  <a:extLst>
+                    <a:ext uri="{9D8B030D-6E8A-4147-A177-3AD203B41FA5}">
+                      <a16:colId xmlns:a16="http://schemas.microsoft.com/office/drawing/2014/main" val="20000"/>
+                    </a:ext>
+                  </a:extLst>
+                </a:gridCol>
+                <a:gridCol w="2834640">
+                  <a:extLst>
+                    <a:ext uri="{9D8B030D-6E8A-4147-A177-3AD203B41FA5}">
+                      <a16:colId xmlns:a16="http://schemas.microsoft.com/office/drawing/2014/main" val="20001"/>
+                    </a:ext>
+                  </a:extLst>
+                </a:gridCol>
               </a:tblGrid>
               <a:tr h="514350">
                 <a:tc>
                   <a:txBody>
-                    <a:bodyPr wrap="square"/>
+                    <a:bodyPr/>
                     <a:lstStyle/>
                     <a:p>
                       <a:r>
@@ -29270,7 +31235,7 @@
                 </a:tc>
                 <a:tc>
                   <a:txBody>
-                    <a:bodyPr wrap="square"/>
+                    <a:bodyPr/>
                     <a:lstStyle/>
                     <a:p>
                       <a:r>
@@ -29290,11 +31255,16 @@
                     </a:solidFill>
                   </a:tcPr>
                 </a:tc>
+                <a:extLst>
+                  <a:ext uri="{0D108BD9-81ED-4DB2-BD59-A6C34878D82A}">
+                    <a16:rowId xmlns:a16="http://schemas.microsoft.com/office/drawing/2014/main" val="10000"/>
+                  </a:ext>
+                </a:extLst>
               </a:tr>
               <a:tr h="514350">
                 <a:tc>
                   <a:txBody>
-                    <a:bodyPr wrap="square"/>
+                    <a:bodyPr/>
                     <a:lstStyle/>
                     <a:p>
                       <a:r>
@@ -29316,7 +31286,7 @@
                 </a:tc>
                 <a:tc>
                   <a:txBody>
-                    <a:bodyPr wrap="square"/>
+                    <a:bodyPr/>
                     <a:lstStyle/>
                     <a:p>
                       <a:r>
@@ -29336,11 +31306,16 @@
                     </a:solidFill>
                   </a:tcPr>
                 </a:tc>
+                <a:extLst>
+                  <a:ext uri="{0D108BD9-81ED-4DB2-BD59-A6C34878D82A}">
+                    <a16:rowId xmlns:a16="http://schemas.microsoft.com/office/drawing/2014/main" val="10001"/>
+                  </a:ext>
+                </a:extLst>
               </a:tr>
               <a:tr h="514350">
                 <a:tc>
                   <a:txBody>
-                    <a:bodyPr wrap="square"/>
+                    <a:bodyPr/>
                     <a:lstStyle/>
                     <a:p>
                       <a:r>
@@ -29362,7 +31337,7 @@
                 </a:tc>
                 <a:tc>
                   <a:txBody>
-                    <a:bodyPr wrap="square"/>
+                    <a:bodyPr/>
                     <a:lstStyle/>
                     <a:p>
                       <a:r>
@@ -29382,11 +31357,16 @@
                     </a:solidFill>
                   </a:tcPr>
                 </a:tc>
+                <a:extLst>
+                  <a:ext uri="{0D108BD9-81ED-4DB2-BD59-A6C34878D82A}">
+                    <a16:rowId xmlns:a16="http://schemas.microsoft.com/office/drawing/2014/main" val="10002"/>
+                  </a:ext>
+                </a:extLst>
               </a:tr>
               <a:tr h="514350">
                 <a:tc>
                   <a:txBody>
-                    <a:bodyPr wrap="square"/>
+                    <a:bodyPr/>
                     <a:lstStyle/>
                     <a:p>
                       <a:r>
@@ -29408,7 +31388,7 @@
                 </a:tc>
                 <a:tc>
                   <a:txBody>
-                    <a:bodyPr wrap="square"/>
+                    <a:bodyPr/>
                     <a:lstStyle/>
                     <a:p>
                       <a:r>
@@ -29428,11 +31408,16 @@
                     </a:solidFill>
                   </a:tcPr>
                 </a:tc>
+                <a:extLst>
+                  <a:ext uri="{0D108BD9-81ED-4DB2-BD59-A6C34878D82A}">
+                    <a16:rowId xmlns:a16="http://schemas.microsoft.com/office/drawing/2014/main" val="10003"/>
+                  </a:ext>
+                </a:extLst>
               </a:tr>
               <a:tr h="514350">
                 <a:tc>
                   <a:txBody>
-                    <a:bodyPr wrap="square"/>
+                    <a:bodyPr/>
                     <a:lstStyle/>
                     <a:p>
                       <a:r>
@@ -29454,7 +31439,7 @@
                 </a:tc>
                 <a:tc>
                   <a:txBody>
-                    <a:bodyPr wrap="square"/>
+                    <a:bodyPr/>
                     <a:lstStyle/>
                     <a:p>
                       <a:r>
@@ -29474,11 +31459,16 @@
                     </a:solidFill>
                   </a:tcPr>
                 </a:tc>
+                <a:extLst>
+                  <a:ext uri="{0D108BD9-81ED-4DB2-BD59-A6C34878D82A}">
+                    <a16:rowId xmlns:a16="http://schemas.microsoft.com/office/drawing/2014/main" val="10004"/>
+                  </a:ext>
+                </a:extLst>
               </a:tr>
               <a:tr h="514350">
                 <a:tc>
                   <a:txBody>
-                    <a:bodyPr wrap="square"/>
+                    <a:bodyPr/>
                     <a:lstStyle/>
                     <a:p>
                       <a:r>
@@ -29500,7 +31490,7 @@
                 </a:tc>
                 <a:tc>
                   <a:txBody>
-                    <a:bodyPr wrap="square"/>
+                    <a:bodyPr/>
                     <a:lstStyle/>
                     <a:p>
                       <a:r>
@@ -29520,11 +31510,16 @@
                     </a:solidFill>
                   </a:tcPr>
                 </a:tc>
+                <a:extLst>
+                  <a:ext uri="{0D108BD9-81ED-4DB2-BD59-A6C34878D82A}">
+                    <a16:rowId xmlns:a16="http://schemas.microsoft.com/office/drawing/2014/main" val="10005"/>
+                  </a:ext>
+                </a:extLst>
               </a:tr>
               <a:tr h="514350">
                 <a:tc>
                   <a:txBody>
-                    <a:bodyPr wrap="square"/>
+                    <a:bodyPr/>
                     <a:lstStyle/>
                     <a:p>
                       <a:r>
@@ -29546,7 +31541,7 @@
                 </a:tc>
                 <a:tc>
                   <a:txBody>
-                    <a:bodyPr wrap="square"/>
+                    <a:bodyPr/>
                     <a:lstStyle/>
                     <a:p>
                       <a:r>
@@ -29566,11 +31561,16 @@
                     </a:solidFill>
                   </a:tcPr>
                 </a:tc>
+                <a:extLst>
+                  <a:ext uri="{0D108BD9-81ED-4DB2-BD59-A6C34878D82A}">
+                    <a16:rowId xmlns:a16="http://schemas.microsoft.com/office/drawing/2014/main" val="10006"/>
+                  </a:ext>
+                </a:extLst>
               </a:tr>
               <a:tr h="514350">
                 <a:tc>
                   <a:txBody>
-                    <a:bodyPr wrap="square"/>
+                    <a:bodyPr/>
                     <a:lstStyle/>
                     <a:p>
                       <a:r>
@@ -29592,7 +31592,7 @@
                 </a:tc>
                 <a:tc>
                   <a:txBody>
-                    <a:bodyPr wrap="square"/>
+                    <a:bodyPr/>
                     <a:lstStyle/>
                     <a:p>
                       <a:r>
@@ -29612,6 +31612,11 @@
                     </a:solidFill>
                   </a:tcPr>
                 </a:tc>
+                <a:extLst>
+                  <a:ext uri="{0D108BD9-81ED-4DB2-BD59-A6C34878D82A}">
+                    <a16:rowId xmlns:a16="http://schemas.microsoft.com/office/drawing/2014/main" val="10007"/>
+                  </a:ext>
+                </a:extLst>
               </a:tr>
             </a:tbl>
           </a:graphicData>
@@ -29634,7 +31639,7 @@
           <a:noFill/>
         </p:spPr>
         <p:txBody>
-          <a:bodyPr wrap="square" anchor="t" lIns="0" rIns="0" tIns="0" bIns="0">
+          <a:bodyPr wrap="square" lIns="0" tIns="0" rIns="0" bIns="0" anchor="t">
             <a:spAutoFit/>
           </a:bodyPr>
           <a:lstStyle/>
@@ -29696,7 +31701,7 @@
               <a:t>●  </a:t>
             </a:r>
             <a:r>
-              <a:rPr b="1" sz="1300">
+              <a:rPr sz="1300" b="1">
                 <a:solidFill>
                   <a:srgbClr val="0F172A"/>
                 </a:solidFill>
@@ -29733,7 +31738,7 @@
               <a:t>●  </a:t>
             </a:r>
             <a:r>
-              <a:rPr b="1" sz="1300">
+              <a:rPr sz="1300" b="1">
                 <a:solidFill>
                   <a:srgbClr val="0F172A"/>
                 </a:solidFill>
@@ -29798,6 +31803,7 @@
           <a:lstStyle/>
           <a:p>
             <a:pPr algn="ctr"/>
+            <a:endParaRPr/>
           </a:p>
         </p:txBody>
       </p:sp>
@@ -29818,7 +31824,7 @@
           <a:noFill/>
         </p:spPr>
         <p:txBody>
-          <a:bodyPr wrap="square" anchor="t" lIns="0" rIns="0" tIns="0" bIns="0">
+          <a:bodyPr wrap="square" lIns="0" tIns="0" rIns="0" bIns="0" anchor="t">
             <a:spAutoFit/>
           </a:bodyPr>
           <a:lstStyle/>
